--- a/DISSERTACAO/figuras/figures.pptx
+++ b/DISSERTACAO/figuras/figures.pptx
@@ -5,13 +5,15 @@
     <p:sldMasterId id="2147483648" r:id="rId1"/>
   </p:sldMasterIdLst>
   <p:notesMasterIdLst>
-    <p:notesMasterId r:id="rId6"/>
+    <p:notesMasterId r:id="rId8"/>
   </p:notesMasterIdLst>
   <p:sldIdLst>
     <p:sldId id="256" r:id="rId2"/>
     <p:sldId id="257" r:id="rId3"/>
     <p:sldId id="258" r:id="rId4"/>
     <p:sldId id="259" r:id="rId5"/>
+    <p:sldId id="260" r:id="rId6"/>
+    <p:sldId id="261" r:id="rId7"/>
   </p:sldIdLst>
   <p:sldSz cx="12192000" cy="6858000"/>
   <p:notesSz cx="6858000" cy="9144000"/>
@@ -110,6 +112,11 @@
       </a:defRPr>
     </a:lvl9pPr>
   </p:defaultTextStyle>
+  <p:extLst>
+    <p:ext uri="{EFAFB233-063F-42B5-8137-9DF3F51BA10A}">
+      <p15:sldGuideLst xmlns:p15="http://schemas.microsoft.com/office/powerpoint/2012/main"/>
+    </p:ext>
+  </p:extLst>
 </p:presentation>
 </file>
 
@@ -677,7 +684,7 @@
           <a:p>
             <a:fld id="{FFCE6A37-3420-40C1-9DE2-D7E9118C4CF6}" type="datetimeFigureOut">
               <a:rPr lang="pt-BR" smtClean="0"/>
-              <a:t>11/05/2026</a:t>
+              <a:t>16/05/2026</a:t>
             </a:fld>
             <a:endParaRPr lang="pt-BR"/>
           </a:p>
@@ -1178,7 +1185,7 @@
           <a:p>
             <a:fld id="{7C8BC570-9881-4DD1-A666-BFFC3ABED690}" type="datetimeFigureOut">
               <a:rPr lang="pt-BR" smtClean="0"/>
-              <a:t>11/05/2026</a:t>
+              <a:t>16/05/2026</a:t>
             </a:fld>
             <a:endParaRPr lang="pt-BR"/>
           </a:p>
@@ -1378,7 +1385,7 @@
           <a:p>
             <a:fld id="{7C8BC570-9881-4DD1-A666-BFFC3ABED690}" type="datetimeFigureOut">
               <a:rPr lang="pt-BR" smtClean="0"/>
-              <a:t>11/05/2026</a:t>
+              <a:t>16/05/2026</a:t>
             </a:fld>
             <a:endParaRPr lang="pt-BR"/>
           </a:p>
@@ -1588,7 +1595,7 @@
           <a:p>
             <a:fld id="{7C8BC570-9881-4DD1-A666-BFFC3ABED690}" type="datetimeFigureOut">
               <a:rPr lang="pt-BR" smtClean="0"/>
-              <a:t>11/05/2026</a:t>
+              <a:t>16/05/2026</a:t>
             </a:fld>
             <a:endParaRPr lang="pt-BR"/>
           </a:p>
@@ -1788,7 +1795,7 @@
           <a:p>
             <a:fld id="{7C8BC570-9881-4DD1-A666-BFFC3ABED690}" type="datetimeFigureOut">
               <a:rPr lang="pt-BR" smtClean="0"/>
-              <a:t>11/05/2026</a:t>
+              <a:t>16/05/2026</a:t>
             </a:fld>
             <a:endParaRPr lang="pt-BR"/>
           </a:p>
@@ -2064,7 +2071,7 @@
           <a:p>
             <a:fld id="{7C8BC570-9881-4DD1-A666-BFFC3ABED690}" type="datetimeFigureOut">
               <a:rPr lang="pt-BR" smtClean="0"/>
-              <a:t>11/05/2026</a:t>
+              <a:t>16/05/2026</a:t>
             </a:fld>
             <a:endParaRPr lang="pt-BR"/>
           </a:p>
@@ -2332,7 +2339,7 @@
           <a:p>
             <a:fld id="{7C8BC570-9881-4DD1-A666-BFFC3ABED690}" type="datetimeFigureOut">
               <a:rPr lang="pt-BR" smtClean="0"/>
-              <a:t>11/05/2026</a:t>
+              <a:t>16/05/2026</a:t>
             </a:fld>
             <a:endParaRPr lang="pt-BR"/>
           </a:p>
@@ -2747,7 +2754,7 @@
           <a:p>
             <a:fld id="{7C8BC570-9881-4DD1-A666-BFFC3ABED690}" type="datetimeFigureOut">
               <a:rPr lang="pt-BR" smtClean="0"/>
-              <a:t>11/05/2026</a:t>
+              <a:t>16/05/2026</a:t>
             </a:fld>
             <a:endParaRPr lang="pt-BR"/>
           </a:p>
@@ -2889,7 +2896,7 @@
           <a:p>
             <a:fld id="{7C8BC570-9881-4DD1-A666-BFFC3ABED690}" type="datetimeFigureOut">
               <a:rPr lang="pt-BR" smtClean="0"/>
-              <a:t>11/05/2026</a:t>
+              <a:t>16/05/2026</a:t>
             </a:fld>
             <a:endParaRPr lang="pt-BR"/>
           </a:p>
@@ -3002,7 +3009,7 @@
           <a:p>
             <a:fld id="{7C8BC570-9881-4DD1-A666-BFFC3ABED690}" type="datetimeFigureOut">
               <a:rPr lang="pt-BR" smtClean="0"/>
-              <a:t>11/05/2026</a:t>
+              <a:t>16/05/2026</a:t>
             </a:fld>
             <a:endParaRPr lang="pt-BR"/>
           </a:p>
@@ -3315,7 +3322,7 @@
           <a:p>
             <a:fld id="{7C8BC570-9881-4DD1-A666-BFFC3ABED690}" type="datetimeFigureOut">
               <a:rPr lang="pt-BR" smtClean="0"/>
-              <a:t>11/05/2026</a:t>
+              <a:t>16/05/2026</a:t>
             </a:fld>
             <a:endParaRPr lang="pt-BR"/>
           </a:p>
@@ -3604,7 +3611,7 @@
           <a:p>
             <a:fld id="{7C8BC570-9881-4DD1-A666-BFFC3ABED690}" type="datetimeFigureOut">
               <a:rPr lang="pt-BR" smtClean="0"/>
-              <a:t>11/05/2026</a:t>
+              <a:t>16/05/2026</a:t>
             </a:fld>
             <a:endParaRPr lang="pt-BR"/>
           </a:p>
@@ -3847,7 +3854,7 @@
           <a:p>
             <a:fld id="{7C8BC570-9881-4DD1-A666-BFFC3ABED690}" type="datetimeFigureOut">
               <a:rPr lang="pt-BR" smtClean="0"/>
-              <a:t>11/05/2026</a:t>
+              <a:t>16/05/2026</a:t>
             </a:fld>
             <a:endParaRPr lang="pt-BR"/>
           </a:p>
@@ -5321,8 +5328,8 @@
               </mc:Fallback>
             </mc:AlternateContent>
           </p:grpSp>
-          <mc:AlternateContent xmlns:mc="http://schemas.openxmlformats.org/markup-compatibility/2006">
-            <mc:Choice xmlns:a14="http://schemas.microsoft.com/office/drawing/2010/main" Requires="a14">
+          <mc:AlternateContent xmlns:mc="http://schemas.openxmlformats.org/markup-compatibility/2006" xmlns:a14="http://schemas.microsoft.com/office/drawing/2010/main">
+            <mc:Choice Requires="a14">
               <p:sp>
                 <p:nvSpPr>
                   <p:cNvPr id="11" name="TextBox 10">
@@ -5394,7 +5401,7 @@
                 </p:txBody>
               </p:sp>
             </mc:Choice>
-            <mc:Fallback>
+            <mc:Fallback xmlns="">
               <p:sp>
                 <p:nvSpPr>
                   <p:cNvPr id="11" name="TextBox 10">
@@ -5439,8 +5446,8 @@
               </p:sp>
             </mc:Fallback>
           </mc:AlternateContent>
-          <mc:AlternateContent xmlns:mc="http://schemas.openxmlformats.org/markup-compatibility/2006">
-            <mc:Choice xmlns:a14="http://schemas.microsoft.com/office/drawing/2010/main" Requires="a14">
+          <mc:AlternateContent xmlns:mc="http://schemas.openxmlformats.org/markup-compatibility/2006" xmlns:a14="http://schemas.microsoft.com/office/drawing/2010/main">
+            <mc:Choice Requires="a14">
               <p:sp>
                 <p:nvSpPr>
                   <p:cNvPr id="12" name="TextBox 11">
@@ -5490,7 +5497,7 @@
                 </p:txBody>
               </p:sp>
             </mc:Choice>
-            <mc:Fallback>
+            <mc:Fallback xmlns="">
               <p:sp>
                 <p:nvSpPr>
                   <p:cNvPr id="12" name="TextBox 11">
@@ -6129,8 +6136,8 @@
               </a:fontRef>
             </p:style>
           </p:cxnSp>
-          <mc:AlternateContent xmlns:mc="http://schemas.openxmlformats.org/markup-compatibility/2006">
-            <mc:Choice xmlns:a14="http://schemas.microsoft.com/office/drawing/2010/main" Requires="a14">
+          <mc:AlternateContent xmlns:mc="http://schemas.openxmlformats.org/markup-compatibility/2006" xmlns:a14="http://schemas.microsoft.com/office/drawing/2010/main">
+            <mc:Choice Requires="a14">
               <p:sp>
                 <p:nvSpPr>
                   <p:cNvPr id="17" name="TextBox 16">
@@ -6183,7 +6190,7 @@
                 </p:txBody>
               </p:sp>
             </mc:Choice>
-            <mc:Fallback>
+            <mc:Fallback xmlns="">
               <p:sp>
                 <p:nvSpPr>
                   <p:cNvPr id="17" name="TextBox 16">
@@ -8150,8 +8157,8 @@
                 </p:style>
               </p:cxnSp>
             </p:grpSp>
-            <mc:AlternateContent xmlns:mc="http://schemas.openxmlformats.org/markup-compatibility/2006">
-              <mc:Choice xmlns:a14="http://schemas.microsoft.com/office/drawing/2010/main" Requires="a14">
+            <mc:AlternateContent xmlns:mc="http://schemas.openxmlformats.org/markup-compatibility/2006" xmlns:a14="http://schemas.microsoft.com/office/drawing/2010/main">
+              <mc:Choice Requires="a14">
                 <p:sp>
                   <p:nvSpPr>
                     <p:cNvPr id="86" name="TextBox 85">
@@ -8201,7 +8208,7 @@
                   </p:txBody>
                 </p:sp>
               </mc:Choice>
-              <mc:Fallback>
+              <mc:Fallback xmlns="">
                 <p:sp>
                   <p:nvSpPr>
                     <p:cNvPr id="86" name="TextBox 85">
@@ -8246,8 +8253,8 @@
                 </p:sp>
               </mc:Fallback>
             </mc:AlternateContent>
-            <mc:AlternateContent xmlns:mc="http://schemas.openxmlformats.org/markup-compatibility/2006">
-              <mc:Choice xmlns:a14="http://schemas.microsoft.com/office/drawing/2010/main" Requires="a14">
+            <mc:AlternateContent xmlns:mc="http://schemas.openxmlformats.org/markup-compatibility/2006" xmlns:a14="http://schemas.microsoft.com/office/drawing/2010/main">
+              <mc:Choice Requires="a14">
                 <p:sp>
                   <p:nvSpPr>
                     <p:cNvPr id="87" name="TextBox 86">
@@ -8297,7 +8304,7 @@
                   </p:txBody>
                 </p:sp>
               </mc:Choice>
-              <mc:Fallback>
+              <mc:Fallback xmlns="">
                 <p:sp>
                   <p:nvSpPr>
                     <p:cNvPr id="87" name="TextBox 86">
@@ -8639,8 +8646,8 @@
                 </a:fontRef>
               </p:style>
             </p:cxnSp>
-            <mc:AlternateContent xmlns:mc="http://schemas.openxmlformats.org/markup-compatibility/2006">
-              <mc:Choice xmlns:a14="http://schemas.microsoft.com/office/drawing/2010/main" Requires="a14">
+            <mc:AlternateContent xmlns:mc="http://schemas.openxmlformats.org/markup-compatibility/2006" xmlns:a14="http://schemas.microsoft.com/office/drawing/2010/main">
+              <mc:Choice Requires="a14">
                 <p:sp>
                   <p:nvSpPr>
                     <p:cNvPr id="90" name="TextBox 89">
@@ -8709,7 +8716,7 @@
                   </p:txBody>
                 </p:sp>
               </mc:Choice>
-              <mc:Fallback>
+              <mc:Fallback xmlns="">
                 <p:sp>
                   <p:nvSpPr>
                     <p:cNvPr id="90" name="TextBox 89">
@@ -11930,8 +11937,8 @@
             </a:prstGeom>
           </p:spPr>
         </p:pic>
-        <mc:AlternateContent xmlns:mc="http://schemas.openxmlformats.org/markup-compatibility/2006">
-          <mc:Choice xmlns:a14="http://schemas.microsoft.com/office/drawing/2010/main" Requires="a14">
+        <mc:AlternateContent xmlns:mc="http://schemas.openxmlformats.org/markup-compatibility/2006" xmlns:a14="http://schemas.microsoft.com/office/drawing/2010/main">
+          <mc:Choice Requires="a14">
             <p:sp>
               <p:nvSpPr>
                 <p:cNvPr id="4" name="TextBox 3">
@@ -11960,6 +11967,7 @@
                 </a:bodyPr>
                 <a:lstStyle/>
                 <a:p>
+                  <a:pPr/>
                   <a14:m>
                     <m:oMathPara xmlns:m="http://schemas.openxmlformats.org/officeDocument/2006/math">
                       <m:oMathParaPr>
@@ -12016,7 +12024,7 @@
               </p:txBody>
             </p:sp>
           </mc:Choice>
-          <mc:Fallback>
+          <mc:Fallback xmlns="">
             <p:sp>
               <p:nvSpPr>
                 <p:cNvPr id="4" name="TextBox 3">
@@ -12061,8 +12069,8 @@
             </p:sp>
           </mc:Fallback>
         </mc:AlternateContent>
-        <mc:AlternateContent xmlns:mc="http://schemas.openxmlformats.org/markup-compatibility/2006">
-          <mc:Choice xmlns:a14="http://schemas.microsoft.com/office/drawing/2010/main" Requires="a14">
+        <mc:AlternateContent xmlns:mc="http://schemas.openxmlformats.org/markup-compatibility/2006" xmlns:a14="http://schemas.microsoft.com/office/drawing/2010/main">
+          <mc:Choice Requires="a14">
             <p:sp>
               <p:nvSpPr>
                 <p:cNvPr id="5" name="TextBox 4">
@@ -12091,6 +12099,7 @@
                 </a:bodyPr>
                 <a:lstStyle/>
                 <a:p>
+                  <a:pPr/>
                   <a14:m>
                     <m:oMathPara xmlns:m="http://schemas.openxmlformats.org/officeDocument/2006/math">
                       <m:oMathParaPr>
@@ -12147,7 +12156,7 @@
               </p:txBody>
             </p:sp>
           </mc:Choice>
-          <mc:Fallback>
+          <mc:Fallback xmlns="">
             <p:sp>
               <p:nvSpPr>
                 <p:cNvPr id="5" name="TextBox 4">
@@ -12192,8 +12201,8 @@
             </p:sp>
           </mc:Fallback>
         </mc:AlternateContent>
-        <mc:AlternateContent xmlns:mc="http://schemas.openxmlformats.org/markup-compatibility/2006">
-          <mc:Choice xmlns:a14="http://schemas.microsoft.com/office/drawing/2010/main" Requires="a14">
+        <mc:AlternateContent xmlns:mc="http://schemas.openxmlformats.org/markup-compatibility/2006" xmlns:a14="http://schemas.microsoft.com/office/drawing/2010/main">
+          <mc:Choice Requires="a14">
             <p:sp>
               <p:nvSpPr>
                 <p:cNvPr id="6" name="TextBox 5">
@@ -12222,6 +12231,7 @@
                 </a:bodyPr>
                 <a:lstStyle/>
                 <a:p>
+                  <a:pPr/>
                   <a14:m>
                     <m:oMathPara xmlns:m="http://schemas.openxmlformats.org/officeDocument/2006/math">
                       <m:oMathParaPr>
@@ -12250,7 +12260,7 @@
                                   <a:rPr lang="pt-BR" sz="2400" b="0" i="1" smtClean="0">
                                     <a:latin typeface="Cambria Math" panose="02040503050406030204" pitchFamily="18" charset="0"/>
                                   </a:rPr>
-                                  <m:t>-</m:t>
+                                  <m:t>−</m:t>
                                 </m:r>
                                 <m:r>
                                   <a:rPr lang="pt-BR" sz="2400" i="1" smtClean="0">
@@ -12319,7 +12329,7 @@
               </p:txBody>
             </p:sp>
           </mc:Choice>
-          <mc:Fallback>
+          <mc:Fallback xmlns="">
             <p:sp>
               <p:nvSpPr>
                 <p:cNvPr id="6" name="TextBox 5">
@@ -12445,8 +12455,8 @@
             </a:prstGeom>
           </p:spPr>
         </p:pic>
-        <mc:AlternateContent xmlns:mc="http://schemas.openxmlformats.org/markup-compatibility/2006">
-          <mc:Choice xmlns:a14="http://schemas.microsoft.com/office/drawing/2010/main" Requires="a14">
+        <mc:AlternateContent xmlns:mc="http://schemas.openxmlformats.org/markup-compatibility/2006" xmlns:a14="http://schemas.microsoft.com/office/drawing/2010/main">
+          <mc:Choice Requires="a14">
             <p:sp>
               <p:nvSpPr>
                 <p:cNvPr id="8" name="TextBox 7">
@@ -12477,6 +12487,7 @@
                 </a:bodyPr>
                 <a:lstStyle/>
                 <a:p>
+                  <a:pPr/>
                   <a14:m>
                     <m:oMathPara xmlns:m="http://schemas.openxmlformats.org/officeDocument/2006/math">
                       <m:oMathParaPr>
@@ -12547,7 +12558,7 @@
               </p:txBody>
             </p:sp>
           </mc:Choice>
-          <mc:Fallback>
+          <mc:Fallback xmlns="">
             <p:sp>
               <p:nvSpPr>
                 <p:cNvPr id="8" name="TextBox 7">
@@ -12592,8 +12603,8 @@
             </p:sp>
           </mc:Fallback>
         </mc:AlternateContent>
-        <mc:AlternateContent xmlns:mc="http://schemas.openxmlformats.org/markup-compatibility/2006">
-          <mc:Choice xmlns:a14="http://schemas.microsoft.com/office/drawing/2010/main" Requires="a14">
+        <mc:AlternateContent xmlns:mc="http://schemas.openxmlformats.org/markup-compatibility/2006" xmlns:a14="http://schemas.microsoft.com/office/drawing/2010/main">
+          <mc:Choice Requires="a14">
             <p:sp>
               <p:nvSpPr>
                 <p:cNvPr id="9" name="TextBox 8">
@@ -12624,6 +12635,7 @@
                 </a:bodyPr>
                 <a:lstStyle/>
                 <a:p>
+                  <a:pPr/>
                   <a14:m>
                     <m:oMathPara xmlns:m="http://schemas.openxmlformats.org/officeDocument/2006/math">
                       <m:oMathParaPr>
@@ -12666,7 +12678,7 @@
               </p:txBody>
             </p:sp>
           </mc:Choice>
-          <mc:Fallback>
+          <mc:Fallback xmlns="">
             <p:sp>
               <p:nvSpPr>
                 <p:cNvPr id="9" name="TextBox 8">
@@ -12711,8 +12723,8 @@
             </p:sp>
           </mc:Fallback>
         </mc:AlternateContent>
-        <mc:AlternateContent xmlns:mc="http://schemas.openxmlformats.org/markup-compatibility/2006">
-          <mc:Choice xmlns:a14="http://schemas.microsoft.com/office/drawing/2010/main" Requires="a14">
+        <mc:AlternateContent xmlns:mc="http://schemas.openxmlformats.org/markup-compatibility/2006" xmlns:a14="http://schemas.microsoft.com/office/drawing/2010/main">
+          <mc:Choice Requires="a14">
             <p:sp>
               <p:nvSpPr>
                 <p:cNvPr id="10" name="TextBox 9">
@@ -12743,6 +12755,7 @@
                 </a:bodyPr>
                 <a:lstStyle/>
                 <a:p>
+                  <a:pPr/>
                   <a14:m>
                     <m:oMathPara xmlns:m="http://schemas.openxmlformats.org/officeDocument/2006/math">
                       <m:oMathParaPr>
@@ -12786,7 +12799,7 @@
               </p:txBody>
             </p:sp>
           </mc:Choice>
-          <mc:Fallback>
+          <mc:Fallback xmlns="">
             <p:sp>
               <p:nvSpPr>
                 <p:cNvPr id="10" name="TextBox 9">
@@ -12831,8 +12844,8 @@
             </p:sp>
           </mc:Fallback>
         </mc:AlternateContent>
-        <mc:AlternateContent xmlns:mc="http://schemas.openxmlformats.org/markup-compatibility/2006">
-          <mc:Choice xmlns:a14="http://schemas.microsoft.com/office/drawing/2010/main" Requires="a14">
+        <mc:AlternateContent xmlns:mc="http://schemas.openxmlformats.org/markup-compatibility/2006" xmlns:a14="http://schemas.microsoft.com/office/drawing/2010/main">
+          <mc:Choice Requires="a14">
             <p:sp>
               <p:nvSpPr>
                 <p:cNvPr id="11" name="TextBox 10">
@@ -12863,6 +12876,7 @@
                 </a:bodyPr>
                 <a:lstStyle/>
                 <a:p>
+                  <a:pPr/>
                   <a14:m>
                     <m:oMathPara xmlns:m="http://schemas.openxmlformats.org/officeDocument/2006/math">
                       <m:oMathParaPr>
@@ -12885,7 +12899,7 @@
                               <a:rPr lang="pt-BR" sz="2800" b="0" i="0" dirty="0" smtClean="0">
                                 <a:latin typeface="Cambria Math" panose="02040503050406030204" pitchFamily="18" charset="0"/>
                               </a:rPr>
-                              <m:t>-</m:t>
+                              <m:t>−</m:t>
                             </m:r>
                             <m:r>
                               <m:rPr>
@@ -12915,7 +12929,7 @@
               </p:txBody>
             </p:sp>
           </mc:Choice>
-          <mc:Fallback>
+          <mc:Fallback xmlns="">
             <p:sp>
               <p:nvSpPr>
                 <p:cNvPr id="11" name="TextBox 10">
@@ -13146,6 +13160,401 @@
     <p:extLst>
       <p:ext uri="{BB962C8B-B14F-4D97-AF65-F5344CB8AC3E}">
         <p14:creationId xmlns:p14="http://schemas.microsoft.com/office/powerpoint/2010/main" val="712012867"/>
+      </p:ext>
+    </p:extLst>
+  </p:cSld>
+  <p:clrMapOvr>
+    <a:masterClrMapping/>
+  </p:clrMapOvr>
+</p:sld>
+</file>
+
+<file path=ppt/slides/slide5.xml><?xml version="1.0" encoding="utf-8"?>
+<p:sld xmlns:a="http://schemas.openxmlformats.org/drawingml/2006/main" xmlns:r="http://schemas.openxmlformats.org/officeDocument/2006/relationships" xmlns:p="http://schemas.openxmlformats.org/presentationml/2006/main">
+  <p:cSld>
+    <p:spTree>
+      <p:nvGrpSpPr>
+        <p:cNvPr id="1" name=""/>
+        <p:cNvGrpSpPr/>
+        <p:nvPr/>
+      </p:nvGrpSpPr>
+      <p:grpSpPr>
+        <a:xfrm>
+          <a:off x="0" y="0"/>
+          <a:ext cx="0" cy="0"/>
+          <a:chOff x="0" y="0"/>
+          <a:chExt cx="0" cy="0"/>
+        </a:xfrm>
+      </p:grpSpPr>
+      <p:grpSp>
+        <p:nvGrpSpPr>
+          <p:cNvPr id="15" name="Group 14">
+            <a:extLst>
+              <a:ext uri="{FF2B5EF4-FFF2-40B4-BE49-F238E27FC236}">
+                <a16:creationId xmlns:a16="http://schemas.microsoft.com/office/drawing/2014/main" id="{567885AE-C414-6A97-12A4-10ED22804881}"/>
+              </a:ext>
+            </a:extLst>
+          </p:cNvPr>
+          <p:cNvGrpSpPr/>
+          <p:nvPr/>
+        </p:nvGrpSpPr>
+        <p:grpSpPr>
+          <a:xfrm>
+            <a:off x="1238249" y="0"/>
+            <a:ext cx="8801101" cy="6858000"/>
+            <a:chOff x="1238249" y="0"/>
+            <a:chExt cx="8801101" cy="6858000"/>
+          </a:xfrm>
+        </p:grpSpPr>
+        <p:sp>
+          <p:nvSpPr>
+            <p:cNvPr id="14" name="Rectangle 13">
+              <a:extLst>
+                <a:ext uri="{FF2B5EF4-FFF2-40B4-BE49-F238E27FC236}">
+                  <a16:creationId xmlns:a16="http://schemas.microsoft.com/office/drawing/2014/main" id="{4320DCB3-CFE7-5F9E-A74B-DAE156844D66}"/>
+                </a:ext>
+              </a:extLst>
+            </p:cNvPr>
+            <p:cNvSpPr/>
+            <p:nvPr/>
+          </p:nvSpPr>
+          <p:spPr>
+            <a:xfrm>
+              <a:off x="1238249" y="0"/>
+              <a:ext cx="8801101" cy="6858000"/>
+            </a:xfrm>
+            <a:prstGeom prst="rect">
+              <a:avLst/>
+            </a:prstGeom>
+            <a:solidFill>
+              <a:schemeClr val="bg1"/>
+            </a:solidFill>
+            <a:ln>
+              <a:solidFill>
+                <a:schemeClr val="bg1"/>
+              </a:solidFill>
+            </a:ln>
+          </p:spPr>
+          <p:style>
+            <a:lnRef idx="2">
+              <a:schemeClr val="accent1">
+                <a:shade val="15000"/>
+              </a:schemeClr>
+            </a:lnRef>
+            <a:fillRef idx="1">
+              <a:schemeClr val="accent1"/>
+            </a:fillRef>
+            <a:effectRef idx="0">
+              <a:schemeClr val="accent1"/>
+            </a:effectRef>
+            <a:fontRef idx="minor">
+              <a:schemeClr val="lt1"/>
+            </a:fontRef>
+          </p:style>
+          <p:txBody>
+            <a:bodyPr rtlCol="0" anchor="ctr"/>
+            <a:lstStyle/>
+            <a:p>
+              <a:pPr algn="ctr"/>
+              <a:endParaRPr lang="en-GB"/>
+            </a:p>
+          </p:txBody>
+        </p:sp>
+        <p:grpSp>
+          <p:nvGrpSpPr>
+            <p:cNvPr id="13" name="Group 12">
+              <a:extLst>
+                <a:ext uri="{FF2B5EF4-FFF2-40B4-BE49-F238E27FC236}">
+                  <a16:creationId xmlns:a16="http://schemas.microsoft.com/office/drawing/2014/main" id="{8FE2E168-AB76-D4A5-7CD5-F01608D4E87B}"/>
+                </a:ext>
+              </a:extLst>
+            </p:cNvPr>
+            <p:cNvGrpSpPr/>
+            <p:nvPr/>
+          </p:nvGrpSpPr>
+          <p:grpSpPr>
+            <a:xfrm>
+              <a:off x="1430585" y="198532"/>
+              <a:ext cx="8209651" cy="6460935"/>
+              <a:chOff x="1563935" y="198532"/>
+              <a:chExt cx="8209651" cy="6460935"/>
+            </a:xfrm>
+          </p:grpSpPr>
+          <p:pic>
+            <p:nvPicPr>
+              <p:cNvPr id="3" name="Picture 2">
+                <a:extLst>
+                  <a:ext uri="{FF2B5EF4-FFF2-40B4-BE49-F238E27FC236}">
+                    <a16:creationId xmlns:a16="http://schemas.microsoft.com/office/drawing/2014/main" id="{5A721B9E-28F6-E057-99F1-110BE08E8E56}"/>
+                  </a:ext>
+                </a:extLst>
+              </p:cNvPr>
+              <p:cNvPicPr>
+                <a:picLocks noChangeAspect="1"/>
+              </p:cNvPicPr>
+              <p:nvPr/>
+            </p:nvPicPr>
+            <p:blipFill>
+              <a:blip r:embed="rId2"/>
+              <a:srcRect t="2081"/>
+              <a:stretch>
+                <a:fillRect/>
+              </a:stretch>
+            </p:blipFill>
+            <p:spPr>
+              <a:xfrm>
+                <a:off x="1894733" y="198532"/>
+                <a:ext cx="7878853" cy="6460935"/>
+              </a:xfrm>
+              <a:prstGeom prst="rect">
+                <a:avLst/>
+              </a:prstGeom>
+            </p:spPr>
+          </p:pic>
+          <p:pic>
+            <p:nvPicPr>
+              <p:cNvPr id="5" name="Picture 4">
+                <a:extLst>
+                  <a:ext uri="{FF2B5EF4-FFF2-40B4-BE49-F238E27FC236}">
+                    <a16:creationId xmlns:a16="http://schemas.microsoft.com/office/drawing/2014/main" id="{09071C7D-2DE2-3373-506F-A80EB95C2BF4}"/>
+                  </a:ext>
+                </a:extLst>
+              </p:cNvPr>
+              <p:cNvPicPr>
+                <a:picLocks noChangeAspect="1"/>
+              </p:cNvPicPr>
+              <p:nvPr/>
+            </p:nvPicPr>
+            <p:blipFill>
+              <a:blip r:embed="rId2"/>
+              <a:srcRect l="64209" t="55890" r="31894" b="38002"/>
+              <a:stretch>
+                <a:fillRect/>
+              </a:stretch>
+            </p:blipFill>
+            <p:spPr>
+              <a:xfrm>
+                <a:off x="5834159" y="494676"/>
+                <a:ext cx="239843" cy="314794"/>
+              </a:xfrm>
+              <a:prstGeom prst="rect">
+                <a:avLst/>
+              </a:prstGeom>
+            </p:spPr>
+          </p:pic>
+          <p:pic>
+            <p:nvPicPr>
+              <p:cNvPr id="9" name="Picture 8">
+                <a:extLst>
+                  <a:ext uri="{FF2B5EF4-FFF2-40B4-BE49-F238E27FC236}">
+                    <a16:creationId xmlns:a16="http://schemas.microsoft.com/office/drawing/2014/main" id="{B8113E90-56B9-9402-4C90-9C97F97361A6}"/>
+                  </a:ext>
+                </a:extLst>
+              </p:cNvPr>
+              <p:cNvPicPr>
+                <a:picLocks noChangeAspect="1"/>
+              </p:cNvPicPr>
+              <p:nvPr/>
+            </p:nvPicPr>
+            <p:blipFill>
+              <a:blip r:embed="rId3">
+                <a:extLst>
+                  <a:ext uri="{28A0092B-C50C-407E-A947-70E740481C1C}">
+                    <a14:useLocalDpi xmlns:a14="http://schemas.microsoft.com/office/drawing/2010/main" val="0"/>
+                  </a:ext>
+                </a:extLst>
+              </a:blip>
+              <a:srcRect/>
+              <a:stretch/>
+            </p:blipFill>
+            <p:spPr>
+              <a:xfrm>
+                <a:off x="6953684" y="3860006"/>
+                <a:ext cx="281419" cy="247650"/>
+              </a:xfrm>
+              <a:prstGeom prst="rect">
+                <a:avLst/>
+              </a:prstGeom>
+            </p:spPr>
+          </p:pic>
+          <p:sp>
+            <p:nvSpPr>
+              <p:cNvPr id="10" name="TextBox 9">
+                <a:extLst>
+                  <a:ext uri="{FF2B5EF4-FFF2-40B4-BE49-F238E27FC236}">
+                    <a16:creationId xmlns:a16="http://schemas.microsoft.com/office/drawing/2014/main" id="{4BCF545B-FE61-2C67-1A97-0369D87F7325}"/>
+                  </a:ext>
+                </a:extLst>
+              </p:cNvPr>
+              <p:cNvSpPr txBox="1"/>
+              <p:nvPr/>
+            </p:nvSpPr>
+            <p:spPr>
+              <a:xfrm>
+                <a:off x="5536407" y="3505200"/>
+                <a:ext cx="240772" cy="215444"/>
+              </a:xfrm>
+              <a:prstGeom prst="rect">
+                <a:avLst/>
+              </a:prstGeom>
+              <a:noFill/>
+            </p:spPr>
+            <p:txBody>
+              <a:bodyPr wrap="none" rtlCol="0">
+                <a:spAutoFit/>
+              </a:bodyPr>
+              <a:lstStyle/>
+              <a:p>
+                <a:r>
+                  <a:rPr lang="pt-BR" sz="800" dirty="0"/>
+                  <a:t>h</a:t>
+                </a:r>
+                <a:endParaRPr lang="en-GB" sz="2800" dirty="0"/>
+              </a:p>
+            </p:txBody>
+          </p:sp>
+          <p:sp>
+            <p:nvSpPr>
+              <p:cNvPr id="11" name="TextBox 10">
+                <a:extLst>
+                  <a:ext uri="{FF2B5EF4-FFF2-40B4-BE49-F238E27FC236}">
+                    <a16:creationId xmlns:a16="http://schemas.microsoft.com/office/drawing/2014/main" id="{348EE1F7-08A8-6435-AB34-DC0F9B6C9CE5}"/>
+                  </a:ext>
+                </a:extLst>
+              </p:cNvPr>
+              <p:cNvSpPr txBox="1"/>
+              <p:nvPr/>
+            </p:nvSpPr>
+            <p:spPr>
+              <a:xfrm>
+                <a:off x="1563935" y="6230030"/>
+                <a:ext cx="1527982" cy="369332"/>
+              </a:xfrm>
+              <a:prstGeom prst="rect">
+                <a:avLst/>
+              </a:prstGeom>
+              <a:solidFill>
+                <a:schemeClr val="bg1"/>
+              </a:solidFill>
+            </p:spPr>
+            <p:txBody>
+              <a:bodyPr wrap="none" rtlCol="0">
+                <a:spAutoFit/>
+              </a:bodyPr>
+              <a:lstStyle/>
+              <a:p>
+                <a:r>
+                  <a:rPr lang="pt-BR" dirty="0"/>
+                  <a:t>Engrenagem i</a:t>
+                </a:r>
+                <a:endParaRPr lang="en-GB" dirty="0"/>
+              </a:p>
+            </p:txBody>
+          </p:sp>
+          <p:sp>
+            <p:nvSpPr>
+              <p:cNvPr id="12" name="TextBox 11">
+                <a:extLst>
+                  <a:ext uri="{FF2B5EF4-FFF2-40B4-BE49-F238E27FC236}">
+                    <a16:creationId xmlns:a16="http://schemas.microsoft.com/office/drawing/2014/main" id="{0FD7C210-2C73-3B18-E7CC-96DAA8A09398}"/>
+                  </a:ext>
+                </a:extLst>
+              </p:cNvPr>
+              <p:cNvSpPr txBox="1"/>
+              <p:nvPr/>
+            </p:nvSpPr>
+            <p:spPr>
+              <a:xfrm>
+                <a:off x="7405935" y="1491115"/>
+                <a:ext cx="1527982" cy="369332"/>
+              </a:xfrm>
+              <a:prstGeom prst="rect">
+                <a:avLst/>
+              </a:prstGeom>
+              <a:solidFill>
+                <a:schemeClr val="bg1"/>
+              </a:solidFill>
+            </p:spPr>
+            <p:txBody>
+              <a:bodyPr wrap="none" rtlCol="0">
+                <a:spAutoFit/>
+              </a:bodyPr>
+              <a:lstStyle/>
+              <a:p>
+                <a:r>
+                  <a:rPr lang="pt-BR" dirty="0"/>
+                  <a:t>Engrenagem j</a:t>
+                </a:r>
+                <a:endParaRPr lang="en-GB" dirty="0"/>
+              </a:p>
+            </p:txBody>
+          </p:sp>
+        </p:grpSp>
+      </p:grpSp>
+    </p:spTree>
+    <p:extLst>
+      <p:ext uri="{BB962C8B-B14F-4D97-AF65-F5344CB8AC3E}">
+        <p14:creationId xmlns:p14="http://schemas.microsoft.com/office/powerpoint/2010/main" val="1504439720"/>
+      </p:ext>
+    </p:extLst>
+  </p:cSld>
+  <p:clrMapOvr>
+    <a:masterClrMapping/>
+  </p:clrMapOvr>
+</p:sld>
+</file>
+
+<file path=ppt/slides/slide6.xml><?xml version="1.0" encoding="utf-8"?>
+<p:sld xmlns:a="http://schemas.openxmlformats.org/drawingml/2006/main" xmlns:r="http://schemas.openxmlformats.org/officeDocument/2006/relationships" xmlns:p="http://schemas.openxmlformats.org/presentationml/2006/main">
+  <p:cSld>
+    <p:spTree>
+      <p:nvGrpSpPr>
+        <p:cNvPr id="1" name=""/>
+        <p:cNvGrpSpPr/>
+        <p:nvPr/>
+      </p:nvGrpSpPr>
+      <p:grpSpPr>
+        <a:xfrm>
+          <a:off x="0" y="0"/>
+          <a:ext cx="0" cy="0"/>
+          <a:chOff x="0" y="0"/>
+          <a:chExt cx="0" cy="0"/>
+        </a:xfrm>
+      </p:grpSpPr>
+      <p:pic>
+        <p:nvPicPr>
+          <p:cNvPr id="3" name="Picture 2">
+            <a:extLst>
+              <a:ext uri="{FF2B5EF4-FFF2-40B4-BE49-F238E27FC236}">
+                <a16:creationId xmlns:a16="http://schemas.microsoft.com/office/drawing/2014/main" id="{653CB637-D388-B140-FB83-5297CD9EFD6E}"/>
+              </a:ext>
+            </a:extLst>
+          </p:cNvPr>
+          <p:cNvPicPr>
+            <a:picLocks noChangeAspect="1"/>
+          </p:cNvPicPr>
+          <p:nvPr/>
+        </p:nvPicPr>
+        <p:blipFill>
+          <a:blip r:embed="rId2"/>
+          <a:stretch>
+            <a:fillRect/>
+          </a:stretch>
+        </p:blipFill>
+        <p:spPr>
+          <a:xfrm>
+            <a:off x="90014" y="1060442"/>
+            <a:ext cx="12011972" cy="4737116"/>
+          </a:xfrm>
+          <a:prstGeom prst="rect">
+            <a:avLst/>
+          </a:prstGeom>
+        </p:spPr>
+      </p:pic>
+    </p:spTree>
+    <p:extLst>
+      <p:ext uri="{BB962C8B-B14F-4D97-AF65-F5344CB8AC3E}">
+        <p14:creationId xmlns:p14="http://schemas.microsoft.com/office/powerpoint/2010/main" val="2172550475"/>
       </p:ext>
     </p:extLst>
   </p:cSld>

--- a/DISSERTACAO/figuras/figures.pptx
+++ b/DISSERTACAO/figuras/figures.pptx
@@ -5,15 +5,16 @@
     <p:sldMasterId id="2147483648" r:id="rId1"/>
   </p:sldMasterIdLst>
   <p:notesMasterIdLst>
-    <p:notesMasterId r:id="rId8"/>
+    <p:notesMasterId r:id="rId9"/>
   </p:notesMasterIdLst>
   <p:sldIdLst>
     <p:sldId id="256" r:id="rId2"/>
     <p:sldId id="257" r:id="rId3"/>
     <p:sldId id="258" r:id="rId4"/>
     <p:sldId id="259" r:id="rId5"/>
-    <p:sldId id="260" r:id="rId6"/>
-    <p:sldId id="261" r:id="rId7"/>
+    <p:sldId id="261" r:id="rId6"/>
+    <p:sldId id="260" r:id="rId7"/>
+    <p:sldId id="262" r:id="rId8"/>
   </p:sldIdLst>
   <p:sldSz cx="12192000" cy="6858000"/>
   <p:notesSz cx="6858000" cy="9144000"/>
@@ -684,7 +685,7 @@
           <a:p>
             <a:fld id="{FFCE6A37-3420-40C1-9DE2-D7E9118C4CF6}" type="datetimeFigureOut">
               <a:rPr lang="pt-BR" smtClean="0"/>
-              <a:t>16/05/2026</a:t>
+              <a:t>25/05/2026</a:t>
             </a:fld>
             <a:endParaRPr lang="pt-BR"/>
           </a:p>
@@ -1185,7 +1186,7 @@
           <a:p>
             <a:fld id="{7C8BC570-9881-4DD1-A666-BFFC3ABED690}" type="datetimeFigureOut">
               <a:rPr lang="pt-BR" smtClean="0"/>
-              <a:t>16/05/2026</a:t>
+              <a:t>25/05/2026</a:t>
             </a:fld>
             <a:endParaRPr lang="pt-BR"/>
           </a:p>
@@ -1385,7 +1386,7 @@
           <a:p>
             <a:fld id="{7C8BC570-9881-4DD1-A666-BFFC3ABED690}" type="datetimeFigureOut">
               <a:rPr lang="pt-BR" smtClean="0"/>
-              <a:t>16/05/2026</a:t>
+              <a:t>25/05/2026</a:t>
             </a:fld>
             <a:endParaRPr lang="pt-BR"/>
           </a:p>
@@ -1595,7 +1596,7 @@
           <a:p>
             <a:fld id="{7C8BC570-9881-4DD1-A666-BFFC3ABED690}" type="datetimeFigureOut">
               <a:rPr lang="pt-BR" smtClean="0"/>
-              <a:t>16/05/2026</a:t>
+              <a:t>25/05/2026</a:t>
             </a:fld>
             <a:endParaRPr lang="pt-BR"/>
           </a:p>
@@ -1795,7 +1796,7 @@
           <a:p>
             <a:fld id="{7C8BC570-9881-4DD1-A666-BFFC3ABED690}" type="datetimeFigureOut">
               <a:rPr lang="pt-BR" smtClean="0"/>
-              <a:t>16/05/2026</a:t>
+              <a:t>25/05/2026</a:t>
             </a:fld>
             <a:endParaRPr lang="pt-BR"/>
           </a:p>
@@ -2071,7 +2072,7 @@
           <a:p>
             <a:fld id="{7C8BC570-9881-4DD1-A666-BFFC3ABED690}" type="datetimeFigureOut">
               <a:rPr lang="pt-BR" smtClean="0"/>
-              <a:t>16/05/2026</a:t>
+              <a:t>25/05/2026</a:t>
             </a:fld>
             <a:endParaRPr lang="pt-BR"/>
           </a:p>
@@ -2339,7 +2340,7 @@
           <a:p>
             <a:fld id="{7C8BC570-9881-4DD1-A666-BFFC3ABED690}" type="datetimeFigureOut">
               <a:rPr lang="pt-BR" smtClean="0"/>
-              <a:t>16/05/2026</a:t>
+              <a:t>25/05/2026</a:t>
             </a:fld>
             <a:endParaRPr lang="pt-BR"/>
           </a:p>
@@ -2754,7 +2755,7 @@
           <a:p>
             <a:fld id="{7C8BC570-9881-4DD1-A666-BFFC3ABED690}" type="datetimeFigureOut">
               <a:rPr lang="pt-BR" smtClean="0"/>
-              <a:t>16/05/2026</a:t>
+              <a:t>25/05/2026</a:t>
             </a:fld>
             <a:endParaRPr lang="pt-BR"/>
           </a:p>
@@ -2896,7 +2897,7 @@
           <a:p>
             <a:fld id="{7C8BC570-9881-4DD1-A666-BFFC3ABED690}" type="datetimeFigureOut">
               <a:rPr lang="pt-BR" smtClean="0"/>
-              <a:t>16/05/2026</a:t>
+              <a:t>25/05/2026</a:t>
             </a:fld>
             <a:endParaRPr lang="pt-BR"/>
           </a:p>
@@ -3009,7 +3010,7 @@
           <a:p>
             <a:fld id="{7C8BC570-9881-4DD1-A666-BFFC3ABED690}" type="datetimeFigureOut">
               <a:rPr lang="pt-BR" smtClean="0"/>
-              <a:t>16/05/2026</a:t>
+              <a:t>25/05/2026</a:t>
             </a:fld>
             <a:endParaRPr lang="pt-BR"/>
           </a:p>
@@ -3322,7 +3323,7 @@
           <a:p>
             <a:fld id="{7C8BC570-9881-4DD1-A666-BFFC3ABED690}" type="datetimeFigureOut">
               <a:rPr lang="pt-BR" smtClean="0"/>
-              <a:t>16/05/2026</a:t>
+              <a:t>25/05/2026</a:t>
             </a:fld>
             <a:endParaRPr lang="pt-BR"/>
           </a:p>
@@ -3611,7 +3612,7 @@
           <a:p>
             <a:fld id="{7C8BC570-9881-4DD1-A666-BFFC3ABED690}" type="datetimeFigureOut">
               <a:rPr lang="pt-BR" smtClean="0"/>
-              <a:t>16/05/2026</a:t>
+              <a:t>25/05/2026</a:t>
             </a:fld>
             <a:endParaRPr lang="pt-BR"/>
           </a:p>
@@ -3854,7 +3855,7 @@
           <a:p>
             <a:fld id="{7C8BC570-9881-4DD1-A666-BFFC3ABED690}" type="datetimeFigureOut">
               <a:rPr lang="pt-BR" smtClean="0"/>
-              <a:t>16/05/2026</a:t>
+              <a:t>25/05/2026</a:t>
             </a:fld>
             <a:endParaRPr lang="pt-BR"/>
           </a:p>
@@ -13186,6 +13187,66 @@
           <a:chExt cx="0" cy="0"/>
         </a:xfrm>
       </p:grpSpPr>
+      <p:pic>
+        <p:nvPicPr>
+          <p:cNvPr id="3" name="Picture 2">
+            <a:extLst>
+              <a:ext uri="{FF2B5EF4-FFF2-40B4-BE49-F238E27FC236}">
+                <a16:creationId xmlns:a16="http://schemas.microsoft.com/office/drawing/2014/main" id="{653CB637-D388-B140-FB83-5297CD9EFD6E}"/>
+              </a:ext>
+            </a:extLst>
+          </p:cNvPr>
+          <p:cNvPicPr>
+            <a:picLocks noChangeAspect="1"/>
+          </p:cNvPicPr>
+          <p:nvPr/>
+        </p:nvPicPr>
+        <p:blipFill>
+          <a:blip r:embed="rId2"/>
+          <a:stretch>
+            <a:fillRect/>
+          </a:stretch>
+        </p:blipFill>
+        <p:spPr>
+          <a:xfrm>
+            <a:off x="90014" y="1060442"/>
+            <a:ext cx="12011972" cy="4737116"/>
+          </a:xfrm>
+          <a:prstGeom prst="rect">
+            <a:avLst/>
+          </a:prstGeom>
+        </p:spPr>
+      </p:pic>
+    </p:spTree>
+    <p:extLst>
+      <p:ext uri="{BB962C8B-B14F-4D97-AF65-F5344CB8AC3E}">
+        <p14:creationId xmlns:p14="http://schemas.microsoft.com/office/powerpoint/2010/main" val="2172550475"/>
+      </p:ext>
+    </p:extLst>
+  </p:cSld>
+  <p:clrMapOvr>
+    <a:masterClrMapping/>
+  </p:clrMapOvr>
+</p:sld>
+</file>
+
+<file path=ppt/slides/slide6.xml><?xml version="1.0" encoding="utf-8"?>
+<p:sld xmlns:a="http://schemas.openxmlformats.org/drawingml/2006/main" xmlns:r="http://schemas.openxmlformats.org/officeDocument/2006/relationships" xmlns:p="http://schemas.openxmlformats.org/presentationml/2006/main">
+  <p:cSld>
+    <p:spTree>
+      <p:nvGrpSpPr>
+        <p:cNvPr id="1" name=""/>
+        <p:cNvGrpSpPr/>
+        <p:nvPr/>
+      </p:nvGrpSpPr>
+      <p:grpSpPr>
+        <a:xfrm>
+          <a:off x="0" y="0"/>
+          <a:ext cx="0" cy="0"/>
+          <a:chOff x="0" y="0"/>
+          <a:chExt cx="0" cy="0"/>
+        </a:xfrm>
+      </p:grpSpPr>
       <p:grpSp>
         <p:nvGrpSpPr>
           <p:cNvPr id="15" name="Group 14">
@@ -13391,7 +13452,7 @@
             </p:nvSpPr>
             <p:spPr>
               <a:xfrm>
-                <a:off x="5536407" y="3505200"/>
+                <a:off x="5531377" y="3526566"/>
                 <a:ext cx="240772" cy="215444"/>
               </a:xfrm>
               <a:prstGeom prst="rect">
@@ -13406,10 +13467,10 @@
               <a:lstStyle/>
               <a:p>
                 <a:r>
-                  <a:rPr lang="pt-BR" sz="800" dirty="0"/>
+                  <a:rPr lang="pt-BR" sz="800" b="1" dirty="0"/>
                   <a:t>h</a:t>
                 </a:r>
-                <a:endParaRPr lang="en-GB" sz="2800" dirty="0"/>
+                <a:endParaRPr lang="en-GB" sz="2800" b="1" dirty="0"/>
               </a:p>
             </p:txBody>
           </p:sp>
@@ -13504,7 +13565,7 @@
 </p:sld>
 </file>
 
-<file path=ppt/slides/slide6.xml><?xml version="1.0" encoding="utf-8"?>
+<file path=ppt/slides/slide7.xml><?xml version="1.0" encoding="utf-8"?>
 <p:sld xmlns:a="http://schemas.openxmlformats.org/drawingml/2006/main" xmlns:r="http://schemas.openxmlformats.org/officeDocument/2006/relationships" xmlns:p="http://schemas.openxmlformats.org/presentationml/2006/main">
   <p:cSld>
     <p:spTree>
@@ -13521,40 +13582,449 @@
           <a:chExt cx="0" cy="0"/>
         </a:xfrm>
       </p:grpSpPr>
-      <p:pic>
-        <p:nvPicPr>
-          <p:cNvPr id="3" name="Picture 2">
+      <p:grpSp>
+        <p:nvGrpSpPr>
+          <p:cNvPr id="15" name="Group 14">
             <a:extLst>
               <a:ext uri="{FF2B5EF4-FFF2-40B4-BE49-F238E27FC236}">
-                <a16:creationId xmlns:a16="http://schemas.microsoft.com/office/drawing/2014/main" id="{653CB637-D388-B140-FB83-5297CD9EFD6E}"/>
+                <a16:creationId xmlns:a16="http://schemas.microsoft.com/office/drawing/2014/main" id="{D44F780C-BF8F-4E93-CA27-1593B9B65785}"/>
               </a:ext>
             </a:extLst>
           </p:cNvPr>
-          <p:cNvPicPr>
-            <a:picLocks noChangeAspect="1"/>
-          </p:cNvPicPr>
+          <p:cNvGrpSpPr/>
           <p:nvPr/>
-        </p:nvPicPr>
-        <p:blipFill>
-          <a:blip r:embed="rId2"/>
-          <a:stretch>
-            <a:fillRect/>
-          </a:stretch>
-        </p:blipFill>
-        <p:spPr>
+        </p:nvGrpSpPr>
+        <p:grpSpPr>
           <a:xfrm>
-            <a:off x="90014" y="1060442"/>
-            <a:ext cx="12011972" cy="4737116"/>
+            <a:off x="979714" y="756138"/>
+            <a:ext cx="10668000" cy="5505335"/>
+            <a:chOff x="979714" y="756138"/>
+            <a:chExt cx="10668000" cy="5505335"/>
           </a:xfrm>
-          <a:prstGeom prst="rect">
-            <a:avLst/>
-          </a:prstGeom>
-        </p:spPr>
-      </p:pic>
+        </p:grpSpPr>
+        <p:sp>
+          <p:nvSpPr>
+            <p:cNvPr id="13" name="Rectangle 12">
+              <a:extLst>
+                <a:ext uri="{FF2B5EF4-FFF2-40B4-BE49-F238E27FC236}">
+                  <a16:creationId xmlns:a16="http://schemas.microsoft.com/office/drawing/2014/main" id="{2650C8F3-FDCD-5993-1BD0-AD03CFE969F9}"/>
+                </a:ext>
+              </a:extLst>
+            </p:cNvPr>
+            <p:cNvSpPr/>
+            <p:nvPr/>
+          </p:nvSpPr>
+          <p:spPr>
+            <a:xfrm>
+              <a:off x="979714" y="756138"/>
+              <a:ext cx="10668000" cy="5505335"/>
+            </a:xfrm>
+            <a:prstGeom prst="rect">
+              <a:avLst/>
+            </a:prstGeom>
+            <a:solidFill>
+              <a:schemeClr val="bg1"/>
+            </a:solidFill>
+            <a:ln>
+              <a:solidFill>
+                <a:schemeClr val="bg1"/>
+              </a:solidFill>
+            </a:ln>
+          </p:spPr>
+          <p:style>
+            <a:lnRef idx="2">
+              <a:schemeClr val="accent1">
+                <a:shade val="15000"/>
+              </a:schemeClr>
+            </a:lnRef>
+            <a:fillRef idx="1">
+              <a:schemeClr val="accent1"/>
+            </a:fillRef>
+            <a:effectRef idx="0">
+              <a:schemeClr val="accent1"/>
+            </a:effectRef>
+            <a:fontRef idx="minor">
+              <a:schemeClr val="lt1"/>
+            </a:fontRef>
+          </p:style>
+          <p:txBody>
+            <a:bodyPr rtlCol="0" anchor="ctr"/>
+            <a:lstStyle/>
+            <a:p>
+              <a:pPr algn="ctr"/>
+              <a:endParaRPr lang="en-GB"/>
+            </a:p>
+          </p:txBody>
+        </p:sp>
+        <p:grpSp>
+          <p:nvGrpSpPr>
+            <p:cNvPr id="12" name="Group 11">
+              <a:extLst>
+                <a:ext uri="{FF2B5EF4-FFF2-40B4-BE49-F238E27FC236}">
+                  <a16:creationId xmlns:a16="http://schemas.microsoft.com/office/drawing/2014/main" id="{8F26B5C1-15E8-C5D2-48F0-6016E809AA13}"/>
+                </a:ext>
+              </a:extLst>
+            </p:cNvPr>
+            <p:cNvGrpSpPr/>
+            <p:nvPr/>
+          </p:nvGrpSpPr>
+          <p:grpSpPr>
+            <a:xfrm>
+              <a:off x="1156636" y="756138"/>
+              <a:ext cx="10208050" cy="5345723"/>
+              <a:chOff x="1156636" y="756138"/>
+              <a:chExt cx="10208050" cy="5345723"/>
+            </a:xfrm>
+          </p:grpSpPr>
+          <p:pic>
+            <p:nvPicPr>
+              <p:cNvPr id="3" name="Picture 2">
+                <a:extLst>
+                  <a:ext uri="{FF2B5EF4-FFF2-40B4-BE49-F238E27FC236}">
+                    <a16:creationId xmlns:a16="http://schemas.microsoft.com/office/drawing/2014/main" id="{B2B7DF96-7E2A-C2E9-22C9-7154B8CB6A13}"/>
+                  </a:ext>
+                </a:extLst>
+              </p:cNvPr>
+              <p:cNvPicPr>
+                <a:picLocks noChangeAspect="1"/>
+              </p:cNvPicPr>
+              <p:nvPr/>
+            </p:nvPicPr>
+            <p:blipFill>
+              <a:blip r:embed="rId2">
+                <a:extLst>
+                  <a:ext uri="{28A0092B-C50C-407E-A947-70E740481C1C}">
+                    <a14:useLocalDpi xmlns:a14="http://schemas.microsoft.com/office/drawing/2010/main" val="0"/>
+                  </a:ext>
+                </a:extLst>
+              </a:blip>
+              <a:srcRect l="14047" r="10714"/>
+              <a:stretch>
+                <a:fillRect/>
+              </a:stretch>
+            </p:blipFill>
+            <p:spPr>
+              <a:xfrm>
+                <a:off x="1712686" y="756138"/>
+                <a:ext cx="9173028" cy="5345723"/>
+              </a:xfrm>
+              <a:prstGeom prst="rect">
+                <a:avLst/>
+              </a:prstGeom>
+            </p:spPr>
+          </p:pic>
+          <p:sp>
+            <p:nvSpPr>
+              <p:cNvPr id="4" name="TextBox 3">
+                <a:extLst>
+                  <a:ext uri="{FF2B5EF4-FFF2-40B4-BE49-F238E27FC236}">
+                    <a16:creationId xmlns:a16="http://schemas.microsoft.com/office/drawing/2014/main" id="{AD620F21-828F-AE4C-2B26-FB16AAE470EC}"/>
+                  </a:ext>
+                </a:extLst>
+              </p:cNvPr>
+              <p:cNvSpPr txBox="1"/>
+              <p:nvPr/>
+            </p:nvSpPr>
+            <p:spPr>
+              <a:xfrm>
+                <a:off x="7561943" y="1045029"/>
+                <a:ext cx="1527200" cy="400110"/>
+              </a:xfrm>
+              <a:prstGeom prst="rect">
+                <a:avLst/>
+              </a:prstGeom>
+              <a:solidFill>
+                <a:schemeClr val="bg1"/>
+              </a:solidFill>
+            </p:spPr>
+            <p:txBody>
+              <a:bodyPr wrap="square" rtlCol="0">
+                <a:spAutoFit/>
+              </a:bodyPr>
+              <a:lstStyle/>
+              <a:p>
+                <a:pPr algn="ctr"/>
+                <a:r>
+                  <a:rPr lang="pt-BR" sz="2000" b="1" dirty="0"/>
+                  <a:t>Espessura</a:t>
+                </a:r>
+                <a:endParaRPr lang="en-GB" sz="2000" b="1" dirty="0"/>
+              </a:p>
+            </p:txBody>
+          </p:sp>
+          <p:sp>
+            <p:nvSpPr>
+              <p:cNvPr id="5" name="TextBox 4">
+                <a:extLst>
+                  <a:ext uri="{FF2B5EF4-FFF2-40B4-BE49-F238E27FC236}">
+                    <a16:creationId xmlns:a16="http://schemas.microsoft.com/office/drawing/2014/main" id="{725FC484-7F21-88D9-07D5-800DCFD54D82}"/>
+                  </a:ext>
+                </a:extLst>
+              </p:cNvPr>
+              <p:cNvSpPr txBox="1"/>
+              <p:nvPr/>
+            </p:nvSpPr>
+            <p:spPr>
+              <a:xfrm>
+                <a:off x="10022114" y="2880601"/>
+                <a:ext cx="1342572" cy="707886"/>
+              </a:xfrm>
+              <a:prstGeom prst="rect">
+                <a:avLst/>
+              </a:prstGeom>
+              <a:solidFill>
+                <a:schemeClr val="bg1"/>
+              </a:solidFill>
+            </p:spPr>
+            <p:txBody>
+              <a:bodyPr wrap="square" rtlCol="0">
+                <a:spAutoFit/>
+              </a:bodyPr>
+              <a:lstStyle/>
+              <a:p>
+                <a:pPr algn="ctr"/>
+                <a:r>
+                  <a:rPr lang="pt-BR" sz="2000" b="1" dirty="0"/>
+                  <a:t>Ângulo de Hélice</a:t>
+                </a:r>
+                <a:endParaRPr lang="en-GB" sz="2000" b="1" dirty="0"/>
+              </a:p>
+            </p:txBody>
+          </p:sp>
+          <p:sp>
+            <p:nvSpPr>
+              <p:cNvPr id="6" name="TextBox 5">
+                <a:extLst>
+                  <a:ext uri="{FF2B5EF4-FFF2-40B4-BE49-F238E27FC236}">
+                    <a16:creationId xmlns:a16="http://schemas.microsoft.com/office/drawing/2014/main" id="{AB80541A-FE1D-EBE9-945C-7C8A347339A4}"/>
+                  </a:ext>
+                </a:extLst>
+              </p:cNvPr>
+              <p:cNvSpPr txBox="1"/>
+              <p:nvPr/>
+            </p:nvSpPr>
+            <p:spPr>
+              <a:xfrm>
+                <a:off x="9739086" y="3278086"/>
+                <a:ext cx="508000" cy="461665"/>
+              </a:xfrm>
+              <a:prstGeom prst="rect">
+                <a:avLst/>
+              </a:prstGeom>
+              <a:noFill/>
+            </p:spPr>
+            <p:txBody>
+              <a:bodyPr wrap="square" rtlCol="0">
+                <a:spAutoFit/>
+              </a:bodyPr>
+              <a:lstStyle/>
+              <a:p>
+                <a:pPr algn="ctr"/>
+                <a:r>
+                  <a:rPr lang="pt-BR" sz="2400" b="1" dirty="0"/>
+                  <a:t>h</a:t>
+                </a:r>
+                <a:endParaRPr lang="en-GB" sz="2400" b="1" dirty="0"/>
+              </a:p>
+            </p:txBody>
+          </p:sp>
+          <p:sp>
+            <p:nvSpPr>
+              <p:cNvPr id="7" name="TextBox 6">
+                <a:extLst>
+                  <a:ext uri="{FF2B5EF4-FFF2-40B4-BE49-F238E27FC236}">
+                    <a16:creationId xmlns:a16="http://schemas.microsoft.com/office/drawing/2014/main" id="{4AA6F059-90C8-720C-8A72-67F81B2B5C79}"/>
+                  </a:ext>
+                </a:extLst>
+              </p:cNvPr>
+              <p:cNvSpPr txBox="1"/>
+              <p:nvPr/>
+            </p:nvSpPr>
+            <p:spPr>
+              <a:xfrm>
+                <a:off x="4615543" y="2235200"/>
+                <a:ext cx="2039404" cy="369332"/>
+              </a:xfrm>
+              <a:prstGeom prst="rect">
+                <a:avLst/>
+              </a:prstGeom>
+              <a:solidFill>
+                <a:schemeClr val="bg1"/>
+              </a:solidFill>
+            </p:spPr>
+            <p:txBody>
+              <a:bodyPr wrap="none" rtlCol="0">
+                <a:spAutoFit/>
+              </a:bodyPr>
+              <a:lstStyle/>
+              <a:p>
+                <a:r>
+                  <a:rPr lang="pt-BR" dirty="0"/>
+                  <a:t>Diâmetro principal</a:t>
+                </a:r>
+                <a:endParaRPr lang="en-GB" dirty="0"/>
+              </a:p>
+            </p:txBody>
+          </p:sp>
+          <p:sp>
+            <p:nvSpPr>
+              <p:cNvPr id="8" name="TextBox 7">
+                <a:extLst>
+                  <a:ext uri="{FF2B5EF4-FFF2-40B4-BE49-F238E27FC236}">
+                    <a16:creationId xmlns:a16="http://schemas.microsoft.com/office/drawing/2014/main" id="{3271DE60-5683-7B15-5D2C-9C5835FA6D09}"/>
+                  </a:ext>
+                </a:extLst>
+              </p:cNvPr>
+              <p:cNvSpPr txBox="1"/>
+              <p:nvPr/>
+            </p:nvSpPr>
+            <p:spPr>
+              <a:xfrm>
+                <a:off x="5304972" y="4593772"/>
+                <a:ext cx="1649875" cy="369332"/>
+              </a:xfrm>
+              <a:prstGeom prst="rect">
+                <a:avLst/>
+              </a:prstGeom>
+              <a:solidFill>
+                <a:schemeClr val="bg1"/>
+              </a:solidFill>
+            </p:spPr>
+            <p:txBody>
+              <a:bodyPr wrap="none" rtlCol="0">
+                <a:spAutoFit/>
+              </a:bodyPr>
+              <a:lstStyle/>
+              <a:p>
+                <a:r>
+                  <a:rPr lang="pt-BR" dirty="0"/>
+                  <a:t>Diâmetro base</a:t>
+                </a:r>
+                <a:endParaRPr lang="en-GB" dirty="0"/>
+              </a:p>
+            </p:txBody>
+          </p:sp>
+          <p:sp>
+            <p:nvSpPr>
+              <p:cNvPr id="9" name="TextBox 8">
+                <a:extLst>
+                  <a:ext uri="{FF2B5EF4-FFF2-40B4-BE49-F238E27FC236}">
+                    <a16:creationId xmlns:a16="http://schemas.microsoft.com/office/drawing/2014/main" id="{F6FC1697-B703-D523-813B-9C5C038A1BEF}"/>
+                  </a:ext>
+                </a:extLst>
+              </p:cNvPr>
+              <p:cNvSpPr txBox="1"/>
+              <p:nvPr/>
+            </p:nvSpPr>
+            <p:spPr>
+              <a:xfrm>
+                <a:off x="1156636" y="3049878"/>
+                <a:ext cx="556050" cy="369332"/>
+              </a:xfrm>
+              <a:prstGeom prst="rect">
+                <a:avLst/>
+              </a:prstGeom>
+              <a:solidFill>
+                <a:schemeClr val="bg1"/>
+              </a:solidFill>
+            </p:spPr>
+            <p:txBody>
+              <a:bodyPr wrap="none" rtlCol="0">
+                <a:spAutoFit/>
+              </a:bodyPr>
+              <a:lstStyle/>
+              <a:p>
+                <a:r>
+                  <a:rPr lang="pt-BR" i="1" dirty="0"/>
+                  <a:t>LOA</a:t>
+                </a:r>
+                <a:endParaRPr lang="en-GB" i="1" dirty="0"/>
+              </a:p>
+            </p:txBody>
+          </p:sp>
+          <p:sp>
+            <p:nvSpPr>
+              <p:cNvPr id="10" name="TextBox 9">
+                <a:extLst>
+                  <a:ext uri="{FF2B5EF4-FFF2-40B4-BE49-F238E27FC236}">
+                    <a16:creationId xmlns:a16="http://schemas.microsoft.com/office/drawing/2014/main" id="{75FBFCE7-1394-8257-EC44-8DD829177690}"/>
+                  </a:ext>
+                </a:extLst>
+              </p:cNvPr>
+              <p:cNvSpPr txBox="1"/>
+              <p:nvPr/>
+            </p:nvSpPr>
+            <p:spPr>
+              <a:xfrm>
+                <a:off x="1712686" y="4666342"/>
+                <a:ext cx="636887" cy="369332"/>
+              </a:xfrm>
+              <a:prstGeom prst="rect">
+                <a:avLst/>
+              </a:prstGeom>
+              <a:solidFill>
+                <a:schemeClr val="bg1"/>
+              </a:solidFill>
+            </p:spPr>
+            <p:txBody>
+              <a:bodyPr wrap="square" rtlCol="0">
+                <a:spAutoFit/>
+              </a:bodyPr>
+              <a:lstStyle/>
+              <a:p>
+                <a:r>
+                  <a:rPr lang="pt-BR" i="1" dirty="0"/>
+                  <a:t>        </a:t>
+                </a:r>
+                <a:endParaRPr lang="en-GB" i="1" dirty="0"/>
+              </a:p>
+            </p:txBody>
+          </p:sp>
+          <p:sp>
+            <p:nvSpPr>
+              <p:cNvPr id="11" name="TextBox 10">
+                <a:extLst>
+                  <a:ext uri="{FF2B5EF4-FFF2-40B4-BE49-F238E27FC236}">
+                    <a16:creationId xmlns:a16="http://schemas.microsoft.com/office/drawing/2014/main" id="{143BCFBE-A597-2112-73EA-FB5FC16A9E0D}"/>
+                  </a:ext>
+                </a:extLst>
+              </p:cNvPr>
+              <p:cNvSpPr txBox="1"/>
+              <p:nvPr/>
+            </p:nvSpPr>
+            <p:spPr>
+              <a:xfrm>
+                <a:off x="6313714" y="3416585"/>
+                <a:ext cx="1016000" cy="646331"/>
+              </a:xfrm>
+              <a:prstGeom prst="rect">
+                <a:avLst/>
+              </a:prstGeom>
+              <a:solidFill>
+                <a:schemeClr val="bg1"/>
+              </a:solidFill>
+            </p:spPr>
+            <p:txBody>
+              <a:bodyPr wrap="square" rtlCol="0">
+                <a:spAutoFit/>
+              </a:bodyPr>
+              <a:lstStyle/>
+              <a:p>
+                <a:pPr algn="ctr"/>
+                <a:r>
+                  <a:rPr lang="pt-BR" dirty="0"/>
+                  <a:t>Eixo de Rotação</a:t>
+                </a:r>
+                <a:endParaRPr lang="en-GB" dirty="0"/>
+              </a:p>
+            </p:txBody>
+          </p:sp>
+        </p:grpSp>
+      </p:grpSp>
     </p:spTree>
     <p:extLst>
       <p:ext uri="{BB962C8B-B14F-4D97-AF65-F5344CB8AC3E}">
-        <p14:creationId xmlns:p14="http://schemas.microsoft.com/office/powerpoint/2010/main" val="2172550475"/>
+        <p14:creationId xmlns:p14="http://schemas.microsoft.com/office/powerpoint/2010/main" val="510817131"/>
       </p:ext>
     </p:extLst>
   </p:cSld>

--- a/DISSERTACAO/figuras/figures.pptx
+++ b/DISSERTACAO/figuras/figures.pptx
@@ -5,7 +5,7 @@
     <p:sldMasterId id="2147483648" r:id="rId1"/>
   </p:sldMasterIdLst>
   <p:notesMasterIdLst>
-    <p:notesMasterId r:id="rId9"/>
+    <p:notesMasterId r:id="rId10"/>
   </p:notesMasterIdLst>
   <p:sldIdLst>
     <p:sldId id="256" r:id="rId2"/>
@@ -15,6 +15,7 @@
     <p:sldId id="261" r:id="rId6"/>
     <p:sldId id="260" r:id="rId7"/>
     <p:sldId id="262" r:id="rId8"/>
+    <p:sldId id="263" r:id="rId9"/>
   </p:sldIdLst>
   <p:sldSz cx="12192000" cy="6858000"/>
   <p:notesSz cx="6858000" cy="9144000"/>
@@ -124,7 +125,7 @@
 <file path=ppt/revisionInfo.xml><?xml version="1.0" encoding="utf-8"?>
 <p1510:revInfo xmlns:a="http://schemas.openxmlformats.org/drawingml/2006/main" xmlns:r="http://schemas.openxmlformats.org/officeDocument/2006/relationships" xmlns:p1510="http://schemas.microsoft.com/office/powerpoint/2015/10/main">
   <p1510:revLst>
-    <p1510:client id="{E4BA911E-600C-4CB8-961E-BEA32BCB8A9D}" v="73" dt="2026-05-11T20:34:18.702"/>
+    <p1510:client id="{93B72BAE-AB54-495B-86A9-4541991303FD}" v="9" dt="2026-06-01T18:10:53.590"/>
   </p1510:revLst>
 </p1510:revInfo>
 </file>
@@ -133,8 +134,8 @@
 <pc:chgInfo xmlns:a="http://schemas.openxmlformats.org/drawingml/2006/main" xmlns:r="http://schemas.openxmlformats.org/officeDocument/2006/relationships" xmlns:ac="http://schemas.microsoft.com/office/drawing/2013/main/command" xmlns:pc="http://schemas.microsoft.com/office/powerpoint/2013/main/command">
   <pc:docChgLst>
     <pc:chgData name="Murillo Álvaro Borges de Sousa" userId="02386067-c46f-46e6-bf61-8f6a774af0e5" providerId="ADAL" clId="{73C3FE35-BF7E-418C-A7F8-FA0AB4F63A6B}"/>
-    <pc:docChg chg="undo custSel addSld modSld">
-      <pc:chgData name="Murillo Álvaro Borges de Sousa" userId="02386067-c46f-46e6-bf61-8f6a774af0e5" providerId="ADAL" clId="{73C3FE35-BF7E-418C-A7F8-FA0AB4F63A6B}" dt="2026-05-11T20:34:18.701" v="212" actId="164"/>
+    <pc:docChg chg="undo custSel addSld modSld sldOrd">
+      <pc:chgData name="Murillo Álvaro Borges de Sousa" userId="02386067-c46f-46e6-bf61-8f6a774af0e5" providerId="ADAL" clId="{73C3FE35-BF7E-418C-A7F8-FA0AB4F63A6B}" dt="2026-06-01T18:10:53.590" v="259" actId="164"/>
       <pc:docMkLst>
         <pc:docMk/>
       </pc:docMkLst>
@@ -144,22 +145,6 @@
           <pc:docMk/>
           <pc:sldMk cId="817646025" sldId="256"/>
         </pc:sldMkLst>
-        <pc:spChg chg="del">
-          <ac:chgData name="Murillo Álvaro Borges de Sousa" userId="02386067-c46f-46e6-bf61-8f6a774af0e5" providerId="ADAL" clId="{73C3FE35-BF7E-418C-A7F8-FA0AB4F63A6B}" dt="2026-05-11T18:50:27.489" v="1" actId="478"/>
-          <ac:spMkLst>
-            <pc:docMk/>
-            <pc:sldMk cId="817646025" sldId="256"/>
-            <ac:spMk id="2" creationId="{EBF6C91B-E1E2-364E-377E-D956AEB3A6A4}"/>
-          </ac:spMkLst>
-        </pc:spChg>
-        <pc:spChg chg="del">
-          <ac:chgData name="Murillo Álvaro Borges de Sousa" userId="02386067-c46f-46e6-bf61-8f6a774af0e5" providerId="ADAL" clId="{73C3FE35-BF7E-418C-A7F8-FA0AB4F63A6B}" dt="2026-05-11T18:50:27.489" v="1" actId="478"/>
-          <ac:spMkLst>
-            <pc:docMk/>
-            <pc:sldMk cId="817646025" sldId="256"/>
-            <ac:spMk id="3" creationId="{91098D57-10DF-6DCC-5C56-93444B738C3A}"/>
-          </ac:spMkLst>
-        </pc:spChg>
         <pc:spChg chg="mod topLvl">
           <ac:chgData name="Murillo Álvaro Borges de Sousa" userId="02386067-c46f-46e6-bf61-8f6a774af0e5" providerId="ADAL" clId="{73C3FE35-BF7E-418C-A7F8-FA0AB4F63A6B}" dt="2026-05-11T19:14:00.412" v="20" actId="165"/>
           <ac:spMkLst>
@@ -302,14 +287,6 @@
             <pc:docMk/>
             <pc:sldMk cId="817646025" sldId="256"/>
             <ac:spMk id="149" creationId="{5DB1E4AD-88AB-D2E3-DF0B-BD616732E35D}"/>
-          </ac:spMkLst>
-        </pc:spChg>
-        <pc:spChg chg="add del">
-          <ac:chgData name="Murillo Álvaro Borges de Sousa" userId="02386067-c46f-46e6-bf61-8f6a774af0e5" providerId="ADAL" clId="{73C3FE35-BF7E-418C-A7F8-FA0AB4F63A6B}" dt="2026-05-11T19:13:59.101" v="17" actId="11529"/>
-          <ac:spMkLst>
-            <pc:docMk/>
-            <pc:sldMk cId="817646025" sldId="256"/>
-            <ac:spMk id="156" creationId="{D3B17188-116D-16A9-B3A4-1CD035A5176F}"/>
           </ac:spMkLst>
         </pc:spChg>
         <pc:spChg chg="add mod ord">
@@ -557,22 +534,6 @@
             <ac:picMk id="7" creationId="{27297451-97A2-EADE-0111-5BD94C194E76}"/>
           </ac:picMkLst>
         </pc:picChg>
-        <pc:cxnChg chg="add del mod">
-          <ac:chgData name="Murillo Álvaro Borges de Sousa" userId="02386067-c46f-46e6-bf61-8f6a774af0e5" providerId="ADAL" clId="{73C3FE35-BF7E-418C-A7F8-FA0AB4F63A6B}" dt="2026-05-11T20:29:26.595" v="143" actId="478"/>
-          <ac:cxnSpMkLst>
-            <pc:docMk/>
-            <pc:sldMk cId="712012867" sldId="259"/>
-            <ac:cxnSpMk id="3" creationId="{FFAA85B4-3037-04D6-634A-50FD64371CE9}"/>
-          </ac:cxnSpMkLst>
-        </pc:cxnChg>
-        <pc:cxnChg chg="add del mod">
-          <ac:chgData name="Murillo Álvaro Borges de Sousa" userId="02386067-c46f-46e6-bf61-8f6a774af0e5" providerId="ADAL" clId="{73C3FE35-BF7E-418C-A7F8-FA0AB4F63A6B}" dt="2026-05-11T20:29:26.595" v="143" actId="478"/>
-          <ac:cxnSpMkLst>
-            <pc:docMk/>
-            <pc:sldMk cId="712012867" sldId="259"/>
-            <ac:cxnSpMk id="5" creationId="{F14B0C05-9794-85C3-F50C-A3EF248EB8C2}"/>
-          </ac:cxnSpMkLst>
-        </pc:cxnChg>
         <pc:cxnChg chg="add mod">
           <ac:chgData name="Murillo Álvaro Borges de Sousa" userId="02386067-c46f-46e6-bf61-8f6a774af0e5" providerId="ADAL" clId="{73C3FE35-BF7E-418C-A7F8-FA0AB4F63A6B}" dt="2026-05-11T20:34:18.701" v="212" actId="164"/>
           <ac:cxnSpMkLst>
@@ -597,6 +558,301 @@
             <ac:cxnSpMk id="26" creationId="{1A65F0D0-A3EB-53B5-5269-29D7C805881C}"/>
           </ac:cxnSpMkLst>
         </pc:cxnChg>
+      </pc:sldChg>
+      <pc:sldChg chg="addSp delSp modSp new mod ord">
+        <pc:chgData name="Murillo Álvaro Borges de Sousa" userId="02386067-c46f-46e6-bf61-8f6a774af0e5" providerId="ADAL" clId="{73C3FE35-BF7E-418C-A7F8-FA0AB4F63A6B}" dt="2026-06-01T18:10:53.590" v="259" actId="164"/>
+        <pc:sldMkLst>
+          <pc:docMk/>
+          <pc:sldMk cId="1834618103" sldId="263"/>
+        </pc:sldMkLst>
+        <pc:spChg chg="mod">
+          <ac:chgData name="Murillo Álvaro Borges de Sousa" userId="02386067-c46f-46e6-bf61-8f6a774af0e5" providerId="ADAL" clId="{73C3FE35-BF7E-418C-A7F8-FA0AB4F63A6B}" dt="2026-06-01T18:03:38.673" v="248" actId="164"/>
+          <ac:spMkLst>
+            <pc:docMk/>
+            <pc:sldMk cId="1834618103" sldId="263"/>
+            <ac:spMk id="4" creationId="{947B6668-CAEF-84E5-7B0C-C28530DEFD54}"/>
+          </ac:spMkLst>
+        </pc:spChg>
+        <pc:spChg chg="mod">
+          <ac:chgData name="Murillo Álvaro Borges de Sousa" userId="02386067-c46f-46e6-bf61-8f6a774af0e5" providerId="ADAL" clId="{73C3FE35-BF7E-418C-A7F8-FA0AB4F63A6B}" dt="2026-06-01T18:03:38.673" v="248" actId="164"/>
+          <ac:spMkLst>
+            <pc:docMk/>
+            <pc:sldMk cId="1834618103" sldId="263"/>
+            <ac:spMk id="5" creationId="{58F3A87D-60FA-6F4F-5D39-B6B21632440D}"/>
+          </ac:spMkLst>
+        </pc:spChg>
+        <pc:spChg chg="mod">
+          <ac:chgData name="Murillo Álvaro Borges de Sousa" userId="02386067-c46f-46e6-bf61-8f6a774af0e5" providerId="ADAL" clId="{73C3FE35-BF7E-418C-A7F8-FA0AB4F63A6B}" dt="2026-06-01T18:03:38.673" v="248" actId="164"/>
+          <ac:spMkLst>
+            <pc:docMk/>
+            <pc:sldMk cId="1834618103" sldId="263"/>
+            <ac:spMk id="6" creationId="{2983C37A-DAC4-4E5F-1E10-38A88F1A6EB5}"/>
+          </ac:spMkLst>
+        </pc:spChg>
+        <pc:spChg chg="mod">
+          <ac:chgData name="Murillo Álvaro Borges de Sousa" userId="02386067-c46f-46e6-bf61-8f6a774af0e5" providerId="ADAL" clId="{73C3FE35-BF7E-418C-A7F8-FA0AB4F63A6B}" dt="2026-06-01T18:03:38.673" v="248" actId="164"/>
+          <ac:spMkLst>
+            <pc:docMk/>
+            <pc:sldMk cId="1834618103" sldId="263"/>
+            <ac:spMk id="7" creationId="{FE88876A-03CD-3617-4066-A09B42AD5864}"/>
+          </ac:spMkLst>
+        </pc:spChg>
+        <pc:spChg chg="mod">
+          <ac:chgData name="Murillo Álvaro Borges de Sousa" userId="02386067-c46f-46e6-bf61-8f6a774af0e5" providerId="ADAL" clId="{73C3FE35-BF7E-418C-A7F8-FA0AB4F63A6B}" dt="2026-06-01T18:03:38.673" v="248" actId="164"/>
+          <ac:spMkLst>
+            <pc:docMk/>
+            <pc:sldMk cId="1834618103" sldId="263"/>
+            <ac:spMk id="8" creationId="{5095C891-2A26-13DB-1188-82B8DB26BCBA}"/>
+          </ac:spMkLst>
+        </pc:spChg>
+        <pc:spChg chg="mod">
+          <ac:chgData name="Murillo Álvaro Borges de Sousa" userId="02386067-c46f-46e6-bf61-8f6a774af0e5" providerId="ADAL" clId="{73C3FE35-BF7E-418C-A7F8-FA0AB4F63A6B}" dt="2026-06-01T18:10:22.033" v="250" actId="165"/>
+          <ac:spMkLst>
+            <pc:docMk/>
+            <pc:sldMk cId="1834618103" sldId="263"/>
+            <ac:spMk id="16" creationId="{BFA4B31B-5F8F-1736-4563-EDD5F7C09809}"/>
+          </ac:spMkLst>
+        </pc:spChg>
+        <pc:spChg chg="mod">
+          <ac:chgData name="Murillo Álvaro Borges de Sousa" userId="02386067-c46f-46e6-bf61-8f6a774af0e5" providerId="ADAL" clId="{73C3FE35-BF7E-418C-A7F8-FA0AB4F63A6B}" dt="2026-06-01T18:10:22.033" v="250" actId="165"/>
+          <ac:spMkLst>
+            <pc:docMk/>
+            <pc:sldMk cId="1834618103" sldId="263"/>
+            <ac:spMk id="27" creationId="{13C1F253-17DD-9889-45D5-C26BC3094872}"/>
+          </ac:spMkLst>
+        </pc:spChg>
+        <pc:spChg chg="mod">
+          <ac:chgData name="Murillo Álvaro Borges de Sousa" userId="02386067-c46f-46e6-bf61-8f6a774af0e5" providerId="ADAL" clId="{73C3FE35-BF7E-418C-A7F8-FA0AB4F63A6B}" dt="2026-06-01T18:10:22.033" v="250" actId="165"/>
+          <ac:spMkLst>
+            <pc:docMk/>
+            <pc:sldMk cId="1834618103" sldId="263"/>
+            <ac:spMk id="31" creationId="{99655463-26CC-24CE-0926-671569A32E84}"/>
+          </ac:spMkLst>
+        </pc:spChg>
+        <pc:spChg chg="mod">
+          <ac:chgData name="Murillo Álvaro Borges de Sousa" userId="02386067-c46f-46e6-bf61-8f6a774af0e5" providerId="ADAL" clId="{73C3FE35-BF7E-418C-A7F8-FA0AB4F63A6B}" dt="2026-06-01T18:03:30.031" v="247" actId="164"/>
+          <ac:spMkLst>
+            <pc:docMk/>
+            <pc:sldMk cId="1834618103" sldId="263"/>
+            <ac:spMk id="36" creationId="{F640234E-0398-1342-0734-87669D5860F6}"/>
+          </ac:spMkLst>
+        </pc:spChg>
+        <pc:spChg chg="mod">
+          <ac:chgData name="Murillo Álvaro Borges de Sousa" userId="02386067-c46f-46e6-bf61-8f6a774af0e5" providerId="ADAL" clId="{73C3FE35-BF7E-418C-A7F8-FA0AB4F63A6B}" dt="2026-06-01T18:03:30.031" v="247" actId="164"/>
+          <ac:spMkLst>
+            <pc:docMk/>
+            <pc:sldMk cId="1834618103" sldId="263"/>
+            <ac:spMk id="37" creationId="{7EBE36D6-B11E-E2D4-ECC1-0032655DA74A}"/>
+          </ac:spMkLst>
+        </pc:spChg>
+        <pc:spChg chg="mod topLvl">
+          <ac:chgData name="Murillo Álvaro Borges de Sousa" userId="02386067-c46f-46e6-bf61-8f6a774af0e5" providerId="ADAL" clId="{73C3FE35-BF7E-418C-A7F8-FA0AB4F63A6B}" dt="2026-06-01T18:10:22.033" v="250" actId="165"/>
+          <ac:spMkLst>
+            <pc:docMk/>
+            <pc:sldMk cId="1834618103" sldId="263"/>
+            <ac:spMk id="38" creationId="{05841053-B5D1-63E1-99D7-4E46DA195B2E}"/>
+          </ac:spMkLst>
+        </pc:spChg>
+        <pc:spChg chg="mod">
+          <ac:chgData name="Murillo Álvaro Borges de Sousa" userId="02386067-c46f-46e6-bf61-8f6a774af0e5" providerId="ADAL" clId="{73C3FE35-BF7E-418C-A7F8-FA0AB4F63A6B}" dt="2026-06-01T18:03:30.031" v="247" actId="164"/>
+          <ac:spMkLst>
+            <pc:docMk/>
+            <pc:sldMk cId="1834618103" sldId="263"/>
+            <ac:spMk id="39" creationId="{C7963248-DE4E-B646-3C69-B163B611BA07}"/>
+          </ac:spMkLst>
+        </pc:spChg>
+        <pc:spChg chg="mod topLvl">
+          <ac:chgData name="Murillo Álvaro Borges de Sousa" userId="02386067-c46f-46e6-bf61-8f6a774af0e5" providerId="ADAL" clId="{73C3FE35-BF7E-418C-A7F8-FA0AB4F63A6B}" dt="2026-06-01T18:10:22.033" v="250" actId="165"/>
+          <ac:spMkLst>
+            <pc:docMk/>
+            <pc:sldMk cId="1834618103" sldId="263"/>
+            <ac:spMk id="40" creationId="{556C9E57-4041-FCFF-37A7-3AF84C0A1602}"/>
+          </ac:spMkLst>
+        </pc:spChg>
+        <pc:spChg chg="mod">
+          <ac:chgData name="Murillo Álvaro Borges de Sousa" userId="02386067-c46f-46e6-bf61-8f6a774af0e5" providerId="ADAL" clId="{73C3FE35-BF7E-418C-A7F8-FA0AB4F63A6B}" dt="2026-06-01T17:56:33.335" v="231" actId="208"/>
+          <ac:spMkLst>
+            <pc:docMk/>
+            <pc:sldMk cId="1834618103" sldId="263"/>
+            <ac:spMk id="42" creationId="{046B6F47-DA82-7DD6-0E13-CF12C5F51CA5}"/>
+          </ac:spMkLst>
+        </pc:spChg>
+        <pc:spChg chg="mod">
+          <ac:chgData name="Murillo Álvaro Borges de Sousa" userId="02386067-c46f-46e6-bf61-8f6a774af0e5" providerId="ADAL" clId="{73C3FE35-BF7E-418C-A7F8-FA0AB4F63A6B}" dt="2026-06-01T17:56:33.335" v="231" actId="208"/>
+          <ac:spMkLst>
+            <pc:docMk/>
+            <pc:sldMk cId="1834618103" sldId="263"/>
+            <ac:spMk id="43" creationId="{7DC8D8D2-96AA-7DD0-7AEE-C33FB2A88FA8}"/>
+          </ac:spMkLst>
+        </pc:spChg>
+        <pc:spChg chg="mod">
+          <ac:chgData name="Murillo Álvaro Borges de Sousa" userId="02386067-c46f-46e6-bf61-8f6a774af0e5" providerId="ADAL" clId="{73C3FE35-BF7E-418C-A7F8-FA0AB4F63A6B}" dt="2026-06-01T17:56:33.335" v="231" actId="208"/>
+          <ac:spMkLst>
+            <pc:docMk/>
+            <pc:sldMk cId="1834618103" sldId="263"/>
+            <ac:spMk id="45" creationId="{71339A56-93E1-765C-C2D1-EBFB56920F55}"/>
+          </ac:spMkLst>
+        </pc:spChg>
+        <pc:spChg chg="mod">
+          <ac:chgData name="Murillo Álvaro Borges de Sousa" userId="02386067-c46f-46e6-bf61-8f6a774af0e5" providerId="ADAL" clId="{73C3FE35-BF7E-418C-A7F8-FA0AB4F63A6B}" dt="2026-06-01T18:10:22.033" v="250" actId="165"/>
+          <ac:spMkLst>
+            <pc:docMk/>
+            <pc:sldMk cId="1834618103" sldId="263"/>
+            <ac:spMk id="46" creationId="{6EBDDC76-53D4-1104-2C40-B2062D8FAF8D}"/>
+          </ac:spMkLst>
+        </pc:spChg>
+        <pc:spChg chg="mod">
+          <ac:chgData name="Murillo Álvaro Borges de Sousa" userId="02386067-c46f-46e6-bf61-8f6a774af0e5" providerId="ADAL" clId="{73C3FE35-BF7E-418C-A7F8-FA0AB4F63A6B}" dt="2026-06-01T17:56:33.335" v="231" actId="208"/>
+          <ac:spMkLst>
+            <pc:docMk/>
+            <pc:sldMk cId="1834618103" sldId="263"/>
+            <ac:spMk id="47" creationId="{2A8C70C0-AD08-079D-F06D-C2FB7D90B7D3}"/>
+          </ac:spMkLst>
+        </pc:spChg>
+        <pc:spChg chg="mod">
+          <ac:chgData name="Murillo Álvaro Borges de Sousa" userId="02386067-c46f-46e6-bf61-8f6a774af0e5" providerId="ADAL" clId="{73C3FE35-BF7E-418C-A7F8-FA0AB4F63A6B}" dt="2026-06-01T17:56:33.335" v="231" actId="208"/>
+          <ac:spMkLst>
+            <pc:docMk/>
+            <pc:sldMk cId="1834618103" sldId="263"/>
+            <ac:spMk id="49" creationId="{B7D1909B-D66F-C89D-4BAC-DD4F1ED21EB6}"/>
+          </ac:spMkLst>
+        </pc:spChg>
+        <pc:spChg chg="mod">
+          <ac:chgData name="Murillo Álvaro Borges de Sousa" userId="02386067-c46f-46e6-bf61-8f6a774af0e5" providerId="ADAL" clId="{73C3FE35-BF7E-418C-A7F8-FA0AB4F63A6B}" dt="2026-06-01T17:56:33.335" v="231" actId="208"/>
+          <ac:spMkLst>
+            <pc:docMk/>
+            <pc:sldMk cId="1834618103" sldId="263"/>
+            <ac:spMk id="50" creationId="{520E8935-AA66-1B0B-1B31-557CB696D708}"/>
+          </ac:spMkLst>
+        </pc:spChg>
+        <pc:spChg chg="mod">
+          <ac:chgData name="Murillo Álvaro Borges de Sousa" userId="02386067-c46f-46e6-bf61-8f6a774af0e5" providerId="ADAL" clId="{73C3FE35-BF7E-418C-A7F8-FA0AB4F63A6B}" dt="2026-06-01T18:10:22.033" v="250" actId="165"/>
+          <ac:spMkLst>
+            <pc:docMk/>
+            <pc:sldMk cId="1834618103" sldId="263"/>
+            <ac:spMk id="53" creationId="{E09CF5EE-8EE2-0971-9A00-A420D77A2A21}"/>
+          </ac:spMkLst>
+        </pc:spChg>
+        <pc:spChg chg="mod">
+          <ac:chgData name="Murillo Álvaro Borges de Sousa" userId="02386067-c46f-46e6-bf61-8f6a774af0e5" providerId="ADAL" clId="{73C3FE35-BF7E-418C-A7F8-FA0AB4F63A6B}" dt="2026-06-01T17:56:33.335" v="231" actId="208"/>
+          <ac:spMkLst>
+            <pc:docMk/>
+            <pc:sldMk cId="1834618103" sldId="263"/>
+            <ac:spMk id="59" creationId="{A06382A5-176E-15DB-05D4-BCF1EA260829}"/>
+          </ac:spMkLst>
+        </pc:spChg>
+        <pc:spChg chg="mod">
+          <ac:chgData name="Murillo Álvaro Borges de Sousa" userId="02386067-c46f-46e6-bf61-8f6a774af0e5" providerId="ADAL" clId="{73C3FE35-BF7E-418C-A7F8-FA0AB4F63A6B}" dt="2026-06-01T18:10:22.033" v="250" actId="165"/>
+          <ac:spMkLst>
+            <pc:docMk/>
+            <pc:sldMk cId="1834618103" sldId="263"/>
+            <ac:spMk id="60" creationId="{FD2D6E26-5878-C977-2F63-40B04B05282B}"/>
+          </ac:spMkLst>
+        </pc:spChg>
+        <pc:spChg chg="mod">
+          <ac:chgData name="Murillo Álvaro Borges de Sousa" userId="02386067-c46f-46e6-bf61-8f6a774af0e5" providerId="ADAL" clId="{73C3FE35-BF7E-418C-A7F8-FA0AB4F63A6B}" dt="2026-06-01T18:10:22.033" v="250" actId="165"/>
+          <ac:spMkLst>
+            <pc:docMk/>
+            <pc:sldMk cId="1834618103" sldId="263"/>
+            <ac:spMk id="63" creationId="{E564DB17-07E3-8072-6BE8-E7DD912EC467}"/>
+          </ac:spMkLst>
+        </pc:spChg>
+        <pc:spChg chg="mod">
+          <ac:chgData name="Murillo Álvaro Borges de Sousa" userId="02386067-c46f-46e6-bf61-8f6a774af0e5" providerId="ADAL" clId="{73C3FE35-BF7E-418C-A7F8-FA0AB4F63A6B}" dt="2026-06-01T18:10:22.033" v="250" actId="165"/>
+          <ac:spMkLst>
+            <pc:docMk/>
+            <pc:sldMk cId="1834618103" sldId="263"/>
+            <ac:spMk id="64" creationId="{0FD36958-D4DC-FFC1-65B6-5A2650DE4583}"/>
+          </ac:spMkLst>
+        </pc:spChg>
+        <pc:spChg chg="mod">
+          <ac:chgData name="Murillo Álvaro Borges de Sousa" userId="02386067-c46f-46e6-bf61-8f6a774af0e5" providerId="ADAL" clId="{73C3FE35-BF7E-418C-A7F8-FA0AB4F63A6B}" dt="2026-06-01T17:56:33.335" v="231" actId="208"/>
+          <ac:spMkLst>
+            <pc:docMk/>
+            <pc:sldMk cId="1834618103" sldId="263"/>
+            <ac:spMk id="65" creationId="{E7684FD0-4D75-F821-F3B2-AA0915DF9C17}"/>
+          </ac:spMkLst>
+        </pc:spChg>
+        <pc:spChg chg="add mod ord">
+          <ac:chgData name="Murillo Álvaro Borges de Sousa" userId="02386067-c46f-46e6-bf61-8f6a774af0e5" providerId="ADAL" clId="{73C3FE35-BF7E-418C-A7F8-FA0AB4F63A6B}" dt="2026-06-01T18:10:53.590" v="259" actId="164"/>
+          <ac:spMkLst>
+            <pc:docMk/>
+            <pc:sldMk cId="1834618103" sldId="263"/>
+            <ac:spMk id="66" creationId="{60E9778A-3761-C461-64F3-79642AA7D427}"/>
+          </ac:spMkLst>
+        </pc:spChg>
+        <pc:grpChg chg="mod">
+          <ac:chgData name="Murillo Álvaro Borges de Sousa" userId="02386067-c46f-46e6-bf61-8f6a774af0e5" providerId="ADAL" clId="{73C3FE35-BF7E-418C-A7F8-FA0AB4F63A6B}" dt="2026-06-01T17:59:08.477" v="243" actId="164"/>
+          <ac:grpSpMkLst>
+            <pc:docMk/>
+            <pc:sldMk cId="1834618103" sldId="263"/>
+            <ac:grpSpMk id="2" creationId="{06E81DF3-7D76-29AB-97CF-A8B53F2D8ED0}"/>
+          </ac:grpSpMkLst>
+        </pc:grpChg>
+        <pc:grpChg chg="mod">
+          <ac:chgData name="Murillo Álvaro Borges de Sousa" userId="02386067-c46f-46e6-bf61-8f6a774af0e5" providerId="ADAL" clId="{73C3FE35-BF7E-418C-A7F8-FA0AB4F63A6B}" dt="2026-06-01T18:03:38.673" v="248" actId="164"/>
+          <ac:grpSpMkLst>
+            <pc:docMk/>
+            <pc:sldMk cId="1834618103" sldId="263"/>
+            <ac:grpSpMk id="3" creationId="{5E4E3FC1-3E88-7A56-F45C-61B2053D3CBB}"/>
+          </ac:grpSpMkLst>
+        </pc:grpChg>
+        <pc:grpChg chg="mod">
+          <ac:chgData name="Murillo Álvaro Borges de Sousa" userId="02386067-c46f-46e6-bf61-8f6a774af0e5" providerId="ADAL" clId="{73C3FE35-BF7E-418C-A7F8-FA0AB4F63A6B}" dt="2026-06-01T17:59:08.477" v="243" actId="164"/>
+          <ac:grpSpMkLst>
+            <pc:docMk/>
+            <pc:sldMk cId="1834618103" sldId="263"/>
+            <ac:grpSpMk id="34" creationId="{BF02EA0B-FC7B-8F43-7233-A7650864F8E7}"/>
+          </ac:grpSpMkLst>
+        </pc:grpChg>
+        <pc:grpChg chg="mod">
+          <ac:chgData name="Murillo Álvaro Borges de Sousa" userId="02386067-c46f-46e6-bf61-8f6a774af0e5" providerId="ADAL" clId="{73C3FE35-BF7E-418C-A7F8-FA0AB4F63A6B}" dt="2026-06-01T18:03:30.031" v="247" actId="164"/>
+          <ac:grpSpMkLst>
+            <pc:docMk/>
+            <pc:sldMk cId="1834618103" sldId="263"/>
+            <ac:grpSpMk id="35" creationId="{91E6B644-1474-DD30-D9A3-246E2A799F9B}"/>
+          </ac:grpSpMkLst>
+        </pc:grpChg>
+        <pc:grpChg chg="add mod">
+          <ac:chgData name="Murillo Álvaro Borges de Sousa" userId="02386067-c46f-46e6-bf61-8f6a774af0e5" providerId="ADAL" clId="{73C3FE35-BF7E-418C-A7F8-FA0AB4F63A6B}" dt="2026-06-01T17:59:08.477" v="243" actId="164"/>
+          <ac:grpSpMkLst>
+            <pc:docMk/>
+            <pc:sldMk cId="1834618103" sldId="263"/>
+            <ac:grpSpMk id="67" creationId="{0784DB73-6013-98E4-FC95-B2D8BEF1FE2E}"/>
+          </ac:grpSpMkLst>
+        </pc:grpChg>
+        <pc:grpChg chg="add mod">
+          <ac:chgData name="Murillo Álvaro Borges de Sousa" userId="02386067-c46f-46e6-bf61-8f6a774af0e5" providerId="ADAL" clId="{73C3FE35-BF7E-418C-A7F8-FA0AB4F63A6B}" dt="2026-06-01T18:10:53.590" v="259" actId="164"/>
+          <ac:grpSpMkLst>
+            <pc:docMk/>
+            <pc:sldMk cId="1834618103" sldId="263"/>
+            <ac:grpSpMk id="68" creationId="{37B31BF7-5848-4BDC-7C4D-1E89E309FE34}"/>
+          </ac:grpSpMkLst>
+        </pc:grpChg>
+        <pc:grpChg chg="add mod">
+          <ac:chgData name="Murillo Álvaro Borges de Sousa" userId="02386067-c46f-46e6-bf61-8f6a774af0e5" providerId="ADAL" clId="{73C3FE35-BF7E-418C-A7F8-FA0AB4F63A6B}" dt="2026-06-01T18:10:53.590" v="259" actId="164"/>
+          <ac:grpSpMkLst>
+            <pc:docMk/>
+            <pc:sldMk cId="1834618103" sldId="263"/>
+            <ac:grpSpMk id="69" creationId="{94D82AB4-D7F7-3A71-B6AD-76DC93815991}"/>
+          </ac:grpSpMkLst>
+        </pc:grpChg>
+        <pc:grpChg chg="add mod">
+          <ac:chgData name="Murillo Álvaro Borges de Sousa" userId="02386067-c46f-46e6-bf61-8f6a774af0e5" providerId="ADAL" clId="{73C3FE35-BF7E-418C-A7F8-FA0AB4F63A6B}" dt="2026-06-01T18:03:47.628" v="249" actId="164"/>
+          <ac:grpSpMkLst>
+            <pc:docMk/>
+            <pc:sldMk cId="1834618103" sldId="263"/>
+            <ac:grpSpMk id="70" creationId="{1BAF1C5D-DD18-3276-45AB-A46DF417AD86}"/>
+          </ac:grpSpMkLst>
+        </pc:grpChg>
+        <pc:grpChg chg="add mod">
+          <ac:chgData name="Murillo Álvaro Borges de Sousa" userId="02386067-c46f-46e6-bf61-8f6a774af0e5" providerId="ADAL" clId="{73C3FE35-BF7E-418C-A7F8-FA0AB4F63A6B}" dt="2026-06-01T18:10:53.590" v="259" actId="164"/>
+          <ac:grpSpMkLst>
+            <pc:docMk/>
+            <pc:sldMk cId="1834618103" sldId="263"/>
+            <ac:grpSpMk id="71" creationId="{138673CF-4FE2-EFB5-9030-D864907BCDD5}"/>
+          </ac:grpSpMkLst>
+        </pc:grpChg>
       </pc:sldChg>
     </pc:docChg>
   </pc:docChgLst>
@@ -685,7 +941,7 @@
           <a:p>
             <a:fld id="{FFCE6A37-3420-40C1-9DE2-D7E9118C4CF6}" type="datetimeFigureOut">
               <a:rPr lang="pt-BR" smtClean="0"/>
-              <a:t>25/05/2026</a:t>
+              <a:t>01/06/2026</a:t>
             </a:fld>
             <a:endParaRPr lang="pt-BR"/>
           </a:p>
@@ -1186,7 +1442,7 @@
           <a:p>
             <a:fld id="{7C8BC570-9881-4DD1-A666-BFFC3ABED690}" type="datetimeFigureOut">
               <a:rPr lang="pt-BR" smtClean="0"/>
-              <a:t>25/05/2026</a:t>
+              <a:t>01/06/2026</a:t>
             </a:fld>
             <a:endParaRPr lang="pt-BR"/>
           </a:p>
@@ -1386,7 +1642,7 @@
           <a:p>
             <a:fld id="{7C8BC570-9881-4DD1-A666-BFFC3ABED690}" type="datetimeFigureOut">
               <a:rPr lang="pt-BR" smtClean="0"/>
-              <a:t>25/05/2026</a:t>
+              <a:t>01/06/2026</a:t>
             </a:fld>
             <a:endParaRPr lang="pt-BR"/>
           </a:p>
@@ -1596,7 +1852,7 @@
           <a:p>
             <a:fld id="{7C8BC570-9881-4DD1-A666-BFFC3ABED690}" type="datetimeFigureOut">
               <a:rPr lang="pt-BR" smtClean="0"/>
-              <a:t>25/05/2026</a:t>
+              <a:t>01/06/2026</a:t>
             </a:fld>
             <a:endParaRPr lang="pt-BR"/>
           </a:p>
@@ -1796,7 +2052,7 @@
           <a:p>
             <a:fld id="{7C8BC570-9881-4DD1-A666-BFFC3ABED690}" type="datetimeFigureOut">
               <a:rPr lang="pt-BR" smtClean="0"/>
-              <a:t>25/05/2026</a:t>
+              <a:t>01/06/2026</a:t>
             </a:fld>
             <a:endParaRPr lang="pt-BR"/>
           </a:p>
@@ -2072,7 +2328,7 @@
           <a:p>
             <a:fld id="{7C8BC570-9881-4DD1-A666-BFFC3ABED690}" type="datetimeFigureOut">
               <a:rPr lang="pt-BR" smtClean="0"/>
-              <a:t>25/05/2026</a:t>
+              <a:t>01/06/2026</a:t>
             </a:fld>
             <a:endParaRPr lang="pt-BR"/>
           </a:p>
@@ -2340,7 +2596,7 @@
           <a:p>
             <a:fld id="{7C8BC570-9881-4DD1-A666-BFFC3ABED690}" type="datetimeFigureOut">
               <a:rPr lang="pt-BR" smtClean="0"/>
-              <a:t>25/05/2026</a:t>
+              <a:t>01/06/2026</a:t>
             </a:fld>
             <a:endParaRPr lang="pt-BR"/>
           </a:p>
@@ -2755,7 +3011,7 @@
           <a:p>
             <a:fld id="{7C8BC570-9881-4DD1-A666-BFFC3ABED690}" type="datetimeFigureOut">
               <a:rPr lang="pt-BR" smtClean="0"/>
-              <a:t>25/05/2026</a:t>
+              <a:t>01/06/2026</a:t>
             </a:fld>
             <a:endParaRPr lang="pt-BR"/>
           </a:p>
@@ -2897,7 +3153,7 @@
           <a:p>
             <a:fld id="{7C8BC570-9881-4DD1-A666-BFFC3ABED690}" type="datetimeFigureOut">
               <a:rPr lang="pt-BR" smtClean="0"/>
-              <a:t>25/05/2026</a:t>
+              <a:t>01/06/2026</a:t>
             </a:fld>
             <a:endParaRPr lang="pt-BR"/>
           </a:p>
@@ -3010,7 +3266,7 @@
           <a:p>
             <a:fld id="{7C8BC570-9881-4DD1-A666-BFFC3ABED690}" type="datetimeFigureOut">
               <a:rPr lang="pt-BR" smtClean="0"/>
-              <a:t>25/05/2026</a:t>
+              <a:t>01/06/2026</a:t>
             </a:fld>
             <a:endParaRPr lang="pt-BR"/>
           </a:p>
@@ -3323,7 +3579,7 @@
           <a:p>
             <a:fld id="{7C8BC570-9881-4DD1-A666-BFFC3ABED690}" type="datetimeFigureOut">
               <a:rPr lang="pt-BR" smtClean="0"/>
-              <a:t>25/05/2026</a:t>
+              <a:t>01/06/2026</a:t>
             </a:fld>
             <a:endParaRPr lang="pt-BR"/>
           </a:p>
@@ -3612,7 +3868,7 @@
           <a:p>
             <a:fld id="{7C8BC570-9881-4DD1-A666-BFFC3ABED690}" type="datetimeFigureOut">
               <a:rPr lang="pt-BR" smtClean="0"/>
-              <a:t>25/05/2026</a:t>
+              <a:t>01/06/2026</a:t>
             </a:fld>
             <a:endParaRPr lang="pt-BR"/>
           </a:p>
@@ -3855,7 +4111,7 @@
           <a:p>
             <a:fld id="{7C8BC570-9881-4DD1-A666-BFFC3ABED690}" type="datetimeFigureOut">
               <a:rPr lang="pt-BR" smtClean="0"/>
-              <a:t>25/05/2026</a:t>
+              <a:t>01/06/2026</a:t>
             </a:fld>
             <a:endParaRPr lang="pt-BR"/>
           </a:p>
@@ -14034,6 +14290,3081 @@
 </p:sld>
 </file>
 
+<file path=ppt/slides/slide8.xml><?xml version="1.0" encoding="utf-8"?>
+<p:sld xmlns:a="http://schemas.openxmlformats.org/drawingml/2006/main" xmlns:r="http://schemas.openxmlformats.org/officeDocument/2006/relationships" xmlns:p="http://schemas.openxmlformats.org/presentationml/2006/main">
+  <p:cSld>
+    <p:spTree>
+      <p:nvGrpSpPr>
+        <p:cNvPr id="1" name=""/>
+        <p:cNvGrpSpPr/>
+        <p:nvPr/>
+      </p:nvGrpSpPr>
+      <p:grpSpPr>
+        <a:xfrm>
+          <a:off x="0" y="0"/>
+          <a:ext cx="0" cy="0"/>
+          <a:chOff x="0" y="0"/>
+          <a:chExt cx="0" cy="0"/>
+        </a:xfrm>
+      </p:grpSpPr>
+      <p:grpSp>
+        <p:nvGrpSpPr>
+          <p:cNvPr id="71" name="Group 70">
+            <a:extLst>
+              <a:ext uri="{FF2B5EF4-FFF2-40B4-BE49-F238E27FC236}">
+                <a16:creationId xmlns:a16="http://schemas.microsoft.com/office/drawing/2014/main" id="{138673CF-4FE2-EFB5-9030-D864907BCDD5}"/>
+              </a:ext>
+            </a:extLst>
+          </p:cNvPr>
+          <p:cNvGrpSpPr/>
+          <p:nvPr/>
+        </p:nvGrpSpPr>
+        <p:grpSpPr>
+          <a:xfrm>
+            <a:off x="609601" y="739971"/>
+            <a:ext cx="10796954" cy="5754614"/>
+            <a:chOff x="609601" y="739971"/>
+            <a:chExt cx="10796954" cy="5754614"/>
+          </a:xfrm>
+        </p:grpSpPr>
+        <p:sp>
+          <p:nvSpPr>
+            <p:cNvPr id="66" name="Rectangle 65">
+              <a:extLst>
+                <a:ext uri="{FF2B5EF4-FFF2-40B4-BE49-F238E27FC236}">
+                  <a16:creationId xmlns:a16="http://schemas.microsoft.com/office/drawing/2014/main" id="{60E9778A-3761-C461-64F3-79642AA7D427}"/>
+                </a:ext>
+              </a:extLst>
+            </p:cNvPr>
+            <p:cNvSpPr/>
+            <p:nvPr/>
+          </p:nvSpPr>
+          <p:spPr>
+            <a:xfrm>
+              <a:off x="609601" y="739971"/>
+              <a:ext cx="10796954" cy="5754614"/>
+            </a:xfrm>
+            <a:prstGeom prst="rect">
+              <a:avLst/>
+            </a:prstGeom>
+            <a:solidFill>
+              <a:schemeClr val="bg1"/>
+            </a:solidFill>
+            <a:ln>
+              <a:solidFill>
+                <a:schemeClr val="bg1"/>
+              </a:solidFill>
+            </a:ln>
+          </p:spPr>
+          <p:style>
+            <a:lnRef idx="2">
+              <a:schemeClr val="accent1">
+                <a:shade val="15000"/>
+              </a:schemeClr>
+            </a:lnRef>
+            <a:fillRef idx="1">
+              <a:schemeClr val="accent1"/>
+            </a:fillRef>
+            <a:effectRef idx="0">
+              <a:schemeClr val="accent1"/>
+            </a:effectRef>
+            <a:fontRef idx="minor">
+              <a:schemeClr val="lt1"/>
+            </a:fontRef>
+          </p:style>
+          <p:txBody>
+            <a:bodyPr rtlCol="0" anchor="ctr"/>
+            <a:lstStyle/>
+            <a:p>
+              <a:pPr algn="ctr"/>
+              <a:endParaRPr lang="pt-BR"/>
+            </a:p>
+          </p:txBody>
+        </p:sp>
+        <p:grpSp>
+          <p:nvGrpSpPr>
+            <p:cNvPr id="69" name="Group 68">
+              <a:extLst>
+                <a:ext uri="{FF2B5EF4-FFF2-40B4-BE49-F238E27FC236}">
+                  <a16:creationId xmlns:a16="http://schemas.microsoft.com/office/drawing/2014/main" id="{94D82AB4-D7F7-3A71-B6AD-76DC93815991}"/>
+                </a:ext>
+              </a:extLst>
+            </p:cNvPr>
+            <p:cNvGrpSpPr/>
+            <p:nvPr/>
+          </p:nvGrpSpPr>
+          <p:grpSpPr>
+            <a:xfrm>
+              <a:off x="892619" y="956448"/>
+              <a:ext cx="4734412" cy="5291122"/>
+              <a:chOff x="892619" y="956448"/>
+              <a:chExt cx="4734412" cy="5291122"/>
+            </a:xfrm>
+          </p:grpSpPr>
+          <p:grpSp>
+            <p:nvGrpSpPr>
+              <p:cNvPr id="3" name="Group 2">
+                <a:extLst>
+                  <a:ext uri="{FF2B5EF4-FFF2-40B4-BE49-F238E27FC236}">
+                    <a16:creationId xmlns:a16="http://schemas.microsoft.com/office/drawing/2014/main" id="{5E4E3FC1-3E88-7A56-F45C-61B2053D3CBB}"/>
+                  </a:ext>
+                </a:extLst>
+              </p:cNvPr>
+              <p:cNvGrpSpPr/>
+              <p:nvPr/>
+            </p:nvGrpSpPr>
+            <p:grpSpPr>
+              <a:xfrm>
+                <a:off x="892619" y="1640309"/>
+                <a:ext cx="4734412" cy="4607261"/>
+                <a:chOff x="3571792" y="658339"/>
+                <a:chExt cx="4734412" cy="4607261"/>
+              </a:xfrm>
+            </p:grpSpPr>
+            <p:sp>
+              <p:nvSpPr>
+                <p:cNvPr id="9" name="Oval 8">
+                  <a:extLst>
+                    <a:ext uri="{FF2B5EF4-FFF2-40B4-BE49-F238E27FC236}">
+                      <a16:creationId xmlns:a16="http://schemas.microsoft.com/office/drawing/2014/main" id="{BDD20980-8CE0-60B8-90EC-404A2B72BBB3}"/>
+                    </a:ext>
+                  </a:extLst>
+                </p:cNvPr>
+                <p:cNvSpPr/>
+                <p:nvPr/>
+              </p:nvSpPr>
+              <p:spPr>
+                <a:xfrm>
+                  <a:off x="5578998" y="805269"/>
+                  <a:ext cx="720000" cy="720000"/>
+                </a:xfrm>
+                <a:prstGeom prst="ellipse">
+                  <a:avLst/>
+                </a:prstGeom>
+                <a:solidFill>
+                  <a:schemeClr val="bg1">
+                    <a:lumMod val="65000"/>
+                  </a:schemeClr>
+                </a:solidFill>
+              </p:spPr>
+              <p:style>
+                <a:lnRef idx="2">
+                  <a:schemeClr val="accent1">
+                    <a:shade val="15000"/>
+                  </a:schemeClr>
+                </a:lnRef>
+                <a:fillRef idx="1">
+                  <a:schemeClr val="accent1"/>
+                </a:fillRef>
+                <a:effectRef idx="0">
+                  <a:schemeClr val="accent1"/>
+                </a:effectRef>
+                <a:fontRef idx="minor">
+                  <a:schemeClr val="lt1"/>
+                </a:fontRef>
+              </p:style>
+              <p:txBody>
+                <a:bodyPr rtlCol="0" anchor="ctr"/>
+                <a:lstStyle/>
+                <a:p>
+                  <a:pPr algn="ctr"/>
+                  <a:endParaRPr lang="pt-BR"/>
+                </a:p>
+              </p:txBody>
+            </p:sp>
+            <p:sp>
+              <p:nvSpPr>
+                <p:cNvPr id="10" name="Oval 9">
+                  <a:extLst>
+                    <a:ext uri="{FF2B5EF4-FFF2-40B4-BE49-F238E27FC236}">
+                      <a16:creationId xmlns:a16="http://schemas.microsoft.com/office/drawing/2014/main" id="{805139F0-2790-552B-1C65-898D4264C8A1}"/>
+                    </a:ext>
+                  </a:extLst>
+                </p:cNvPr>
+                <p:cNvSpPr/>
+                <p:nvPr/>
+              </p:nvSpPr>
+              <p:spPr>
+                <a:xfrm>
+                  <a:off x="5578998" y="4416059"/>
+                  <a:ext cx="720000" cy="720000"/>
+                </a:xfrm>
+                <a:prstGeom prst="ellipse">
+                  <a:avLst/>
+                </a:prstGeom>
+                <a:solidFill>
+                  <a:schemeClr val="bg1">
+                    <a:lumMod val="65000"/>
+                  </a:schemeClr>
+                </a:solidFill>
+              </p:spPr>
+              <p:style>
+                <a:lnRef idx="2">
+                  <a:schemeClr val="accent1">
+                    <a:shade val="15000"/>
+                  </a:schemeClr>
+                </a:lnRef>
+                <a:fillRef idx="1">
+                  <a:schemeClr val="accent1"/>
+                </a:fillRef>
+                <a:effectRef idx="0">
+                  <a:schemeClr val="accent1"/>
+                </a:effectRef>
+                <a:fontRef idx="minor">
+                  <a:schemeClr val="lt1"/>
+                </a:fontRef>
+              </p:style>
+              <p:txBody>
+                <a:bodyPr rtlCol="0" anchor="ctr"/>
+                <a:lstStyle/>
+                <a:p>
+                  <a:pPr algn="ctr"/>
+                  <a:endParaRPr lang="pt-BR"/>
+                </a:p>
+              </p:txBody>
+            </p:sp>
+            <p:sp>
+              <p:nvSpPr>
+                <p:cNvPr id="11" name="Oval 10">
+                  <a:extLst>
+                    <a:ext uri="{FF2B5EF4-FFF2-40B4-BE49-F238E27FC236}">
+                      <a16:creationId xmlns:a16="http://schemas.microsoft.com/office/drawing/2014/main" id="{DAA5DE70-AE01-9051-52FD-E405BFE4A1FD}"/>
+                    </a:ext>
+                  </a:extLst>
+                </p:cNvPr>
+                <p:cNvSpPr/>
+                <p:nvPr/>
+              </p:nvSpPr>
+              <p:spPr>
+                <a:xfrm>
+                  <a:off x="3781064" y="2605269"/>
+                  <a:ext cx="720000" cy="720000"/>
+                </a:xfrm>
+                <a:prstGeom prst="ellipse">
+                  <a:avLst/>
+                </a:prstGeom>
+                <a:solidFill>
+                  <a:schemeClr val="bg1">
+                    <a:lumMod val="65000"/>
+                  </a:schemeClr>
+                </a:solidFill>
+              </p:spPr>
+              <p:style>
+                <a:lnRef idx="2">
+                  <a:schemeClr val="accent1">
+                    <a:shade val="15000"/>
+                  </a:schemeClr>
+                </a:lnRef>
+                <a:fillRef idx="1">
+                  <a:schemeClr val="accent1"/>
+                </a:fillRef>
+                <a:effectRef idx="0">
+                  <a:schemeClr val="accent1"/>
+                </a:effectRef>
+                <a:fontRef idx="minor">
+                  <a:schemeClr val="lt1"/>
+                </a:fontRef>
+              </p:style>
+              <p:txBody>
+                <a:bodyPr rtlCol="0" anchor="ctr"/>
+                <a:lstStyle/>
+                <a:p>
+                  <a:pPr algn="ctr"/>
+                  <a:endParaRPr lang="pt-BR"/>
+                </a:p>
+              </p:txBody>
+            </p:sp>
+            <p:sp>
+              <p:nvSpPr>
+                <p:cNvPr id="12" name="Oval 11">
+                  <a:extLst>
+                    <a:ext uri="{FF2B5EF4-FFF2-40B4-BE49-F238E27FC236}">
+                      <a16:creationId xmlns:a16="http://schemas.microsoft.com/office/drawing/2014/main" id="{6D1D7E3D-234F-160C-6463-C5AB54660BA5}"/>
+                    </a:ext>
+                  </a:extLst>
+                </p:cNvPr>
+                <p:cNvSpPr/>
+                <p:nvPr/>
+              </p:nvSpPr>
+              <p:spPr>
+                <a:xfrm>
+                  <a:off x="7376932" y="2605269"/>
+                  <a:ext cx="720000" cy="720000"/>
+                </a:xfrm>
+                <a:prstGeom prst="ellipse">
+                  <a:avLst/>
+                </a:prstGeom>
+                <a:solidFill>
+                  <a:schemeClr val="bg1">
+                    <a:lumMod val="65000"/>
+                  </a:schemeClr>
+                </a:solidFill>
+              </p:spPr>
+              <p:style>
+                <a:lnRef idx="2">
+                  <a:schemeClr val="accent1">
+                    <a:shade val="15000"/>
+                  </a:schemeClr>
+                </a:lnRef>
+                <a:fillRef idx="1">
+                  <a:schemeClr val="accent1"/>
+                </a:fillRef>
+                <a:effectRef idx="0">
+                  <a:schemeClr val="accent1"/>
+                </a:effectRef>
+                <a:fontRef idx="minor">
+                  <a:schemeClr val="lt1"/>
+                </a:fontRef>
+              </p:style>
+              <p:txBody>
+                <a:bodyPr rtlCol="0" anchor="ctr"/>
+                <a:lstStyle/>
+                <a:p>
+                  <a:pPr algn="ctr"/>
+                  <a:endParaRPr lang="pt-BR"/>
+                </a:p>
+              </p:txBody>
+            </p:sp>
+            <p:sp>
+              <p:nvSpPr>
+                <p:cNvPr id="13" name="Oval 12">
+                  <a:extLst>
+                    <a:ext uri="{FF2B5EF4-FFF2-40B4-BE49-F238E27FC236}">
+                      <a16:creationId xmlns:a16="http://schemas.microsoft.com/office/drawing/2014/main" id="{C5D312AA-A382-7223-46A2-9A670CD14831}"/>
+                    </a:ext>
+                  </a:extLst>
+                </p:cNvPr>
+                <p:cNvSpPr/>
+                <p:nvPr/>
+              </p:nvSpPr>
+              <p:spPr>
+                <a:xfrm>
+                  <a:off x="4138998" y="1165269"/>
+                  <a:ext cx="3600000" cy="3600000"/>
+                </a:xfrm>
+                <a:prstGeom prst="ellipse">
+                  <a:avLst/>
+                </a:prstGeom>
+                <a:noFill/>
+                <a:ln>
+                  <a:solidFill>
+                    <a:schemeClr val="tx1"/>
+                  </a:solidFill>
+                </a:ln>
+              </p:spPr>
+              <p:style>
+                <a:lnRef idx="2">
+                  <a:schemeClr val="accent1">
+                    <a:shade val="15000"/>
+                  </a:schemeClr>
+                </a:lnRef>
+                <a:fillRef idx="1">
+                  <a:schemeClr val="accent1"/>
+                </a:fillRef>
+                <a:effectRef idx="0">
+                  <a:schemeClr val="accent1"/>
+                </a:effectRef>
+                <a:fontRef idx="minor">
+                  <a:schemeClr val="lt1"/>
+                </a:fontRef>
+              </p:style>
+              <p:txBody>
+                <a:bodyPr rtlCol="0" anchor="ctr"/>
+                <a:lstStyle/>
+                <a:p>
+                  <a:pPr algn="ctr"/>
+                  <a:endParaRPr lang="pt-BR"/>
+                </a:p>
+              </p:txBody>
+            </p:sp>
+            <p:sp>
+              <p:nvSpPr>
+                <p:cNvPr id="14" name="Arrow: Curved Right 13">
+                  <a:extLst>
+                    <a:ext uri="{FF2B5EF4-FFF2-40B4-BE49-F238E27FC236}">
+                      <a16:creationId xmlns:a16="http://schemas.microsoft.com/office/drawing/2014/main" id="{9A02A53E-E9F0-7FA8-23DF-56B2C36EB898}"/>
+                    </a:ext>
+                  </a:extLst>
+                </p:cNvPr>
+                <p:cNvSpPr/>
+                <p:nvPr/>
+              </p:nvSpPr>
+              <p:spPr>
+                <a:xfrm rot="5400000">
+                  <a:off x="5647250" y="331428"/>
+                  <a:ext cx="523916" cy="1177737"/>
+                </a:xfrm>
+                <a:prstGeom prst="curvedRightArrow">
+                  <a:avLst>
+                    <a:gd name="adj1" fmla="val 0"/>
+                    <a:gd name="adj2" fmla="val 19653"/>
+                    <a:gd name="adj3" fmla="val 36076"/>
+                  </a:avLst>
+                </a:prstGeom>
+                <a:solidFill>
+                  <a:schemeClr val="tx1"/>
+                </a:solidFill>
+                <a:ln>
+                  <a:solidFill>
+                    <a:schemeClr val="tx1"/>
+                  </a:solidFill>
+                </a:ln>
+              </p:spPr>
+              <p:style>
+                <a:lnRef idx="2">
+                  <a:schemeClr val="accent1">
+                    <a:shade val="15000"/>
+                  </a:schemeClr>
+                </a:lnRef>
+                <a:fillRef idx="1">
+                  <a:schemeClr val="accent1"/>
+                </a:fillRef>
+                <a:effectRef idx="0">
+                  <a:schemeClr val="accent1"/>
+                </a:effectRef>
+                <a:fontRef idx="minor">
+                  <a:schemeClr val="lt1"/>
+                </a:fontRef>
+              </p:style>
+              <p:txBody>
+                <a:bodyPr rtlCol="0" anchor="ctr"/>
+                <a:lstStyle/>
+                <a:p>
+                  <a:pPr algn="ctr"/>
+                  <a:endParaRPr lang="pt-BR">
+                    <a:solidFill>
+                      <a:schemeClr val="tx1"/>
+                    </a:solidFill>
+                  </a:endParaRPr>
+                </a:p>
+              </p:txBody>
+            </p:sp>
+            <p:sp>
+              <p:nvSpPr>
+                <p:cNvPr id="15" name="Arrow: Curved Right 14">
+                  <a:extLst>
+                    <a:ext uri="{FF2B5EF4-FFF2-40B4-BE49-F238E27FC236}">
+                      <a16:creationId xmlns:a16="http://schemas.microsoft.com/office/drawing/2014/main" id="{A4DE17FA-178F-CE06-6A7C-00DF633DB4BE}"/>
+                    </a:ext>
+                  </a:extLst>
+                </p:cNvPr>
+                <p:cNvSpPr/>
+                <p:nvPr/>
+              </p:nvSpPr>
+              <p:spPr>
+                <a:xfrm rot="16200000">
+                  <a:off x="5724151" y="950968"/>
+                  <a:ext cx="429762" cy="1105453"/>
+                </a:xfrm>
+                <a:prstGeom prst="curvedRightArrow">
+                  <a:avLst>
+                    <a:gd name="adj1" fmla="val 0"/>
+                    <a:gd name="adj2" fmla="val 19653"/>
+                    <a:gd name="adj3" fmla="val 36076"/>
+                  </a:avLst>
+                </a:prstGeom>
+                <a:solidFill>
+                  <a:schemeClr val="tx1"/>
+                </a:solidFill>
+                <a:ln>
+                  <a:solidFill>
+                    <a:schemeClr val="tx1"/>
+                  </a:solidFill>
+                </a:ln>
+              </p:spPr>
+              <p:style>
+                <a:lnRef idx="2">
+                  <a:schemeClr val="accent1">
+                    <a:shade val="15000"/>
+                  </a:schemeClr>
+                </a:lnRef>
+                <a:fillRef idx="1">
+                  <a:schemeClr val="accent1"/>
+                </a:fillRef>
+                <a:effectRef idx="0">
+                  <a:schemeClr val="accent1"/>
+                </a:effectRef>
+                <a:fontRef idx="minor">
+                  <a:schemeClr val="lt1"/>
+                </a:fontRef>
+              </p:style>
+              <p:txBody>
+                <a:bodyPr rtlCol="0" anchor="ctr"/>
+                <a:lstStyle/>
+                <a:p>
+                  <a:pPr algn="ctr"/>
+                  <a:endParaRPr lang="pt-BR">
+                    <a:solidFill>
+                      <a:schemeClr val="tx1"/>
+                    </a:solidFill>
+                  </a:endParaRPr>
+                </a:p>
+              </p:txBody>
+            </p:sp>
+            <p:sp>
+              <p:nvSpPr>
+                <p:cNvPr id="16" name="Arrow: Curved Right 15">
+                  <a:extLst>
+                    <a:ext uri="{FF2B5EF4-FFF2-40B4-BE49-F238E27FC236}">
+                      <a16:creationId xmlns:a16="http://schemas.microsoft.com/office/drawing/2014/main" id="{BFA4B31B-5F8F-1736-4563-EDD5F7C09809}"/>
+                    </a:ext>
+                  </a:extLst>
+                </p:cNvPr>
+                <p:cNvSpPr/>
+                <p:nvPr/>
+              </p:nvSpPr>
+              <p:spPr>
+                <a:xfrm rot="5400000">
+                  <a:off x="5694328" y="3917739"/>
+                  <a:ext cx="429762" cy="1013661"/>
+                </a:xfrm>
+                <a:prstGeom prst="curvedRightArrow">
+                  <a:avLst>
+                    <a:gd name="adj1" fmla="val 0"/>
+                    <a:gd name="adj2" fmla="val 19653"/>
+                    <a:gd name="adj3" fmla="val 36076"/>
+                  </a:avLst>
+                </a:prstGeom>
+                <a:solidFill>
+                  <a:schemeClr val="tx1"/>
+                </a:solidFill>
+                <a:ln>
+                  <a:solidFill>
+                    <a:schemeClr val="tx1"/>
+                  </a:solidFill>
+                </a:ln>
+              </p:spPr>
+              <p:style>
+                <a:lnRef idx="2">
+                  <a:schemeClr val="accent1">
+                    <a:shade val="15000"/>
+                  </a:schemeClr>
+                </a:lnRef>
+                <a:fillRef idx="1">
+                  <a:schemeClr val="accent1"/>
+                </a:fillRef>
+                <a:effectRef idx="0">
+                  <a:schemeClr val="accent1"/>
+                </a:effectRef>
+                <a:fontRef idx="minor">
+                  <a:schemeClr val="lt1"/>
+                </a:fontRef>
+              </p:style>
+              <p:txBody>
+                <a:bodyPr rtlCol="0" anchor="ctr"/>
+                <a:lstStyle/>
+                <a:p>
+                  <a:pPr algn="ctr"/>
+                  <a:endParaRPr lang="pt-BR">
+                    <a:solidFill>
+                      <a:schemeClr val="tx1"/>
+                    </a:solidFill>
+                  </a:endParaRPr>
+                </a:p>
+              </p:txBody>
+            </p:sp>
+            <p:sp>
+              <p:nvSpPr>
+                <p:cNvPr id="17" name="Arrow: Curved Right 16">
+                  <a:extLst>
+                    <a:ext uri="{FF2B5EF4-FFF2-40B4-BE49-F238E27FC236}">
+                      <a16:creationId xmlns:a16="http://schemas.microsoft.com/office/drawing/2014/main" id="{D1A9DDC5-EB3A-41BB-0F0A-3BEE31C04203}"/>
+                    </a:ext>
+                  </a:extLst>
+                </p:cNvPr>
+                <p:cNvSpPr/>
+                <p:nvPr/>
+              </p:nvSpPr>
+              <p:spPr>
+                <a:xfrm rot="16200000">
+                  <a:off x="5693602" y="4451367"/>
+                  <a:ext cx="523012" cy="1105453"/>
+                </a:xfrm>
+                <a:prstGeom prst="curvedRightArrow">
+                  <a:avLst>
+                    <a:gd name="adj1" fmla="val 0"/>
+                    <a:gd name="adj2" fmla="val 19653"/>
+                    <a:gd name="adj3" fmla="val 36076"/>
+                  </a:avLst>
+                </a:prstGeom>
+                <a:solidFill>
+                  <a:schemeClr val="tx1"/>
+                </a:solidFill>
+                <a:ln>
+                  <a:solidFill>
+                    <a:schemeClr val="tx1"/>
+                  </a:solidFill>
+                </a:ln>
+              </p:spPr>
+              <p:style>
+                <a:lnRef idx="2">
+                  <a:schemeClr val="accent1">
+                    <a:shade val="15000"/>
+                  </a:schemeClr>
+                </a:lnRef>
+                <a:fillRef idx="1">
+                  <a:schemeClr val="accent1"/>
+                </a:fillRef>
+                <a:effectRef idx="0">
+                  <a:schemeClr val="accent1"/>
+                </a:effectRef>
+                <a:fontRef idx="minor">
+                  <a:schemeClr val="lt1"/>
+                </a:fontRef>
+              </p:style>
+              <p:txBody>
+                <a:bodyPr rtlCol="0" anchor="ctr"/>
+                <a:lstStyle/>
+                <a:p>
+                  <a:pPr algn="ctr"/>
+                  <a:endParaRPr lang="pt-BR">
+                    <a:solidFill>
+                      <a:schemeClr val="tx1"/>
+                    </a:solidFill>
+                  </a:endParaRPr>
+                </a:p>
+              </p:txBody>
+            </p:sp>
+            <p:sp>
+              <p:nvSpPr>
+                <p:cNvPr id="18" name="Arrow: Curved Right 17">
+                  <a:extLst>
+                    <a:ext uri="{FF2B5EF4-FFF2-40B4-BE49-F238E27FC236}">
+                      <a16:creationId xmlns:a16="http://schemas.microsoft.com/office/drawing/2014/main" id="{92E2AF48-162C-ED68-A6BB-76B1C6A1E741}"/>
+                    </a:ext>
+                  </a:extLst>
+                </p:cNvPr>
+                <p:cNvSpPr/>
+                <p:nvPr/>
+              </p:nvSpPr>
+              <p:spPr>
+                <a:xfrm>
+                  <a:off x="3571792" y="2453118"/>
+                  <a:ext cx="523916" cy="1105454"/>
+                </a:xfrm>
+                <a:prstGeom prst="curvedRightArrow">
+                  <a:avLst>
+                    <a:gd name="adj1" fmla="val 0"/>
+                    <a:gd name="adj2" fmla="val 19653"/>
+                    <a:gd name="adj3" fmla="val 36076"/>
+                  </a:avLst>
+                </a:prstGeom>
+                <a:solidFill>
+                  <a:schemeClr val="tx1"/>
+                </a:solidFill>
+                <a:ln>
+                  <a:solidFill>
+                    <a:schemeClr val="tx1"/>
+                  </a:solidFill>
+                </a:ln>
+              </p:spPr>
+              <p:style>
+                <a:lnRef idx="2">
+                  <a:schemeClr val="accent1">
+                    <a:shade val="15000"/>
+                  </a:schemeClr>
+                </a:lnRef>
+                <a:fillRef idx="1">
+                  <a:schemeClr val="accent1"/>
+                </a:fillRef>
+                <a:effectRef idx="0">
+                  <a:schemeClr val="accent1"/>
+                </a:effectRef>
+                <a:fontRef idx="minor">
+                  <a:schemeClr val="lt1"/>
+                </a:fontRef>
+              </p:style>
+              <p:txBody>
+                <a:bodyPr rtlCol="0" anchor="ctr"/>
+                <a:lstStyle/>
+                <a:p>
+                  <a:pPr algn="ctr"/>
+                  <a:endParaRPr lang="pt-BR">
+                    <a:solidFill>
+                      <a:schemeClr val="tx1"/>
+                    </a:solidFill>
+                  </a:endParaRPr>
+                </a:p>
+              </p:txBody>
+            </p:sp>
+            <p:sp>
+              <p:nvSpPr>
+                <p:cNvPr id="19" name="Arrow: Curved Right 18">
+                  <a:extLst>
+                    <a:ext uri="{FF2B5EF4-FFF2-40B4-BE49-F238E27FC236}">
+                      <a16:creationId xmlns:a16="http://schemas.microsoft.com/office/drawing/2014/main" id="{C045DC9E-4985-0FC1-71B9-624F231C63C1}"/>
+                    </a:ext>
+                  </a:extLst>
+                </p:cNvPr>
+                <p:cNvSpPr/>
+                <p:nvPr/>
+              </p:nvSpPr>
+              <p:spPr>
+                <a:xfrm rot="10800000">
+                  <a:off x="4234974" y="2412542"/>
+                  <a:ext cx="523916" cy="1105453"/>
+                </a:xfrm>
+                <a:prstGeom prst="curvedRightArrow">
+                  <a:avLst>
+                    <a:gd name="adj1" fmla="val 0"/>
+                    <a:gd name="adj2" fmla="val 19653"/>
+                    <a:gd name="adj3" fmla="val 36076"/>
+                  </a:avLst>
+                </a:prstGeom>
+                <a:solidFill>
+                  <a:schemeClr val="tx1"/>
+                </a:solidFill>
+                <a:ln>
+                  <a:solidFill>
+                    <a:schemeClr val="tx1"/>
+                  </a:solidFill>
+                </a:ln>
+              </p:spPr>
+              <p:style>
+                <a:lnRef idx="2">
+                  <a:schemeClr val="accent1">
+                    <a:shade val="15000"/>
+                  </a:schemeClr>
+                </a:lnRef>
+                <a:fillRef idx="1">
+                  <a:schemeClr val="accent1"/>
+                </a:fillRef>
+                <a:effectRef idx="0">
+                  <a:schemeClr val="accent1"/>
+                </a:effectRef>
+                <a:fontRef idx="minor">
+                  <a:schemeClr val="lt1"/>
+                </a:fontRef>
+              </p:style>
+              <p:txBody>
+                <a:bodyPr rtlCol="0" anchor="ctr"/>
+                <a:lstStyle/>
+                <a:p>
+                  <a:pPr algn="ctr"/>
+                  <a:endParaRPr lang="pt-BR">
+                    <a:solidFill>
+                      <a:schemeClr val="tx1"/>
+                    </a:solidFill>
+                  </a:endParaRPr>
+                </a:p>
+              </p:txBody>
+            </p:sp>
+            <p:sp>
+              <p:nvSpPr>
+                <p:cNvPr id="20" name="Arrow: Curved Right 19">
+                  <a:extLst>
+                    <a:ext uri="{FF2B5EF4-FFF2-40B4-BE49-F238E27FC236}">
+                      <a16:creationId xmlns:a16="http://schemas.microsoft.com/office/drawing/2014/main" id="{98470598-89D5-399A-CA7C-9E1539E0A529}"/>
+                    </a:ext>
+                  </a:extLst>
+                </p:cNvPr>
+                <p:cNvSpPr/>
+                <p:nvPr/>
+              </p:nvSpPr>
+              <p:spPr>
+                <a:xfrm>
+                  <a:off x="7167660" y="2493696"/>
+                  <a:ext cx="432072" cy="1024299"/>
+                </a:xfrm>
+                <a:prstGeom prst="curvedRightArrow">
+                  <a:avLst>
+                    <a:gd name="adj1" fmla="val 0"/>
+                    <a:gd name="adj2" fmla="val 19653"/>
+                    <a:gd name="adj3" fmla="val 36076"/>
+                  </a:avLst>
+                </a:prstGeom>
+                <a:solidFill>
+                  <a:schemeClr val="tx1"/>
+                </a:solidFill>
+                <a:ln>
+                  <a:solidFill>
+                    <a:schemeClr val="tx1"/>
+                  </a:solidFill>
+                </a:ln>
+              </p:spPr>
+              <p:style>
+                <a:lnRef idx="2">
+                  <a:schemeClr val="accent1">
+                    <a:shade val="15000"/>
+                  </a:schemeClr>
+                </a:lnRef>
+                <a:fillRef idx="1">
+                  <a:schemeClr val="accent1"/>
+                </a:fillRef>
+                <a:effectRef idx="0">
+                  <a:schemeClr val="accent1"/>
+                </a:effectRef>
+                <a:fontRef idx="minor">
+                  <a:schemeClr val="lt1"/>
+                </a:fontRef>
+              </p:style>
+              <p:txBody>
+                <a:bodyPr rtlCol="0" anchor="ctr"/>
+                <a:lstStyle/>
+                <a:p>
+                  <a:pPr algn="ctr"/>
+                  <a:endParaRPr lang="pt-BR">
+                    <a:solidFill>
+                      <a:schemeClr val="tx1"/>
+                    </a:solidFill>
+                  </a:endParaRPr>
+                </a:p>
+              </p:txBody>
+            </p:sp>
+            <p:sp>
+              <p:nvSpPr>
+                <p:cNvPr id="21" name="Arrow: Curved Right 20">
+                  <a:extLst>
+                    <a:ext uri="{FF2B5EF4-FFF2-40B4-BE49-F238E27FC236}">
+                      <a16:creationId xmlns:a16="http://schemas.microsoft.com/office/drawing/2014/main" id="{48B36E8B-8C9D-B331-2869-DD35A74460FD}"/>
+                    </a:ext>
+                  </a:extLst>
+                </p:cNvPr>
+                <p:cNvSpPr/>
+                <p:nvPr/>
+              </p:nvSpPr>
+              <p:spPr>
+                <a:xfrm rot="10800000">
+                  <a:off x="7738998" y="2427781"/>
+                  <a:ext cx="567206" cy="1090213"/>
+                </a:xfrm>
+                <a:prstGeom prst="curvedRightArrow">
+                  <a:avLst>
+                    <a:gd name="adj1" fmla="val 0"/>
+                    <a:gd name="adj2" fmla="val 19653"/>
+                    <a:gd name="adj3" fmla="val 36076"/>
+                  </a:avLst>
+                </a:prstGeom>
+                <a:solidFill>
+                  <a:schemeClr val="tx1"/>
+                </a:solidFill>
+                <a:ln>
+                  <a:solidFill>
+                    <a:schemeClr val="tx1"/>
+                  </a:solidFill>
+                </a:ln>
+              </p:spPr>
+              <p:style>
+                <a:lnRef idx="2">
+                  <a:schemeClr val="accent1">
+                    <a:shade val="15000"/>
+                  </a:schemeClr>
+                </a:lnRef>
+                <a:fillRef idx="1">
+                  <a:schemeClr val="accent1"/>
+                </a:fillRef>
+                <a:effectRef idx="0">
+                  <a:schemeClr val="accent1"/>
+                </a:effectRef>
+                <a:fontRef idx="minor">
+                  <a:schemeClr val="lt1"/>
+                </a:fontRef>
+              </p:style>
+              <p:txBody>
+                <a:bodyPr rtlCol="0" anchor="ctr"/>
+                <a:lstStyle/>
+                <a:p>
+                  <a:pPr algn="ctr"/>
+                  <a:endParaRPr lang="pt-BR">
+                    <a:solidFill>
+                      <a:schemeClr val="tx1"/>
+                    </a:solidFill>
+                  </a:endParaRPr>
+                </a:p>
+              </p:txBody>
+            </p:sp>
+            <p:grpSp>
+              <p:nvGrpSpPr>
+                <p:cNvPr id="22" name="Group 21">
+                  <a:extLst>
+                    <a:ext uri="{FF2B5EF4-FFF2-40B4-BE49-F238E27FC236}">
+                      <a16:creationId xmlns:a16="http://schemas.microsoft.com/office/drawing/2014/main" id="{87ADE500-98EF-56F2-2D6C-129C7B43976E}"/>
+                    </a:ext>
+                  </a:extLst>
+                </p:cNvPr>
+                <p:cNvGrpSpPr/>
+                <p:nvPr/>
+              </p:nvGrpSpPr>
+              <p:grpSpPr>
+                <a:xfrm>
+                  <a:off x="3853863" y="920296"/>
+                  <a:ext cx="2654414" cy="2520000"/>
+                  <a:chOff x="3817838" y="909000"/>
+                  <a:chExt cx="2654414" cy="2520000"/>
+                </a:xfrm>
+              </p:grpSpPr>
+              <p:sp>
+                <p:nvSpPr>
+                  <p:cNvPr id="32" name="Arc 31">
+                    <a:extLst>
+                      <a:ext uri="{FF2B5EF4-FFF2-40B4-BE49-F238E27FC236}">
+                        <a16:creationId xmlns:a16="http://schemas.microsoft.com/office/drawing/2014/main" id="{898FD113-75BD-5D41-54E9-C9D2CF3B7D78}"/>
+                      </a:ext>
+                    </a:extLst>
+                  </p:cNvPr>
+                  <p:cNvSpPr/>
+                  <p:nvPr/>
+                </p:nvSpPr>
+                <p:spPr>
+                  <a:xfrm rot="16200000">
+                    <a:off x="3952252" y="909000"/>
+                    <a:ext cx="2520000" cy="2520000"/>
+                  </a:xfrm>
+                  <a:prstGeom prst="arc">
+                    <a:avLst>
+                      <a:gd name="adj1" fmla="val 16588158"/>
+                      <a:gd name="adj2" fmla="val 21192311"/>
+                    </a:avLst>
+                  </a:prstGeom>
+                  <a:ln w="38100">
+                    <a:solidFill>
+                      <a:srgbClr val="0070C0"/>
+                    </a:solidFill>
+                  </a:ln>
+                </p:spPr>
+                <p:style>
+                  <a:lnRef idx="2">
+                    <a:schemeClr val="accent1"/>
+                  </a:lnRef>
+                  <a:fillRef idx="0">
+                    <a:schemeClr val="accent1"/>
+                  </a:fillRef>
+                  <a:effectRef idx="1">
+                    <a:schemeClr val="accent1"/>
+                  </a:effectRef>
+                  <a:fontRef idx="minor">
+                    <a:schemeClr val="tx1"/>
+                  </a:fontRef>
+                </p:style>
+                <p:txBody>
+                  <a:bodyPr rtlCol="0" anchor="ctr"/>
+                  <a:lstStyle/>
+                  <a:p>
+                    <a:pPr algn="ctr"/>
+                    <a:endParaRPr lang="pt-BR" dirty="0"/>
+                  </a:p>
+                </p:txBody>
+              </p:sp>
+              <p:sp>
+                <p:nvSpPr>
+                  <p:cNvPr id="33" name="Isosceles Triangle 32">
+                    <a:extLst>
+                      <a:ext uri="{FF2B5EF4-FFF2-40B4-BE49-F238E27FC236}">
+                        <a16:creationId xmlns:a16="http://schemas.microsoft.com/office/drawing/2014/main" id="{703ED48F-50BE-DA20-962B-9AA8E5391DD2}"/>
+                      </a:ext>
+                    </a:extLst>
+                  </p:cNvPr>
+                  <p:cNvSpPr/>
+                  <p:nvPr/>
+                </p:nvSpPr>
+                <p:spPr>
+                  <a:xfrm rot="10979888">
+                    <a:off x="3817838" y="2024999"/>
+                    <a:ext cx="288000" cy="288000"/>
+                  </a:xfrm>
+                  <a:prstGeom prst="triangle">
+                    <a:avLst/>
+                  </a:prstGeom>
+                  <a:solidFill>
+                    <a:srgbClr val="0070C0"/>
+                  </a:solidFill>
+                  <a:ln>
+                    <a:solidFill>
+                      <a:srgbClr val="0070C0"/>
+                    </a:solidFill>
+                  </a:ln>
+                </p:spPr>
+                <p:style>
+                  <a:lnRef idx="2">
+                    <a:schemeClr val="accent1">
+                      <a:shade val="15000"/>
+                    </a:schemeClr>
+                  </a:lnRef>
+                  <a:fillRef idx="1">
+                    <a:schemeClr val="accent1"/>
+                  </a:fillRef>
+                  <a:effectRef idx="0">
+                    <a:schemeClr val="accent1"/>
+                  </a:effectRef>
+                  <a:fontRef idx="minor">
+                    <a:schemeClr val="lt1"/>
+                  </a:fontRef>
+                </p:style>
+                <p:txBody>
+                  <a:bodyPr rtlCol="0" anchor="ctr"/>
+                  <a:lstStyle/>
+                  <a:p>
+                    <a:pPr algn="ctr"/>
+                    <a:endParaRPr lang="pt-BR"/>
+                  </a:p>
+                </p:txBody>
+              </p:sp>
+            </p:grpSp>
+            <p:grpSp>
+              <p:nvGrpSpPr>
+                <p:cNvPr id="23" name="Group 22">
+                  <a:extLst>
+                    <a:ext uri="{FF2B5EF4-FFF2-40B4-BE49-F238E27FC236}">
+                      <a16:creationId xmlns:a16="http://schemas.microsoft.com/office/drawing/2014/main" id="{695E1CBD-6A4B-1480-013D-58191937A3C9}"/>
+                    </a:ext>
+                  </a:extLst>
+                </p:cNvPr>
+                <p:cNvGrpSpPr/>
+                <p:nvPr/>
+              </p:nvGrpSpPr>
+              <p:grpSpPr>
+                <a:xfrm rot="10800000">
+                  <a:off x="5347108" y="2505921"/>
+                  <a:ext cx="2654414" cy="2520000"/>
+                  <a:chOff x="3817838" y="909000"/>
+                  <a:chExt cx="2654414" cy="2520000"/>
+                </a:xfrm>
+              </p:grpSpPr>
+              <p:sp>
+                <p:nvSpPr>
+                  <p:cNvPr id="30" name="Arc 29">
+                    <a:extLst>
+                      <a:ext uri="{FF2B5EF4-FFF2-40B4-BE49-F238E27FC236}">
+                        <a16:creationId xmlns:a16="http://schemas.microsoft.com/office/drawing/2014/main" id="{3D833E17-A953-B284-CB58-3F410D6BB039}"/>
+                      </a:ext>
+                    </a:extLst>
+                  </p:cNvPr>
+                  <p:cNvSpPr/>
+                  <p:nvPr/>
+                </p:nvSpPr>
+                <p:spPr>
+                  <a:xfrm rot="16200000">
+                    <a:off x="3952252" y="909000"/>
+                    <a:ext cx="2520000" cy="2520000"/>
+                  </a:xfrm>
+                  <a:prstGeom prst="arc">
+                    <a:avLst>
+                      <a:gd name="adj1" fmla="val 16588158"/>
+                      <a:gd name="adj2" fmla="val 21192311"/>
+                    </a:avLst>
+                  </a:prstGeom>
+                  <a:ln w="38100">
+                    <a:solidFill>
+                      <a:srgbClr val="0070C0"/>
+                    </a:solidFill>
+                  </a:ln>
+                </p:spPr>
+                <p:style>
+                  <a:lnRef idx="2">
+                    <a:schemeClr val="accent1"/>
+                  </a:lnRef>
+                  <a:fillRef idx="0">
+                    <a:schemeClr val="accent1"/>
+                  </a:fillRef>
+                  <a:effectRef idx="1">
+                    <a:schemeClr val="accent1"/>
+                  </a:effectRef>
+                  <a:fontRef idx="minor">
+                    <a:schemeClr val="tx1"/>
+                  </a:fontRef>
+                </p:style>
+                <p:txBody>
+                  <a:bodyPr rtlCol="0" anchor="ctr"/>
+                  <a:lstStyle/>
+                  <a:p>
+                    <a:pPr algn="ctr"/>
+                    <a:endParaRPr lang="pt-BR" dirty="0"/>
+                  </a:p>
+                </p:txBody>
+              </p:sp>
+              <p:sp>
+                <p:nvSpPr>
+                  <p:cNvPr id="31" name="Isosceles Triangle 30">
+                    <a:extLst>
+                      <a:ext uri="{FF2B5EF4-FFF2-40B4-BE49-F238E27FC236}">
+                        <a16:creationId xmlns:a16="http://schemas.microsoft.com/office/drawing/2014/main" id="{99655463-26CC-24CE-0926-671569A32E84}"/>
+                      </a:ext>
+                    </a:extLst>
+                  </p:cNvPr>
+                  <p:cNvSpPr/>
+                  <p:nvPr/>
+                </p:nvSpPr>
+                <p:spPr>
+                  <a:xfrm rot="10979888">
+                    <a:off x="3817838" y="2024999"/>
+                    <a:ext cx="288000" cy="288000"/>
+                  </a:xfrm>
+                  <a:prstGeom prst="triangle">
+                    <a:avLst/>
+                  </a:prstGeom>
+                  <a:solidFill>
+                    <a:srgbClr val="0070C0"/>
+                  </a:solidFill>
+                  <a:ln>
+                    <a:solidFill>
+                      <a:srgbClr val="0070C0"/>
+                    </a:solidFill>
+                  </a:ln>
+                </p:spPr>
+                <p:style>
+                  <a:lnRef idx="2">
+                    <a:schemeClr val="accent1">
+                      <a:shade val="15000"/>
+                    </a:schemeClr>
+                  </a:lnRef>
+                  <a:fillRef idx="1">
+                    <a:schemeClr val="accent1"/>
+                  </a:fillRef>
+                  <a:effectRef idx="0">
+                    <a:schemeClr val="accent1"/>
+                  </a:effectRef>
+                  <a:fontRef idx="minor">
+                    <a:schemeClr val="lt1"/>
+                  </a:fontRef>
+                </p:style>
+                <p:txBody>
+                  <a:bodyPr rtlCol="0" anchor="ctr"/>
+                  <a:lstStyle/>
+                  <a:p>
+                    <a:pPr algn="ctr"/>
+                    <a:endParaRPr lang="pt-BR"/>
+                  </a:p>
+                </p:txBody>
+              </p:sp>
+            </p:grpSp>
+            <p:grpSp>
+              <p:nvGrpSpPr>
+                <p:cNvPr id="24" name="Group 23">
+                  <a:extLst>
+                    <a:ext uri="{FF2B5EF4-FFF2-40B4-BE49-F238E27FC236}">
+                      <a16:creationId xmlns:a16="http://schemas.microsoft.com/office/drawing/2014/main" id="{4619294F-F796-C7EA-6934-EB003EB9B045}"/>
+                    </a:ext>
+                  </a:extLst>
+                </p:cNvPr>
+                <p:cNvGrpSpPr/>
+                <p:nvPr/>
+              </p:nvGrpSpPr>
+              <p:grpSpPr>
+                <a:xfrm rot="5802683">
+                  <a:off x="5399606" y="955029"/>
+                  <a:ext cx="2654414" cy="2520000"/>
+                  <a:chOff x="3817838" y="909000"/>
+                  <a:chExt cx="2654414" cy="2520000"/>
+                </a:xfrm>
+              </p:grpSpPr>
+              <p:sp>
+                <p:nvSpPr>
+                  <p:cNvPr id="28" name="Arc 27">
+                    <a:extLst>
+                      <a:ext uri="{FF2B5EF4-FFF2-40B4-BE49-F238E27FC236}">
+                        <a16:creationId xmlns:a16="http://schemas.microsoft.com/office/drawing/2014/main" id="{78B52DAE-8819-8D12-7B36-B553E645A18C}"/>
+                      </a:ext>
+                    </a:extLst>
+                  </p:cNvPr>
+                  <p:cNvSpPr/>
+                  <p:nvPr/>
+                </p:nvSpPr>
+                <p:spPr>
+                  <a:xfrm rot="16200000">
+                    <a:off x="3952252" y="909000"/>
+                    <a:ext cx="2520000" cy="2520000"/>
+                  </a:xfrm>
+                  <a:prstGeom prst="arc">
+                    <a:avLst>
+                      <a:gd name="adj1" fmla="val 16588158"/>
+                      <a:gd name="adj2" fmla="val 21192311"/>
+                    </a:avLst>
+                  </a:prstGeom>
+                  <a:ln w="38100">
+                    <a:solidFill>
+                      <a:srgbClr val="0070C0"/>
+                    </a:solidFill>
+                  </a:ln>
+                </p:spPr>
+                <p:style>
+                  <a:lnRef idx="2">
+                    <a:schemeClr val="accent1"/>
+                  </a:lnRef>
+                  <a:fillRef idx="0">
+                    <a:schemeClr val="accent1"/>
+                  </a:fillRef>
+                  <a:effectRef idx="1">
+                    <a:schemeClr val="accent1"/>
+                  </a:effectRef>
+                  <a:fontRef idx="minor">
+                    <a:schemeClr val="tx1"/>
+                  </a:fontRef>
+                </p:style>
+                <p:txBody>
+                  <a:bodyPr rtlCol="0" anchor="ctr"/>
+                  <a:lstStyle/>
+                  <a:p>
+                    <a:pPr algn="ctr"/>
+                    <a:endParaRPr lang="pt-BR" dirty="0"/>
+                  </a:p>
+                </p:txBody>
+              </p:sp>
+              <p:sp>
+                <p:nvSpPr>
+                  <p:cNvPr id="29" name="Isosceles Triangle 28">
+                    <a:extLst>
+                      <a:ext uri="{FF2B5EF4-FFF2-40B4-BE49-F238E27FC236}">
+                        <a16:creationId xmlns:a16="http://schemas.microsoft.com/office/drawing/2014/main" id="{B6EE5621-F4C3-2C87-F15D-5E227216D32C}"/>
+                      </a:ext>
+                    </a:extLst>
+                  </p:cNvPr>
+                  <p:cNvSpPr/>
+                  <p:nvPr/>
+                </p:nvSpPr>
+                <p:spPr>
+                  <a:xfrm rot="10979888">
+                    <a:off x="3817838" y="2024999"/>
+                    <a:ext cx="288000" cy="288000"/>
+                  </a:xfrm>
+                  <a:prstGeom prst="triangle">
+                    <a:avLst/>
+                  </a:prstGeom>
+                  <a:solidFill>
+                    <a:srgbClr val="0070C0"/>
+                  </a:solidFill>
+                  <a:ln>
+                    <a:solidFill>
+                      <a:srgbClr val="0070C0"/>
+                    </a:solidFill>
+                  </a:ln>
+                </p:spPr>
+                <p:style>
+                  <a:lnRef idx="2">
+                    <a:schemeClr val="accent1">
+                      <a:shade val="15000"/>
+                    </a:schemeClr>
+                  </a:lnRef>
+                  <a:fillRef idx="1">
+                    <a:schemeClr val="accent1"/>
+                  </a:fillRef>
+                  <a:effectRef idx="0">
+                    <a:schemeClr val="accent1"/>
+                  </a:effectRef>
+                  <a:fontRef idx="minor">
+                    <a:schemeClr val="lt1"/>
+                  </a:fontRef>
+                </p:style>
+                <p:txBody>
+                  <a:bodyPr rtlCol="0" anchor="ctr"/>
+                  <a:lstStyle/>
+                  <a:p>
+                    <a:pPr algn="ctr"/>
+                    <a:endParaRPr lang="pt-BR"/>
+                  </a:p>
+                </p:txBody>
+              </p:sp>
+            </p:grpSp>
+            <p:grpSp>
+              <p:nvGrpSpPr>
+                <p:cNvPr id="25" name="Group 24">
+                  <a:extLst>
+                    <a:ext uri="{FF2B5EF4-FFF2-40B4-BE49-F238E27FC236}">
+                      <a16:creationId xmlns:a16="http://schemas.microsoft.com/office/drawing/2014/main" id="{4CB36ECE-2AAA-2C95-91DA-7719D7FE96F0}"/>
+                    </a:ext>
+                  </a:extLst>
+                </p:cNvPr>
+                <p:cNvGrpSpPr/>
+                <p:nvPr/>
+              </p:nvGrpSpPr>
+              <p:grpSpPr>
+                <a:xfrm rot="16378641">
+                  <a:off x="3851631" y="2479905"/>
+                  <a:ext cx="2654414" cy="2520000"/>
+                  <a:chOff x="3817838" y="909000"/>
+                  <a:chExt cx="2654414" cy="2520000"/>
+                </a:xfrm>
+              </p:grpSpPr>
+              <p:sp>
+                <p:nvSpPr>
+                  <p:cNvPr id="26" name="Arc 25">
+                    <a:extLst>
+                      <a:ext uri="{FF2B5EF4-FFF2-40B4-BE49-F238E27FC236}">
+                        <a16:creationId xmlns:a16="http://schemas.microsoft.com/office/drawing/2014/main" id="{1F800AEF-CA4F-56A1-1273-BD21B759E572}"/>
+                      </a:ext>
+                    </a:extLst>
+                  </p:cNvPr>
+                  <p:cNvSpPr/>
+                  <p:nvPr/>
+                </p:nvSpPr>
+                <p:spPr>
+                  <a:xfrm rot="16200000">
+                    <a:off x="3952252" y="909000"/>
+                    <a:ext cx="2520000" cy="2520000"/>
+                  </a:xfrm>
+                  <a:prstGeom prst="arc">
+                    <a:avLst>
+                      <a:gd name="adj1" fmla="val 16588158"/>
+                      <a:gd name="adj2" fmla="val 21192311"/>
+                    </a:avLst>
+                  </a:prstGeom>
+                  <a:ln w="38100">
+                    <a:solidFill>
+                      <a:srgbClr val="0070C0"/>
+                    </a:solidFill>
+                  </a:ln>
+                </p:spPr>
+                <p:style>
+                  <a:lnRef idx="2">
+                    <a:schemeClr val="accent1"/>
+                  </a:lnRef>
+                  <a:fillRef idx="0">
+                    <a:schemeClr val="accent1"/>
+                  </a:fillRef>
+                  <a:effectRef idx="1">
+                    <a:schemeClr val="accent1"/>
+                  </a:effectRef>
+                  <a:fontRef idx="minor">
+                    <a:schemeClr val="tx1"/>
+                  </a:fontRef>
+                </p:style>
+                <p:txBody>
+                  <a:bodyPr rtlCol="0" anchor="ctr"/>
+                  <a:lstStyle/>
+                  <a:p>
+                    <a:pPr algn="ctr"/>
+                    <a:endParaRPr lang="pt-BR" dirty="0"/>
+                  </a:p>
+                </p:txBody>
+              </p:sp>
+              <p:sp>
+                <p:nvSpPr>
+                  <p:cNvPr id="27" name="Isosceles Triangle 26">
+                    <a:extLst>
+                      <a:ext uri="{FF2B5EF4-FFF2-40B4-BE49-F238E27FC236}">
+                        <a16:creationId xmlns:a16="http://schemas.microsoft.com/office/drawing/2014/main" id="{13C1F253-17DD-9889-45D5-C26BC3094872}"/>
+                      </a:ext>
+                    </a:extLst>
+                  </p:cNvPr>
+                  <p:cNvSpPr/>
+                  <p:nvPr/>
+                </p:nvSpPr>
+                <p:spPr>
+                  <a:xfrm rot="10979888">
+                    <a:off x="3817838" y="2024999"/>
+                    <a:ext cx="288000" cy="288000"/>
+                  </a:xfrm>
+                  <a:prstGeom prst="triangle">
+                    <a:avLst/>
+                  </a:prstGeom>
+                  <a:solidFill>
+                    <a:srgbClr val="0070C0"/>
+                  </a:solidFill>
+                  <a:ln>
+                    <a:solidFill>
+                      <a:srgbClr val="0070C0"/>
+                    </a:solidFill>
+                  </a:ln>
+                </p:spPr>
+                <p:style>
+                  <a:lnRef idx="2">
+                    <a:schemeClr val="accent1">
+                      <a:shade val="15000"/>
+                    </a:schemeClr>
+                  </a:lnRef>
+                  <a:fillRef idx="1">
+                    <a:schemeClr val="accent1"/>
+                  </a:fillRef>
+                  <a:effectRef idx="0">
+                    <a:schemeClr val="accent1"/>
+                  </a:effectRef>
+                  <a:fontRef idx="minor">
+                    <a:schemeClr val="lt1"/>
+                  </a:fontRef>
+                </p:style>
+                <p:txBody>
+                  <a:bodyPr rtlCol="0" anchor="ctr"/>
+                  <a:lstStyle/>
+                  <a:p>
+                    <a:pPr algn="ctr"/>
+                    <a:endParaRPr lang="pt-BR"/>
+                  </a:p>
+                </p:txBody>
+              </p:sp>
+            </p:grpSp>
+          </p:grpSp>
+          <p:sp>
+            <p:nvSpPr>
+              <p:cNvPr id="4" name="TextBox 3">
+                <a:extLst>
+                  <a:ext uri="{FF2B5EF4-FFF2-40B4-BE49-F238E27FC236}">
+                    <a16:creationId xmlns:a16="http://schemas.microsoft.com/office/drawing/2014/main" id="{947B6668-CAEF-84E5-7B0C-C28530DEFD54}"/>
+                  </a:ext>
+                </a:extLst>
+              </p:cNvPr>
+              <p:cNvSpPr txBox="1"/>
+              <p:nvPr/>
+            </p:nvSpPr>
+            <p:spPr>
+              <a:xfrm>
+                <a:off x="992842" y="956448"/>
+                <a:ext cx="4566186" cy="461665"/>
+              </a:xfrm>
+              <a:prstGeom prst="rect">
+                <a:avLst/>
+              </a:prstGeom>
+              <a:noFill/>
+            </p:spPr>
+            <p:txBody>
+              <a:bodyPr wrap="none" rtlCol="0">
+                <a:spAutoFit/>
+              </a:bodyPr>
+              <a:lstStyle/>
+              <a:p>
+                <a:r>
+                  <a:rPr lang="pt-BR" sz="2400" dirty="0">
+                    <a:solidFill>
+                      <a:srgbClr val="0070C0"/>
+                    </a:solidFill>
+                  </a:rPr>
+                  <a:t>FORWARD – PRECESSÃO DIRETA</a:t>
+                </a:r>
+              </a:p>
+            </p:txBody>
+          </p:sp>
+          <p:sp>
+            <p:nvSpPr>
+              <p:cNvPr id="5" name="TextBox 4">
+                <a:extLst>
+                  <a:ext uri="{FF2B5EF4-FFF2-40B4-BE49-F238E27FC236}">
+                    <a16:creationId xmlns:a16="http://schemas.microsoft.com/office/drawing/2014/main" id="{58F3A87D-60FA-6F4F-5D39-B6B21632440D}"/>
+                  </a:ext>
+                </a:extLst>
+              </p:cNvPr>
+              <p:cNvSpPr txBox="1"/>
+              <p:nvPr/>
+            </p:nvSpPr>
+            <p:spPr>
+              <a:xfrm>
+                <a:off x="3535145" y="2541053"/>
+                <a:ext cx="413896" cy="461665"/>
+              </a:xfrm>
+              <a:prstGeom prst="rect">
+                <a:avLst/>
+              </a:prstGeom>
+              <a:noFill/>
+            </p:spPr>
+            <p:txBody>
+              <a:bodyPr wrap="none" rtlCol="0">
+                <a:spAutoFit/>
+              </a:bodyPr>
+              <a:lstStyle/>
+              <a:p>
+                <a:r>
+                  <a:rPr lang="el-GR" sz="2400" b="1" dirty="0"/>
+                  <a:t>Ω</a:t>
+                </a:r>
+                <a:endParaRPr lang="pt-BR" sz="2400" b="1" dirty="0"/>
+              </a:p>
+            </p:txBody>
+          </p:sp>
+          <p:sp>
+            <p:nvSpPr>
+              <p:cNvPr id="6" name="TextBox 5">
+                <a:extLst>
+                  <a:ext uri="{FF2B5EF4-FFF2-40B4-BE49-F238E27FC236}">
+                    <a16:creationId xmlns:a16="http://schemas.microsoft.com/office/drawing/2014/main" id="{2983C37A-DAC4-4E5F-1E10-38A88F1A6EB5}"/>
+                  </a:ext>
+                </a:extLst>
+              </p:cNvPr>
+              <p:cNvSpPr txBox="1"/>
+              <p:nvPr/>
+            </p:nvSpPr>
+            <p:spPr>
+              <a:xfrm>
+                <a:off x="1882380" y="3136675"/>
+                <a:ext cx="413896" cy="461665"/>
+              </a:xfrm>
+              <a:prstGeom prst="rect">
+                <a:avLst/>
+              </a:prstGeom>
+              <a:noFill/>
+            </p:spPr>
+            <p:txBody>
+              <a:bodyPr wrap="none" rtlCol="0">
+                <a:spAutoFit/>
+              </a:bodyPr>
+              <a:lstStyle/>
+              <a:p>
+                <a:r>
+                  <a:rPr lang="el-GR" sz="2400" b="1" dirty="0"/>
+                  <a:t>Ω</a:t>
+                </a:r>
+                <a:endParaRPr lang="pt-BR" sz="2400" b="1" dirty="0"/>
+              </a:p>
+            </p:txBody>
+          </p:sp>
+          <p:sp>
+            <p:nvSpPr>
+              <p:cNvPr id="7" name="TextBox 6">
+                <a:extLst>
+                  <a:ext uri="{FF2B5EF4-FFF2-40B4-BE49-F238E27FC236}">
+                    <a16:creationId xmlns:a16="http://schemas.microsoft.com/office/drawing/2014/main" id="{FE88876A-03CD-3617-4066-A09B42AD5864}"/>
+                  </a:ext>
+                </a:extLst>
+              </p:cNvPr>
+              <p:cNvSpPr txBox="1"/>
+              <p:nvPr/>
+            </p:nvSpPr>
+            <p:spPr>
+              <a:xfrm>
+                <a:off x="2360584" y="4970518"/>
+                <a:ext cx="413896" cy="461665"/>
+              </a:xfrm>
+              <a:prstGeom prst="rect">
+                <a:avLst/>
+              </a:prstGeom>
+              <a:noFill/>
+            </p:spPr>
+            <p:txBody>
+              <a:bodyPr wrap="none" rtlCol="0">
+                <a:spAutoFit/>
+              </a:bodyPr>
+              <a:lstStyle/>
+              <a:p>
+                <a:r>
+                  <a:rPr lang="el-GR" sz="2400" b="1" dirty="0"/>
+                  <a:t>Ω</a:t>
+                </a:r>
+                <a:endParaRPr lang="pt-BR" sz="2400" b="1" dirty="0"/>
+              </a:p>
+            </p:txBody>
+          </p:sp>
+          <p:sp>
+            <p:nvSpPr>
+              <p:cNvPr id="8" name="TextBox 7">
+                <a:extLst>
+                  <a:ext uri="{FF2B5EF4-FFF2-40B4-BE49-F238E27FC236}">
+                    <a16:creationId xmlns:a16="http://schemas.microsoft.com/office/drawing/2014/main" id="{5095C891-2A26-13DB-1188-82B8DB26BCBA}"/>
+                  </a:ext>
+                </a:extLst>
+              </p:cNvPr>
+              <p:cNvSpPr txBox="1"/>
+              <p:nvPr/>
+            </p:nvSpPr>
+            <p:spPr>
+              <a:xfrm>
+                <a:off x="4185709" y="4384766"/>
+                <a:ext cx="413896" cy="461665"/>
+              </a:xfrm>
+              <a:prstGeom prst="rect">
+                <a:avLst/>
+              </a:prstGeom>
+              <a:noFill/>
+            </p:spPr>
+            <p:txBody>
+              <a:bodyPr wrap="none" rtlCol="0">
+                <a:spAutoFit/>
+              </a:bodyPr>
+              <a:lstStyle/>
+              <a:p>
+                <a:r>
+                  <a:rPr lang="el-GR" sz="2400" b="1" dirty="0"/>
+                  <a:t>Ω</a:t>
+                </a:r>
+                <a:endParaRPr lang="pt-BR" sz="2400" b="1" dirty="0"/>
+              </a:p>
+            </p:txBody>
+          </p:sp>
+        </p:grpSp>
+        <p:grpSp>
+          <p:nvGrpSpPr>
+            <p:cNvPr id="68" name="Group 67">
+              <a:extLst>
+                <a:ext uri="{FF2B5EF4-FFF2-40B4-BE49-F238E27FC236}">
+                  <a16:creationId xmlns:a16="http://schemas.microsoft.com/office/drawing/2014/main" id="{37B31BF7-5848-4BDC-7C4D-1E89E309FE34}"/>
+                </a:ext>
+              </a:extLst>
+            </p:cNvPr>
+            <p:cNvGrpSpPr/>
+            <p:nvPr/>
+          </p:nvGrpSpPr>
+          <p:grpSpPr>
+            <a:xfrm>
+              <a:off x="6206886" y="972002"/>
+              <a:ext cx="4962256" cy="5290338"/>
+              <a:chOff x="6206886" y="972002"/>
+              <a:chExt cx="4962256" cy="5290338"/>
+            </a:xfrm>
+          </p:grpSpPr>
+          <p:grpSp>
+            <p:nvGrpSpPr>
+              <p:cNvPr id="35" name="Group 34">
+                <a:extLst>
+                  <a:ext uri="{FF2B5EF4-FFF2-40B4-BE49-F238E27FC236}">
+                    <a16:creationId xmlns:a16="http://schemas.microsoft.com/office/drawing/2014/main" id="{91E6B644-1474-DD30-D9A3-246E2A799F9B}"/>
+                  </a:ext>
+                </a:extLst>
+              </p:cNvPr>
+              <p:cNvGrpSpPr/>
+              <p:nvPr/>
+            </p:nvGrpSpPr>
+            <p:grpSpPr>
+              <a:xfrm>
+                <a:off x="6350598" y="1655079"/>
+                <a:ext cx="4734412" cy="4607261"/>
+                <a:chOff x="3571792" y="658339"/>
+                <a:chExt cx="4734412" cy="4607261"/>
+              </a:xfrm>
+            </p:grpSpPr>
+            <p:sp>
+              <p:nvSpPr>
+                <p:cNvPr id="41" name="Oval 40">
+                  <a:extLst>
+                    <a:ext uri="{FF2B5EF4-FFF2-40B4-BE49-F238E27FC236}">
+                      <a16:creationId xmlns:a16="http://schemas.microsoft.com/office/drawing/2014/main" id="{307C2628-8643-6D21-DB74-EC0368A48475}"/>
+                    </a:ext>
+                  </a:extLst>
+                </p:cNvPr>
+                <p:cNvSpPr/>
+                <p:nvPr/>
+              </p:nvSpPr>
+              <p:spPr>
+                <a:xfrm>
+                  <a:off x="5578998" y="805269"/>
+                  <a:ext cx="720000" cy="720000"/>
+                </a:xfrm>
+                <a:prstGeom prst="ellipse">
+                  <a:avLst/>
+                </a:prstGeom>
+                <a:solidFill>
+                  <a:schemeClr val="bg1">
+                    <a:lumMod val="65000"/>
+                  </a:schemeClr>
+                </a:solidFill>
+              </p:spPr>
+              <p:style>
+                <a:lnRef idx="2">
+                  <a:schemeClr val="accent1">
+                    <a:shade val="15000"/>
+                  </a:schemeClr>
+                </a:lnRef>
+                <a:fillRef idx="1">
+                  <a:schemeClr val="accent1"/>
+                </a:fillRef>
+                <a:effectRef idx="0">
+                  <a:schemeClr val="accent1"/>
+                </a:effectRef>
+                <a:fontRef idx="minor">
+                  <a:schemeClr val="lt1"/>
+                </a:fontRef>
+              </p:style>
+              <p:txBody>
+                <a:bodyPr rtlCol="0" anchor="ctr"/>
+                <a:lstStyle/>
+                <a:p>
+                  <a:pPr algn="ctr"/>
+                  <a:endParaRPr lang="pt-BR"/>
+                </a:p>
+              </p:txBody>
+            </p:sp>
+            <p:sp>
+              <p:nvSpPr>
+                <p:cNvPr id="42" name="Oval 41">
+                  <a:extLst>
+                    <a:ext uri="{FF2B5EF4-FFF2-40B4-BE49-F238E27FC236}">
+                      <a16:creationId xmlns:a16="http://schemas.microsoft.com/office/drawing/2014/main" id="{046B6F47-DA82-7DD6-0E13-CF12C5F51CA5}"/>
+                    </a:ext>
+                  </a:extLst>
+                </p:cNvPr>
+                <p:cNvSpPr/>
+                <p:nvPr/>
+              </p:nvSpPr>
+              <p:spPr>
+                <a:xfrm>
+                  <a:off x="5578998" y="4416059"/>
+                  <a:ext cx="720000" cy="720000"/>
+                </a:xfrm>
+                <a:prstGeom prst="ellipse">
+                  <a:avLst/>
+                </a:prstGeom>
+                <a:solidFill>
+                  <a:schemeClr val="bg1">
+                    <a:lumMod val="65000"/>
+                  </a:schemeClr>
+                </a:solidFill>
+              </p:spPr>
+              <p:style>
+                <a:lnRef idx="2">
+                  <a:schemeClr val="accent1">
+                    <a:shade val="15000"/>
+                  </a:schemeClr>
+                </a:lnRef>
+                <a:fillRef idx="1">
+                  <a:schemeClr val="accent1"/>
+                </a:fillRef>
+                <a:effectRef idx="0">
+                  <a:schemeClr val="accent1"/>
+                </a:effectRef>
+                <a:fontRef idx="minor">
+                  <a:schemeClr val="lt1"/>
+                </a:fontRef>
+              </p:style>
+              <p:txBody>
+                <a:bodyPr rtlCol="0" anchor="ctr"/>
+                <a:lstStyle/>
+                <a:p>
+                  <a:pPr algn="ctr"/>
+                  <a:endParaRPr lang="pt-BR"/>
+                </a:p>
+              </p:txBody>
+            </p:sp>
+            <p:sp>
+              <p:nvSpPr>
+                <p:cNvPr id="43" name="Oval 42">
+                  <a:extLst>
+                    <a:ext uri="{FF2B5EF4-FFF2-40B4-BE49-F238E27FC236}">
+                      <a16:creationId xmlns:a16="http://schemas.microsoft.com/office/drawing/2014/main" id="{7DC8D8D2-96AA-7DD0-7AEE-C33FB2A88FA8}"/>
+                    </a:ext>
+                  </a:extLst>
+                </p:cNvPr>
+                <p:cNvSpPr/>
+                <p:nvPr/>
+              </p:nvSpPr>
+              <p:spPr>
+                <a:xfrm>
+                  <a:off x="3781064" y="2605269"/>
+                  <a:ext cx="720000" cy="720000"/>
+                </a:xfrm>
+                <a:prstGeom prst="ellipse">
+                  <a:avLst/>
+                </a:prstGeom>
+                <a:solidFill>
+                  <a:schemeClr val="bg1">
+                    <a:lumMod val="65000"/>
+                  </a:schemeClr>
+                </a:solidFill>
+              </p:spPr>
+              <p:style>
+                <a:lnRef idx="2">
+                  <a:schemeClr val="accent1">
+                    <a:shade val="15000"/>
+                  </a:schemeClr>
+                </a:lnRef>
+                <a:fillRef idx="1">
+                  <a:schemeClr val="accent1"/>
+                </a:fillRef>
+                <a:effectRef idx="0">
+                  <a:schemeClr val="accent1"/>
+                </a:effectRef>
+                <a:fontRef idx="minor">
+                  <a:schemeClr val="lt1"/>
+                </a:fontRef>
+              </p:style>
+              <p:txBody>
+                <a:bodyPr rtlCol="0" anchor="ctr"/>
+                <a:lstStyle/>
+                <a:p>
+                  <a:pPr algn="ctr"/>
+                  <a:endParaRPr lang="pt-BR"/>
+                </a:p>
+              </p:txBody>
+            </p:sp>
+            <p:sp>
+              <p:nvSpPr>
+                <p:cNvPr id="44" name="Oval 43">
+                  <a:extLst>
+                    <a:ext uri="{FF2B5EF4-FFF2-40B4-BE49-F238E27FC236}">
+                      <a16:creationId xmlns:a16="http://schemas.microsoft.com/office/drawing/2014/main" id="{5419599F-C9CA-13EC-2012-EB03B52651E3}"/>
+                    </a:ext>
+                  </a:extLst>
+                </p:cNvPr>
+                <p:cNvSpPr/>
+                <p:nvPr/>
+              </p:nvSpPr>
+              <p:spPr>
+                <a:xfrm>
+                  <a:off x="7376932" y="2605269"/>
+                  <a:ext cx="720000" cy="720000"/>
+                </a:xfrm>
+                <a:prstGeom prst="ellipse">
+                  <a:avLst/>
+                </a:prstGeom>
+                <a:solidFill>
+                  <a:schemeClr val="bg1">
+                    <a:lumMod val="65000"/>
+                  </a:schemeClr>
+                </a:solidFill>
+              </p:spPr>
+              <p:style>
+                <a:lnRef idx="2">
+                  <a:schemeClr val="accent1">
+                    <a:shade val="15000"/>
+                  </a:schemeClr>
+                </a:lnRef>
+                <a:fillRef idx="1">
+                  <a:schemeClr val="accent1"/>
+                </a:fillRef>
+                <a:effectRef idx="0">
+                  <a:schemeClr val="accent1"/>
+                </a:effectRef>
+                <a:fontRef idx="minor">
+                  <a:schemeClr val="lt1"/>
+                </a:fontRef>
+              </p:style>
+              <p:txBody>
+                <a:bodyPr rtlCol="0" anchor="ctr"/>
+                <a:lstStyle/>
+                <a:p>
+                  <a:pPr algn="ctr"/>
+                  <a:endParaRPr lang="pt-BR"/>
+                </a:p>
+              </p:txBody>
+            </p:sp>
+            <p:sp>
+              <p:nvSpPr>
+                <p:cNvPr id="45" name="Oval 44">
+                  <a:extLst>
+                    <a:ext uri="{FF2B5EF4-FFF2-40B4-BE49-F238E27FC236}">
+                      <a16:creationId xmlns:a16="http://schemas.microsoft.com/office/drawing/2014/main" id="{71339A56-93E1-765C-C2D1-EBFB56920F55}"/>
+                    </a:ext>
+                  </a:extLst>
+                </p:cNvPr>
+                <p:cNvSpPr/>
+                <p:nvPr/>
+              </p:nvSpPr>
+              <p:spPr>
+                <a:xfrm>
+                  <a:off x="4138998" y="1165269"/>
+                  <a:ext cx="3600000" cy="3600000"/>
+                </a:xfrm>
+                <a:prstGeom prst="ellipse">
+                  <a:avLst/>
+                </a:prstGeom>
+                <a:noFill/>
+                <a:ln>
+                  <a:solidFill>
+                    <a:schemeClr val="tx1"/>
+                  </a:solidFill>
+                </a:ln>
+              </p:spPr>
+              <p:style>
+                <a:lnRef idx="2">
+                  <a:schemeClr val="accent1">
+                    <a:shade val="15000"/>
+                  </a:schemeClr>
+                </a:lnRef>
+                <a:fillRef idx="1">
+                  <a:schemeClr val="accent1"/>
+                </a:fillRef>
+                <a:effectRef idx="0">
+                  <a:schemeClr val="accent1"/>
+                </a:effectRef>
+                <a:fontRef idx="minor">
+                  <a:schemeClr val="lt1"/>
+                </a:fontRef>
+              </p:style>
+              <p:txBody>
+                <a:bodyPr rtlCol="0" anchor="ctr"/>
+                <a:lstStyle/>
+                <a:p>
+                  <a:pPr algn="ctr"/>
+                  <a:endParaRPr lang="pt-BR"/>
+                </a:p>
+              </p:txBody>
+            </p:sp>
+            <p:sp>
+              <p:nvSpPr>
+                <p:cNvPr id="46" name="Arrow: Curved Right 45">
+                  <a:extLst>
+                    <a:ext uri="{FF2B5EF4-FFF2-40B4-BE49-F238E27FC236}">
+                      <a16:creationId xmlns:a16="http://schemas.microsoft.com/office/drawing/2014/main" id="{6EBDDC76-53D4-1104-2C40-B2062D8FAF8D}"/>
+                    </a:ext>
+                  </a:extLst>
+                </p:cNvPr>
+                <p:cNvSpPr/>
+                <p:nvPr/>
+              </p:nvSpPr>
+              <p:spPr>
+                <a:xfrm rot="5400000">
+                  <a:off x="5647250" y="331428"/>
+                  <a:ext cx="523916" cy="1177737"/>
+                </a:xfrm>
+                <a:prstGeom prst="curvedRightArrow">
+                  <a:avLst>
+                    <a:gd name="adj1" fmla="val 0"/>
+                    <a:gd name="adj2" fmla="val 19653"/>
+                    <a:gd name="adj3" fmla="val 36076"/>
+                  </a:avLst>
+                </a:prstGeom>
+                <a:solidFill>
+                  <a:schemeClr val="tx1"/>
+                </a:solidFill>
+                <a:ln>
+                  <a:solidFill>
+                    <a:schemeClr val="tx1"/>
+                  </a:solidFill>
+                </a:ln>
+              </p:spPr>
+              <p:style>
+                <a:lnRef idx="2">
+                  <a:schemeClr val="accent1">
+                    <a:shade val="15000"/>
+                  </a:schemeClr>
+                </a:lnRef>
+                <a:fillRef idx="1">
+                  <a:schemeClr val="accent1"/>
+                </a:fillRef>
+                <a:effectRef idx="0">
+                  <a:schemeClr val="accent1"/>
+                </a:effectRef>
+                <a:fontRef idx="minor">
+                  <a:schemeClr val="lt1"/>
+                </a:fontRef>
+              </p:style>
+              <p:txBody>
+                <a:bodyPr rtlCol="0" anchor="ctr"/>
+                <a:lstStyle/>
+                <a:p>
+                  <a:pPr algn="ctr"/>
+                  <a:endParaRPr lang="pt-BR">
+                    <a:solidFill>
+                      <a:schemeClr val="tx1"/>
+                    </a:solidFill>
+                  </a:endParaRPr>
+                </a:p>
+              </p:txBody>
+            </p:sp>
+            <p:sp>
+              <p:nvSpPr>
+                <p:cNvPr id="47" name="Arrow: Curved Right 46">
+                  <a:extLst>
+                    <a:ext uri="{FF2B5EF4-FFF2-40B4-BE49-F238E27FC236}">
+                      <a16:creationId xmlns:a16="http://schemas.microsoft.com/office/drawing/2014/main" id="{2A8C70C0-AD08-079D-F06D-C2FB7D90B7D3}"/>
+                    </a:ext>
+                  </a:extLst>
+                </p:cNvPr>
+                <p:cNvSpPr/>
+                <p:nvPr/>
+              </p:nvSpPr>
+              <p:spPr>
+                <a:xfrm rot="16200000">
+                  <a:off x="5724151" y="950968"/>
+                  <a:ext cx="429762" cy="1105453"/>
+                </a:xfrm>
+                <a:prstGeom prst="curvedRightArrow">
+                  <a:avLst>
+                    <a:gd name="adj1" fmla="val 0"/>
+                    <a:gd name="adj2" fmla="val 19653"/>
+                    <a:gd name="adj3" fmla="val 36076"/>
+                  </a:avLst>
+                </a:prstGeom>
+                <a:solidFill>
+                  <a:schemeClr val="tx1"/>
+                </a:solidFill>
+                <a:ln>
+                  <a:solidFill>
+                    <a:schemeClr val="tx1"/>
+                  </a:solidFill>
+                </a:ln>
+              </p:spPr>
+              <p:style>
+                <a:lnRef idx="2">
+                  <a:schemeClr val="accent1">
+                    <a:shade val="15000"/>
+                  </a:schemeClr>
+                </a:lnRef>
+                <a:fillRef idx="1">
+                  <a:schemeClr val="accent1"/>
+                </a:fillRef>
+                <a:effectRef idx="0">
+                  <a:schemeClr val="accent1"/>
+                </a:effectRef>
+                <a:fontRef idx="minor">
+                  <a:schemeClr val="lt1"/>
+                </a:fontRef>
+              </p:style>
+              <p:txBody>
+                <a:bodyPr rtlCol="0" anchor="ctr"/>
+                <a:lstStyle/>
+                <a:p>
+                  <a:pPr algn="ctr"/>
+                  <a:endParaRPr lang="pt-BR">
+                    <a:solidFill>
+                      <a:schemeClr val="tx1"/>
+                    </a:solidFill>
+                  </a:endParaRPr>
+                </a:p>
+              </p:txBody>
+            </p:sp>
+            <p:sp>
+              <p:nvSpPr>
+                <p:cNvPr id="48" name="Arrow: Curved Right 47">
+                  <a:extLst>
+                    <a:ext uri="{FF2B5EF4-FFF2-40B4-BE49-F238E27FC236}">
+                      <a16:creationId xmlns:a16="http://schemas.microsoft.com/office/drawing/2014/main" id="{AF096836-0E2C-58B3-1784-5FCD6D24EDD0}"/>
+                    </a:ext>
+                  </a:extLst>
+                </p:cNvPr>
+                <p:cNvSpPr/>
+                <p:nvPr/>
+              </p:nvSpPr>
+              <p:spPr>
+                <a:xfrm rot="5400000">
+                  <a:off x="5694328" y="3917739"/>
+                  <a:ext cx="429762" cy="1013661"/>
+                </a:xfrm>
+                <a:prstGeom prst="curvedRightArrow">
+                  <a:avLst>
+                    <a:gd name="adj1" fmla="val 0"/>
+                    <a:gd name="adj2" fmla="val 19653"/>
+                    <a:gd name="adj3" fmla="val 36076"/>
+                  </a:avLst>
+                </a:prstGeom>
+                <a:solidFill>
+                  <a:schemeClr val="tx1"/>
+                </a:solidFill>
+                <a:ln>
+                  <a:solidFill>
+                    <a:schemeClr val="tx1"/>
+                  </a:solidFill>
+                </a:ln>
+              </p:spPr>
+              <p:style>
+                <a:lnRef idx="2">
+                  <a:schemeClr val="accent1">
+                    <a:shade val="15000"/>
+                  </a:schemeClr>
+                </a:lnRef>
+                <a:fillRef idx="1">
+                  <a:schemeClr val="accent1"/>
+                </a:fillRef>
+                <a:effectRef idx="0">
+                  <a:schemeClr val="accent1"/>
+                </a:effectRef>
+                <a:fontRef idx="minor">
+                  <a:schemeClr val="lt1"/>
+                </a:fontRef>
+              </p:style>
+              <p:txBody>
+                <a:bodyPr rtlCol="0" anchor="ctr"/>
+                <a:lstStyle/>
+                <a:p>
+                  <a:pPr algn="ctr"/>
+                  <a:endParaRPr lang="pt-BR">
+                    <a:solidFill>
+                      <a:schemeClr val="tx1"/>
+                    </a:solidFill>
+                  </a:endParaRPr>
+                </a:p>
+              </p:txBody>
+            </p:sp>
+            <p:sp>
+              <p:nvSpPr>
+                <p:cNvPr id="49" name="Arrow: Curved Right 48">
+                  <a:extLst>
+                    <a:ext uri="{FF2B5EF4-FFF2-40B4-BE49-F238E27FC236}">
+                      <a16:creationId xmlns:a16="http://schemas.microsoft.com/office/drawing/2014/main" id="{B7D1909B-D66F-C89D-4BAC-DD4F1ED21EB6}"/>
+                    </a:ext>
+                  </a:extLst>
+                </p:cNvPr>
+                <p:cNvSpPr/>
+                <p:nvPr/>
+              </p:nvSpPr>
+              <p:spPr>
+                <a:xfrm rot="16200000">
+                  <a:off x="5693602" y="4451367"/>
+                  <a:ext cx="523012" cy="1105453"/>
+                </a:xfrm>
+                <a:prstGeom prst="curvedRightArrow">
+                  <a:avLst>
+                    <a:gd name="adj1" fmla="val 0"/>
+                    <a:gd name="adj2" fmla="val 19653"/>
+                    <a:gd name="adj3" fmla="val 36076"/>
+                  </a:avLst>
+                </a:prstGeom>
+                <a:solidFill>
+                  <a:schemeClr val="tx1"/>
+                </a:solidFill>
+                <a:ln>
+                  <a:solidFill>
+                    <a:schemeClr val="tx1"/>
+                  </a:solidFill>
+                </a:ln>
+              </p:spPr>
+              <p:style>
+                <a:lnRef idx="2">
+                  <a:schemeClr val="accent1">
+                    <a:shade val="15000"/>
+                  </a:schemeClr>
+                </a:lnRef>
+                <a:fillRef idx="1">
+                  <a:schemeClr val="accent1"/>
+                </a:fillRef>
+                <a:effectRef idx="0">
+                  <a:schemeClr val="accent1"/>
+                </a:effectRef>
+                <a:fontRef idx="minor">
+                  <a:schemeClr val="lt1"/>
+                </a:fontRef>
+              </p:style>
+              <p:txBody>
+                <a:bodyPr rtlCol="0" anchor="ctr"/>
+                <a:lstStyle/>
+                <a:p>
+                  <a:pPr algn="ctr"/>
+                  <a:endParaRPr lang="pt-BR">
+                    <a:solidFill>
+                      <a:schemeClr val="tx1"/>
+                    </a:solidFill>
+                  </a:endParaRPr>
+                </a:p>
+              </p:txBody>
+            </p:sp>
+            <p:sp>
+              <p:nvSpPr>
+                <p:cNvPr id="50" name="Arrow: Curved Right 49">
+                  <a:extLst>
+                    <a:ext uri="{FF2B5EF4-FFF2-40B4-BE49-F238E27FC236}">
+                      <a16:creationId xmlns:a16="http://schemas.microsoft.com/office/drawing/2014/main" id="{520E8935-AA66-1B0B-1B31-557CB696D708}"/>
+                    </a:ext>
+                  </a:extLst>
+                </p:cNvPr>
+                <p:cNvSpPr/>
+                <p:nvPr/>
+              </p:nvSpPr>
+              <p:spPr>
+                <a:xfrm>
+                  <a:off x="3571792" y="2453118"/>
+                  <a:ext cx="523916" cy="1105454"/>
+                </a:xfrm>
+                <a:prstGeom prst="curvedRightArrow">
+                  <a:avLst>
+                    <a:gd name="adj1" fmla="val 0"/>
+                    <a:gd name="adj2" fmla="val 19653"/>
+                    <a:gd name="adj3" fmla="val 36076"/>
+                  </a:avLst>
+                </a:prstGeom>
+                <a:solidFill>
+                  <a:schemeClr val="tx1"/>
+                </a:solidFill>
+                <a:ln>
+                  <a:solidFill>
+                    <a:schemeClr val="tx1"/>
+                  </a:solidFill>
+                </a:ln>
+              </p:spPr>
+              <p:style>
+                <a:lnRef idx="2">
+                  <a:schemeClr val="accent1">
+                    <a:shade val="15000"/>
+                  </a:schemeClr>
+                </a:lnRef>
+                <a:fillRef idx="1">
+                  <a:schemeClr val="accent1"/>
+                </a:fillRef>
+                <a:effectRef idx="0">
+                  <a:schemeClr val="accent1"/>
+                </a:effectRef>
+                <a:fontRef idx="minor">
+                  <a:schemeClr val="lt1"/>
+                </a:fontRef>
+              </p:style>
+              <p:txBody>
+                <a:bodyPr rtlCol="0" anchor="ctr"/>
+                <a:lstStyle/>
+                <a:p>
+                  <a:pPr algn="ctr"/>
+                  <a:endParaRPr lang="pt-BR">
+                    <a:solidFill>
+                      <a:schemeClr val="tx1"/>
+                    </a:solidFill>
+                  </a:endParaRPr>
+                </a:p>
+              </p:txBody>
+            </p:sp>
+            <p:sp>
+              <p:nvSpPr>
+                <p:cNvPr id="51" name="Arrow: Curved Right 50">
+                  <a:extLst>
+                    <a:ext uri="{FF2B5EF4-FFF2-40B4-BE49-F238E27FC236}">
+                      <a16:creationId xmlns:a16="http://schemas.microsoft.com/office/drawing/2014/main" id="{E0BB5A97-A770-97B0-31CB-B573A2326176}"/>
+                    </a:ext>
+                  </a:extLst>
+                </p:cNvPr>
+                <p:cNvSpPr/>
+                <p:nvPr/>
+              </p:nvSpPr>
+              <p:spPr>
+                <a:xfrm rot="10800000">
+                  <a:off x="4234974" y="2412542"/>
+                  <a:ext cx="523916" cy="1105453"/>
+                </a:xfrm>
+                <a:prstGeom prst="curvedRightArrow">
+                  <a:avLst>
+                    <a:gd name="adj1" fmla="val 0"/>
+                    <a:gd name="adj2" fmla="val 19653"/>
+                    <a:gd name="adj3" fmla="val 36076"/>
+                  </a:avLst>
+                </a:prstGeom>
+                <a:solidFill>
+                  <a:schemeClr val="tx1"/>
+                </a:solidFill>
+                <a:ln>
+                  <a:solidFill>
+                    <a:schemeClr val="tx1"/>
+                  </a:solidFill>
+                </a:ln>
+              </p:spPr>
+              <p:style>
+                <a:lnRef idx="2">
+                  <a:schemeClr val="accent1">
+                    <a:shade val="15000"/>
+                  </a:schemeClr>
+                </a:lnRef>
+                <a:fillRef idx="1">
+                  <a:schemeClr val="accent1"/>
+                </a:fillRef>
+                <a:effectRef idx="0">
+                  <a:schemeClr val="accent1"/>
+                </a:effectRef>
+                <a:fontRef idx="minor">
+                  <a:schemeClr val="lt1"/>
+                </a:fontRef>
+              </p:style>
+              <p:txBody>
+                <a:bodyPr rtlCol="0" anchor="ctr"/>
+                <a:lstStyle/>
+                <a:p>
+                  <a:pPr algn="ctr"/>
+                  <a:endParaRPr lang="pt-BR">
+                    <a:solidFill>
+                      <a:schemeClr val="tx1"/>
+                    </a:solidFill>
+                  </a:endParaRPr>
+                </a:p>
+              </p:txBody>
+            </p:sp>
+            <p:sp>
+              <p:nvSpPr>
+                <p:cNvPr id="52" name="Arrow: Curved Right 51">
+                  <a:extLst>
+                    <a:ext uri="{FF2B5EF4-FFF2-40B4-BE49-F238E27FC236}">
+                      <a16:creationId xmlns:a16="http://schemas.microsoft.com/office/drawing/2014/main" id="{96A7DEB9-2882-DCEB-FF27-75A2C9BE0448}"/>
+                    </a:ext>
+                  </a:extLst>
+                </p:cNvPr>
+                <p:cNvSpPr/>
+                <p:nvPr/>
+              </p:nvSpPr>
+              <p:spPr>
+                <a:xfrm>
+                  <a:off x="7167660" y="2493696"/>
+                  <a:ext cx="432072" cy="1024299"/>
+                </a:xfrm>
+                <a:prstGeom prst="curvedRightArrow">
+                  <a:avLst>
+                    <a:gd name="adj1" fmla="val 0"/>
+                    <a:gd name="adj2" fmla="val 19653"/>
+                    <a:gd name="adj3" fmla="val 36076"/>
+                  </a:avLst>
+                </a:prstGeom>
+                <a:solidFill>
+                  <a:schemeClr val="tx1"/>
+                </a:solidFill>
+                <a:ln>
+                  <a:solidFill>
+                    <a:schemeClr val="tx1"/>
+                  </a:solidFill>
+                </a:ln>
+              </p:spPr>
+              <p:style>
+                <a:lnRef idx="2">
+                  <a:schemeClr val="accent1">
+                    <a:shade val="15000"/>
+                  </a:schemeClr>
+                </a:lnRef>
+                <a:fillRef idx="1">
+                  <a:schemeClr val="accent1"/>
+                </a:fillRef>
+                <a:effectRef idx="0">
+                  <a:schemeClr val="accent1"/>
+                </a:effectRef>
+                <a:fontRef idx="minor">
+                  <a:schemeClr val="lt1"/>
+                </a:fontRef>
+              </p:style>
+              <p:txBody>
+                <a:bodyPr rtlCol="0" anchor="ctr"/>
+                <a:lstStyle/>
+                <a:p>
+                  <a:pPr algn="ctr"/>
+                  <a:endParaRPr lang="pt-BR">
+                    <a:solidFill>
+                      <a:schemeClr val="tx1"/>
+                    </a:solidFill>
+                  </a:endParaRPr>
+                </a:p>
+              </p:txBody>
+            </p:sp>
+            <p:sp>
+              <p:nvSpPr>
+                <p:cNvPr id="53" name="Arrow: Curved Right 52">
+                  <a:extLst>
+                    <a:ext uri="{FF2B5EF4-FFF2-40B4-BE49-F238E27FC236}">
+                      <a16:creationId xmlns:a16="http://schemas.microsoft.com/office/drawing/2014/main" id="{E09CF5EE-8EE2-0971-9A00-A420D77A2A21}"/>
+                    </a:ext>
+                  </a:extLst>
+                </p:cNvPr>
+                <p:cNvSpPr/>
+                <p:nvPr/>
+              </p:nvSpPr>
+              <p:spPr>
+                <a:xfrm rot="10800000">
+                  <a:off x="7738998" y="2427781"/>
+                  <a:ext cx="567206" cy="1090213"/>
+                </a:xfrm>
+                <a:prstGeom prst="curvedRightArrow">
+                  <a:avLst>
+                    <a:gd name="adj1" fmla="val 0"/>
+                    <a:gd name="adj2" fmla="val 19653"/>
+                    <a:gd name="adj3" fmla="val 36076"/>
+                  </a:avLst>
+                </a:prstGeom>
+                <a:solidFill>
+                  <a:schemeClr val="tx1"/>
+                </a:solidFill>
+                <a:ln>
+                  <a:solidFill>
+                    <a:schemeClr val="tx1"/>
+                  </a:solidFill>
+                </a:ln>
+              </p:spPr>
+              <p:style>
+                <a:lnRef idx="2">
+                  <a:schemeClr val="accent1">
+                    <a:shade val="15000"/>
+                  </a:schemeClr>
+                </a:lnRef>
+                <a:fillRef idx="1">
+                  <a:schemeClr val="accent1"/>
+                </a:fillRef>
+                <a:effectRef idx="0">
+                  <a:schemeClr val="accent1"/>
+                </a:effectRef>
+                <a:fontRef idx="minor">
+                  <a:schemeClr val="lt1"/>
+                </a:fontRef>
+              </p:style>
+              <p:txBody>
+                <a:bodyPr rtlCol="0" anchor="ctr"/>
+                <a:lstStyle/>
+                <a:p>
+                  <a:pPr algn="ctr"/>
+                  <a:endParaRPr lang="pt-BR">
+                    <a:solidFill>
+                      <a:schemeClr val="tx1"/>
+                    </a:solidFill>
+                  </a:endParaRPr>
+                </a:p>
+              </p:txBody>
+            </p:sp>
+            <p:grpSp>
+              <p:nvGrpSpPr>
+                <p:cNvPr id="54" name="Group 53">
+                  <a:extLst>
+                    <a:ext uri="{FF2B5EF4-FFF2-40B4-BE49-F238E27FC236}">
+                      <a16:creationId xmlns:a16="http://schemas.microsoft.com/office/drawing/2014/main" id="{E0CBAD50-B2E0-A4E2-2774-707FA84042CD}"/>
+                    </a:ext>
+                  </a:extLst>
+                </p:cNvPr>
+                <p:cNvGrpSpPr/>
+                <p:nvPr/>
+              </p:nvGrpSpPr>
+              <p:grpSpPr>
+                <a:xfrm>
+                  <a:off x="3988277" y="776296"/>
+                  <a:ext cx="2520000" cy="2664000"/>
+                  <a:chOff x="3952252" y="765000"/>
+                  <a:chExt cx="2520000" cy="2664000"/>
+                </a:xfrm>
+              </p:grpSpPr>
+              <p:sp>
+                <p:nvSpPr>
+                  <p:cNvPr id="64" name="Arc 63">
+                    <a:extLst>
+                      <a:ext uri="{FF2B5EF4-FFF2-40B4-BE49-F238E27FC236}">
+                        <a16:creationId xmlns:a16="http://schemas.microsoft.com/office/drawing/2014/main" id="{0FD36958-D4DC-FFC1-65B6-5A2650DE4583}"/>
+                      </a:ext>
+                    </a:extLst>
+                  </p:cNvPr>
+                  <p:cNvSpPr/>
+                  <p:nvPr/>
+                </p:nvSpPr>
+                <p:spPr>
+                  <a:xfrm rot="16200000">
+                    <a:off x="3952252" y="909000"/>
+                    <a:ext cx="2520000" cy="2520000"/>
+                  </a:xfrm>
+                  <a:prstGeom prst="arc">
+                    <a:avLst>
+                      <a:gd name="adj1" fmla="val 16588158"/>
+                      <a:gd name="adj2" fmla="val 21192311"/>
+                    </a:avLst>
+                  </a:prstGeom>
+                  <a:ln w="38100">
+                    <a:solidFill>
+                      <a:srgbClr val="FF0000"/>
+                    </a:solidFill>
+                  </a:ln>
+                </p:spPr>
+                <p:style>
+                  <a:lnRef idx="2">
+                    <a:schemeClr val="accent1"/>
+                  </a:lnRef>
+                  <a:fillRef idx="0">
+                    <a:schemeClr val="accent1"/>
+                  </a:fillRef>
+                  <a:effectRef idx="1">
+                    <a:schemeClr val="accent1"/>
+                  </a:effectRef>
+                  <a:fontRef idx="minor">
+                    <a:schemeClr val="tx1"/>
+                  </a:fontRef>
+                </p:style>
+                <p:txBody>
+                  <a:bodyPr rtlCol="0" anchor="ctr"/>
+                  <a:lstStyle/>
+                  <a:p>
+                    <a:pPr algn="ctr"/>
+                    <a:endParaRPr lang="pt-BR" dirty="0"/>
+                  </a:p>
+                </p:txBody>
+              </p:sp>
+              <p:sp>
+                <p:nvSpPr>
+                  <p:cNvPr id="65" name="Isosceles Triangle 64">
+                    <a:extLst>
+                      <a:ext uri="{FF2B5EF4-FFF2-40B4-BE49-F238E27FC236}">
+                        <a16:creationId xmlns:a16="http://schemas.microsoft.com/office/drawing/2014/main" id="{E7684FD0-4D75-F821-F3B2-AA0915DF9C17}"/>
+                      </a:ext>
+                    </a:extLst>
+                  </p:cNvPr>
+                  <p:cNvSpPr/>
+                  <p:nvPr/>
+                </p:nvSpPr>
+                <p:spPr>
+                  <a:xfrm rot="4447299">
+                    <a:off x="4889042" y="765000"/>
+                    <a:ext cx="288000" cy="288000"/>
+                  </a:xfrm>
+                  <a:prstGeom prst="triangle">
+                    <a:avLst/>
+                  </a:prstGeom>
+                  <a:solidFill>
+                    <a:srgbClr val="FF0000"/>
+                  </a:solidFill>
+                  <a:ln>
+                    <a:solidFill>
+                      <a:srgbClr val="FF0000"/>
+                    </a:solidFill>
+                  </a:ln>
+                </p:spPr>
+                <p:style>
+                  <a:lnRef idx="2">
+                    <a:schemeClr val="accent1">
+                      <a:shade val="15000"/>
+                    </a:schemeClr>
+                  </a:lnRef>
+                  <a:fillRef idx="1">
+                    <a:schemeClr val="accent1"/>
+                  </a:fillRef>
+                  <a:effectRef idx="0">
+                    <a:schemeClr val="accent1"/>
+                  </a:effectRef>
+                  <a:fontRef idx="minor">
+                    <a:schemeClr val="lt1"/>
+                  </a:fontRef>
+                </p:style>
+                <p:txBody>
+                  <a:bodyPr rtlCol="0" anchor="ctr"/>
+                  <a:lstStyle/>
+                  <a:p>
+                    <a:pPr algn="ctr"/>
+                    <a:endParaRPr lang="pt-BR"/>
+                  </a:p>
+                </p:txBody>
+              </p:sp>
+            </p:grpSp>
+            <p:grpSp>
+              <p:nvGrpSpPr>
+                <p:cNvPr id="55" name="Group 54">
+                  <a:extLst>
+                    <a:ext uri="{FF2B5EF4-FFF2-40B4-BE49-F238E27FC236}">
+                      <a16:creationId xmlns:a16="http://schemas.microsoft.com/office/drawing/2014/main" id="{31F7F26E-DBD9-667F-9CA3-14D754EC7123}"/>
+                    </a:ext>
+                  </a:extLst>
+                </p:cNvPr>
+                <p:cNvGrpSpPr/>
+                <p:nvPr/>
+              </p:nvGrpSpPr>
+              <p:grpSpPr>
+                <a:xfrm rot="10800000">
+                  <a:off x="5347108" y="2505921"/>
+                  <a:ext cx="2520000" cy="2676224"/>
+                  <a:chOff x="3952252" y="752776"/>
+                  <a:chExt cx="2520000" cy="2676224"/>
+                </a:xfrm>
+              </p:grpSpPr>
+              <p:sp>
+                <p:nvSpPr>
+                  <p:cNvPr id="62" name="Arc 61">
+                    <a:extLst>
+                      <a:ext uri="{FF2B5EF4-FFF2-40B4-BE49-F238E27FC236}">
+                        <a16:creationId xmlns:a16="http://schemas.microsoft.com/office/drawing/2014/main" id="{43B1B338-7C1A-1ACD-DC46-54FF9D1A97F9}"/>
+                      </a:ext>
+                    </a:extLst>
+                  </p:cNvPr>
+                  <p:cNvSpPr/>
+                  <p:nvPr/>
+                </p:nvSpPr>
+                <p:spPr>
+                  <a:xfrm rot="16200000">
+                    <a:off x="3952252" y="909000"/>
+                    <a:ext cx="2520000" cy="2520000"/>
+                  </a:xfrm>
+                  <a:prstGeom prst="arc">
+                    <a:avLst>
+                      <a:gd name="adj1" fmla="val 16588158"/>
+                      <a:gd name="adj2" fmla="val 21192311"/>
+                    </a:avLst>
+                  </a:prstGeom>
+                  <a:ln w="38100">
+                    <a:solidFill>
+                      <a:srgbClr val="FF0000"/>
+                    </a:solidFill>
+                  </a:ln>
+                </p:spPr>
+                <p:style>
+                  <a:lnRef idx="2">
+                    <a:schemeClr val="accent1"/>
+                  </a:lnRef>
+                  <a:fillRef idx="0">
+                    <a:schemeClr val="accent1"/>
+                  </a:fillRef>
+                  <a:effectRef idx="1">
+                    <a:schemeClr val="accent1"/>
+                  </a:effectRef>
+                  <a:fontRef idx="minor">
+                    <a:schemeClr val="tx1"/>
+                  </a:fontRef>
+                </p:style>
+                <p:txBody>
+                  <a:bodyPr rtlCol="0" anchor="ctr"/>
+                  <a:lstStyle/>
+                  <a:p>
+                    <a:pPr algn="ctr"/>
+                    <a:endParaRPr lang="pt-BR" dirty="0"/>
+                  </a:p>
+                </p:txBody>
+              </p:sp>
+              <p:sp>
+                <p:nvSpPr>
+                  <p:cNvPr id="63" name="Isosceles Triangle 62">
+                    <a:extLst>
+                      <a:ext uri="{FF2B5EF4-FFF2-40B4-BE49-F238E27FC236}">
+                        <a16:creationId xmlns:a16="http://schemas.microsoft.com/office/drawing/2014/main" id="{E564DB17-07E3-8072-6BE8-E7DD912EC467}"/>
+                      </a:ext>
+                    </a:extLst>
+                  </p:cNvPr>
+                  <p:cNvSpPr/>
+                  <p:nvPr/>
+                </p:nvSpPr>
+                <p:spPr>
+                  <a:xfrm rot="4571183">
+                    <a:off x="4917550" y="752776"/>
+                    <a:ext cx="288000" cy="288000"/>
+                  </a:xfrm>
+                  <a:prstGeom prst="triangle">
+                    <a:avLst/>
+                  </a:prstGeom>
+                  <a:solidFill>
+                    <a:srgbClr val="FF0000"/>
+                  </a:solidFill>
+                  <a:ln>
+                    <a:solidFill>
+                      <a:srgbClr val="FF0000"/>
+                    </a:solidFill>
+                  </a:ln>
+                </p:spPr>
+                <p:style>
+                  <a:lnRef idx="2">
+                    <a:schemeClr val="accent1">
+                      <a:shade val="15000"/>
+                    </a:schemeClr>
+                  </a:lnRef>
+                  <a:fillRef idx="1">
+                    <a:schemeClr val="accent1"/>
+                  </a:fillRef>
+                  <a:effectRef idx="0">
+                    <a:schemeClr val="accent1"/>
+                  </a:effectRef>
+                  <a:fontRef idx="minor">
+                    <a:schemeClr val="lt1"/>
+                  </a:fontRef>
+                </p:style>
+                <p:txBody>
+                  <a:bodyPr rtlCol="0" anchor="ctr"/>
+                  <a:lstStyle/>
+                  <a:p>
+                    <a:pPr algn="ctr"/>
+                    <a:endParaRPr lang="pt-BR"/>
+                  </a:p>
+                </p:txBody>
+              </p:sp>
+            </p:grpSp>
+            <p:grpSp>
+              <p:nvGrpSpPr>
+                <p:cNvPr id="56" name="Group 55">
+                  <a:extLst>
+                    <a:ext uri="{FF2B5EF4-FFF2-40B4-BE49-F238E27FC236}">
+                      <a16:creationId xmlns:a16="http://schemas.microsoft.com/office/drawing/2014/main" id="{2B775C34-6F81-30E8-3BF6-77537CDEF719}"/>
+                    </a:ext>
+                  </a:extLst>
+                </p:cNvPr>
+                <p:cNvGrpSpPr/>
+                <p:nvPr/>
+              </p:nvGrpSpPr>
+              <p:grpSpPr>
+                <a:xfrm rot="5802683">
+                  <a:off x="5403400" y="883168"/>
+                  <a:ext cx="2520000" cy="2671189"/>
+                  <a:chOff x="3896164" y="895947"/>
+                  <a:chExt cx="2520000" cy="2671189"/>
+                </a:xfrm>
+              </p:grpSpPr>
+              <p:sp>
+                <p:nvSpPr>
+                  <p:cNvPr id="60" name="Arc 59">
+                    <a:extLst>
+                      <a:ext uri="{FF2B5EF4-FFF2-40B4-BE49-F238E27FC236}">
+                        <a16:creationId xmlns:a16="http://schemas.microsoft.com/office/drawing/2014/main" id="{FD2D6E26-5878-C977-2F63-40B04B05282B}"/>
+                      </a:ext>
+                    </a:extLst>
+                  </p:cNvPr>
+                  <p:cNvSpPr/>
+                  <p:nvPr/>
+                </p:nvSpPr>
+                <p:spPr>
+                  <a:xfrm rot="15797317">
+                    <a:off x="3896164" y="1047136"/>
+                    <a:ext cx="2520000" cy="2520000"/>
+                  </a:xfrm>
+                  <a:prstGeom prst="arc">
+                    <a:avLst>
+                      <a:gd name="adj1" fmla="val 16588158"/>
+                      <a:gd name="adj2" fmla="val 21192311"/>
+                    </a:avLst>
+                  </a:prstGeom>
+                  <a:ln w="38100">
+                    <a:solidFill>
+                      <a:srgbClr val="FF0000"/>
+                    </a:solidFill>
+                  </a:ln>
+                </p:spPr>
+                <p:style>
+                  <a:lnRef idx="2">
+                    <a:schemeClr val="accent1"/>
+                  </a:lnRef>
+                  <a:fillRef idx="0">
+                    <a:schemeClr val="accent1"/>
+                  </a:fillRef>
+                  <a:effectRef idx="1">
+                    <a:schemeClr val="accent1"/>
+                  </a:effectRef>
+                  <a:fontRef idx="minor">
+                    <a:schemeClr val="tx1"/>
+                  </a:fontRef>
+                </p:style>
+                <p:txBody>
+                  <a:bodyPr rtlCol="0" anchor="ctr"/>
+                  <a:lstStyle/>
+                  <a:p>
+                    <a:pPr algn="ctr"/>
+                    <a:endParaRPr lang="pt-BR" dirty="0"/>
+                  </a:p>
+                </p:txBody>
+              </p:sp>
+              <p:sp>
+                <p:nvSpPr>
+                  <p:cNvPr id="61" name="Isosceles Triangle 60">
+                    <a:extLst>
+                      <a:ext uri="{FF2B5EF4-FFF2-40B4-BE49-F238E27FC236}">
+                        <a16:creationId xmlns:a16="http://schemas.microsoft.com/office/drawing/2014/main" id="{B46CBDE0-9822-DB5D-F797-A1507A01780B}"/>
+                      </a:ext>
+                    </a:extLst>
+                  </p:cNvPr>
+                  <p:cNvSpPr/>
+                  <p:nvPr/>
+                </p:nvSpPr>
+                <p:spPr>
+                  <a:xfrm rot="5222525">
+                    <a:off x="4786280" y="895947"/>
+                    <a:ext cx="288000" cy="288000"/>
+                  </a:xfrm>
+                  <a:prstGeom prst="triangle">
+                    <a:avLst/>
+                  </a:prstGeom>
+                  <a:solidFill>
+                    <a:srgbClr val="FF0000"/>
+                  </a:solidFill>
+                  <a:ln>
+                    <a:solidFill>
+                      <a:srgbClr val="FF0000"/>
+                    </a:solidFill>
+                  </a:ln>
+                </p:spPr>
+                <p:style>
+                  <a:lnRef idx="2">
+                    <a:schemeClr val="accent1">
+                      <a:shade val="15000"/>
+                    </a:schemeClr>
+                  </a:lnRef>
+                  <a:fillRef idx="1">
+                    <a:schemeClr val="accent1"/>
+                  </a:fillRef>
+                  <a:effectRef idx="0">
+                    <a:schemeClr val="accent1"/>
+                  </a:effectRef>
+                  <a:fontRef idx="minor">
+                    <a:schemeClr val="lt1"/>
+                  </a:fontRef>
+                </p:style>
+                <p:txBody>
+                  <a:bodyPr rtlCol="0" anchor="ctr"/>
+                  <a:lstStyle/>
+                  <a:p>
+                    <a:pPr algn="ctr"/>
+                    <a:endParaRPr lang="pt-BR" dirty="0"/>
+                  </a:p>
+                </p:txBody>
+              </p:sp>
+            </p:grpSp>
+            <p:grpSp>
+              <p:nvGrpSpPr>
+                <p:cNvPr id="57" name="Group 56">
+                  <a:extLst>
+                    <a:ext uri="{FF2B5EF4-FFF2-40B4-BE49-F238E27FC236}">
+                      <a16:creationId xmlns:a16="http://schemas.microsoft.com/office/drawing/2014/main" id="{980FC966-C032-CA59-182D-398649B7697F}"/>
+                    </a:ext>
+                  </a:extLst>
+                </p:cNvPr>
+                <p:cNvGrpSpPr/>
+                <p:nvPr/>
+              </p:nvGrpSpPr>
+              <p:grpSpPr>
+                <a:xfrm rot="16378641">
+                  <a:off x="3952828" y="2428558"/>
+                  <a:ext cx="2520000" cy="2624423"/>
+                  <a:chOff x="3885948" y="890778"/>
+                  <a:chExt cx="2520000" cy="2624423"/>
+                </a:xfrm>
+              </p:grpSpPr>
+              <p:sp>
+                <p:nvSpPr>
+                  <p:cNvPr id="58" name="Arc 57">
+                    <a:extLst>
+                      <a:ext uri="{FF2B5EF4-FFF2-40B4-BE49-F238E27FC236}">
+                        <a16:creationId xmlns:a16="http://schemas.microsoft.com/office/drawing/2014/main" id="{47332A0A-A31D-CBA4-A19A-DC9E2DEFB4C3}"/>
+                      </a:ext>
+                    </a:extLst>
+                  </p:cNvPr>
+                  <p:cNvSpPr/>
+                  <p:nvPr/>
+                </p:nvSpPr>
+                <p:spPr>
+                  <a:xfrm rot="15597623">
+                    <a:off x="3885948" y="995201"/>
+                    <a:ext cx="2520000" cy="2520000"/>
+                  </a:xfrm>
+                  <a:prstGeom prst="arc">
+                    <a:avLst>
+                      <a:gd name="adj1" fmla="val 16588158"/>
+                      <a:gd name="adj2" fmla="val 21192311"/>
+                    </a:avLst>
+                  </a:prstGeom>
+                  <a:ln w="38100">
+                    <a:solidFill>
+                      <a:srgbClr val="FF0000"/>
+                    </a:solidFill>
+                  </a:ln>
+                </p:spPr>
+                <p:style>
+                  <a:lnRef idx="2">
+                    <a:schemeClr val="accent1"/>
+                  </a:lnRef>
+                  <a:fillRef idx="0">
+                    <a:schemeClr val="accent1"/>
+                  </a:fillRef>
+                  <a:effectRef idx="1">
+                    <a:schemeClr val="accent1"/>
+                  </a:effectRef>
+                  <a:fontRef idx="minor">
+                    <a:schemeClr val="tx1"/>
+                  </a:fontRef>
+                </p:style>
+                <p:txBody>
+                  <a:bodyPr rtlCol="0" anchor="ctr"/>
+                  <a:lstStyle/>
+                  <a:p>
+                    <a:pPr algn="ctr"/>
+                    <a:endParaRPr lang="pt-BR" dirty="0"/>
+                  </a:p>
+                </p:txBody>
+              </p:sp>
+              <p:sp>
+                <p:nvSpPr>
+                  <p:cNvPr id="59" name="Isosceles Triangle 58">
+                    <a:extLst>
+                      <a:ext uri="{FF2B5EF4-FFF2-40B4-BE49-F238E27FC236}">
+                        <a16:creationId xmlns:a16="http://schemas.microsoft.com/office/drawing/2014/main" id="{A06382A5-176E-15DB-05D4-BCF1EA260829}"/>
+                      </a:ext>
+                    </a:extLst>
+                  </p:cNvPr>
+                  <p:cNvSpPr/>
+                  <p:nvPr/>
+                </p:nvSpPr>
+                <p:spPr>
+                  <a:xfrm rot="4970851">
+                    <a:off x="4753613" y="890778"/>
+                    <a:ext cx="288000" cy="288000"/>
+                  </a:xfrm>
+                  <a:prstGeom prst="triangle">
+                    <a:avLst/>
+                  </a:prstGeom>
+                  <a:solidFill>
+                    <a:srgbClr val="FF0000"/>
+                  </a:solidFill>
+                  <a:ln>
+                    <a:solidFill>
+                      <a:srgbClr val="FF0000"/>
+                    </a:solidFill>
+                  </a:ln>
+                </p:spPr>
+                <p:style>
+                  <a:lnRef idx="2">
+                    <a:schemeClr val="accent1">
+                      <a:shade val="15000"/>
+                    </a:schemeClr>
+                  </a:lnRef>
+                  <a:fillRef idx="1">
+                    <a:schemeClr val="accent1"/>
+                  </a:fillRef>
+                  <a:effectRef idx="0">
+                    <a:schemeClr val="accent1"/>
+                  </a:effectRef>
+                  <a:fontRef idx="minor">
+                    <a:schemeClr val="lt1"/>
+                  </a:fontRef>
+                </p:style>
+                <p:txBody>
+                  <a:bodyPr rtlCol="0" anchor="ctr"/>
+                  <a:lstStyle/>
+                  <a:p>
+                    <a:pPr algn="ctr"/>
+                    <a:endParaRPr lang="pt-BR"/>
+                  </a:p>
+                </p:txBody>
+              </p:sp>
+            </p:grpSp>
+          </p:grpSp>
+          <p:sp>
+            <p:nvSpPr>
+              <p:cNvPr id="36" name="TextBox 35">
+                <a:extLst>
+                  <a:ext uri="{FF2B5EF4-FFF2-40B4-BE49-F238E27FC236}">
+                    <a16:creationId xmlns:a16="http://schemas.microsoft.com/office/drawing/2014/main" id="{F640234E-0398-1342-0734-87669D5860F6}"/>
+                  </a:ext>
+                </a:extLst>
+              </p:cNvPr>
+              <p:cNvSpPr txBox="1"/>
+              <p:nvPr/>
+            </p:nvSpPr>
+            <p:spPr>
+              <a:xfrm>
+                <a:off x="6206886" y="972002"/>
+                <a:ext cx="4962256" cy="461665"/>
+              </a:xfrm>
+              <a:prstGeom prst="rect">
+                <a:avLst/>
+              </a:prstGeom>
+              <a:noFill/>
+            </p:spPr>
+            <p:txBody>
+              <a:bodyPr wrap="none" rtlCol="0">
+                <a:spAutoFit/>
+              </a:bodyPr>
+              <a:lstStyle/>
+              <a:p>
+                <a:r>
+                  <a:rPr lang="pt-BR" sz="2400" dirty="0">
+                    <a:solidFill>
+                      <a:srgbClr val="FF0000"/>
+                    </a:solidFill>
+                  </a:rPr>
+                  <a:t>BACKWARD – PRECESSÃO INVERSA</a:t>
+                </a:r>
+              </a:p>
+            </p:txBody>
+          </p:sp>
+          <p:sp>
+            <p:nvSpPr>
+              <p:cNvPr id="37" name="TextBox 36">
+                <a:extLst>
+                  <a:ext uri="{FF2B5EF4-FFF2-40B4-BE49-F238E27FC236}">
+                    <a16:creationId xmlns:a16="http://schemas.microsoft.com/office/drawing/2014/main" id="{7EBE36D6-B11E-E2D4-ECC1-0032655DA74A}"/>
+                  </a:ext>
+                </a:extLst>
+              </p:cNvPr>
+              <p:cNvSpPr txBox="1"/>
+              <p:nvPr/>
+            </p:nvSpPr>
+            <p:spPr>
+              <a:xfrm>
+                <a:off x="9117880" y="2465626"/>
+                <a:ext cx="413896" cy="461665"/>
+              </a:xfrm>
+              <a:prstGeom prst="rect">
+                <a:avLst/>
+              </a:prstGeom>
+              <a:noFill/>
+            </p:spPr>
+            <p:txBody>
+              <a:bodyPr wrap="none" rtlCol="0">
+                <a:spAutoFit/>
+              </a:bodyPr>
+              <a:lstStyle/>
+              <a:p>
+                <a:r>
+                  <a:rPr lang="el-GR" sz="2400" b="1" dirty="0"/>
+                  <a:t>Ω</a:t>
+                </a:r>
+                <a:endParaRPr lang="pt-BR" sz="2400" b="1" dirty="0"/>
+              </a:p>
+            </p:txBody>
+          </p:sp>
+          <p:sp>
+            <p:nvSpPr>
+              <p:cNvPr id="38" name="TextBox 37">
+                <a:extLst>
+                  <a:ext uri="{FF2B5EF4-FFF2-40B4-BE49-F238E27FC236}">
+                    <a16:creationId xmlns:a16="http://schemas.microsoft.com/office/drawing/2014/main" id="{05841053-B5D1-63E1-99D7-4E46DA195B2E}"/>
+                  </a:ext>
+                </a:extLst>
+              </p:cNvPr>
+              <p:cNvSpPr txBox="1"/>
+              <p:nvPr/>
+            </p:nvSpPr>
+            <p:spPr>
+              <a:xfrm>
+                <a:off x="7465115" y="3061248"/>
+                <a:ext cx="413896" cy="461665"/>
+              </a:xfrm>
+              <a:prstGeom prst="rect">
+                <a:avLst/>
+              </a:prstGeom>
+              <a:noFill/>
+            </p:spPr>
+            <p:txBody>
+              <a:bodyPr wrap="none" rtlCol="0">
+                <a:spAutoFit/>
+              </a:bodyPr>
+              <a:lstStyle/>
+              <a:p>
+                <a:r>
+                  <a:rPr lang="el-GR" sz="2400" b="1" dirty="0"/>
+                  <a:t>Ω</a:t>
+                </a:r>
+                <a:endParaRPr lang="pt-BR" sz="2400" b="1" dirty="0"/>
+              </a:p>
+            </p:txBody>
+          </p:sp>
+          <p:sp>
+            <p:nvSpPr>
+              <p:cNvPr id="39" name="TextBox 38">
+                <a:extLst>
+                  <a:ext uri="{FF2B5EF4-FFF2-40B4-BE49-F238E27FC236}">
+                    <a16:creationId xmlns:a16="http://schemas.microsoft.com/office/drawing/2014/main" id="{C7963248-DE4E-B646-3C69-B163B611BA07}"/>
+                  </a:ext>
+                </a:extLst>
+              </p:cNvPr>
+              <p:cNvSpPr txBox="1"/>
+              <p:nvPr/>
+            </p:nvSpPr>
+            <p:spPr>
+              <a:xfrm>
+                <a:off x="7943319" y="4895091"/>
+                <a:ext cx="413896" cy="461665"/>
+              </a:xfrm>
+              <a:prstGeom prst="rect">
+                <a:avLst/>
+              </a:prstGeom>
+              <a:noFill/>
+            </p:spPr>
+            <p:txBody>
+              <a:bodyPr wrap="none" rtlCol="0">
+                <a:spAutoFit/>
+              </a:bodyPr>
+              <a:lstStyle/>
+              <a:p>
+                <a:r>
+                  <a:rPr lang="el-GR" sz="2400" b="1" dirty="0"/>
+                  <a:t>Ω</a:t>
+                </a:r>
+                <a:endParaRPr lang="pt-BR" sz="2400" b="1" dirty="0"/>
+              </a:p>
+            </p:txBody>
+          </p:sp>
+          <p:sp>
+            <p:nvSpPr>
+              <p:cNvPr id="40" name="TextBox 39">
+                <a:extLst>
+                  <a:ext uri="{FF2B5EF4-FFF2-40B4-BE49-F238E27FC236}">
+                    <a16:creationId xmlns:a16="http://schemas.microsoft.com/office/drawing/2014/main" id="{556C9E57-4041-FCFF-37A7-3AF84C0A1602}"/>
+                  </a:ext>
+                </a:extLst>
+              </p:cNvPr>
+              <p:cNvSpPr txBox="1"/>
+              <p:nvPr/>
+            </p:nvSpPr>
+            <p:spPr>
+              <a:xfrm>
+                <a:off x="9768444" y="4309339"/>
+                <a:ext cx="413896" cy="461665"/>
+              </a:xfrm>
+              <a:prstGeom prst="rect">
+                <a:avLst/>
+              </a:prstGeom>
+              <a:noFill/>
+            </p:spPr>
+            <p:txBody>
+              <a:bodyPr wrap="none" rtlCol="0">
+                <a:spAutoFit/>
+              </a:bodyPr>
+              <a:lstStyle/>
+              <a:p>
+                <a:r>
+                  <a:rPr lang="el-GR" sz="2400" b="1" dirty="0"/>
+                  <a:t>Ω</a:t>
+                </a:r>
+                <a:endParaRPr lang="pt-BR" sz="2400" b="1" dirty="0"/>
+              </a:p>
+            </p:txBody>
+          </p:sp>
+        </p:grpSp>
+      </p:grpSp>
+    </p:spTree>
+    <p:extLst>
+      <p:ext uri="{BB962C8B-B14F-4D97-AF65-F5344CB8AC3E}">
+        <p14:creationId xmlns:p14="http://schemas.microsoft.com/office/powerpoint/2010/main" val="1834618103"/>
+      </p:ext>
+    </p:extLst>
+  </p:cSld>
+  <p:clrMapOvr>
+    <a:masterClrMapping/>
+  </p:clrMapOvr>
+</p:sld>
+</file>
+
 <file path=ppt/theme/theme1.xml><?xml version="1.0" encoding="utf-8"?>
 <a:theme xmlns:a="http://schemas.openxmlformats.org/drawingml/2006/main" name="Office Theme">
   <a:themeElements>

--- a/DISSERTACAO/figuras/figures.pptx
+++ b/DISSERTACAO/figuras/figures.pptx
@@ -5,7 +5,7 @@
     <p:sldMasterId id="2147483648" r:id="rId1"/>
   </p:sldMasterIdLst>
   <p:notesMasterIdLst>
-    <p:notesMasterId r:id="rId10"/>
+    <p:notesMasterId r:id="rId11"/>
   </p:notesMasterIdLst>
   <p:sldIdLst>
     <p:sldId id="256" r:id="rId2"/>
@@ -16,6 +16,7 @@
     <p:sldId id="260" r:id="rId7"/>
     <p:sldId id="262" r:id="rId8"/>
     <p:sldId id="263" r:id="rId9"/>
+    <p:sldId id="264" r:id="rId10"/>
   </p:sldIdLst>
   <p:sldSz cx="12192000" cy="6858000"/>
   <p:notesSz cx="6858000" cy="9144000"/>
@@ -125,7 +126,7 @@
 <file path=ppt/revisionInfo.xml><?xml version="1.0" encoding="utf-8"?>
 <p1510:revInfo xmlns:a="http://schemas.openxmlformats.org/drawingml/2006/main" xmlns:r="http://schemas.openxmlformats.org/officeDocument/2006/relationships" xmlns:p1510="http://schemas.microsoft.com/office/powerpoint/2015/10/main">
   <p1510:revLst>
-    <p1510:client id="{93B72BAE-AB54-495B-86A9-4541991303FD}" v="9" dt="2026-06-01T18:10:53.590"/>
+    <p1510:client id="{93B72BAE-AB54-495B-86A9-4541991303FD}" v="13" dt="2026-06-02T12:41:21.301"/>
   </p1510:revLst>
 </p1510:revInfo>
 </file>
@@ -135,7 +136,7 @@
   <pc:docChgLst>
     <pc:chgData name="Murillo Álvaro Borges de Sousa" userId="02386067-c46f-46e6-bf61-8f6a774af0e5" providerId="ADAL" clId="{73C3FE35-BF7E-418C-A7F8-FA0AB4F63A6B}"/>
     <pc:docChg chg="undo custSel addSld modSld sldOrd">
-      <pc:chgData name="Murillo Álvaro Borges de Sousa" userId="02386067-c46f-46e6-bf61-8f6a774af0e5" providerId="ADAL" clId="{73C3FE35-BF7E-418C-A7F8-FA0AB4F63A6B}" dt="2026-06-01T18:10:53.590" v="259" actId="164"/>
+      <pc:chgData name="Murillo Álvaro Borges de Sousa" userId="02386067-c46f-46e6-bf61-8f6a774af0e5" providerId="ADAL" clId="{73C3FE35-BF7E-418C-A7F8-FA0AB4F63A6B}" dt="2026-06-02T14:37:18.113" v="359" actId="478"/>
       <pc:docMkLst>
         <pc:docMk/>
       </pc:docMkLst>
@@ -853,6 +854,61 @@
             <ac:grpSpMk id="71" creationId="{138673CF-4FE2-EFB5-9030-D864907BCDD5}"/>
           </ac:grpSpMkLst>
         </pc:grpChg>
+      </pc:sldChg>
+      <pc:sldChg chg="addSp delSp modSp new mod">
+        <pc:chgData name="Murillo Álvaro Borges de Sousa" userId="02386067-c46f-46e6-bf61-8f6a774af0e5" providerId="ADAL" clId="{73C3FE35-BF7E-418C-A7F8-FA0AB4F63A6B}" dt="2026-06-02T14:37:18.113" v="359" actId="478"/>
+        <pc:sldMkLst>
+          <pc:docMk/>
+          <pc:sldMk cId="1522299716" sldId="264"/>
+        </pc:sldMkLst>
+        <pc:spChg chg="add mod">
+          <ac:chgData name="Murillo Álvaro Borges de Sousa" userId="02386067-c46f-46e6-bf61-8f6a774af0e5" providerId="ADAL" clId="{73C3FE35-BF7E-418C-A7F8-FA0AB4F63A6B}" dt="2026-06-02T12:41:21.300" v="354" actId="164"/>
+          <ac:spMkLst>
+            <pc:docMk/>
+            <pc:sldMk cId="1522299716" sldId="264"/>
+            <ac:spMk id="4" creationId="{52DD1A79-310E-A78E-9BDB-78E99881CC90}"/>
+          </ac:spMkLst>
+        </pc:spChg>
+        <pc:spChg chg="add mod">
+          <ac:chgData name="Murillo Álvaro Borges de Sousa" userId="02386067-c46f-46e6-bf61-8f6a774af0e5" providerId="ADAL" clId="{73C3FE35-BF7E-418C-A7F8-FA0AB4F63A6B}" dt="2026-06-02T14:37:13.137" v="358" actId="1076"/>
+          <ac:spMkLst>
+            <pc:docMk/>
+            <pc:sldMk cId="1522299716" sldId="264"/>
+            <ac:spMk id="5" creationId="{D3DE5C22-CA75-31F6-D542-30E5945083D9}"/>
+          </ac:spMkLst>
+        </pc:spChg>
+        <pc:spChg chg="add mod">
+          <ac:chgData name="Murillo Álvaro Borges de Sousa" userId="02386067-c46f-46e6-bf61-8f6a774af0e5" providerId="ADAL" clId="{73C3FE35-BF7E-418C-A7F8-FA0AB4F63A6B}" dt="2026-06-02T12:41:21.300" v="354" actId="164"/>
+          <ac:spMkLst>
+            <pc:docMk/>
+            <pc:sldMk cId="1522299716" sldId="264"/>
+            <ac:spMk id="6" creationId="{968B5D67-F3CD-C562-F708-B396E50213D8}"/>
+          </ac:spMkLst>
+        </pc:spChg>
+        <pc:spChg chg="add del mod ord">
+          <ac:chgData name="Murillo Álvaro Borges de Sousa" userId="02386067-c46f-46e6-bf61-8f6a774af0e5" providerId="ADAL" clId="{73C3FE35-BF7E-418C-A7F8-FA0AB4F63A6B}" dt="2026-06-02T14:37:18.113" v="359" actId="478"/>
+          <ac:spMkLst>
+            <pc:docMk/>
+            <pc:sldMk cId="1522299716" sldId="264"/>
+            <ac:spMk id="8" creationId="{847CC85F-1B1D-54D3-04B1-F79DCF1CC49E}"/>
+          </ac:spMkLst>
+        </pc:spChg>
+        <pc:grpChg chg="add mod">
+          <ac:chgData name="Murillo Álvaro Borges de Sousa" userId="02386067-c46f-46e6-bf61-8f6a774af0e5" providerId="ADAL" clId="{73C3FE35-BF7E-418C-A7F8-FA0AB4F63A6B}" dt="2026-06-02T12:41:21.300" v="354" actId="164"/>
+          <ac:grpSpMkLst>
+            <pc:docMk/>
+            <pc:sldMk cId="1522299716" sldId="264"/>
+            <ac:grpSpMk id="7" creationId="{1F7C3375-1F11-3A99-DAFF-60594AFA7427}"/>
+          </ac:grpSpMkLst>
+        </pc:grpChg>
+        <pc:picChg chg="add mod">
+          <ac:chgData name="Murillo Álvaro Borges de Sousa" userId="02386067-c46f-46e6-bf61-8f6a774af0e5" providerId="ADAL" clId="{73C3FE35-BF7E-418C-A7F8-FA0AB4F63A6B}" dt="2026-06-02T12:41:21.300" v="354" actId="164"/>
+          <ac:picMkLst>
+            <pc:docMk/>
+            <pc:sldMk cId="1522299716" sldId="264"/>
+            <ac:picMk id="3" creationId="{C395F624-29E7-EB8D-AA14-ACD11D1DD967}"/>
+          </ac:picMkLst>
+        </pc:picChg>
       </pc:sldChg>
     </pc:docChg>
   </pc:docChgLst>
@@ -17365,6 +17421,215 @@
 </p:sld>
 </file>
 
+<file path=ppt/slides/slide9.xml><?xml version="1.0" encoding="utf-8"?>
+<p:sld xmlns:a="http://schemas.openxmlformats.org/drawingml/2006/main" xmlns:r="http://schemas.openxmlformats.org/officeDocument/2006/relationships" xmlns:p="http://schemas.openxmlformats.org/presentationml/2006/main">
+  <p:cSld>
+    <p:spTree>
+      <p:nvGrpSpPr>
+        <p:cNvPr id="1" name=""/>
+        <p:cNvGrpSpPr/>
+        <p:nvPr/>
+      </p:nvGrpSpPr>
+      <p:grpSpPr>
+        <a:xfrm>
+          <a:off x="0" y="0"/>
+          <a:ext cx="0" cy="0"/>
+          <a:chOff x="0" y="0"/>
+          <a:chExt cx="0" cy="0"/>
+        </a:xfrm>
+      </p:grpSpPr>
+      <p:grpSp>
+        <p:nvGrpSpPr>
+          <p:cNvPr id="7" name="Group 6">
+            <a:extLst>
+              <a:ext uri="{FF2B5EF4-FFF2-40B4-BE49-F238E27FC236}">
+                <a16:creationId xmlns:a16="http://schemas.microsoft.com/office/drawing/2014/main" id="{1F7C3375-1F11-3A99-DAFF-60594AFA7427}"/>
+              </a:ext>
+            </a:extLst>
+          </p:cNvPr>
+          <p:cNvGrpSpPr/>
+          <p:nvPr/>
+        </p:nvGrpSpPr>
+        <p:grpSpPr>
+          <a:xfrm>
+            <a:off x="1818678" y="1028540"/>
+            <a:ext cx="8554644" cy="5020376"/>
+            <a:chOff x="1818678" y="1028540"/>
+            <a:chExt cx="8554644" cy="5020376"/>
+          </a:xfrm>
+        </p:grpSpPr>
+        <p:pic>
+          <p:nvPicPr>
+            <p:cNvPr id="3" name="Picture 2">
+              <a:extLst>
+                <a:ext uri="{FF2B5EF4-FFF2-40B4-BE49-F238E27FC236}">
+                  <a16:creationId xmlns:a16="http://schemas.microsoft.com/office/drawing/2014/main" id="{C395F624-29E7-EB8D-AA14-ACD11D1DD967}"/>
+                </a:ext>
+              </a:extLst>
+            </p:cNvPr>
+            <p:cNvPicPr>
+              <a:picLocks noChangeAspect="1"/>
+            </p:cNvPicPr>
+            <p:nvPr/>
+          </p:nvPicPr>
+          <p:blipFill>
+            <a:blip r:embed="rId2">
+              <a:extLst>
+                <a:ext uri="{28A0092B-C50C-407E-A947-70E740481C1C}">
+                  <a14:useLocalDpi xmlns:a14="http://schemas.microsoft.com/office/drawing/2010/main" val="0"/>
+                </a:ext>
+              </a:extLst>
+            </a:blip>
+            <a:stretch>
+              <a:fillRect/>
+            </a:stretch>
+          </p:blipFill>
+          <p:spPr>
+            <a:xfrm>
+              <a:off x="1818678" y="1028540"/>
+              <a:ext cx="8554644" cy="5020376"/>
+            </a:xfrm>
+            <a:prstGeom prst="rect">
+              <a:avLst/>
+            </a:prstGeom>
+          </p:spPr>
+        </p:pic>
+        <p:sp>
+          <p:nvSpPr>
+            <p:cNvPr id="4" name="TextBox 3">
+              <a:extLst>
+                <a:ext uri="{FF2B5EF4-FFF2-40B4-BE49-F238E27FC236}">
+                  <a16:creationId xmlns:a16="http://schemas.microsoft.com/office/drawing/2014/main" id="{52DD1A79-310E-A78E-9BDB-78E99881CC90}"/>
+                </a:ext>
+              </a:extLst>
+            </p:cNvPr>
+            <p:cNvSpPr txBox="1"/>
+            <p:nvPr/>
+          </p:nvSpPr>
+          <p:spPr>
+            <a:xfrm>
+              <a:off x="8607552" y="3755136"/>
+              <a:ext cx="1162241" cy="400110"/>
+            </a:xfrm>
+            <a:prstGeom prst="rect">
+              <a:avLst/>
+            </a:prstGeom>
+            <a:noFill/>
+          </p:spPr>
+          <p:txBody>
+            <a:bodyPr wrap="none" rtlCol="0">
+              <a:spAutoFit/>
+            </a:bodyPr>
+            <a:lstStyle/>
+            <a:p>
+              <a:r>
+                <a:rPr lang="pt-BR" sz="2000" dirty="0">
+                  <a:latin typeface="Times New Roman" panose="02020603050405020304" pitchFamily="18" charset="0"/>
+                  <a:cs typeface="Times New Roman" panose="02020603050405020304" pitchFamily="18" charset="0"/>
+                </a:rPr>
+                <a:t>Torcional</a:t>
+              </a:r>
+              <a:endParaRPr lang="pt-BR" dirty="0">
+                <a:latin typeface="Times New Roman" panose="02020603050405020304" pitchFamily="18" charset="0"/>
+                <a:cs typeface="Times New Roman" panose="02020603050405020304" pitchFamily="18" charset="0"/>
+              </a:endParaRPr>
+            </a:p>
+          </p:txBody>
+        </p:sp>
+        <p:sp>
+          <p:nvSpPr>
+            <p:cNvPr id="5" name="TextBox 4">
+              <a:extLst>
+                <a:ext uri="{FF2B5EF4-FFF2-40B4-BE49-F238E27FC236}">
+                  <a16:creationId xmlns:a16="http://schemas.microsoft.com/office/drawing/2014/main" id="{D3DE5C22-CA75-31F6-D542-30E5945083D9}"/>
+                </a:ext>
+              </a:extLst>
+            </p:cNvPr>
+            <p:cNvSpPr txBox="1"/>
+            <p:nvPr/>
+          </p:nvSpPr>
+          <p:spPr>
+            <a:xfrm>
+              <a:off x="4845218" y="5589067"/>
+              <a:ext cx="3212592" cy="400110"/>
+            </a:xfrm>
+            <a:prstGeom prst="rect">
+              <a:avLst/>
+            </a:prstGeom>
+            <a:solidFill>
+              <a:schemeClr val="bg1"/>
+            </a:solidFill>
+          </p:spPr>
+          <p:txBody>
+            <a:bodyPr wrap="square" rtlCol="0">
+              <a:spAutoFit/>
+            </a:bodyPr>
+            <a:lstStyle/>
+            <a:p>
+              <a:r>
+                <a:rPr lang="pt-BR" sz="2000" dirty="0">
+                  <a:latin typeface="Times New Roman" panose="02020603050405020304" pitchFamily="18" charset="0"/>
+                  <a:cs typeface="Times New Roman" panose="02020603050405020304" pitchFamily="18" charset="0"/>
+                </a:rPr>
+                <a:t>Velocidade de Rotação [rpm]</a:t>
+              </a:r>
+            </a:p>
+          </p:txBody>
+        </p:sp>
+        <p:sp>
+          <p:nvSpPr>
+            <p:cNvPr id="6" name="TextBox 5">
+              <a:extLst>
+                <a:ext uri="{FF2B5EF4-FFF2-40B4-BE49-F238E27FC236}">
+                  <a16:creationId xmlns:a16="http://schemas.microsoft.com/office/drawing/2014/main" id="{968B5D67-F3CD-C562-F708-B396E50213D8}"/>
+                </a:ext>
+              </a:extLst>
+            </p:cNvPr>
+            <p:cNvSpPr txBox="1"/>
+            <p:nvPr/>
+          </p:nvSpPr>
+          <p:spPr>
+            <a:xfrm rot="16200000">
+              <a:off x="644004" y="2919354"/>
+              <a:ext cx="3212592" cy="400110"/>
+            </a:xfrm>
+            <a:prstGeom prst="rect">
+              <a:avLst/>
+            </a:prstGeom>
+            <a:solidFill>
+              <a:schemeClr val="bg1"/>
+            </a:solidFill>
+          </p:spPr>
+          <p:txBody>
+            <a:bodyPr wrap="square" rtlCol="0">
+              <a:spAutoFit/>
+            </a:bodyPr>
+            <a:lstStyle/>
+            <a:p>
+              <a:r>
+                <a:rPr lang="pt-BR" sz="2000" dirty="0">
+                  <a:latin typeface="Times New Roman" panose="02020603050405020304" pitchFamily="18" charset="0"/>
+                  <a:cs typeface="Times New Roman" panose="02020603050405020304" pitchFamily="18" charset="0"/>
+                </a:rPr>
+                <a:t>Frequência Natural [Hz]</a:t>
+              </a:r>
+            </a:p>
+          </p:txBody>
+        </p:sp>
+      </p:grpSp>
+    </p:spTree>
+    <p:extLst>
+      <p:ext uri="{BB962C8B-B14F-4D97-AF65-F5344CB8AC3E}">
+        <p14:creationId xmlns:p14="http://schemas.microsoft.com/office/powerpoint/2010/main" val="1522299716"/>
+      </p:ext>
+    </p:extLst>
+  </p:cSld>
+  <p:clrMapOvr>
+    <a:masterClrMapping/>
+  </p:clrMapOvr>
+</p:sld>
+</file>
+
 <file path=ppt/theme/theme1.xml><?xml version="1.0" encoding="utf-8"?>
 <a:theme xmlns:a="http://schemas.openxmlformats.org/drawingml/2006/main" name="Office Theme">
   <a:themeElements>

--- a/DISSERTACAO/figuras/figures.pptx
+++ b/DISSERTACAO/figuras/figures.pptx
@@ -5,7 +5,7 @@
     <p:sldMasterId id="2147483648" r:id="rId1"/>
   </p:sldMasterIdLst>
   <p:notesMasterIdLst>
-    <p:notesMasterId r:id="rId11"/>
+    <p:notesMasterId r:id="rId12"/>
   </p:notesMasterIdLst>
   <p:sldIdLst>
     <p:sldId id="256" r:id="rId2"/>
@@ -17,6 +17,7 @@
     <p:sldId id="262" r:id="rId8"/>
     <p:sldId id="263" r:id="rId9"/>
     <p:sldId id="264" r:id="rId10"/>
+    <p:sldId id="265" r:id="rId11"/>
   </p:sldIdLst>
   <p:sldSz cx="12192000" cy="6858000"/>
   <p:notesSz cx="6858000" cy="9144000"/>
@@ -126,7 +127,7 @@
 <file path=ppt/revisionInfo.xml><?xml version="1.0" encoding="utf-8"?>
 <p1510:revInfo xmlns:a="http://schemas.openxmlformats.org/drawingml/2006/main" xmlns:r="http://schemas.openxmlformats.org/officeDocument/2006/relationships" xmlns:p1510="http://schemas.microsoft.com/office/powerpoint/2015/10/main">
   <p1510:revLst>
-    <p1510:client id="{93B72BAE-AB54-495B-86A9-4541991303FD}" v="13" dt="2026-06-02T12:41:21.301"/>
+    <p1510:client id="{93B72BAE-AB54-495B-86A9-4541991303FD}" v="22" dt="2026-06-02T18:19:11.810"/>
   </p1510:revLst>
 </p1510:revInfo>
 </file>
@@ -136,7 +137,7 @@
   <pc:docChgLst>
     <pc:chgData name="Murillo Álvaro Borges de Sousa" userId="02386067-c46f-46e6-bf61-8f6a774af0e5" providerId="ADAL" clId="{73C3FE35-BF7E-418C-A7F8-FA0AB4F63A6B}"/>
     <pc:docChg chg="undo custSel addSld modSld sldOrd">
-      <pc:chgData name="Murillo Álvaro Borges de Sousa" userId="02386067-c46f-46e6-bf61-8f6a774af0e5" providerId="ADAL" clId="{73C3FE35-BF7E-418C-A7F8-FA0AB4F63A6B}" dt="2026-06-02T14:37:18.113" v="359" actId="478"/>
+      <pc:chgData name="Murillo Álvaro Borges de Sousa" userId="02386067-c46f-46e6-bf61-8f6a774af0e5" providerId="ADAL" clId="{73C3FE35-BF7E-418C-A7F8-FA0AB4F63A6B}" dt="2026-06-02T18:19:11.810" v="442" actId="164"/>
       <pc:docMkLst>
         <pc:docMk/>
       </pc:docMkLst>
@@ -856,7 +857,7 @@
         </pc:grpChg>
       </pc:sldChg>
       <pc:sldChg chg="addSp delSp modSp new mod">
-        <pc:chgData name="Murillo Álvaro Borges de Sousa" userId="02386067-c46f-46e6-bf61-8f6a774af0e5" providerId="ADAL" clId="{73C3FE35-BF7E-418C-A7F8-FA0AB4F63A6B}" dt="2026-06-02T14:37:18.113" v="359" actId="478"/>
+        <pc:chgData name="Murillo Álvaro Borges de Sousa" userId="02386067-c46f-46e6-bf61-8f6a774af0e5" providerId="ADAL" clId="{73C3FE35-BF7E-418C-A7F8-FA0AB4F63A6B}" dt="2026-06-02T17:04:50.653" v="374" actId="208"/>
         <pc:sldMkLst>
           <pc:docMk/>
           <pc:sldMk cId="1522299716" sldId="264"/>
@@ -893,12 +894,28 @@
             <ac:spMk id="8" creationId="{847CC85F-1B1D-54D3-04B1-F79DCF1CC49E}"/>
           </ac:spMkLst>
         </pc:spChg>
+        <pc:spChg chg="add mod ord">
+          <ac:chgData name="Murillo Álvaro Borges de Sousa" userId="02386067-c46f-46e6-bf61-8f6a774af0e5" providerId="ADAL" clId="{73C3FE35-BF7E-418C-A7F8-FA0AB4F63A6B}" dt="2026-06-02T17:04:50.653" v="374" actId="208"/>
+          <ac:spMkLst>
+            <pc:docMk/>
+            <pc:sldMk cId="1522299716" sldId="264"/>
+            <ac:spMk id="9" creationId="{E6CBC1F0-97FD-DA72-ED5A-E7D463CC8A68}"/>
+          </ac:spMkLst>
+        </pc:spChg>
         <pc:grpChg chg="add mod">
-          <ac:chgData name="Murillo Álvaro Borges de Sousa" userId="02386067-c46f-46e6-bf61-8f6a774af0e5" providerId="ADAL" clId="{73C3FE35-BF7E-418C-A7F8-FA0AB4F63A6B}" dt="2026-06-02T12:41:21.300" v="354" actId="164"/>
+          <ac:chgData name="Murillo Álvaro Borges de Sousa" userId="02386067-c46f-46e6-bf61-8f6a774af0e5" providerId="ADAL" clId="{73C3FE35-BF7E-418C-A7F8-FA0AB4F63A6B}" dt="2026-06-02T17:04:41.292" v="372" actId="164"/>
           <ac:grpSpMkLst>
             <pc:docMk/>
             <pc:sldMk cId="1522299716" sldId="264"/>
             <ac:grpSpMk id="7" creationId="{1F7C3375-1F11-3A99-DAFF-60594AFA7427}"/>
+          </ac:grpSpMkLst>
+        </pc:grpChg>
+        <pc:grpChg chg="add mod">
+          <ac:chgData name="Murillo Álvaro Borges de Sousa" userId="02386067-c46f-46e6-bf61-8f6a774af0e5" providerId="ADAL" clId="{73C3FE35-BF7E-418C-A7F8-FA0AB4F63A6B}" dt="2026-06-02T17:04:41.292" v="372" actId="164"/>
+          <ac:grpSpMkLst>
+            <pc:docMk/>
+            <pc:sldMk cId="1522299716" sldId="264"/>
+            <ac:grpSpMk id="10" creationId="{FE3EBD89-0E68-3B35-525E-3ABD8515678D}"/>
           </ac:grpSpMkLst>
         </pc:grpChg>
         <pc:picChg chg="add mod">
@@ -909,6 +926,149 @@
             <ac:picMk id="3" creationId="{C395F624-29E7-EB8D-AA14-ACD11D1DD967}"/>
           </ac:picMkLst>
         </pc:picChg>
+      </pc:sldChg>
+      <pc:sldChg chg="addSp delSp modSp new mod">
+        <pc:chgData name="Murillo Álvaro Borges de Sousa" userId="02386067-c46f-46e6-bf61-8f6a774af0e5" providerId="ADAL" clId="{73C3FE35-BF7E-418C-A7F8-FA0AB4F63A6B}" dt="2026-06-02T18:19:11.810" v="442" actId="164"/>
+        <pc:sldMkLst>
+          <pc:docMk/>
+          <pc:sldMk cId="4196720484" sldId="265"/>
+        </pc:sldMkLst>
+        <pc:spChg chg="add del mod">
+          <ac:chgData name="Murillo Álvaro Borges de Sousa" userId="02386067-c46f-46e6-bf61-8f6a774af0e5" providerId="ADAL" clId="{73C3FE35-BF7E-418C-A7F8-FA0AB4F63A6B}" dt="2026-06-02T18:11:23.386" v="379" actId="478"/>
+          <ac:spMkLst>
+            <pc:docMk/>
+            <pc:sldMk cId="4196720484" sldId="265"/>
+            <ac:spMk id="2" creationId="{DEC84091-BDE2-80FA-FCC9-86173490AD77}"/>
+          </ac:spMkLst>
+        </pc:spChg>
+        <pc:spChg chg="add mod">
+          <ac:chgData name="Murillo Álvaro Borges de Sousa" userId="02386067-c46f-46e6-bf61-8f6a774af0e5" providerId="ADAL" clId="{73C3FE35-BF7E-418C-A7F8-FA0AB4F63A6B}" dt="2026-06-02T18:19:05.993" v="441" actId="164"/>
+          <ac:spMkLst>
+            <pc:docMk/>
+            <pc:sldMk cId="4196720484" sldId="265"/>
+            <ac:spMk id="3" creationId="{4D6B3DB7-F0C9-6D0A-542E-1958730A76AF}"/>
+          </ac:spMkLst>
+        </pc:spChg>
+        <pc:spChg chg="add mod">
+          <ac:chgData name="Murillo Álvaro Borges de Sousa" userId="02386067-c46f-46e6-bf61-8f6a774af0e5" providerId="ADAL" clId="{73C3FE35-BF7E-418C-A7F8-FA0AB4F63A6B}" dt="2026-06-02T18:19:05.993" v="441" actId="164"/>
+          <ac:spMkLst>
+            <pc:docMk/>
+            <pc:sldMk cId="4196720484" sldId="265"/>
+            <ac:spMk id="18" creationId="{AF727D3A-E35C-C430-5268-63E56FC4688E}"/>
+          </ac:spMkLst>
+        </pc:spChg>
+        <pc:spChg chg="add mod">
+          <ac:chgData name="Murillo Álvaro Borges de Sousa" userId="02386067-c46f-46e6-bf61-8f6a774af0e5" providerId="ADAL" clId="{73C3FE35-BF7E-418C-A7F8-FA0AB4F63A6B}" dt="2026-06-02T18:19:05.993" v="441" actId="164"/>
+          <ac:spMkLst>
+            <pc:docMk/>
+            <pc:sldMk cId="4196720484" sldId="265"/>
+            <ac:spMk id="19" creationId="{AAD04BC0-2C1B-2626-6C84-5127B3C8A86E}"/>
+          </ac:spMkLst>
+        </pc:spChg>
+        <pc:spChg chg="add mod">
+          <ac:chgData name="Murillo Álvaro Borges de Sousa" userId="02386067-c46f-46e6-bf61-8f6a774af0e5" providerId="ADAL" clId="{73C3FE35-BF7E-418C-A7F8-FA0AB4F63A6B}" dt="2026-06-02T18:19:05.993" v="441" actId="164"/>
+          <ac:spMkLst>
+            <pc:docMk/>
+            <pc:sldMk cId="4196720484" sldId="265"/>
+            <ac:spMk id="20" creationId="{9C6110CC-5413-0C7C-FEDB-4B267FBB0CD7}"/>
+          </ac:spMkLst>
+        </pc:spChg>
+        <pc:spChg chg="add mod">
+          <ac:chgData name="Murillo Álvaro Borges de Sousa" userId="02386067-c46f-46e6-bf61-8f6a774af0e5" providerId="ADAL" clId="{73C3FE35-BF7E-418C-A7F8-FA0AB4F63A6B}" dt="2026-06-02T18:19:11.810" v="442" actId="164"/>
+          <ac:spMkLst>
+            <pc:docMk/>
+            <pc:sldMk cId="4196720484" sldId="265"/>
+            <ac:spMk id="21" creationId="{D938E15D-0725-97A0-B87C-FBF24A2E4349}"/>
+          </ac:spMkLst>
+        </pc:spChg>
+        <pc:spChg chg="add mod">
+          <ac:chgData name="Murillo Álvaro Borges de Sousa" userId="02386067-c46f-46e6-bf61-8f6a774af0e5" providerId="ADAL" clId="{73C3FE35-BF7E-418C-A7F8-FA0AB4F63A6B}" dt="2026-06-02T18:19:11.810" v="442" actId="164"/>
+          <ac:spMkLst>
+            <pc:docMk/>
+            <pc:sldMk cId="4196720484" sldId="265"/>
+            <ac:spMk id="25" creationId="{D57C48E2-3B2E-87E9-09A0-FEAD1730A968}"/>
+          </ac:spMkLst>
+        </pc:spChg>
+        <pc:spChg chg="add mod">
+          <ac:chgData name="Murillo Álvaro Borges de Sousa" userId="02386067-c46f-46e6-bf61-8f6a774af0e5" providerId="ADAL" clId="{73C3FE35-BF7E-418C-A7F8-FA0AB4F63A6B}" dt="2026-06-02T18:19:11.810" v="442" actId="164"/>
+          <ac:spMkLst>
+            <pc:docMk/>
+            <pc:sldMk cId="4196720484" sldId="265"/>
+            <ac:spMk id="26" creationId="{006589A8-8B6E-22A4-F728-3486E191A2F4}"/>
+          </ac:spMkLst>
+        </pc:spChg>
+        <pc:spChg chg="add mod">
+          <ac:chgData name="Murillo Álvaro Borges de Sousa" userId="02386067-c46f-46e6-bf61-8f6a774af0e5" providerId="ADAL" clId="{73C3FE35-BF7E-418C-A7F8-FA0AB4F63A6B}" dt="2026-06-02T18:19:11.810" v="442" actId="164"/>
+          <ac:spMkLst>
+            <pc:docMk/>
+            <pc:sldMk cId="4196720484" sldId="265"/>
+            <ac:spMk id="27" creationId="{11754AC1-AC6E-3EA1-A814-AECAB43F68FB}"/>
+          </ac:spMkLst>
+        </pc:spChg>
+        <pc:grpChg chg="add mod">
+          <ac:chgData name="Murillo Álvaro Borges de Sousa" userId="02386067-c46f-46e6-bf61-8f6a774af0e5" providerId="ADAL" clId="{73C3FE35-BF7E-418C-A7F8-FA0AB4F63A6B}" dt="2026-06-02T18:19:05.993" v="441" actId="164"/>
+          <ac:grpSpMkLst>
+            <pc:docMk/>
+            <pc:sldMk cId="4196720484" sldId="265"/>
+            <ac:grpSpMk id="29" creationId="{A0F7F135-52C0-7A7C-B0B9-676E167521BB}"/>
+          </ac:grpSpMkLst>
+        </pc:grpChg>
+        <pc:grpChg chg="add mod">
+          <ac:chgData name="Murillo Álvaro Borges de Sousa" userId="02386067-c46f-46e6-bf61-8f6a774af0e5" providerId="ADAL" clId="{73C3FE35-BF7E-418C-A7F8-FA0AB4F63A6B}" dt="2026-06-02T18:19:11.810" v="442" actId="164"/>
+          <ac:grpSpMkLst>
+            <pc:docMk/>
+            <pc:sldMk cId="4196720484" sldId="265"/>
+            <ac:grpSpMk id="30" creationId="{3C8191E6-6AC6-E6E4-D076-AE12083ED166}"/>
+          </ac:grpSpMkLst>
+        </pc:grpChg>
+        <pc:cxnChg chg="add mod">
+          <ac:chgData name="Murillo Álvaro Borges de Sousa" userId="02386067-c46f-46e6-bf61-8f6a774af0e5" providerId="ADAL" clId="{73C3FE35-BF7E-418C-A7F8-FA0AB4F63A6B}" dt="2026-06-02T18:19:05.993" v="441" actId="164"/>
+          <ac:cxnSpMkLst>
+            <pc:docMk/>
+            <pc:sldMk cId="4196720484" sldId="265"/>
+            <ac:cxnSpMk id="5" creationId="{82A421F8-EFF9-C019-5862-65AF81CB2C68}"/>
+          </ac:cxnSpMkLst>
+        </pc:cxnChg>
+        <pc:cxnChg chg="add mod">
+          <ac:chgData name="Murillo Álvaro Borges de Sousa" userId="02386067-c46f-46e6-bf61-8f6a774af0e5" providerId="ADAL" clId="{73C3FE35-BF7E-418C-A7F8-FA0AB4F63A6B}" dt="2026-06-02T18:19:05.993" v="441" actId="164"/>
+          <ac:cxnSpMkLst>
+            <pc:docMk/>
+            <pc:sldMk cId="4196720484" sldId="265"/>
+            <ac:cxnSpMk id="7" creationId="{00A30EE2-93ED-2A00-E96E-1A9EE6165D49}"/>
+          </ac:cxnSpMkLst>
+        </pc:cxnChg>
+        <pc:cxnChg chg="add mod">
+          <ac:chgData name="Murillo Álvaro Borges de Sousa" userId="02386067-c46f-46e6-bf61-8f6a774af0e5" providerId="ADAL" clId="{73C3FE35-BF7E-418C-A7F8-FA0AB4F63A6B}" dt="2026-06-02T18:19:05.993" v="441" actId="164"/>
+          <ac:cxnSpMkLst>
+            <pc:docMk/>
+            <pc:sldMk cId="4196720484" sldId="265"/>
+            <ac:cxnSpMk id="9" creationId="{FAE0A26F-A4C9-1472-F178-B9D95F19649B}"/>
+          </ac:cxnSpMkLst>
+        </pc:cxnChg>
+        <pc:cxnChg chg="add mod">
+          <ac:chgData name="Murillo Álvaro Borges de Sousa" userId="02386067-c46f-46e6-bf61-8f6a774af0e5" providerId="ADAL" clId="{73C3FE35-BF7E-418C-A7F8-FA0AB4F63A6B}" dt="2026-06-02T18:19:11.810" v="442" actId="164"/>
+          <ac:cxnSpMkLst>
+            <pc:docMk/>
+            <pc:sldMk cId="4196720484" sldId="265"/>
+            <ac:cxnSpMk id="22" creationId="{2079778B-47D1-2666-0861-C16604698386}"/>
+          </ac:cxnSpMkLst>
+        </pc:cxnChg>
+        <pc:cxnChg chg="add mod">
+          <ac:chgData name="Murillo Álvaro Borges de Sousa" userId="02386067-c46f-46e6-bf61-8f6a774af0e5" providerId="ADAL" clId="{73C3FE35-BF7E-418C-A7F8-FA0AB4F63A6B}" dt="2026-06-02T18:19:11.810" v="442" actId="164"/>
+          <ac:cxnSpMkLst>
+            <pc:docMk/>
+            <pc:sldMk cId="4196720484" sldId="265"/>
+            <ac:cxnSpMk id="23" creationId="{347D07DE-B126-74F7-EB5F-1F800BEB3455}"/>
+          </ac:cxnSpMkLst>
+        </pc:cxnChg>
+        <pc:cxnChg chg="add mod">
+          <ac:chgData name="Murillo Álvaro Borges de Sousa" userId="02386067-c46f-46e6-bf61-8f6a774af0e5" providerId="ADAL" clId="{73C3FE35-BF7E-418C-A7F8-FA0AB4F63A6B}" dt="2026-06-02T18:19:11.810" v="442" actId="164"/>
+          <ac:cxnSpMkLst>
+            <pc:docMk/>
+            <pc:sldMk cId="4196720484" sldId="265"/>
+            <ac:cxnSpMk id="24" creationId="{13ECFF32-CA15-F024-7BDE-FEE70F25DBB3}"/>
+          </ac:cxnSpMkLst>
+        </pc:cxnChg>
       </pc:sldChg>
     </pc:docChg>
   </pc:docChgLst>
@@ -11998,6 +12158,674 @@
 </p:sld>
 </file>
 
+<file path=ppt/slides/slide10.xml><?xml version="1.0" encoding="utf-8"?>
+<p:sld xmlns:a="http://schemas.openxmlformats.org/drawingml/2006/main" xmlns:r="http://schemas.openxmlformats.org/officeDocument/2006/relationships" xmlns:p="http://schemas.openxmlformats.org/presentationml/2006/main">
+  <p:cSld>
+    <p:spTree>
+      <p:nvGrpSpPr>
+        <p:cNvPr id="1" name=""/>
+        <p:cNvGrpSpPr/>
+        <p:nvPr/>
+      </p:nvGrpSpPr>
+      <p:grpSpPr>
+        <a:xfrm>
+          <a:off x="0" y="0"/>
+          <a:ext cx="0" cy="0"/>
+          <a:chOff x="0" y="0"/>
+          <a:chExt cx="0" cy="0"/>
+        </a:xfrm>
+      </p:grpSpPr>
+      <p:grpSp>
+        <p:nvGrpSpPr>
+          <p:cNvPr id="29" name="Group 28">
+            <a:extLst>
+              <a:ext uri="{FF2B5EF4-FFF2-40B4-BE49-F238E27FC236}">
+                <a16:creationId xmlns:a16="http://schemas.microsoft.com/office/drawing/2014/main" id="{A0F7F135-52C0-7A7C-B0B9-676E167521BB}"/>
+              </a:ext>
+            </a:extLst>
+          </p:cNvPr>
+          <p:cNvGrpSpPr/>
+          <p:nvPr/>
+        </p:nvGrpSpPr>
+        <p:grpSpPr>
+          <a:xfrm>
+            <a:off x="5798508" y="2994963"/>
+            <a:ext cx="2717800" cy="1317874"/>
+            <a:chOff x="5798508" y="2994963"/>
+            <a:chExt cx="2717800" cy="1317874"/>
+          </a:xfrm>
+        </p:grpSpPr>
+        <p:sp>
+          <p:nvSpPr>
+            <p:cNvPr id="3" name="Cylinder 2">
+              <a:extLst>
+                <a:ext uri="{FF2B5EF4-FFF2-40B4-BE49-F238E27FC236}">
+                  <a16:creationId xmlns:a16="http://schemas.microsoft.com/office/drawing/2014/main" id="{4D6B3DB7-F0C9-6D0A-542E-1958730A76AF}"/>
+                </a:ext>
+              </a:extLst>
+            </p:cNvPr>
+            <p:cNvSpPr/>
+            <p:nvPr/>
+          </p:nvSpPr>
+          <p:spPr>
+            <a:xfrm rot="5400000">
+              <a:off x="6664866" y="3250266"/>
+              <a:ext cx="347347" cy="1777796"/>
+            </a:xfrm>
+            <a:prstGeom prst="can">
+              <a:avLst/>
+            </a:prstGeom>
+            <a:noFill/>
+            <a:ln>
+              <a:solidFill>
+                <a:schemeClr val="tx1"/>
+              </a:solidFill>
+            </a:ln>
+          </p:spPr>
+          <p:style>
+            <a:lnRef idx="2">
+              <a:schemeClr val="accent1">
+                <a:shade val="15000"/>
+              </a:schemeClr>
+            </a:lnRef>
+            <a:fillRef idx="1">
+              <a:schemeClr val="accent1"/>
+            </a:fillRef>
+            <a:effectRef idx="0">
+              <a:schemeClr val="accent1"/>
+            </a:effectRef>
+            <a:fontRef idx="minor">
+              <a:schemeClr val="lt1"/>
+            </a:fontRef>
+          </p:style>
+          <p:txBody>
+            <a:bodyPr rtlCol="0" anchor="ctr"/>
+            <a:lstStyle/>
+            <a:p>
+              <a:pPr algn="ctr"/>
+              <a:endParaRPr lang="pt-BR"/>
+            </a:p>
+          </p:txBody>
+        </p:sp>
+        <p:cxnSp>
+          <p:nvCxnSpPr>
+            <p:cNvPr id="5" name="Straight Arrow Connector 4">
+              <a:extLst>
+                <a:ext uri="{FF2B5EF4-FFF2-40B4-BE49-F238E27FC236}">
+                  <a16:creationId xmlns:a16="http://schemas.microsoft.com/office/drawing/2014/main" id="{82A421F8-EFF9-C019-5862-65AF81CB2C68}"/>
+                </a:ext>
+              </a:extLst>
+            </p:cNvPr>
+            <p:cNvCxnSpPr>
+              <a:cxnSpLocks/>
+            </p:cNvCxnSpPr>
+            <p:nvPr/>
+          </p:nvCxnSpPr>
+          <p:spPr>
+            <a:xfrm flipH="1" flipV="1">
+              <a:off x="5949642" y="3364296"/>
+              <a:ext cx="1" cy="774867"/>
+            </a:xfrm>
+            <a:prstGeom prst="straightConnector1">
+              <a:avLst/>
+            </a:prstGeom>
+            <a:ln>
+              <a:solidFill>
+                <a:schemeClr val="tx1"/>
+              </a:solidFill>
+              <a:tailEnd type="triangle"/>
+            </a:ln>
+          </p:spPr>
+          <p:style>
+            <a:lnRef idx="2">
+              <a:schemeClr val="accent1"/>
+            </a:lnRef>
+            <a:fillRef idx="0">
+              <a:schemeClr val="accent1"/>
+            </a:fillRef>
+            <a:effectRef idx="1">
+              <a:schemeClr val="accent1"/>
+            </a:effectRef>
+            <a:fontRef idx="minor">
+              <a:schemeClr val="tx1"/>
+            </a:fontRef>
+          </p:style>
+        </p:cxnSp>
+        <p:cxnSp>
+          <p:nvCxnSpPr>
+            <p:cNvPr id="7" name="Straight Arrow Connector 6">
+              <a:extLst>
+                <a:ext uri="{FF2B5EF4-FFF2-40B4-BE49-F238E27FC236}">
+                  <a16:creationId xmlns:a16="http://schemas.microsoft.com/office/drawing/2014/main" id="{00A30EE2-93ED-2A00-E96E-1A9EE6165D49}"/>
+                </a:ext>
+              </a:extLst>
+            </p:cNvPr>
+            <p:cNvCxnSpPr>
+              <a:cxnSpLocks/>
+            </p:cNvCxnSpPr>
+            <p:nvPr/>
+          </p:nvCxnSpPr>
+          <p:spPr>
+            <a:xfrm>
+              <a:off x="5949643" y="4139163"/>
+              <a:ext cx="2240935" cy="0"/>
+            </a:xfrm>
+            <a:prstGeom prst="straightConnector1">
+              <a:avLst/>
+            </a:prstGeom>
+            <a:ln>
+              <a:solidFill>
+                <a:schemeClr val="tx1"/>
+              </a:solidFill>
+              <a:tailEnd type="triangle"/>
+            </a:ln>
+          </p:spPr>
+          <p:style>
+            <a:lnRef idx="2">
+              <a:schemeClr val="accent1"/>
+            </a:lnRef>
+            <a:fillRef idx="0">
+              <a:schemeClr val="accent1"/>
+            </a:fillRef>
+            <a:effectRef idx="1">
+              <a:schemeClr val="accent1"/>
+            </a:effectRef>
+            <a:fontRef idx="minor">
+              <a:schemeClr val="tx1"/>
+            </a:fontRef>
+          </p:style>
+        </p:cxnSp>
+        <p:cxnSp>
+          <p:nvCxnSpPr>
+            <p:cNvPr id="9" name="Straight Arrow Connector 8">
+              <a:extLst>
+                <a:ext uri="{FF2B5EF4-FFF2-40B4-BE49-F238E27FC236}">
+                  <a16:creationId xmlns:a16="http://schemas.microsoft.com/office/drawing/2014/main" id="{FAE0A26F-A4C9-1472-F178-B9D95F19649B}"/>
+                </a:ext>
+              </a:extLst>
+            </p:cNvPr>
+            <p:cNvCxnSpPr>
+              <a:cxnSpLocks/>
+            </p:cNvCxnSpPr>
+            <p:nvPr/>
+          </p:nvCxnSpPr>
+          <p:spPr>
+            <a:xfrm flipV="1">
+              <a:off x="5949642" y="3705711"/>
+              <a:ext cx="317132" cy="433452"/>
+            </a:xfrm>
+            <a:prstGeom prst="straightConnector1">
+              <a:avLst/>
+            </a:prstGeom>
+            <a:ln>
+              <a:solidFill>
+                <a:schemeClr val="tx1"/>
+              </a:solidFill>
+              <a:tailEnd type="triangle"/>
+            </a:ln>
+          </p:spPr>
+          <p:style>
+            <a:lnRef idx="2">
+              <a:schemeClr val="accent1"/>
+            </a:lnRef>
+            <a:fillRef idx="0">
+              <a:schemeClr val="accent1"/>
+            </a:fillRef>
+            <a:effectRef idx="1">
+              <a:schemeClr val="accent1"/>
+            </a:effectRef>
+            <a:fontRef idx="minor">
+              <a:schemeClr val="tx1"/>
+            </a:fontRef>
+          </p:style>
+        </p:cxnSp>
+        <p:sp>
+          <p:nvSpPr>
+            <p:cNvPr id="18" name="TextBox 17">
+              <a:extLst>
+                <a:ext uri="{FF2B5EF4-FFF2-40B4-BE49-F238E27FC236}">
+                  <a16:creationId xmlns:a16="http://schemas.microsoft.com/office/drawing/2014/main" id="{AF727D3A-E35C-C430-5268-63E56FC4688E}"/>
+                </a:ext>
+              </a:extLst>
+            </p:cNvPr>
+            <p:cNvSpPr txBox="1"/>
+            <p:nvPr/>
+          </p:nvSpPr>
+          <p:spPr>
+            <a:xfrm>
+              <a:off x="5798508" y="2994963"/>
+              <a:ext cx="351378" cy="369332"/>
+            </a:xfrm>
+            <a:prstGeom prst="rect">
+              <a:avLst/>
+            </a:prstGeom>
+            <a:noFill/>
+          </p:spPr>
+          <p:txBody>
+            <a:bodyPr wrap="none" rtlCol="0">
+              <a:spAutoFit/>
+            </a:bodyPr>
+            <a:lstStyle/>
+            <a:p>
+              <a:r>
+                <a:rPr lang="pt-BR" dirty="0">
+                  <a:latin typeface="Times New Roman" panose="02020603050405020304" pitchFamily="18" charset="0"/>
+                  <a:cs typeface="Times New Roman" panose="02020603050405020304" pitchFamily="18" charset="0"/>
+                </a:rPr>
+                <a:t>Y</a:t>
+              </a:r>
+            </a:p>
+          </p:txBody>
+        </p:sp>
+        <p:sp>
+          <p:nvSpPr>
+            <p:cNvPr id="19" name="TextBox 18">
+              <a:extLst>
+                <a:ext uri="{FF2B5EF4-FFF2-40B4-BE49-F238E27FC236}">
+                  <a16:creationId xmlns:a16="http://schemas.microsoft.com/office/drawing/2014/main" id="{AAD04BC0-2C1B-2626-6C84-5127B3C8A86E}"/>
+                </a:ext>
+              </a:extLst>
+            </p:cNvPr>
+            <p:cNvSpPr txBox="1"/>
+            <p:nvPr/>
+          </p:nvSpPr>
+          <p:spPr>
+            <a:xfrm>
+              <a:off x="6152908" y="3347370"/>
+              <a:ext cx="351378" cy="369332"/>
+            </a:xfrm>
+            <a:prstGeom prst="rect">
+              <a:avLst/>
+            </a:prstGeom>
+            <a:noFill/>
+          </p:spPr>
+          <p:txBody>
+            <a:bodyPr wrap="none" rtlCol="0">
+              <a:spAutoFit/>
+            </a:bodyPr>
+            <a:lstStyle/>
+            <a:p>
+              <a:r>
+                <a:rPr lang="pt-BR" dirty="0">
+                  <a:latin typeface="Times New Roman" panose="02020603050405020304" pitchFamily="18" charset="0"/>
+                  <a:cs typeface="Times New Roman" panose="02020603050405020304" pitchFamily="18" charset="0"/>
+                </a:rPr>
+                <a:t>X</a:t>
+              </a:r>
+            </a:p>
+          </p:txBody>
+        </p:sp>
+        <p:sp>
+          <p:nvSpPr>
+            <p:cNvPr id="20" name="TextBox 19">
+              <a:extLst>
+                <a:ext uri="{FF2B5EF4-FFF2-40B4-BE49-F238E27FC236}">
+                  <a16:creationId xmlns:a16="http://schemas.microsoft.com/office/drawing/2014/main" id="{9C6110CC-5413-0C7C-FEDB-4B267FBB0CD7}"/>
+                </a:ext>
+              </a:extLst>
+            </p:cNvPr>
+            <p:cNvSpPr txBox="1"/>
+            <p:nvPr/>
+          </p:nvSpPr>
+          <p:spPr>
+            <a:xfrm>
+              <a:off x="8190578" y="3922437"/>
+              <a:ext cx="325730" cy="369332"/>
+            </a:xfrm>
+            <a:prstGeom prst="rect">
+              <a:avLst/>
+            </a:prstGeom>
+            <a:noFill/>
+          </p:spPr>
+          <p:txBody>
+            <a:bodyPr wrap="none" rtlCol="0">
+              <a:spAutoFit/>
+            </a:bodyPr>
+            <a:lstStyle/>
+            <a:p>
+              <a:r>
+                <a:rPr lang="pt-BR" dirty="0">
+                  <a:latin typeface="Times New Roman" panose="02020603050405020304" pitchFamily="18" charset="0"/>
+                  <a:cs typeface="Times New Roman" panose="02020603050405020304" pitchFamily="18" charset="0"/>
+                </a:rPr>
+                <a:t>Z</a:t>
+              </a:r>
+            </a:p>
+          </p:txBody>
+        </p:sp>
+      </p:grpSp>
+      <p:grpSp>
+        <p:nvGrpSpPr>
+          <p:cNvPr id="30" name="Group 29">
+            <a:extLst>
+              <a:ext uri="{FF2B5EF4-FFF2-40B4-BE49-F238E27FC236}">
+                <a16:creationId xmlns:a16="http://schemas.microsoft.com/office/drawing/2014/main" id="{3C8191E6-6AC6-E6E4-D076-AE12083ED166}"/>
+              </a:ext>
+            </a:extLst>
+          </p:cNvPr>
+          <p:cNvGrpSpPr/>
+          <p:nvPr/>
+        </p:nvGrpSpPr>
+        <p:grpSpPr>
+          <a:xfrm>
+            <a:off x="1821005" y="2999412"/>
+            <a:ext cx="3127978" cy="1914008"/>
+            <a:chOff x="1821005" y="2999412"/>
+            <a:chExt cx="3127978" cy="1914008"/>
+          </a:xfrm>
+        </p:grpSpPr>
+        <p:sp>
+          <p:nvSpPr>
+            <p:cNvPr id="21" name="Cylinder 20">
+              <a:extLst>
+                <a:ext uri="{FF2B5EF4-FFF2-40B4-BE49-F238E27FC236}">
+                  <a16:creationId xmlns:a16="http://schemas.microsoft.com/office/drawing/2014/main" id="{D938E15D-0725-97A0-B87C-FBF24A2E4349}"/>
+                </a:ext>
+              </a:extLst>
+            </p:cNvPr>
+            <p:cNvSpPr/>
+            <p:nvPr/>
+          </p:nvSpPr>
+          <p:spPr>
+            <a:xfrm rot="5400000">
+              <a:off x="3063295" y="3243721"/>
+              <a:ext cx="347347" cy="1777796"/>
+            </a:xfrm>
+            <a:prstGeom prst="can">
+              <a:avLst/>
+            </a:prstGeom>
+            <a:noFill/>
+            <a:ln>
+              <a:solidFill>
+                <a:schemeClr val="tx1"/>
+              </a:solidFill>
+            </a:ln>
+          </p:spPr>
+          <p:style>
+            <a:lnRef idx="2">
+              <a:schemeClr val="accent1">
+                <a:shade val="15000"/>
+              </a:schemeClr>
+            </a:lnRef>
+            <a:fillRef idx="1">
+              <a:schemeClr val="accent1"/>
+            </a:fillRef>
+            <a:effectRef idx="0">
+              <a:schemeClr val="accent1"/>
+            </a:effectRef>
+            <a:fontRef idx="minor">
+              <a:schemeClr val="lt1"/>
+            </a:fontRef>
+          </p:style>
+          <p:txBody>
+            <a:bodyPr rtlCol="0" anchor="ctr"/>
+            <a:lstStyle/>
+            <a:p>
+              <a:pPr algn="ctr"/>
+              <a:endParaRPr lang="pt-BR"/>
+            </a:p>
+          </p:txBody>
+        </p:sp>
+        <p:cxnSp>
+          <p:nvCxnSpPr>
+            <p:cNvPr id="22" name="Straight Arrow Connector 21">
+              <a:extLst>
+                <a:ext uri="{FF2B5EF4-FFF2-40B4-BE49-F238E27FC236}">
+                  <a16:creationId xmlns:a16="http://schemas.microsoft.com/office/drawing/2014/main" id="{2079778B-47D1-2666-0861-C16604698386}"/>
+                </a:ext>
+              </a:extLst>
+            </p:cNvPr>
+            <p:cNvCxnSpPr>
+              <a:cxnSpLocks/>
+            </p:cNvCxnSpPr>
+            <p:nvPr/>
+          </p:nvCxnSpPr>
+          <p:spPr>
+            <a:xfrm flipH="1" flipV="1">
+              <a:off x="2348071" y="3357751"/>
+              <a:ext cx="1" cy="774867"/>
+            </a:xfrm>
+            <a:prstGeom prst="straightConnector1">
+              <a:avLst/>
+            </a:prstGeom>
+            <a:ln>
+              <a:solidFill>
+                <a:schemeClr val="tx1"/>
+              </a:solidFill>
+              <a:tailEnd type="triangle"/>
+            </a:ln>
+          </p:spPr>
+          <p:style>
+            <a:lnRef idx="2">
+              <a:schemeClr val="accent1"/>
+            </a:lnRef>
+            <a:fillRef idx="0">
+              <a:schemeClr val="accent1"/>
+            </a:fillRef>
+            <a:effectRef idx="1">
+              <a:schemeClr val="accent1"/>
+            </a:effectRef>
+            <a:fontRef idx="minor">
+              <a:schemeClr val="tx1"/>
+            </a:fontRef>
+          </p:style>
+        </p:cxnSp>
+        <p:cxnSp>
+          <p:nvCxnSpPr>
+            <p:cNvPr id="23" name="Straight Arrow Connector 22">
+              <a:extLst>
+                <a:ext uri="{FF2B5EF4-FFF2-40B4-BE49-F238E27FC236}">
+                  <a16:creationId xmlns:a16="http://schemas.microsoft.com/office/drawing/2014/main" id="{347D07DE-B126-74F7-EB5F-1F800BEB3455}"/>
+                </a:ext>
+              </a:extLst>
+            </p:cNvPr>
+            <p:cNvCxnSpPr>
+              <a:cxnSpLocks/>
+            </p:cNvCxnSpPr>
+            <p:nvPr/>
+          </p:nvCxnSpPr>
+          <p:spPr>
+            <a:xfrm>
+              <a:off x="2348072" y="4132618"/>
+              <a:ext cx="2240935" cy="0"/>
+            </a:xfrm>
+            <a:prstGeom prst="straightConnector1">
+              <a:avLst/>
+            </a:prstGeom>
+            <a:ln>
+              <a:solidFill>
+                <a:schemeClr val="tx1"/>
+              </a:solidFill>
+              <a:tailEnd type="triangle"/>
+            </a:ln>
+          </p:spPr>
+          <p:style>
+            <a:lnRef idx="2">
+              <a:schemeClr val="accent1"/>
+            </a:lnRef>
+            <a:fillRef idx="0">
+              <a:schemeClr val="accent1"/>
+            </a:fillRef>
+            <a:effectRef idx="1">
+              <a:schemeClr val="accent1"/>
+            </a:effectRef>
+            <a:fontRef idx="minor">
+              <a:schemeClr val="tx1"/>
+            </a:fontRef>
+          </p:style>
+        </p:cxnSp>
+        <p:cxnSp>
+          <p:nvCxnSpPr>
+            <p:cNvPr id="24" name="Straight Arrow Connector 23">
+              <a:extLst>
+                <a:ext uri="{FF2B5EF4-FFF2-40B4-BE49-F238E27FC236}">
+                  <a16:creationId xmlns:a16="http://schemas.microsoft.com/office/drawing/2014/main" id="{13ECFF32-CA15-F024-7BDE-FEE70F25DBB3}"/>
+                </a:ext>
+              </a:extLst>
+            </p:cNvPr>
+            <p:cNvCxnSpPr>
+              <a:cxnSpLocks/>
+            </p:cNvCxnSpPr>
+            <p:nvPr/>
+          </p:nvCxnSpPr>
+          <p:spPr>
+            <a:xfrm flipH="1">
+              <a:off x="2030940" y="4132618"/>
+              <a:ext cx="317131" cy="422463"/>
+            </a:xfrm>
+            <a:prstGeom prst="straightConnector1">
+              <a:avLst/>
+            </a:prstGeom>
+            <a:ln>
+              <a:solidFill>
+                <a:schemeClr val="tx1"/>
+              </a:solidFill>
+              <a:tailEnd type="triangle"/>
+            </a:ln>
+          </p:spPr>
+          <p:style>
+            <a:lnRef idx="2">
+              <a:schemeClr val="accent1"/>
+            </a:lnRef>
+            <a:fillRef idx="0">
+              <a:schemeClr val="accent1"/>
+            </a:fillRef>
+            <a:effectRef idx="1">
+              <a:schemeClr val="accent1"/>
+            </a:effectRef>
+            <a:fontRef idx="minor">
+              <a:schemeClr val="tx1"/>
+            </a:fontRef>
+          </p:style>
+        </p:cxnSp>
+        <p:sp>
+          <p:nvSpPr>
+            <p:cNvPr id="25" name="TextBox 24">
+              <a:extLst>
+                <a:ext uri="{FF2B5EF4-FFF2-40B4-BE49-F238E27FC236}">
+                  <a16:creationId xmlns:a16="http://schemas.microsoft.com/office/drawing/2014/main" id="{D57C48E2-3B2E-87E9-09A0-FEAD1730A968}"/>
+                </a:ext>
+              </a:extLst>
+            </p:cNvPr>
+            <p:cNvSpPr txBox="1"/>
+            <p:nvPr/>
+          </p:nvSpPr>
+          <p:spPr>
+            <a:xfrm>
+              <a:off x="4597605" y="3915891"/>
+              <a:ext cx="351378" cy="369332"/>
+            </a:xfrm>
+            <a:prstGeom prst="rect">
+              <a:avLst/>
+            </a:prstGeom>
+            <a:noFill/>
+          </p:spPr>
+          <p:txBody>
+            <a:bodyPr wrap="none" rtlCol="0">
+              <a:spAutoFit/>
+            </a:bodyPr>
+            <a:lstStyle/>
+            <a:p>
+              <a:r>
+                <a:rPr lang="pt-BR" dirty="0">
+                  <a:latin typeface="Times New Roman" panose="02020603050405020304" pitchFamily="18" charset="0"/>
+                  <a:cs typeface="Times New Roman" panose="02020603050405020304" pitchFamily="18" charset="0"/>
+                </a:rPr>
+                <a:t>Y</a:t>
+              </a:r>
+            </a:p>
+          </p:txBody>
+        </p:sp>
+        <p:sp>
+          <p:nvSpPr>
+            <p:cNvPr id="26" name="TextBox 25">
+              <a:extLst>
+                <a:ext uri="{FF2B5EF4-FFF2-40B4-BE49-F238E27FC236}">
+                  <a16:creationId xmlns:a16="http://schemas.microsoft.com/office/drawing/2014/main" id="{006589A8-8B6E-22A4-F728-3486E191A2F4}"/>
+                </a:ext>
+              </a:extLst>
+            </p:cNvPr>
+            <p:cNvSpPr txBox="1"/>
+            <p:nvPr/>
+          </p:nvSpPr>
+          <p:spPr>
+            <a:xfrm>
+              <a:off x="1821005" y="4544088"/>
+              <a:ext cx="351378" cy="369332"/>
+            </a:xfrm>
+            <a:prstGeom prst="rect">
+              <a:avLst/>
+            </a:prstGeom>
+            <a:noFill/>
+          </p:spPr>
+          <p:txBody>
+            <a:bodyPr wrap="none" rtlCol="0">
+              <a:spAutoFit/>
+            </a:bodyPr>
+            <a:lstStyle/>
+            <a:p>
+              <a:r>
+                <a:rPr lang="pt-BR" dirty="0">
+                  <a:latin typeface="Times New Roman" panose="02020603050405020304" pitchFamily="18" charset="0"/>
+                  <a:cs typeface="Times New Roman" panose="02020603050405020304" pitchFamily="18" charset="0"/>
+                </a:rPr>
+                <a:t>X</a:t>
+              </a:r>
+            </a:p>
+          </p:txBody>
+        </p:sp>
+        <p:sp>
+          <p:nvSpPr>
+            <p:cNvPr id="27" name="TextBox 26">
+              <a:extLst>
+                <a:ext uri="{FF2B5EF4-FFF2-40B4-BE49-F238E27FC236}">
+                  <a16:creationId xmlns:a16="http://schemas.microsoft.com/office/drawing/2014/main" id="{11754AC1-AC6E-3EA1-A814-AECAB43F68FB}"/>
+                </a:ext>
+              </a:extLst>
+            </p:cNvPr>
+            <p:cNvSpPr txBox="1"/>
+            <p:nvPr/>
+          </p:nvSpPr>
+          <p:spPr>
+            <a:xfrm>
+              <a:off x="2189505" y="2999412"/>
+              <a:ext cx="325730" cy="369332"/>
+            </a:xfrm>
+            <a:prstGeom prst="rect">
+              <a:avLst/>
+            </a:prstGeom>
+            <a:noFill/>
+          </p:spPr>
+          <p:txBody>
+            <a:bodyPr wrap="none" rtlCol="0">
+              <a:spAutoFit/>
+            </a:bodyPr>
+            <a:lstStyle/>
+            <a:p>
+              <a:r>
+                <a:rPr lang="pt-BR" dirty="0">
+                  <a:latin typeface="Times New Roman" panose="02020603050405020304" pitchFamily="18" charset="0"/>
+                  <a:cs typeface="Times New Roman" panose="02020603050405020304" pitchFamily="18" charset="0"/>
+                </a:rPr>
+                <a:t>Z</a:t>
+              </a:r>
+            </a:p>
+          </p:txBody>
+        </p:sp>
+      </p:grpSp>
+    </p:spTree>
+    <p:extLst>
+      <p:ext uri="{BB962C8B-B14F-4D97-AF65-F5344CB8AC3E}">
+        <p14:creationId xmlns:p14="http://schemas.microsoft.com/office/powerpoint/2010/main" val="4196720484"/>
+      </p:ext>
+    </p:extLst>
+  </p:cSld>
+  <p:clrMapOvr>
+    <a:masterClrMapping/>
+  </p:clrMapOvr>
+</p:sld>
+</file>
+
 <file path=ppt/slides/slide2.xml><?xml version="1.0" encoding="utf-8"?>
 <p:sld xmlns:a="http://schemas.openxmlformats.org/drawingml/2006/main" xmlns:r="http://schemas.openxmlformats.org/officeDocument/2006/relationships" xmlns:p="http://schemas.openxmlformats.org/presentationml/2006/main">
   <p:cSld>
@@ -17440,10 +18268,10 @@
       </p:grpSpPr>
       <p:grpSp>
         <p:nvGrpSpPr>
-          <p:cNvPr id="7" name="Group 6">
+          <p:cNvPr id="10" name="Group 9">
             <a:extLst>
               <a:ext uri="{FF2B5EF4-FFF2-40B4-BE49-F238E27FC236}">
-                <a16:creationId xmlns:a16="http://schemas.microsoft.com/office/drawing/2014/main" id="{1F7C3375-1F11-3A99-DAFF-60594AFA7427}"/>
+                <a16:creationId xmlns:a16="http://schemas.microsoft.com/office/drawing/2014/main" id="{FE3EBD89-0E68-3B35-525E-3ABD8515678D}"/>
               </a:ext>
             </a:extLst>
           </p:cNvPr>
@@ -17452,106 +18280,28 @@
         </p:nvGrpSpPr>
         <p:grpSpPr>
           <a:xfrm>
-            <a:off x="1818678" y="1028540"/>
-            <a:ext cx="8554644" cy="5020376"/>
-            <a:chOff x="1818678" y="1028540"/>
-            <a:chExt cx="8554644" cy="5020376"/>
+            <a:off x="1793099" y="1028539"/>
+            <a:ext cx="8704687" cy="5170380"/>
+            <a:chOff x="1793099" y="1028539"/>
+            <a:chExt cx="8704687" cy="5170380"/>
           </a:xfrm>
         </p:grpSpPr>
-        <p:pic>
-          <p:nvPicPr>
-            <p:cNvPr id="3" name="Picture 2">
+        <p:sp>
+          <p:nvSpPr>
+            <p:cNvPr id="9" name="Rectangle 8">
               <a:extLst>
                 <a:ext uri="{FF2B5EF4-FFF2-40B4-BE49-F238E27FC236}">
-                  <a16:creationId xmlns:a16="http://schemas.microsoft.com/office/drawing/2014/main" id="{C395F624-29E7-EB8D-AA14-ACD11D1DD967}"/>
+                  <a16:creationId xmlns:a16="http://schemas.microsoft.com/office/drawing/2014/main" id="{E6CBC1F0-97FD-DA72-ED5A-E7D463CC8A68}"/>
                 </a:ext>
               </a:extLst>
             </p:cNvPr>
-            <p:cNvPicPr>
-              <a:picLocks noChangeAspect="1"/>
-            </p:cNvPicPr>
-            <p:nvPr/>
-          </p:nvPicPr>
-          <p:blipFill>
-            <a:blip r:embed="rId2">
-              <a:extLst>
-                <a:ext uri="{28A0092B-C50C-407E-A947-70E740481C1C}">
-                  <a14:useLocalDpi xmlns:a14="http://schemas.microsoft.com/office/drawing/2010/main" val="0"/>
-                </a:ext>
-              </a:extLst>
-            </a:blip>
-            <a:stretch>
-              <a:fillRect/>
-            </a:stretch>
-          </p:blipFill>
-          <p:spPr>
-            <a:xfrm>
-              <a:off x="1818678" y="1028540"/>
-              <a:ext cx="8554644" cy="5020376"/>
-            </a:xfrm>
-            <a:prstGeom prst="rect">
-              <a:avLst/>
-            </a:prstGeom>
-          </p:spPr>
-        </p:pic>
-        <p:sp>
-          <p:nvSpPr>
-            <p:cNvPr id="4" name="TextBox 3">
-              <a:extLst>
-                <a:ext uri="{FF2B5EF4-FFF2-40B4-BE49-F238E27FC236}">
-                  <a16:creationId xmlns:a16="http://schemas.microsoft.com/office/drawing/2014/main" id="{52DD1A79-310E-A78E-9BDB-78E99881CC90}"/>
-                </a:ext>
-              </a:extLst>
-            </p:cNvPr>
-            <p:cNvSpPr txBox="1"/>
+            <p:cNvSpPr/>
             <p:nvPr/>
           </p:nvSpPr>
           <p:spPr>
             <a:xfrm>
-              <a:off x="8607552" y="3755136"/>
-              <a:ext cx="1162241" cy="400110"/>
-            </a:xfrm>
-            <a:prstGeom prst="rect">
-              <a:avLst/>
-            </a:prstGeom>
-            <a:noFill/>
-          </p:spPr>
-          <p:txBody>
-            <a:bodyPr wrap="none" rtlCol="0">
-              <a:spAutoFit/>
-            </a:bodyPr>
-            <a:lstStyle/>
-            <a:p>
-              <a:r>
-                <a:rPr lang="pt-BR" sz="2000" dirty="0">
-                  <a:latin typeface="Times New Roman" panose="02020603050405020304" pitchFamily="18" charset="0"/>
-                  <a:cs typeface="Times New Roman" panose="02020603050405020304" pitchFamily="18" charset="0"/>
-                </a:rPr>
-                <a:t>Torcional</a:t>
-              </a:r>
-              <a:endParaRPr lang="pt-BR" dirty="0">
-                <a:latin typeface="Times New Roman" panose="02020603050405020304" pitchFamily="18" charset="0"/>
-                <a:cs typeface="Times New Roman" panose="02020603050405020304" pitchFamily="18" charset="0"/>
-              </a:endParaRPr>
-            </a:p>
-          </p:txBody>
-        </p:sp>
-        <p:sp>
-          <p:nvSpPr>
-            <p:cNvPr id="5" name="TextBox 4">
-              <a:extLst>
-                <a:ext uri="{FF2B5EF4-FFF2-40B4-BE49-F238E27FC236}">
-                  <a16:creationId xmlns:a16="http://schemas.microsoft.com/office/drawing/2014/main" id="{D3DE5C22-CA75-31F6-D542-30E5945083D9}"/>
-                </a:ext>
-              </a:extLst>
-            </p:cNvPr>
-            <p:cNvSpPr txBox="1"/>
-            <p:nvPr/>
-          </p:nvSpPr>
-          <p:spPr>
-            <a:xfrm>
-              <a:off x="4845218" y="5589067"/>
-              <a:ext cx="3212592" cy="400110"/>
+              <a:off x="1793099" y="1028539"/>
+              <a:ext cx="8704687" cy="5170380"/>
             </a:xfrm>
             <a:prstGeom prst="rect">
               <a:avLst/>
@@ -17559,63 +18309,216 @@
             <a:solidFill>
               <a:schemeClr val="bg1"/>
             </a:solidFill>
+            <a:ln>
+              <a:solidFill>
+                <a:schemeClr val="bg1"/>
+              </a:solidFill>
+            </a:ln>
           </p:spPr>
+          <p:style>
+            <a:lnRef idx="2">
+              <a:schemeClr val="accent1">
+                <a:shade val="15000"/>
+              </a:schemeClr>
+            </a:lnRef>
+            <a:fillRef idx="1">
+              <a:schemeClr val="accent1"/>
+            </a:fillRef>
+            <a:effectRef idx="0">
+              <a:schemeClr val="accent1"/>
+            </a:effectRef>
+            <a:fontRef idx="minor">
+              <a:schemeClr val="lt1"/>
+            </a:fontRef>
+          </p:style>
           <p:txBody>
-            <a:bodyPr wrap="square" rtlCol="0">
-              <a:spAutoFit/>
-            </a:bodyPr>
+            <a:bodyPr rtlCol="0" anchor="ctr"/>
             <a:lstStyle/>
             <a:p>
-              <a:r>
-                <a:rPr lang="pt-BR" sz="2000" dirty="0">
-                  <a:latin typeface="Times New Roman" panose="02020603050405020304" pitchFamily="18" charset="0"/>
-                  <a:cs typeface="Times New Roman" panose="02020603050405020304" pitchFamily="18" charset="0"/>
-                </a:rPr>
-                <a:t>Velocidade de Rotação [rpm]</a:t>
-              </a:r>
+              <a:pPr algn="ctr"/>
+              <a:endParaRPr lang="pt-BR"/>
             </a:p>
           </p:txBody>
         </p:sp>
-        <p:sp>
-          <p:nvSpPr>
-            <p:cNvPr id="6" name="TextBox 5">
+        <p:grpSp>
+          <p:nvGrpSpPr>
+            <p:cNvPr id="7" name="Group 6">
               <a:extLst>
                 <a:ext uri="{FF2B5EF4-FFF2-40B4-BE49-F238E27FC236}">
-                  <a16:creationId xmlns:a16="http://schemas.microsoft.com/office/drawing/2014/main" id="{968B5D67-F3CD-C562-F708-B396E50213D8}"/>
+                  <a16:creationId xmlns:a16="http://schemas.microsoft.com/office/drawing/2014/main" id="{1F7C3375-1F11-3A99-DAFF-60594AFA7427}"/>
                 </a:ext>
               </a:extLst>
             </p:cNvPr>
-            <p:cNvSpPr txBox="1"/>
+            <p:cNvGrpSpPr/>
             <p:nvPr/>
-          </p:nvSpPr>
-          <p:spPr>
-            <a:xfrm rot="16200000">
-              <a:off x="644004" y="2919354"/>
-              <a:ext cx="3212592" cy="400110"/>
+          </p:nvGrpSpPr>
+          <p:grpSpPr>
+            <a:xfrm>
+              <a:off x="1868120" y="1103541"/>
+              <a:ext cx="8554644" cy="5020376"/>
+              <a:chOff x="1818678" y="1028540"/>
+              <a:chExt cx="8554644" cy="5020376"/>
             </a:xfrm>
-            <a:prstGeom prst="rect">
-              <a:avLst/>
-            </a:prstGeom>
-            <a:solidFill>
-              <a:schemeClr val="bg1"/>
-            </a:solidFill>
-          </p:spPr>
-          <p:txBody>
-            <a:bodyPr wrap="square" rtlCol="0">
-              <a:spAutoFit/>
-            </a:bodyPr>
-            <a:lstStyle/>
-            <a:p>
-              <a:r>
-                <a:rPr lang="pt-BR" sz="2000" dirty="0">
+          </p:grpSpPr>
+          <p:pic>
+            <p:nvPicPr>
+              <p:cNvPr id="3" name="Picture 2">
+                <a:extLst>
+                  <a:ext uri="{FF2B5EF4-FFF2-40B4-BE49-F238E27FC236}">
+                    <a16:creationId xmlns:a16="http://schemas.microsoft.com/office/drawing/2014/main" id="{C395F624-29E7-EB8D-AA14-ACD11D1DD967}"/>
+                  </a:ext>
+                </a:extLst>
+              </p:cNvPr>
+              <p:cNvPicPr>
+                <a:picLocks noChangeAspect="1"/>
+              </p:cNvPicPr>
+              <p:nvPr/>
+            </p:nvPicPr>
+            <p:blipFill>
+              <a:blip r:embed="rId2">
+                <a:extLst>
+                  <a:ext uri="{28A0092B-C50C-407E-A947-70E740481C1C}">
+                    <a14:useLocalDpi xmlns:a14="http://schemas.microsoft.com/office/drawing/2010/main" val="0"/>
+                  </a:ext>
+                </a:extLst>
+              </a:blip>
+              <a:stretch>
+                <a:fillRect/>
+              </a:stretch>
+            </p:blipFill>
+            <p:spPr>
+              <a:xfrm>
+                <a:off x="1818678" y="1028540"/>
+                <a:ext cx="8554644" cy="5020376"/>
+              </a:xfrm>
+              <a:prstGeom prst="rect">
+                <a:avLst/>
+              </a:prstGeom>
+            </p:spPr>
+          </p:pic>
+          <p:sp>
+            <p:nvSpPr>
+              <p:cNvPr id="4" name="TextBox 3">
+                <a:extLst>
+                  <a:ext uri="{FF2B5EF4-FFF2-40B4-BE49-F238E27FC236}">
+                    <a16:creationId xmlns:a16="http://schemas.microsoft.com/office/drawing/2014/main" id="{52DD1A79-310E-A78E-9BDB-78E99881CC90}"/>
+                  </a:ext>
+                </a:extLst>
+              </p:cNvPr>
+              <p:cNvSpPr txBox="1"/>
+              <p:nvPr/>
+            </p:nvSpPr>
+            <p:spPr>
+              <a:xfrm>
+                <a:off x="8607552" y="3755136"/>
+                <a:ext cx="1162241" cy="400110"/>
+              </a:xfrm>
+              <a:prstGeom prst="rect">
+                <a:avLst/>
+              </a:prstGeom>
+              <a:noFill/>
+            </p:spPr>
+            <p:txBody>
+              <a:bodyPr wrap="none" rtlCol="0">
+                <a:spAutoFit/>
+              </a:bodyPr>
+              <a:lstStyle/>
+              <a:p>
+                <a:r>
+                  <a:rPr lang="pt-BR" sz="2000" dirty="0">
+                    <a:latin typeface="Times New Roman" panose="02020603050405020304" pitchFamily="18" charset="0"/>
+                    <a:cs typeface="Times New Roman" panose="02020603050405020304" pitchFamily="18" charset="0"/>
+                  </a:rPr>
+                  <a:t>Torcional</a:t>
+                </a:r>
+                <a:endParaRPr lang="pt-BR" dirty="0">
                   <a:latin typeface="Times New Roman" panose="02020603050405020304" pitchFamily="18" charset="0"/>
                   <a:cs typeface="Times New Roman" panose="02020603050405020304" pitchFamily="18" charset="0"/>
-                </a:rPr>
-                <a:t>Frequência Natural [Hz]</a:t>
-              </a:r>
-            </a:p>
-          </p:txBody>
-        </p:sp>
+                </a:endParaRPr>
+              </a:p>
+            </p:txBody>
+          </p:sp>
+          <p:sp>
+            <p:nvSpPr>
+              <p:cNvPr id="5" name="TextBox 4">
+                <a:extLst>
+                  <a:ext uri="{FF2B5EF4-FFF2-40B4-BE49-F238E27FC236}">
+                    <a16:creationId xmlns:a16="http://schemas.microsoft.com/office/drawing/2014/main" id="{D3DE5C22-CA75-31F6-D542-30E5945083D9}"/>
+                  </a:ext>
+                </a:extLst>
+              </p:cNvPr>
+              <p:cNvSpPr txBox="1"/>
+              <p:nvPr/>
+            </p:nvSpPr>
+            <p:spPr>
+              <a:xfrm>
+                <a:off x="4845218" y="5589067"/>
+                <a:ext cx="3212592" cy="400110"/>
+              </a:xfrm>
+              <a:prstGeom prst="rect">
+                <a:avLst/>
+              </a:prstGeom>
+              <a:solidFill>
+                <a:schemeClr val="bg1"/>
+              </a:solidFill>
+            </p:spPr>
+            <p:txBody>
+              <a:bodyPr wrap="square" rtlCol="0">
+                <a:spAutoFit/>
+              </a:bodyPr>
+              <a:lstStyle/>
+              <a:p>
+                <a:r>
+                  <a:rPr lang="pt-BR" sz="2000" dirty="0">
+                    <a:latin typeface="Times New Roman" panose="02020603050405020304" pitchFamily="18" charset="0"/>
+                    <a:cs typeface="Times New Roman" panose="02020603050405020304" pitchFamily="18" charset="0"/>
+                  </a:rPr>
+                  <a:t>Velocidade de Rotação [rpm]</a:t>
+                </a:r>
+              </a:p>
+            </p:txBody>
+          </p:sp>
+          <p:sp>
+            <p:nvSpPr>
+              <p:cNvPr id="6" name="TextBox 5">
+                <a:extLst>
+                  <a:ext uri="{FF2B5EF4-FFF2-40B4-BE49-F238E27FC236}">
+                    <a16:creationId xmlns:a16="http://schemas.microsoft.com/office/drawing/2014/main" id="{968B5D67-F3CD-C562-F708-B396E50213D8}"/>
+                  </a:ext>
+                </a:extLst>
+              </p:cNvPr>
+              <p:cNvSpPr txBox="1"/>
+              <p:nvPr/>
+            </p:nvSpPr>
+            <p:spPr>
+              <a:xfrm rot="16200000">
+                <a:off x="644004" y="2919354"/>
+                <a:ext cx="3212592" cy="400110"/>
+              </a:xfrm>
+              <a:prstGeom prst="rect">
+                <a:avLst/>
+              </a:prstGeom>
+              <a:solidFill>
+                <a:schemeClr val="bg1"/>
+              </a:solidFill>
+            </p:spPr>
+            <p:txBody>
+              <a:bodyPr wrap="square" rtlCol="0">
+                <a:spAutoFit/>
+              </a:bodyPr>
+              <a:lstStyle/>
+              <a:p>
+                <a:r>
+                  <a:rPr lang="pt-BR" sz="2000" dirty="0">
+                    <a:latin typeface="Times New Roman" panose="02020603050405020304" pitchFamily="18" charset="0"/>
+                    <a:cs typeface="Times New Roman" panose="02020603050405020304" pitchFamily="18" charset="0"/>
+                  </a:rPr>
+                  <a:t>Frequência Natural [Hz]</a:t>
+                </a:r>
+              </a:p>
+            </p:txBody>
+          </p:sp>
+        </p:grpSp>
       </p:grpSp>
     </p:spTree>
     <p:extLst>

--- a/DISSERTACAO/figuras/figures.pptx
+++ b/DISSERTACAO/figuras/figures.pptx
@@ -5,7 +5,7 @@
     <p:sldMasterId id="2147483648" r:id="rId1"/>
   </p:sldMasterIdLst>
   <p:notesMasterIdLst>
-    <p:notesMasterId r:id="rId12"/>
+    <p:notesMasterId r:id="rId14"/>
   </p:notesMasterIdLst>
   <p:sldIdLst>
     <p:sldId id="256" r:id="rId2"/>
@@ -18,6 +18,8 @@
     <p:sldId id="263" r:id="rId9"/>
     <p:sldId id="264" r:id="rId10"/>
     <p:sldId id="265" r:id="rId11"/>
+    <p:sldId id="266" r:id="rId12"/>
+    <p:sldId id="267" r:id="rId13"/>
   </p:sldIdLst>
   <p:sldSz cx="12192000" cy="6858000"/>
   <p:notesSz cx="6858000" cy="9144000"/>
@@ -127,7 +129,7 @@
 <file path=ppt/revisionInfo.xml><?xml version="1.0" encoding="utf-8"?>
 <p1510:revInfo xmlns:a="http://schemas.openxmlformats.org/drawingml/2006/main" xmlns:r="http://schemas.openxmlformats.org/officeDocument/2006/relationships" xmlns:p1510="http://schemas.microsoft.com/office/powerpoint/2015/10/main">
   <p1510:revLst>
-    <p1510:client id="{93B72BAE-AB54-495B-86A9-4541991303FD}" v="22" dt="2026-06-02T18:19:11.810"/>
+    <p1510:client id="{93B72BAE-AB54-495B-86A9-4541991303FD}" v="77" dt="2026-06-03T20:47:40.220"/>
   </p1510:revLst>
 </p1510:revInfo>
 </file>
@@ -137,7 +139,7 @@
   <pc:docChgLst>
     <pc:chgData name="Murillo Álvaro Borges de Sousa" userId="02386067-c46f-46e6-bf61-8f6a774af0e5" providerId="ADAL" clId="{73C3FE35-BF7E-418C-A7F8-FA0AB4F63A6B}"/>
     <pc:docChg chg="undo custSel addSld modSld sldOrd">
-      <pc:chgData name="Murillo Álvaro Borges de Sousa" userId="02386067-c46f-46e6-bf61-8f6a774af0e5" providerId="ADAL" clId="{73C3FE35-BF7E-418C-A7F8-FA0AB4F63A6B}" dt="2026-06-02T18:19:11.810" v="442" actId="164"/>
+      <pc:chgData name="Murillo Álvaro Borges de Sousa" userId="02386067-c46f-46e6-bf61-8f6a774af0e5" providerId="ADAL" clId="{73C3FE35-BF7E-418C-A7F8-FA0AB4F63A6B}" dt="2026-06-03T20:47:40.220" v="624" actId="14100"/>
       <pc:docMkLst>
         <pc:docMk/>
       </pc:docMkLst>
@@ -784,14 +786,6 @@
           </ac:spMkLst>
         </pc:spChg>
         <pc:grpChg chg="mod">
-          <ac:chgData name="Murillo Álvaro Borges de Sousa" userId="02386067-c46f-46e6-bf61-8f6a774af0e5" providerId="ADAL" clId="{73C3FE35-BF7E-418C-A7F8-FA0AB4F63A6B}" dt="2026-06-01T17:59:08.477" v="243" actId="164"/>
-          <ac:grpSpMkLst>
-            <pc:docMk/>
-            <pc:sldMk cId="1834618103" sldId="263"/>
-            <ac:grpSpMk id="2" creationId="{06E81DF3-7D76-29AB-97CF-A8B53F2D8ED0}"/>
-          </ac:grpSpMkLst>
-        </pc:grpChg>
-        <pc:grpChg chg="mod">
           <ac:chgData name="Murillo Álvaro Borges de Sousa" userId="02386067-c46f-46e6-bf61-8f6a774af0e5" providerId="ADAL" clId="{73C3FE35-BF7E-418C-A7F8-FA0AB4F63A6B}" dt="2026-06-01T18:03:38.673" v="248" actId="164"/>
           <ac:grpSpMkLst>
             <pc:docMk/>
@@ -800,27 +794,11 @@
           </ac:grpSpMkLst>
         </pc:grpChg>
         <pc:grpChg chg="mod">
-          <ac:chgData name="Murillo Álvaro Borges de Sousa" userId="02386067-c46f-46e6-bf61-8f6a774af0e5" providerId="ADAL" clId="{73C3FE35-BF7E-418C-A7F8-FA0AB4F63A6B}" dt="2026-06-01T17:59:08.477" v="243" actId="164"/>
-          <ac:grpSpMkLst>
-            <pc:docMk/>
-            <pc:sldMk cId="1834618103" sldId="263"/>
-            <ac:grpSpMk id="34" creationId="{BF02EA0B-FC7B-8F43-7233-A7650864F8E7}"/>
-          </ac:grpSpMkLst>
-        </pc:grpChg>
-        <pc:grpChg chg="mod">
           <ac:chgData name="Murillo Álvaro Borges de Sousa" userId="02386067-c46f-46e6-bf61-8f6a774af0e5" providerId="ADAL" clId="{73C3FE35-BF7E-418C-A7F8-FA0AB4F63A6B}" dt="2026-06-01T18:03:30.031" v="247" actId="164"/>
           <ac:grpSpMkLst>
             <pc:docMk/>
             <pc:sldMk cId="1834618103" sldId="263"/>
             <ac:grpSpMk id="35" creationId="{91E6B644-1474-DD30-D9A3-246E2A799F9B}"/>
-          </ac:grpSpMkLst>
-        </pc:grpChg>
-        <pc:grpChg chg="add mod">
-          <ac:chgData name="Murillo Álvaro Borges de Sousa" userId="02386067-c46f-46e6-bf61-8f6a774af0e5" providerId="ADAL" clId="{73C3FE35-BF7E-418C-A7F8-FA0AB4F63A6B}" dt="2026-06-01T17:59:08.477" v="243" actId="164"/>
-          <ac:grpSpMkLst>
-            <pc:docMk/>
-            <pc:sldMk cId="1834618103" sldId="263"/>
-            <ac:grpSpMk id="67" creationId="{0784DB73-6013-98E4-FC95-B2D8BEF1FE2E}"/>
           </ac:grpSpMkLst>
         </pc:grpChg>
         <pc:grpChg chg="add mod">
@@ -837,14 +815,6 @@
             <pc:docMk/>
             <pc:sldMk cId="1834618103" sldId="263"/>
             <ac:grpSpMk id="69" creationId="{94D82AB4-D7F7-3A71-B6AD-76DC93815991}"/>
-          </ac:grpSpMkLst>
-        </pc:grpChg>
-        <pc:grpChg chg="add mod">
-          <ac:chgData name="Murillo Álvaro Borges de Sousa" userId="02386067-c46f-46e6-bf61-8f6a774af0e5" providerId="ADAL" clId="{73C3FE35-BF7E-418C-A7F8-FA0AB4F63A6B}" dt="2026-06-01T18:03:47.628" v="249" actId="164"/>
-          <ac:grpSpMkLst>
-            <pc:docMk/>
-            <pc:sldMk cId="1834618103" sldId="263"/>
-            <ac:grpSpMk id="70" creationId="{1BAF1C5D-DD18-3276-45AB-A46DF417AD86}"/>
           </ac:grpSpMkLst>
         </pc:grpChg>
         <pc:grpChg chg="add mod">
@@ -1070,6 +1040,196 @@
           </ac:cxnSpMkLst>
         </pc:cxnChg>
       </pc:sldChg>
+      <pc:sldChg chg="addSp delSp modSp new mod ord">
+        <pc:chgData name="Murillo Álvaro Borges de Sousa" userId="02386067-c46f-46e6-bf61-8f6a774af0e5" providerId="ADAL" clId="{73C3FE35-BF7E-418C-A7F8-FA0AB4F63A6B}" dt="2026-06-03T18:54:11.602" v="561" actId="403"/>
+        <pc:sldMkLst>
+          <pc:docMk/>
+          <pc:sldMk cId="790095411" sldId="266"/>
+        </pc:sldMkLst>
+        <pc:spChg chg="add mod ord">
+          <ac:chgData name="Murillo Álvaro Borges de Sousa" userId="02386067-c46f-46e6-bf61-8f6a774af0e5" providerId="ADAL" clId="{73C3FE35-BF7E-418C-A7F8-FA0AB4F63A6B}" dt="2026-06-03T18:46:53.962" v="557" actId="164"/>
+          <ac:spMkLst>
+            <pc:docMk/>
+            <pc:sldMk cId="790095411" sldId="266"/>
+            <ac:spMk id="2" creationId="{93B30B1F-CC39-F2A3-F32D-F40C27B31B68}"/>
+          </ac:spMkLst>
+        </pc:spChg>
+        <pc:spChg chg="add mod">
+          <ac:chgData name="Murillo Álvaro Borges de Sousa" userId="02386067-c46f-46e6-bf61-8f6a774af0e5" providerId="ADAL" clId="{73C3FE35-BF7E-418C-A7F8-FA0AB4F63A6B}" dt="2026-06-03T18:46:53.962" v="557" actId="164"/>
+          <ac:spMkLst>
+            <pc:docMk/>
+            <pc:sldMk cId="790095411" sldId="266"/>
+            <ac:spMk id="9" creationId="{29C45C26-866A-35EA-383A-AA46AFD9FCC0}"/>
+          </ac:spMkLst>
+        </pc:spChg>
+        <pc:spChg chg="add mod">
+          <ac:chgData name="Murillo Álvaro Borges de Sousa" userId="02386067-c46f-46e6-bf61-8f6a774af0e5" providerId="ADAL" clId="{73C3FE35-BF7E-418C-A7F8-FA0AB4F63A6B}" dt="2026-06-03T18:46:53.962" v="557" actId="164"/>
+          <ac:spMkLst>
+            <pc:docMk/>
+            <pc:sldMk cId="790095411" sldId="266"/>
+            <ac:spMk id="17" creationId="{9DE5CBB7-A5B3-3B51-7DD5-157FD84B1D8A}"/>
+          </ac:spMkLst>
+        </pc:spChg>
+        <pc:spChg chg="add mod">
+          <ac:chgData name="Murillo Álvaro Borges de Sousa" userId="02386067-c46f-46e6-bf61-8f6a774af0e5" providerId="ADAL" clId="{73C3FE35-BF7E-418C-A7F8-FA0AB4F63A6B}" dt="2026-06-03T18:46:53.962" v="557" actId="164"/>
+          <ac:spMkLst>
+            <pc:docMk/>
+            <pc:sldMk cId="790095411" sldId="266"/>
+            <ac:spMk id="18" creationId="{12B1573A-43F7-FCE5-554F-6291D4A6BDB2}"/>
+          </ac:spMkLst>
+        </pc:spChg>
+        <pc:spChg chg="add mod">
+          <ac:chgData name="Murillo Álvaro Borges de Sousa" userId="02386067-c46f-46e6-bf61-8f6a774af0e5" providerId="ADAL" clId="{73C3FE35-BF7E-418C-A7F8-FA0AB4F63A6B}" dt="2026-06-03T18:46:53.962" v="557" actId="164"/>
+          <ac:spMkLst>
+            <pc:docMk/>
+            <pc:sldMk cId="790095411" sldId="266"/>
+            <ac:spMk id="19" creationId="{E00EA849-0261-7D16-DECC-A6C6FD51DE4D}"/>
+          </ac:spMkLst>
+        </pc:spChg>
+        <pc:spChg chg="add mod">
+          <ac:chgData name="Murillo Álvaro Borges de Sousa" userId="02386067-c46f-46e6-bf61-8f6a774af0e5" providerId="ADAL" clId="{73C3FE35-BF7E-418C-A7F8-FA0AB4F63A6B}" dt="2026-06-03T18:41:39.080" v="512" actId="1076"/>
+          <ac:spMkLst>
+            <pc:docMk/>
+            <pc:sldMk cId="790095411" sldId="266"/>
+            <ac:spMk id="20" creationId="{5DD6CD8C-5935-2425-9CEE-1B6FB3AEE852}"/>
+          </ac:spMkLst>
+        </pc:spChg>
+        <pc:spChg chg="add mod">
+          <ac:chgData name="Murillo Álvaro Borges de Sousa" userId="02386067-c46f-46e6-bf61-8f6a774af0e5" providerId="ADAL" clId="{73C3FE35-BF7E-418C-A7F8-FA0AB4F63A6B}" dt="2026-06-03T18:46:53.962" v="557" actId="164"/>
+          <ac:spMkLst>
+            <pc:docMk/>
+            <pc:sldMk cId="790095411" sldId="266"/>
+            <ac:spMk id="21" creationId="{910EDAC2-AB1B-CC09-F543-DB67348C62EB}"/>
+          </ac:spMkLst>
+        </pc:spChg>
+        <pc:spChg chg="add del mod">
+          <ac:chgData name="Murillo Álvaro Borges de Sousa" userId="02386067-c46f-46e6-bf61-8f6a774af0e5" providerId="ADAL" clId="{73C3FE35-BF7E-418C-A7F8-FA0AB4F63A6B}" dt="2026-06-03T18:43:18.476" v="524" actId="478"/>
+          <ac:spMkLst>
+            <pc:docMk/>
+            <pc:sldMk cId="790095411" sldId="266"/>
+            <ac:spMk id="22" creationId="{8225757F-1773-332F-B024-CFABFDA8DD40}"/>
+          </ac:spMkLst>
+        </pc:spChg>
+        <pc:spChg chg="add mod">
+          <ac:chgData name="Murillo Álvaro Borges de Sousa" userId="02386067-c46f-46e6-bf61-8f6a774af0e5" providerId="ADAL" clId="{73C3FE35-BF7E-418C-A7F8-FA0AB4F63A6B}" dt="2026-06-03T18:46:53.962" v="557" actId="164"/>
+          <ac:spMkLst>
+            <pc:docMk/>
+            <pc:sldMk cId="790095411" sldId="266"/>
+            <ac:spMk id="23" creationId="{43494094-AAA7-261B-E947-6330ECCE4423}"/>
+          </ac:spMkLst>
+        </pc:spChg>
+        <pc:spChg chg="add mod">
+          <ac:chgData name="Murillo Álvaro Borges de Sousa" userId="02386067-c46f-46e6-bf61-8f6a774af0e5" providerId="ADAL" clId="{73C3FE35-BF7E-418C-A7F8-FA0AB4F63A6B}" dt="2026-06-03T18:46:53.962" v="557" actId="164"/>
+          <ac:spMkLst>
+            <pc:docMk/>
+            <pc:sldMk cId="790095411" sldId="266"/>
+            <ac:spMk id="24" creationId="{7C3F8EA1-4DF5-A77C-FB9D-3AC7BC6ADA38}"/>
+          </ac:spMkLst>
+        </pc:spChg>
+        <pc:spChg chg="add mod">
+          <ac:chgData name="Murillo Álvaro Borges de Sousa" userId="02386067-c46f-46e6-bf61-8f6a774af0e5" providerId="ADAL" clId="{73C3FE35-BF7E-418C-A7F8-FA0AB4F63A6B}" dt="2026-06-03T18:54:11.602" v="561" actId="403"/>
+          <ac:spMkLst>
+            <pc:docMk/>
+            <pc:sldMk cId="790095411" sldId="266"/>
+            <ac:spMk id="25" creationId="{891E813D-1A15-BCF5-0862-7F9D3D26F653}"/>
+          </ac:spMkLst>
+        </pc:spChg>
+        <pc:spChg chg="add mod">
+          <ac:chgData name="Murillo Álvaro Borges de Sousa" userId="02386067-c46f-46e6-bf61-8f6a774af0e5" providerId="ADAL" clId="{73C3FE35-BF7E-418C-A7F8-FA0AB4F63A6B}" dt="2026-06-03T18:46:53.962" v="557" actId="164"/>
+          <ac:spMkLst>
+            <pc:docMk/>
+            <pc:sldMk cId="790095411" sldId="266"/>
+            <ac:spMk id="26" creationId="{B731F87B-B38F-8B75-F4A1-DA6636FBCE3B}"/>
+          </ac:spMkLst>
+        </pc:spChg>
+        <pc:cxnChg chg="add mod">
+          <ac:chgData name="Murillo Álvaro Borges de Sousa" userId="02386067-c46f-46e6-bf61-8f6a774af0e5" providerId="ADAL" clId="{73C3FE35-BF7E-418C-A7F8-FA0AB4F63A6B}" dt="2026-06-03T18:40:26.049" v="486" actId="14100"/>
+          <ac:cxnSpMkLst>
+            <pc:docMk/>
+            <pc:sldMk cId="790095411" sldId="266"/>
+            <ac:cxnSpMk id="4" creationId="{0F0F620D-F3E7-05C4-20C4-8882D19BC6CB}"/>
+          </ac:cxnSpMkLst>
+        </pc:cxnChg>
+        <pc:cxnChg chg="add mod">
+          <ac:chgData name="Murillo Álvaro Borges de Sousa" userId="02386067-c46f-46e6-bf61-8f6a774af0e5" providerId="ADAL" clId="{73C3FE35-BF7E-418C-A7F8-FA0AB4F63A6B}" dt="2026-06-03T18:40:22.253" v="485" actId="14100"/>
+          <ac:cxnSpMkLst>
+            <pc:docMk/>
+            <pc:sldMk cId="790095411" sldId="266"/>
+            <ac:cxnSpMk id="7" creationId="{DBCD03D0-2EE7-5EE5-B7E5-D9B26FF81C6F}"/>
+          </ac:cxnSpMkLst>
+        </pc:cxnChg>
+        <pc:cxnChg chg="add mod">
+          <ac:chgData name="Murillo Álvaro Borges de Sousa" userId="02386067-c46f-46e6-bf61-8f6a774af0e5" providerId="ADAL" clId="{73C3FE35-BF7E-418C-A7F8-FA0AB4F63A6B}" dt="2026-06-03T18:40:08.006" v="482" actId="14100"/>
+          <ac:cxnSpMkLst>
+            <pc:docMk/>
+            <pc:sldMk cId="790095411" sldId="266"/>
+            <ac:cxnSpMk id="11" creationId="{987E3B93-086B-B531-D834-A4FC225DFE93}"/>
+          </ac:cxnSpMkLst>
+        </pc:cxnChg>
+      </pc:sldChg>
+      <pc:sldChg chg="addSp delSp modSp new mod">
+        <pc:chgData name="Murillo Álvaro Borges de Sousa" userId="02386067-c46f-46e6-bf61-8f6a774af0e5" providerId="ADAL" clId="{73C3FE35-BF7E-418C-A7F8-FA0AB4F63A6B}" dt="2026-06-03T20:47:40.220" v="624" actId="14100"/>
+        <pc:sldMkLst>
+          <pc:docMk/>
+          <pc:sldMk cId="1044334470" sldId="267"/>
+        </pc:sldMkLst>
+        <pc:grpChg chg="add mod">
+          <ac:chgData name="Murillo Álvaro Borges de Sousa" userId="02386067-c46f-46e6-bf61-8f6a774af0e5" providerId="ADAL" clId="{73C3FE35-BF7E-418C-A7F8-FA0AB4F63A6B}" dt="2026-06-03T20:47:40.220" v="624" actId="14100"/>
+          <ac:grpSpMkLst>
+            <pc:docMk/>
+            <pc:sldMk cId="1044334470" sldId="267"/>
+            <ac:grpSpMk id="4" creationId="{9990C49C-874B-7A88-ED8B-1DDCA56DD1B3}"/>
+          </ac:grpSpMkLst>
+        </pc:grpChg>
+        <pc:picChg chg="add del mod">
+          <ac:chgData name="Murillo Álvaro Borges de Sousa" userId="02386067-c46f-46e6-bf61-8f6a774af0e5" providerId="ADAL" clId="{73C3FE35-BF7E-418C-A7F8-FA0AB4F63A6B}" dt="2026-06-03T20:45:49.498" v="592" actId="478"/>
+          <ac:picMkLst>
+            <pc:docMk/>
+            <pc:sldMk cId="1044334470" sldId="267"/>
+            <ac:picMk id="3" creationId="{6DB04F82-3D01-18EC-7053-E8D737AAB1C4}"/>
+          </ac:picMkLst>
+        </pc:picChg>
+        <pc:picChg chg="add del mod">
+          <ac:chgData name="Murillo Álvaro Borges de Sousa" userId="02386067-c46f-46e6-bf61-8f6a774af0e5" providerId="ADAL" clId="{73C3FE35-BF7E-418C-A7F8-FA0AB4F63A6B}" dt="2026-06-03T20:45:27.424" v="588" actId="478"/>
+          <ac:picMkLst>
+            <pc:docMk/>
+            <pc:sldMk cId="1044334470" sldId="267"/>
+            <ac:picMk id="1026" creationId="{DD102A72-AD13-B15B-1FF8-92A0E8CA47DE}"/>
+          </ac:picMkLst>
+        </pc:picChg>
+        <pc:picChg chg="add mod">
+          <ac:chgData name="Murillo Álvaro Borges de Sousa" userId="02386067-c46f-46e6-bf61-8f6a774af0e5" providerId="ADAL" clId="{73C3FE35-BF7E-418C-A7F8-FA0AB4F63A6B}" dt="2026-06-03T20:47:40.220" v="624" actId="14100"/>
+          <ac:picMkLst>
+            <pc:docMk/>
+            <pc:sldMk cId="1044334470" sldId="267"/>
+            <ac:picMk id="1028" creationId="{BA25EC6C-A7CF-0CC7-9D8B-5F1DA4E203BE}"/>
+          </ac:picMkLst>
+        </pc:picChg>
+        <pc:picChg chg="add mod">
+          <ac:chgData name="Murillo Álvaro Borges de Sousa" userId="02386067-c46f-46e6-bf61-8f6a774af0e5" providerId="ADAL" clId="{73C3FE35-BF7E-418C-A7F8-FA0AB4F63A6B}" dt="2026-06-03T20:47:40.220" v="624" actId="14100"/>
+          <ac:picMkLst>
+            <pc:docMk/>
+            <pc:sldMk cId="1044334470" sldId="267"/>
+            <ac:picMk id="1030" creationId="{83A2EBEF-30B3-240E-77C7-8912817988B7}"/>
+          </ac:picMkLst>
+        </pc:picChg>
+        <pc:picChg chg="add mod">
+          <ac:chgData name="Murillo Álvaro Borges de Sousa" userId="02386067-c46f-46e6-bf61-8f6a774af0e5" providerId="ADAL" clId="{73C3FE35-BF7E-418C-A7F8-FA0AB4F63A6B}" dt="2026-06-03T20:47:40.220" v="624" actId="14100"/>
+          <ac:picMkLst>
+            <pc:docMk/>
+            <pc:sldMk cId="1044334470" sldId="267"/>
+            <ac:picMk id="1032" creationId="{089A9DA7-5790-D882-4C13-50957016F7E3}"/>
+          </ac:picMkLst>
+        </pc:picChg>
+        <pc:picChg chg="add mod">
+          <ac:chgData name="Murillo Álvaro Borges de Sousa" userId="02386067-c46f-46e6-bf61-8f6a774af0e5" providerId="ADAL" clId="{73C3FE35-BF7E-418C-A7F8-FA0AB4F63A6B}" dt="2026-06-03T20:47:40.220" v="624" actId="14100"/>
+          <ac:picMkLst>
+            <pc:docMk/>
+            <pc:sldMk cId="1044334470" sldId="267"/>
+            <ac:picMk id="1034" creationId="{BC5F9A05-7C65-2FAB-C9D0-B20E275568F2}"/>
+          </ac:picMkLst>
+        </pc:picChg>
+      </pc:sldChg>
     </pc:docChg>
   </pc:docChgLst>
 </pc:chgInfo>
@@ -1157,7 +1317,7 @@
           <a:p>
             <a:fld id="{FFCE6A37-3420-40C1-9DE2-D7E9118C4CF6}" type="datetimeFigureOut">
               <a:rPr lang="pt-BR" smtClean="0"/>
-              <a:t>01/06/2026</a:t>
+              <a:t>03/06/2026</a:t>
             </a:fld>
             <a:endParaRPr lang="pt-BR"/>
           </a:p>
@@ -1658,7 +1818,7 @@
           <a:p>
             <a:fld id="{7C8BC570-9881-4DD1-A666-BFFC3ABED690}" type="datetimeFigureOut">
               <a:rPr lang="pt-BR" smtClean="0"/>
-              <a:t>01/06/2026</a:t>
+              <a:t>03/06/2026</a:t>
             </a:fld>
             <a:endParaRPr lang="pt-BR"/>
           </a:p>
@@ -1858,7 +2018,7 @@
           <a:p>
             <a:fld id="{7C8BC570-9881-4DD1-A666-BFFC3ABED690}" type="datetimeFigureOut">
               <a:rPr lang="pt-BR" smtClean="0"/>
-              <a:t>01/06/2026</a:t>
+              <a:t>03/06/2026</a:t>
             </a:fld>
             <a:endParaRPr lang="pt-BR"/>
           </a:p>
@@ -2068,7 +2228,7 @@
           <a:p>
             <a:fld id="{7C8BC570-9881-4DD1-A666-BFFC3ABED690}" type="datetimeFigureOut">
               <a:rPr lang="pt-BR" smtClean="0"/>
-              <a:t>01/06/2026</a:t>
+              <a:t>03/06/2026</a:t>
             </a:fld>
             <a:endParaRPr lang="pt-BR"/>
           </a:p>
@@ -2268,7 +2428,7 @@
           <a:p>
             <a:fld id="{7C8BC570-9881-4DD1-A666-BFFC3ABED690}" type="datetimeFigureOut">
               <a:rPr lang="pt-BR" smtClean="0"/>
-              <a:t>01/06/2026</a:t>
+              <a:t>03/06/2026</a:t>
             </a:fld>
             <a:endParaRPr lang="pt-BR"/>
           </a:p>
@@ -2544,7 +2704,7 @@
           <a:p>
             <a:fld id="{7C8BC570-9881-4DD1-A666-BFFC3ABED690}" type="datetimeFigureOut">
               <a:rPr lang="pt-BR" smtClean="0"/>
-              <a:t>01/06/2026</a:t>
+              <a:t>03/06/2026</a:t>
             </a:fld>
             <a:endParaRPr lang="pt-BR"/>
           </a:p>
@@ -2812,7 +2972,7 @@
           <a:p>
             <a:fld id="{7C8BC570-9881-4DD1-A666-BFFC3ABED690}" type="datetimeFigureOut">
               <a:rPr lang="pt-BR" smtClean="0"/>
-              <a:t>01/06/2026</a:t>
+              <a:t>03/06/2026</a:t>
             </a:fld>
             <a:endParaRPr lang="pt-BR"/>
           </a:p>
@@ -3227,7 +3387,7 @@
           <a:p>
             <a:fld id="{7C8BC570-9881-4DD1-A666-BFFC3ABED690}" type="datetimeFigureOut">
               <a:rPr lang="pt-BR" smtClean="0"/>
-              <a:t>01/06/2026</a:t>
+              <a:t>03/06/2026</a:t>
             </a:fld>
             <a:endParaRPr lang="pt-BR"/>
           </a:p>
@@ -3369,7 +3529,7 @@
           <a:p>
             <a:fld id="{7C8BC570-9881-4DD1-A666-BFFC3ABED690}" type="datetimeFigureOut">
               <a:rPr lang="pt-BR" smtClean="0"/>
-              <a:t>01/06/2026</a:t>
+              <a:t>03/06/2026</a:t>
             </a:fld>
             <a:endParaRPr lang="pt-BR"/>
           </a:p>
@@ -3482,7 +3642,7 @@
           <a:p>
             <a:fld id="{7C8BC570-9881-4DD1-A666-BFFC3ABED690}" type="datetimeFigureOut">
               <a:rPr lang="pt-BR" smtClean="0"/>
-              <a:t>01/06/2026</a:t>
+              <a:t>03/06/2026</a:t>
             </a:fld>
             <a:endParaRPr lang="pt-BR"/>
           </a:p>
@@ -3795,7 +3955,7 @@
           <a:p>
             <a:fld id="{7C8BC570-9881-4DD1-A666-BFFC3ABED690}" type="datetimeFigureOut">
               <a:rPr lang="pt-BR" smtClean="0"/>
-              <a:t>01/06/2026</a:t>
+              <a:t>03/06/2026</a:t>
             </a:fld>
             <a:endParaRPr lang="pt-BR"/>
           </a:p>
@@ -4084,7 +4244,7 @@
           <a:p>
             <a:fld id="{7C8BC570-9881-4DD1-A666-BFFC3ABED690}" type="datetimeFigureOut">
               <a:rPr lang="pt-BR" smtClean="0"/>
-              <a:t>01/06/2026</a:t>
+              <a:t>03/06/2026</a:t>
             </a:fld>
             <a:endParaRPr lang="pt-BR"/>
           </a:p>
@@ -4327,7 +4487,7 @@
           <a:p>
             <a:fld id="{7C8BC570-9881-4DD1-A666-BFFC3ABED690}" type="datetimeFigureOut">
               <a:rPr lang="pt-BR" smtClean="0"/>
-              <a:t>01/06/2026</a:t>
+              <a:t>03/06/2026</a:t>
             </a:fld>
             <a:endParaRPr lang="pt-BR"/>
           </a:p>
@@ -12826,6 +12986,1136 @@
 </p:sld>
 </file>
 
+<file path=ppt/slides/slide11.xml><?xml version="1.0" encoding="utf-8"?>
+<p:sld xmlns:a="http://schemas.openxmlformats.org/drawingml/2006/main" xmlns:r="http://schemas.openxmlformats.org/officeDocument/2006/relationships" xmlns:p="http://schemas.openxmlformats.org/presentationml/2006/main">
+  <p:cSld>
+    <p:spTree>
+      <p:nvGrpSpPr>
+        <p:cNvPr id="1" name=""/>
+        <p:cNvGrpSpPr/>
+        <p:nvPr/>
+      </p:nvGrpSpPr>
+      <p:grpSpPr>
+        <a:xfrm>
+          <a:off x="0" y="0"/>
+          <a:ext cx="0" cy="0"/>
+          <a:chOff x="0" y="0"/>
+          <a:chExt cx="0" cy="0"/>
+        </a:xfrm>
+      </p:grpSpPr>
+      <p:grpSp>
+        <p:nvGrpSpPr>
+          <p:cNvPr id="27" name="Group 26">
+            <a:extLst>
+              <a:ext uri="{FF2B5EF4-FFF2-40B4-BE49-F238E27FC236}">
+                <a16:creationId xmlns:a16="http://schemas.microsoft.com/office/drawing/2014/main" id="{9C3FF780-2588-6F1E-6683-CE307416E5F4}"/>
+              </a:ext>
+            </a:extLst>
+          </p:cNvPr>
+          <p:cNvGrpSpPr/>
+          <p:nvPr/>
+        </p:nvGrpSpPr>
+        <p:grpSpPr>
+          <a:xfrm>
+            <a:off x="4335584" y="714345"/>
+            <a:ext cx="4805160" cy="4418664"/>
+            <a:chOff x="4335584" y="714345"/>
+            <a:chExt cx="4805160" cy="4418664"/>
+          </a:xfrm>
+        </p:grpSpPr>
+        <p:sp>
+          <p:nvSpPr>
+            <p:cNvPr id="2" name="Oval 1">
+              <a:extLst>
+                <a:ext uri="{FF2B5EF4-FFF2-40B4-BE49-F238E27FC236}">
+                  <a16:creationId xmlns:a16="http://schemas.microsoft.com/office/drawing/2014/main" id="{93B30B1F-CC39-F2A3-F32D-F40C27B31B68}"/>
+                </a:ext>
+              </a:extLst>
+            </p:cNvPr>
+            <p:cNvSpPr/>
+            <p:nvPr/>
+          </p:nvSpPr>
+          <p:spPr>
+            <a:xfrm>
+              <a:off x="4335584" y="1533009"/>
+              <a:ext cx="3600000" cy="3600000"/>
+            </a:xfrm>
+            <a:prstGeom prst="ellipse">
+              <a:avLst/>
+            </a:prstGeom>
+            <a:solidFill>
+              <a:schemeClr val="bg1">
+                <a:lumMod val="85000"/>
+              </a:schemeClr>
+            </a:solidFill>
+            <a:ln>
+              <a:solidFill>
+                <a:schemeClr val="tx1"/>
+              </a:solidFill>
+            </a:ln>
+          </p:spPr>
+          <p:style>
+            <a:lnRef idx="2">
+              <a:schemeClr val="accent1">
+                <a:shade val="15000"/>
+              </a:schemeClr>
+            </a:lnRef>
+            <a:fillRef idx="1">
+              <a:schemeClr val="accent1"/>
+            </a:fillRef>
+            <a:effectRef idx="0">
+              <a:schemeClr val="accent1"/>
+            </a:effectRef>
+            <a:fontRef idx="minor">
+              <a:schemeClr val="lt1"/>
+            </a:fontRef>
+          </p:style>
+          <p:txBody>
+            <a:bodyPr rtlCol="0" anchor="ctr"/>
+            <a:lstStyle/>
+            <a:p>
+              <a:pPr algn="ctr"/>
+              <a:endParaRPr lang="pt-BR"/>
+            </a:p>
+          </p:txBody>
+        </p:sp>
+        <p:cxnSp>
+          <p:nvCxnSpPr>
+            <p:cNvPr id="4" name="Straight Arrow Connector 3">
+              <a:extLst>
+                <a:ext uri="{FF2B5EF4-FFF2-40B4-BE49-F238E27FC236}">
+                  <a16:creationId xmlns:a16="http://schemas.microsoft.com/office/drawing/2014/main" id="{0F0F620D-F3E7-05C4-20C4-8882D19BC6CB}"/>
+                </a:ext>
+              </a:extLst>
+            </p:cNvPr>
+            <p:cNvCxnSpPr>
+              <a:cxnSpLocks/>
+            </p:cNvCxnSpPr>
+            <p:nvPr/>
+          </p:nvCxnSpPr>
+          <p:spPr>
+            <a:xfrm flipH="1" flipV="1">
+              <a:off x="6105694" y="914400"/>
+              <a:ext cx="29890" cy="2606633"/>
+            </a:xfrm>
+            <a:prstGeom prst="straightConnector1">
+              <a:avLst/>
+            </a:prstGeom>
+            <a:ln w="28575">
+              <a:solidFill>
+                <a:schemeClr val="tx1"/>
+              </a:solidFill>
+              <a:tailEnd type="triangle"/>
+            </a:ln>
+          </p:spPr>
+          <p:style>
+            <a:lnRef idx="2">
+              <a:schemeClr val="accent1"/>
+            </a:lnRef>
+            <a:fillRef idx="0">
+              <a:schemeClr val="accent1"/>
+            </a:fillRef>
+            <a:effectRef idx="1">
+              <a:schemeClr val="accent1"/>
+            </a:effectRef>
+            <a:fontRef idx="minor">
+              <a:schemeClr val="tx1"/>
+            </a:fontRef>
+          </p:style>
+        </p:cxnSp>
+        <p:cxnSp>
+          <p:nvCxnSpPr>
+            <p:cNvPr id="7" name="Straight Arrow Connector 6">
+              <a:extLst>
+                <a:ext uri="{FF2B5EF4-FFF2-40B4-BE49-F238E27FC236}">
+                  <a16:creationId xmlns:a16="http://schemas.microsoft.com/office/drawing/2014/main" id="{DBCD03D0-2EE7-5EE5-B7E5-D9B26FF81C6F}"/>
+                </a:ext>
+              </a:extLst>
+            </p:cNvPr>
+            <p:cNvCxnSpPr>
+              <a:cxnSpLocks/>
+            </p:cNvCxnSpPr>
+            <p:nvPr/>
+          </p:nvCxnSpPr>
+          <p:spPr>
+            <a:xfrm>
+              <a:off x="6135584" y="3524991"/>
+              <a:ext cx="2569029" cy="0"/>
+            </a:xfrm>
+            <a:prstGeom prst="straightConnector1">
+              <a:avLst/>
+            </a:prstGeom>
+            <a:ln w="28575">
+              <a:solidFill>
+                <a:schemeClr val="tx1"/>
+              </a:solidFill>
+              <a:tailEnd type="triangle"/>
+            </a:ln>
+          </p:spPr>
+          <p:style>
+            <a:lnRef idx="2">
+              <a:schemeClr val="accent1"/>
+            </a:lnRef>
+            <a:fillRef idx="0">
+              <a:schemeClr val="accent1"/>
+            </a:fillRef>
+            <a:effectRef idx="1">
+              <a:schemeClr val="accent1"/>
+            </a:effectRef>
+            <a:fontRef idx="minor">
+              <a:schemeClr val="tx1"/>
+            </a:fontRef>
+          </p:style>
+        </p:cxnSp>
+        <p:sp>
+          <p:nvSpPr>
+            <p:cNvPr id="9" name="Oval 8">
+              <a:extLst>
+                <a:ext uri="{FF2B5EF4-FFF2-40B4-BE49-F238E27FC236}">
+                  <a16:creationId xmlns:a16="http://schemas.microsoft.com/office/drawing/2014/main" id="{29C45C26-866A-35EA-383A-AA46AFD9FCC0}"/>
+                </a:ext>
+              </a:extLst>
+            </p:cNvPr>
+            <p:cNvSpPr/>
+            <p:nvPr/>
+          </p:nvSpPr>
+          <p:spPr>
+            <a:xfrm>
+              <a:off x="6874723" y="2253343"/>
+              <a:ext cx="180000" cy="180000"/>
+            </a:xfrm>
+            <a:prstGeom prst="ellipse">
+              <a:avLst/>
+            </a:prstGeom>
+            <a:solidFill>
+              <a:srgbClr val="FF0000"/>
+            </a:solidFill>
+          </p:spPr>
+          <p:style>
+            <a:lnRef idx="2">
+              <a:schemeClr val="accent1">
+                <a:shade val="15000"/>
+              </a:schemeClr>
+            </a:lnRef>
+            <a:fillRef idx="1">
+              <a:schemeClr val="accent1"/>
+            </a:fillRef>
+            <a:effectRef idx="0">
+              <a:schemeClr val="accent1"/>
+            </a:effectRef>
+            <a:fontRef idx="minor">
+              <a:schemeClr val="lt1"/>
+            </a:fontRef>
+          </p:style>
+          <p:txBody>
+            <a:bodyPr rtlCol="0" anchor="ctr"/>
+            <a:lstStyle/>
+            <a:p>
+              <a:pPr algn="ctr"/>
+              <a:endParaRPr lang="pt-BR"/>
+            </a:p>
+          </p:txBody>
+        </p:sp>
+        <p:cxnSp>
+          <p:nvCxnSpPr>
+            <p:cNvPr id="11" name="Straight Connector 10">
+              <a:extLst>
+                <a:ext uri="{FF2B5EF4-FFF2-40B4-BE49-F238E27FC236}">
+                  <a16:creationId xmlns:a16="http://schemas.microsoft.com/office/drawing/2014/main" id="{987E3B93-086B-B531-D834-A4FC225DFE93}"/>
+                </a:ext>
+              </a:extLst>
+            </p:cNvPr>
+            <p:cNvCxnSpPr>
+              <a:cxnSpLocks/>
+              <a:stCxn id="9" idx="3"/>
+            </p:cNvCxnSpPr>
+            <p:nvPr/>
+          </p:nvCxnSpPr>
+          <p:spPr>
+            <a:xfrm flipH="1">
+              <a:off x="6135584" y="2406983"/>
+              <a:ext cx="765499" cy="1114050"/>
+            </a:xfrm>
+            <a:prstGeom prst="line">
+              <a:avLst/>
+            </a:prstGeom>
+            <a:ln w="12700">
+              <a:solidFill>
+                <a:schemeClr val="tx1"/>
+              </a:solidFill>
+              <a:prstDash val="sysDash"/>
+            </a:ln>
+          </p:spPr>
+          <p:style>
+            <a:lnRef idx="2">
+              <a:schemeClr val="accent1"/>
+            </a:lnRef>
+            <a:fillRef idx="0">
+              <a:schemeClr val="accent1"/>
+            </a:fillRef>
+            <a:effectRef idx="1">
+              <a:schemeClr val="accent1"/>
+            </a:effectRef>
+            <a:fontRef idx="minor">
+              <a:schemeClr val="tx1"/>
+            </a:fontRef>
+          </p:style>
+        </p:cxnSp>
+        <p:sp>
+          <p:nvSpPr>
+            <p:cNvPr id="17" name="TextBox 16">
+              <a:extLst>
+                <a:ext uri="{FF2B5EF4-FFF2-40B4-BE49-F238E27FC236}">
+                  <a16:creationId xmlns:a16="http://schemas.microsoft.com/office/drawing/2014/main" id="{9DE5CBB7-A5B3-3B51-7DD5-157FD84B1D8A}"/>
+                </a:ext>
+              </a:extLst>
+            </p:cNvPr>
+            <p:cNvSpPr txBox="1"/>
+            <p:nvPr/>
+          </p:nvSpPr>
+          <p:spPr>
+            <a:xfrm>
+              <a:off x="5715693" y="714345"/>
+              <a:ext cx="370614" cy="400110"/>
+            </a:xfrm>
+            <a:prstGeom prst="rect">
+              <a:avLst/>
+            </a:prstGeom>
+            <a:noFill/>
+          </p:spPr>
+          <p:txBody>
+            <a:bodyPr wrap="none" rtlCol="0">
+              <a:spAutoFit/>
+            </a:bodyPr>
+            <a:lstStyle/>
+            <a:p>
+              <a:r>
+                <a:rPr lang="pt-BR" sz="2000" b="1" dirty="0">
+                  <a:latin typeface="Times New Roman" panose="02020603050405020304" pitchFamily="18" charset="0"/>
+                  <a:cs typeface="Times New Roman" panose="02020603050405020304" pitchFamily="18" charset="0"/>
+                </a:rPr>
+                <a:t>Y</a:t>
+              </a:r>
+              <a:endParaRPr lang="pt-BR" b="1" dirty="0">
+                <a:latin typeface="Times New Roman" panose="02020603050405020304" pitchFamily="18" charset="0"/>
+                <a:cs typeface="Times New Roman" panose="02020603050405020304" pitchFamily="18" charset="0"/>
+              </a:endParaRPr>
+            </a:p>
+          </p:txBody>
+        </p:sp>
+        <p:sp>
+          <p:nvSpPr>
+            <p:cNvPr id="18" name="TextBox 17">
+              <a:extLst>
+                <a:ext uri="{FF2B5EF4-FFF2-40B4-BE49-F238E27FC236}">
+                  <a16:creationId xmlns:a16="http://schemas.microsoft.com/office/drawing/2014/main" id="{12B1573A-43F7-FCE5-554F-6291D4A6BDB2}"/>
+                </a:ext>
+              </a:extLst>
+            </p:cNvPr>
+            <p:cNvSpPr txBox="1"/>
+            <p:nvPr/>
+          </p:nvSpPr>
+          <p:spPr>
+            <a:xfrm>
+              <a:off x="8770130" y="3333009"/>
+              <a:ext cx="370614" cy="400110"/>
+            </a:xfrm>
+            <a:prstGeom prst="rect">
+              <a:avLst/>
+            </a:prstGeom>
+            <a:noFill/>
+          </p:spPr>
+          <p:txBody>
+            <a:bodyPr wrap="none" rtlCol="0">
+              <a:spAutoFit/>
+            </a:bodyPr>
+            <a:lstStyle/>
+            <a:p>
+              <a:r>
+                <a:rPr lang="pt-BR" sz="2000" b="1" dirty="0">
+                  <a:latin typeface="Times New Roman" panose="02020603050405020304" pitchFamily="18" charset="0"/>
+                  <a:cs typeface="Times New Roman" panose="02020603050405020304" pitchFamily="18" charset="0"/>
+                </a:rPr>
+                <a:t>X</a:t>
+              </a:r>
+              <a:endParaRPr lang="pt-BR" b="1" dirty="0">
+                <a:latin typeface="Times New Roman" panose="02020603050405020304" pitchFamily="18" charset="0"/>
+                <a:cs typeface="Times New Roman" panose="02020603050405020304" pitchFamily="18" charset="0"/>
+              </a:endParaRPr>
+            </a:p>
+          </p:txBody>
+        </p:sp>
+        <p:sp>
+          <p:nvSpPr>
+            <p:cNvPr id="19" name="TextBox 18">
+              <a:extLst>
+                <a:ext uri="{FF2B5EF4-FFF2-40B4-BE49-F238E27FC236}">
+                  <a16:creationId xmlns:a16="http://schemas.microsoft.com/office/drawing/2014/main" id="{E00EA849-0261-7D16-DECC-A6C6FD51DE4D}"/>
+                </a:ext>
+              </a:extLst>
+            </p:cNvPr>
+            <p:cNvSpPr txBox="1"/>
+            <p:nvPr/>
+          </p:nvSpPr>
+          <p:spPr>
+            <a:xfrm>
+              <a:off x="6319846" y="2563898"/>
+              <a:ext cx="298480" cy="400110"/>
+            </a:xfrm>
+            <a:prstGeom prst="rect">
+              <a:avLst/>
+            </a:prstGeom>
+            <a:noFill/>
+          </p:spPr>
+          <p:txBody>
+            <a:bodyPr wrap="none" rtlCol="0">
+              <a:spAutoFit/>
+            </a:bodyPr>
+            <a:lstStyle/>
+            <a:p>
+              <a:r>
+                <a:rPr lang="pt-BR" sz="2000" dirty="0">
+                  <a:latin typeface="Times New Roman" panose="02020603050405020304" pitchFamily="18" charset="0"/>
+                  <a:cs typeface="Times New Roman" panose="02020603050405020304" pitchFamily="18" charset="0"/>
+                </a:rPr>
+                <a:t>e</a:t>
+              </a:r>
+              <a:endParaRPr lang="pt-BR" dirty="0">
+                <a:latin typeface="Times New Roman" panose="02020603050405020304" pitchFamily="18" charset="0"/>
+                <a:cs typeface="Times New Roman" panose="02020603050405020304" pitchFamily="18" charset="0"/>
+              </a:endParaRPr>
+            </a:p>
+          </p:txBody>
+        </p:sp>
+        <p:sp>
+          <p:nvSpPr>
+            <p:cNvPr id="20" name="Arc 19">
+              <a:extLst>
+                <a:ext uri="{FF2B5EF4-FFF2-40B4-BE49-F238E27FC236}">
+                  <a16:creationId xmlns:a16="http://schemas.microsoft.com/office/drawing/2014/main" id="{5DD6CD8C-5935-2425-9CEE-1B6FB3AEE852}"/>
+                </a:ext>
+              </a:extLst>
+            </p:cNvPr>
+            <p:cNvSpPr/>
+            <p:nvPr/>
+          </p:nvSpPr>
+          <p:spPr>
+            <a:xfrm rot="1666246">
+              <a:off x="6081657" y="3177662"/>
+              <a:ext cx="460501" cy="413545"/>
+            </a:xfrm>
+            <a:prstGeom prst="arc">
+              <a:avLst/>
+            </a:prstGeom>
+            <a:ln>
+              <a:solidFill>
+                <a:schemeClr val="tx1"/>
+              </a:solidFill>
+            </a:ln>
+          </p:spPr>
+          <p:style>
+            <a:lnRef idx="2">
+              <a:schemeClr val="accent1"/>
+            </a:lnRef>
+            <a:fillRef idx="0">
+              <a:schemeClr val="accent1"/>
+            </a:fillRef>
+            <a:effectRef idx="1">
+              <a:schemeClr val="accent1"/>
+            </a:effectRef>
+            <a:fontRef idx="minor">
+              <a:schemeClr val="tx1"/>
+            </a:fontRef>
+          </p:style>
+          <p:txBody>
+            <a:bodyPr rtlCol="0" anchor="ctr"/>
+            <a:lstStyle/>
+            <a:p>
+              <a:pPr algn="ctr"/>
+              <a:endParaRPr lang="pt-BR"/>
+            </a:p>
+          </p:txBody>
+        </p:sp>
+        <mc:AlternateContent xmlns:mc="http://schemas.openxmlformats.org/markup-compatibility/2006">
+          <mc:Choice xmlns:a14="http://schemas.microsoft.com/office/drawing/2010/main" Requires="a14">
+            <p:sp>
+              <p:nvSpPr>
+                <p:cNvPr id="21" name="TextBox 20">
+                  <a:extLst>
+                    <a:ext uri="{FF2B5EF4-FFF2-40B4-BE49-F238E27FC236}">
+                      <a16:creationId xmlns:a16="http://schemas.microsoft.com/office/drawing/2014/main" id="{910EDAC2-AB1B-CC09-F543-DB67348C62EB}"/>
+                    </a:ext>
+                  </a:extLst>
+                </p:cNvPr>
+                <p:cNvSpPr txBox="1"/>
+                <p:nvPr/>
+              </p:nvSpPr>
+              <p:spPr>
+                <a:xfrm>
+                  <a:off x="6530183" y="2995709"/>
+                  <a:ext cx="521233" cy="369332"/>
+                </a:xfrm>
+                <a:prstGeom prst="rect">
+                  <a:avLst/>
+                </a:prstGeom>
+                <a:noFill/>
+              </p:spPr>
+              <p:txBody>
+                <a:bodyPr wrap="none" rtlCol="0">
+                  <a:spAutoFit/>
+                </a:bodyPr>
+                <a:lstStyle/>
+                <a:p>
+                  <a14:m>
+                    <m:oMathPara xmlns:m="http://schemas.openxmlformats.org/officeDocument/2006/math">
+                      <m:oMathParaPr>
+                        <m:jc m:val="centerGroup"/>
+                      </m:oMathParaPr>
+                      <m:oMath xmlns:m="http://schemas.openxmlformats.org/officeDocument/2006/math">
+                        <m:sSub>
+                          <m:sSubPr>
+                            <m:ctrlPr>
+                              <a:rPr lang="pt-BR" i="1" smtClean="0">
+                                <a:latin typeface="Cambria Math" panose="02040503050406030204" pitchFamily="18" charset="0"/>
+                                <a:cs typeface="Times New Roman" panose="02020603050405020304" pitchFamily="18" charset="0"/>
+                              </a:rPr>
+                            </m:ctrlPr>
+                          </m:sSubPr>
+                          <m:e>
+                            <m:r>
+                              <m:rPr>
+                                <m:sty m:val="p"/>
+                              </m:rPr>
+                              <a:rPr lang="el-GR" i="1" smtClean="0">
+                                <a:latin typeface="Cambria Math" panose="02040503050406030204" pitchFamily="18" charset="0"/>
+                                <a:cs typeface="Times New Roman" panose="02020603050405020304" pitchFamily="18" charset="0"/>
+                              </a:rPr>
+                              <m:t>φ</m:t>
+                            </m:r>
+                          </m:e>
+                          <m:sub>
+                            <m:r>
+                              <m:rPr>
+                                <m:sty m:val="p"/>
+                              </m:rPr>
+                              <a:rPr lang="pt-BR" b="0" i="1" smtClean="0">
+                                <a:latin typeface="Cambria Math" panose="02040503050406030204" pitchFamily="18" charset="0"/>
+                                <a:cs typeface="Times New Roman" panose="02020603050405020304" pitchFamily="18" charset="0"/>
+                              </a:rPr>
+                              <m:t>u</m:t>
+                            </m:r>
+                          </m:sub>
+                        </m:sSub>
+                      </m:oMath>
+                    </m:oMathPara>
+                  </a14:m>
+                  <a:endParaRPr lang="pt-BR" dirty="0">
+                    <a:latin typeface="Times New Roman" panose="02020603050405020304" pitchFamily="18" charset="0"/>
+                    <a:cs typeface="Times New Roman" panose="02020603050405020304" pitchFamily="18" charset="0"/>
+                  </a:endParaRPr>
+                </a:p>
+              </p:txBody>
+            </p:sp>
+          </mc:Choice>
+          <mc:Fallback>
+            <p:sp>
+              <p:nvSpPr>
+                <p:cNvPr id="21" name="TextBox 20">
+                  <a:extLst>
+                    <a:ext uri="{FF2B5EF4-FFF2-40B4-BE49-F238E27FC236}">
+                      <a16:creationId xmlns:a16="http://schemas.microsoft.com/office/drawing/2014/main" id="{910EDAC2-AB1B-CC09-F543-DB67348C62EB}"/>
+                    </a:ext>
+                  </a:extLst>
+                </p:cNvPr>
+                <p:cNvSpPr txBox="1">
+                  <a:spLocks noRot="1" noChangeAspect="1" noMove="1" noResize="1" noEditPoints="1" noAdjustHandles="1" noChangeArrowheads="1" noChangeShapeType="1" noTextEdit="1"/>
+                </p:cNvSpPr>
+                <p:nvPr/>
+              </p:nvSpPr>
+              <p:spPr>
+                <a:xfrm>
+                  <a:off x="6530183" y="2995709"/>
+                  <a:ext cx="521233" cy="369332"/>
+                </a:xfrm>
+                <a:prstGeom prst="rect">
+                  <a:avLst/>
+                </a:prstGeom>
+                <a:blipFill>
+                  <a:blip r:embed="rId2"/>
+                  <a:stretch>
+                    <a:fillRect b="-8197"/>
+                  </a:stretch>
+                </a:blipFill>
+              </p:spPr>
+              <p:txBody>
+                <a:bodyPr/>
+                <a:lstStyle/>
+                <a:p>
+                  <a:r>
+                    <a:rPr lang="pt-BR">
+                      <a:noFill/>
+                    </a:rPr>
+                    <a:t> </a:t>
+                  </a:r>
+                </a:p>
+              </p:txBody>
+            </p:sp>
+          </mc:Fallback>
+        </mc:AlternateContent>
+        <mc:AlternateContent xmlns:mc="http://schemas.openxmlformats.org/markup-compatibility/2006">
+          <mc:Choice xmlns:a14="http://schemas.microsoft.com/office/drawing/2010/main" Requires="a14">
+            <p:sp>
+              <p:nvSpPr>
+                <p:cNvPr id="23" name="TextBox 22">
+                  <a:extLst>
+                    <a:ext uri="{FF2B5EF4-FFF2-40B4-BE49-F238E27FC236}">
+                      <a16:creationId xmlns:a16="http://schemas.microsoft.com/office/drawing/2014/main" id="{43494094-AAA7-261B-E947-6330ECCE4423}"/>
+                    </a:ext>
+                  </a:extLst>
+                </p:cNvPr>
+                <p:cNvSpPr txBox="1"/>
+                <p:nvPr/>
+              </p:nvSpPr>
+              <p:spPr>
+                <a:xfrm>
+                  <a:off x="6640466" y="1837135"/>
+                  <a:ext cx="567720" cy="369332"/>
+                </a:xfrm>
+                <a:prstGeom prst="rect">
+                  <a:avLst/>
+                </a:prstGeom>
+                <a:noFill/>
+              </p:spPr>
+              <p:txBody>
+                <a:bodyPr wrap="none" rtlCol="0">
+                  <a:spAutoFit/>
+                </a:bodyPr>
+                <a:lstStyle/>
+                <a:p>
+                  <a14:m>
+                    <m:oMathPara xmlns:m="http://schemas.openxmlformats.org/officeDocument/2006/math">
+                      <m:oMathParaPr>
+                        <m:jc m:val="centerGroup"/>
+                      </m:oMathParaPr>
+                      <m:oMath xmlns:m="http://schemas.openxmlformats.org/officeDocument/2006/math">
+                        <m:sSub>
+                          <m:sSubPr>
+                            <m:ctrlPr>
+                              <a:rPr lang="pt-BR" i="1" smtClean="0">
+                                <a:latin typeface="Cambria Math" panose="02040503050406030204" pitchFamily="18" charset="0"/>
+                                <a:cs typeface="Times New Roman" panose="02020603050405020304" pitchFamily="18" charset="0"/>
+                              </a:rPr>
+                            </m:ctrlPr>
+                          </m:sSubPr>
+                          <m:e>
+                            <m:r>
+                              <m:rPr>
+                                <m:sty m:val="p"/>
+                              </m:rPr>
+                              <a:rPr lang="pt-BR" b="0" i="1" smtClean="0">
+                                <a:latin typeface="Cambria Math" panose="02040503050406030204" pitchFamily="18" charset="0"/>
+                                <a:cs typeface="Times New Roman" panose="02020603050405020304" pitchFamily="18" charset="0"/>
+                              </a:rPr>
+                              <m:t>m</m:t>
+                            </m:r>
+                          </m:e>
+                          <m:sub>
+                            <m:r>
+                              <m:rPr>
+                                <m:sty m:val="p"/>
+                              </m:rPr>
+                              <a:rPr lang="pt-BR" b="0" i="1" smtClean="0">
+                                <a:latin typeface="Cambria Math" panose="02040503050406030204" pitchFamily="18" charset="0"/>
+                                <a:cs typeface="Times New Roman" panose="02020603050405020304" pitchFamily="18" charset="0"/>
+                              </a:rPr>
+                              <m:t>u</m:t>
+                            </m:r>
+                          </m:sub>
+                        </m:sSub>
+                      </m:oMath>
+                    </m:oMathPara>
+                  </a14:m>
+                  <a:endParaRPr lang="pt-BR" dirty="0">
+                    <a:latin typeface="Times New Roman" panose="02020603050405020304" pitchFamily="18" charset="0"/>
+                    <a:cs typeface="Times New Roman" panose="02020603050405020304" pitchFamily="18" charset="0"/>
+                  </a:endParaRPr>
+                </a:p>
+              </p:txBody>
+            </p:sp>
+          </mc:Choice>
+          <mc:Fallback>
+            <p:sp>
+              <p:nvSpPr>
+                <p:cNvPr id="23" name="TextBox 22">
+                  <a:extLst>
+                    <a:ext uri="{FF2B5EF4-FFF2-40B4-BE49-F238E27FC236}">
+                      <a16:creationId xmlns:a16="http://schemas.microsoft.com/office/drawing/2014/main" id="{43494094-AAA7-261B-E947-6330ECCE4423}"/>
+                    </a:ext>
+                  </a:extLst>
+                </p:cNvPr>
+                <p:cNvSpPr txBox="1">
+                  <a:spLocks noRot="1" noChangeAspect="1" noMove="1" noResize="1" noEditPoints="1" noAdjustHandles="1" noChangeArrowheads="1" noChangeShapeType="1" noTextEdit="1"/>
+                </p:cNvSpPr>
+                <p:nvPr/>
+              </p:nvSpPr>
+              <p:spPr>
+                <a:xfrm>
+                  <a:off x="6640466" y="1837135"/>
+                  <a:ext cx="567720" cy="369332"/>
+                </a:xfrm>
+                <a:prstGeom prst="rect">
+                  <a:avLst/>
+                </a:prstGeom>
+                <a:blipFill>
+                  <a:blip r:embed="rId3"/>
+                  <a:stretch>
+                    <a:fillRect/>
+                  </a:stretch>
+                </a:blipFill>
+              </p:spPr>
+              <p:txBody>
+                <a:bodyPr/>
+                <a:lstStyle/>
+                <a:p>
+                  <a:r>
+                    <a:rPr lang="pt-BR">
+                      <a:noFill/>
+                    </a:rPr>
+                    <a:t> </a:t>
+                  </a:r>
+                </a:p>
+              </p:txBody>
+            </p:sp>
+          </mc:Fallback>
+        </mc:AlternateContent>
+        <p:sp>
+          <p:nvSpPr>
+            <p:cNvPr id="24" name="Arc 23">
+              <a:extLst>
+                <a:ext uri="{FF2B5EF4-FFF2-40B4-BE49-F238E27FC236}">
+                  <a16:creationId xmlns:a16="http://schemas.microsoft.com/office/drawing/2014/main" id="{7C3F8EA1-4DF5-A77C-FB9D-3AC7BC6ADA38}"/>
+                </a:ext>
+              </a:extLst>
+            </p:cNvPr>
+            <p:cNvSpPr/>
+            <p:nvPr/>
+          </p:nvSpPr>
+          <p:spPr>
+            <a:xfrm>
+              <a:off x="4730183" y="1195709"/>
+              <a:ext cx="3600000" cy="3600000"/>
+            </a:xfrm>
+            <a:prstGeom prst="arc">
+              <a:avLst>
+                <a:gd name="adj1" fmla="val 17495328"/>
+                <a:gd name="adj2" fmla="val 20539130"/>
+              </a:avLst>
+            </a:prstGeom>
+            <a:ln>
+              <a:solidFill>
+                <a:schemeClr val="tx1"/>
+              </a:solidFill>
+            </a:ln>
+          </p:spPr>
+          <p:style>
+            <a:lnRef idx="2">
+              <a:schemeClr val="accent1"/>
+            </a:lnRef>
+            <a:fillRef idx="0">
+              <a:schemeClr val="accent1"/>
+            </a:fillRef>
+            <a:effectRef idx="1">
+              <a:schemeClr val="accent1"/>
+            </a:effectRef>
+            <a:fontRef idx="minor">
+              <a:schemeClr val="tx1"/>
+            </a:fontRef>
+          </p:style>
+          <p:txBody>
+            <a:bodyPr rtlCol="0" anchor="ctr"/>
+            <a:lstStyle/>
+            <a:p>
+              <a:pPr algn="ctr"/>
+              <a:endParaRPr lang="pt-BR"/>
+            </a:p>
+          </p:txBody>
+        </p:sp>
+        <p:sp>
+          <p:nvSpPr>
+            <p:cNvPr id="25" name="TextBox 24">
+              <a:extLst>
+                <a:ext uri="{FF2B5EF4-FFF2-40B4-BE49-F238E27FC236}">
+                  <a16:creationId xmlns:a16="http://schemas.microsoft.com/office/drawing/2014/main" id="{891E813D-1A15-BCF5-0862-7F9D3D26F653}"/>
+                </a:ext>
+              </a:extLst>
+            </p:cNvPr>
+            <p:cNvSpPr txBox="1"/>
+            <p:nvPr/>
+          </p:nvSpPr>
+          <p:spPr>
+            <a:xfrm>
+              <a:off x="7283724" y="977032"/>
+              <a:ext cx="460382" cy="461665"/>
+            </a:xfrm>
+            <a:prstGeom prst="rect">
+              <a:avLst/>
+            </a:prstGeom>
+            <a:noFill/>
+          </p:spPr>
+          <p:txBody>
+            <a:bodyPr wrap="none" rtlCol="0">
+              <a:spAutoFit/>
+            </a:bodyPr>
+            <a:lstStyle/>
+            <a:p>
+              <a:r>
+                <a:rPr lang="el-GR" sz="2000" dirty="0">
+                  <a:latin typeface="Times New Roman" panose="02020603050405020304" pitchFamily="18" charset="0"/>
+                  <a:cs typeface="Times New Roman" panose="02020603050405020304" pitchFamily="18" charset="0"/>
+                </a:rPr>
+                <a:t>Ω</a:t>
+              </a:r>
+              <a:r>
+                <a:rPr lang="pt-BR" sz="2400" dirty="0">
+                  <a:latin typeface="Times New Roman" panose="02020603050405020304" pitchFamily="18" charset="0"/>
+                  <a:cs typeface="Times New Roman" panose="02020603050405020304" pitchFamily="18" charset="0"/>
+                </a:rPr>
+                <a:t>t</a:t>
+              </a:r>
+              <a:endParaRPr lang="pt-BR" sz="2000" dirty="0">
+                <a:latin typeface="Times New Roman" panose="02020603050405020304" pitchFamily="18" charset="0"/>
+                <a:cs typeface="Times New Roman" panose="02020603050405020304" pitchFamily="18" charset="0"/>
+              </a:endParaRPr>
+            </a:p>
+          </p:txBody>
+        </p:sp>
+        <p:sp>
+          <p:nvSpPr>
+            <p:cNvPr id="26" name="Isosceles Triangle 25">
+              <a:extLst>
+                <a:ext uri="{FF2B5EF4-FFF2-40B4-BE49-F238E27FC236}">
+                  <a16:creationId xmlns:a16="http://schemas.microsoft.com/office/drawing/2014/main" id="{B731F87B-B38F-8B75-F4A1-DA6636FBCE3B}"/>
+                </a:ext>
+              </a:extLst>
+            </p:cNvPr>
+            <p:cNvSpPr/>
+            <p:nvPr/>
+          </p:nvSpPr>
+          <p:spPr>
+            <a:xfrm rot="16815210">
+              <a:off x="7107993" y="1254213"/>
+              <a:ext cx="106878" cy="125888"/>
+            </a:xfrm>
+            <a:prstGeom prst="triangle">
+              <a:avLst/>
+            </a:prstGeom>
+            <a:solidFill>
+              <a:schemeClr val="tx1"/>
+            </a:solidFill>
+            <a:ln>
+              <a:solidFill>
+                <a:schemeClr val="tx1"/>
+              </a:solidFill>
+            </a:ln>
+          </p:spPr>
+          <p:style>
+            <a:lnRef idx="2">
+              <a:schemeClr val="accent1">
+                <a:shade val="15000"/>
+              </a:schemeClr>
+            </a:lnRef>
+            <a:fillRef idx="1">
+              <a:schemeClr val="accent1"/>
+            </a:fillRef>
+            <a:effectRef idx="0">
+              <a:schemeClr val="accent1"/>
+            </a:effectRef>
+            <a:fontRef idx="minor">
+              <a:schemeClr val="lt1"/>
+            </a:fontRef>
+          </p:style>
+          <p:txBody>
+            <a:bodyPr rtlCol="0" anchor="ctr"/>
+            <a:lstStyle/>
+            <a:p>
+              <a:pPr algn="ctr"/>
+              <a:endParaRPr lang="pt-BR"/>
+            </a:p>
+          </p:txBody>
+        </p:sp>
+      </p:grpSp>
+    </p:spTree>
+    <p:extLst>
+      <p:ext uri="{BB962C8B-B14F-4D97-AF65-F5344CB8AC3E}">
+        <p14:creationId xmlns:p14="http://schemas.microsoft.com/office/powerpoint/2010/main" val="790095411"/>
+      </p:ext>
+    </p:extLst>
+  </p:cSld>
+  <p:clrMapOvr>
+    <a:masterClrMapping/>
+  </p:clrMapOvr>
+</p:sld>
+</file>
+
+<file path=ppt/slides/slide12.xml><?xml version="1.0" encoding="utf-8"?>
+<p:sld xmlns:a="http://schemas.openxmlformats.org/drawingml/2006/main" xmlns:r="http://schemas.openxmlformats.org/officeDocument/2006/relationships" xmlns:p="http://schemas.openxmlformats.org/presentationml/2006/main">
+  <p:cSld>
+    <p:spTree>
+      <p:nvGrpSpPr>
+        <p:cNvPr id="1" name=""/>
+        <p:cNvGrpSpPr/>
+        <p:nvPr/>
+      </p:nvGrpSpPr>
+      <p:grpSpPr>
+        <a:xfrm>
+          <a:off x="0" y="0"/>
+          <a:ext cx="0" cy="0"/>
+          <a:chOff x="0" y="0"/>
+          <a:chExt cx="0" cy="0"/>
+        </a:xfrm>
+      </p:grpSpPr>
+      <p:grpSp>
+        <p:nvGrpSpPr>
+          <p:cNvPr id="4" name="Group 3">
+            <a:extLst>
+              <a:ext uri="{FF2B5EF4-FFF2-40B4-BE49-F238E27FC236}">
+                <a16:creationId xmlns:a16="http://schemas.microsoft.com/office/drawing/2014/main" id="{9990C49C-874B-7A88-ED8B-1DDCA56DD1B3}"/>
+              </a:ext>
+            </a:extLst>
+          </p:cNvPr>
+          <p:cNvGrpSpPr/>
+          <p:nvPr/>
+        </p:nvGrpSpPr>
+        <p:grpSpPr>
+          <a:xfrm>
+            <a:off x="574360" y="296574"/>
+            <a:ext cx="8346901" cy="6233180"/>
+            <a:chOff x="574361" y="296574"/>
+            <a:chExt cx="7770447" cy="5246598"/>
+          </a:xfrm>
+        </p:grpSpPr>
+        <p:pic>
+          <p:nvPicPr>
+            <p:cNvPr id="1028" name="Picture 4">
+              <a:extLst>
+                <a:ext uri="{FF2B5EF4-FFF2-40B4-BE49-F238E27FC236}">
+                  <a16:creationId xmlns:a16="http://schemas.microsoft.com/office/drawing/2014/main" id="{BA25EC6C-A7CF-0CC7-9D8B-5F1DA4E203BE}"/>
+                </a:ext>
+              </a:extLst>
+            </p:cNvPr>
+            <p:cNvPicPr>
+              <a:picLocks noChangeAspect="1" noChangeArrowheads="1"/>
+            </p:cNvPicPr>
+            <p:nvPr/>
+          </p:nvPicPr>
+          <p:blipFill>
+            <a:blip r:embed="rId2">
+              <a:extLst>
+                <a:ext uri="{28A0092B-C50C-407E-A947-70E740481C1C}">
+                  <a14:useLocalDpi xmlns:a14="http://schemas.microsoft.com/office/drawing/2010/main" val="0"/>
+                </a:ext>
+              </a:extLst>
+            </a:blip>
+            <a:srcRect/>
+            <a:stretch>
+              <a:fillRect/>
+            </a:stretch>
+          </p:blipFill>
+          <p:spPr bwMode="auto">
+            <a:xfrm>
+              <a:off x="574361" y="3115057"/>
+              <a:ext cx="3963199" cy="2428115"/>
+            </a:xfrm>
+            <a:prstGeom prst="rect">
+              <a:avLst/>
+            </a:prstGeom>
+            <a:noFill/>
+            <a:ln>
+              <a:solidFill>
+                <a:schemeClr val="tx1"/>
+              </a:solidFill>
+            </a:ln>
+            <a:extLst>
+              <a:ext uri="{909E8E84-426E-40DD-AFC4-6F175D3DCCD1}">
+                <a14:hiddenFill xmlns:a14="http://schemas.microsoft.com/office/drawing/2010/main">
+                  <a:solidFill>
+                    <a:srgbClr val="FFFFFF"/>
+                  </a:solidFill>
+                </a14:hiddenFill>
+              </a:ext>
+            </a:extLst>
+          </p:spPr>
+        </p:pic>
+        <p:pic>
+          <p:nvPicPr>
+            <p:cNvPr id="1030" name="Picture 6">
+              <a:extLst>
+                <a:ext uri="{FF2B5EF4-FFF2-40B4-BE49-F238E27FC236}">
+                  <a16:creationId xmlns:a16="http://schemas.microsoft.com/office/drawing/2014/main" id="{83A2EBEF-30B3-240E-77C7-8912817988B7}"/>
+                </a:ext>
+              </a:extLst>
+            </p:cNvPr>
+            <p:cNvPicPr>
+              <a:picLocks noChangeAspect="1" noChangeArrowheads="1"/>
+            </p:cNvPicPr>
+            <p:nvPr/>
+          </p:nvPicPr>
+          <p:blipFill>
+            <a:blip r:embed="rId3">
+              <a:extLst>
+                <a:ext uri="{28A0092B-C50C-407E-A947-70E740481C1C}">
+                  <a14:useLocalDpi xmlns:a14="http://schemas.microsoft.com/office/drawing/2010/main" val="0"/>
+                </a:ext>
+              </a:extLst>
+            </a:blip>
+            <a:srcRect/>
+            <a:stretch>
+              <a:fillRect/>
+            </a:stretch>
+          </p:blipFill>
+          <p:spPr bwMode="auto">
+            <a:xfrm>
+              <a:off x="4647349" y="3115056"/>
+              <a:ext cx="3697458" cy="2425443"/>
+            </a:xfrm>
+            <a:prstGeom prst="rect">
+              <a:avLst/>
+            </a:prstGeom>
+            <a:noFill/>
+            <a:ln>
+              <a:solidFill>
+                <a:schemeClr val="tx1"/>
+              </a:solidFill>
+            </a:ln>
+            <a:extLst>
+              <a:ext uri="{909E8E84-426E-40DD-AFC4-6F175D3DCCD1}">
+                <a14:hiddenFill xmlns:a14="http://schemas.microsoft.com/office/drawing/2010/main">
+                  <a:solidFill>
+                    <a:srgbClr val="FFFFFF"/>
+                  </a:solidFill>
+                </a14:hiddenFill>
+              </a:ext>
+            </a:extLst>
+          </p:spPr>
+        </p:pic>
+        <p:pic>
+          <p:nvPicPr>
+            <p:cNvPr id="1032" name="Picture 8">
+              <a:extLst>
+                <a:ext uri="{FF2B5EF4-FFF2-40B4-BE49-F238E27FC236}">
+                  <a16:creationId xmlns:a16="http://schemas.microsoft.com/office/drawing/2014/main" id="{089A9DA7-5790-D882-4C13-50957016F7E3}"/>
+                </a:ext>
+              </a:extLst>
+            </p:cNvPr>
+            <p:cNvPicPr>
+              <a:picLocks noChangeAspect="1" noChangeArrowheads="1"/>
+            </p:cNvPicPr>
+            <p:nvPr/>
+          </p:nvPicPr>
+          <p:blipFill>
+            <a:blip r:embed="rId4">
+              <a:extLst>
+                <a:ext uri="{28A0092B-C50C-407E-A947-70E740481C1C}">
+                  <a14:useLocalDpi xmlns:a14="http://schemas.microsoft.com/office/drawing/2010/main" val="0"/>
+                </a:ext>
+              </a:extLst>
+            </a:blip>
+            <a:srcRect/>
+            <a:stretch>
+              <a:fillRect/>
+            </a:stretch>
+          </p:blipFill>
+          <p:spPr bwMode="auto">
+            <a:xfrm>
+              <a:off x="4647350" y="296574"/>
+              <a:ext cx="3697458" cy="2668396"/>
+            </a:xfrm>
+            <a:prstGeom prst="rect">
+              <a:avLst/>
+            </a:prstGeom>
+            <a:noFill/>
+            <a:ln>
+              <a:solidFill>
+                <a:schemeClr val="tx1"/>
+              </a:solidFill>
+            </a:ln>
+            <a:extLst>
+              <a:ext uri="{909E8E84-426E-40DD-AFC4-6F175D3DCCD1}">
+                <a14:hiddenFill xmlns:a14="http://schemas.microsoft.com/office/drawing/2010/main">
+                  <a:solidFill>
+                    <a:srgbClr val="FFFFFF"/>
+                  </a:solidFill>
+                </a14:hiddenFill>
+              </a:ext>
+            </a:extLst>
+          </p:spPr>
+        </p:pic>
+        <p:pic>
+          <p:nvPicPr>
+            <p:cNvPr id="1034" name="Picture 10">
+              <a:extLst>
+                <a:ext uri="{FF2B5EF4-FFF2-40B4-BE49-F238E27FC236}">
+                  <a16:creationId xmlns:a16="http://schemas.microsoft.com/office/drawing/2014/main" id="{BC5F9A05-7C65-2FAB-C9D0-B20E275568F2}"/>
+                </a:ext>
+              </a:extLst>
+            </p:cNvPr>
+            <p:cNvPicPr>
+              <a:picLocks noChangeAspect="1" noChangeArrowheads="1"/>
+            </p:cNvPicPr>
+            <p:nvPr/>
+          </p:nvPicPr>
+          <p:blipFill>
+            <a:blip r:embed="rId5">
+              <a:extLst>
+                <a:ext uri="{28A0092B-C50C-407E-A947-70E740481C1C}">
+                  <a14:useLocalDpi xmlns:a14="http://schemas.microsoft.com/office/drawing/2010/main" val="0"/>
+                </a:ext>
+              </a:extLst>
+            </a:blip>
+            <a:srcRect/>
+            <a:stretch>
+              <a:fillRect/>
+            </a:stretch>
+          </p:blipFill>
+          <p:spPr bwMode="auto">
+            <a:xfrm>
+              <a:off x="574361" y="296574"/>
+              <a:ext cx="3963199" cy="2668396"/>
+            </a:xfrm>
+            <a:prstGeom prst="rect">
+              <a:avLst/>
+            </a:prstGeom>
+            <a:noFill/>
+            <a:ln>
+              <a:solidFill>
+                <a:schemeClr val="tx1"/>
+              </a:solidFill>
+            </a:ln>
+            <a:extLst>
+              <a:ext uri="{909E8E84-426E-40DD-AFC4-6F175D3DCCD1}">
+                <a14:hiddenFill xmlns:a14="http://schemas.microsoft.com/office/drawing/2010/main">
+                  <a:solidFill>
+                    <a:srgbClr val="FFFFFF"/>
+                  </a:solidFill>
+                </a14:hiddenFill>
+              </a:ext>
+            </a:extLst>
+          </p:spPr>
+        </p:pic>
+      </p:grpSp>
+    </p:spTree>
+    <p:extLst>
+      <p:ext uri="{BB962C8B-B14F-4D97-AF65-F5344CB8AC3E}">
+        <p14:creationId xmlns:p14="http://schemas.microsoft.com/office/powerpoint/2010/main" val="1044334470"/>
+      </p:ext>
+    </p:extLst>
+  </p:cSld>
+  <p:clrMapOvr>
+    <a:masterClrMapping/>
+  </p:clrMapOvr>
+</p:sld>
+</file>
+
 <file path=ppt/slides/slide2.xml><?xml version="1.0" encoding="utf-8"?>
 <p:sld xmlns:a="http://schemas.openxmlformats.org/drawingml/2006/main" xmlns:r="http://schemas.openxmlformats.org/officeDocument/2006/relationships" xmlns:p="http://schemas.openxmlformats.org/presentationml/2006/main">
   <p:cSld>

--- a/DISSERTACAO/figuras/figures.pptx
+++ b/DISSERTACAO/figuras/figures.pptx
@@ -5,7 +5,7 @@
     <p:sldMasterId id="2147483648" r:id="rId1"/>
   </p:sldMasterIdLst>
   <p:notesMasterIdLst>
-    <p:notesMasterId r:id="rId14"/>
+    <p:notesMasterId r:id="rId15"/>
   </p:notesMasterIdLst>
   <p:sldIdLst>
     <p:sldId id="256" r:id="rId2"/>
@@ -20,6 +20,7 @@
     <p:sldId id="265" r:id="rId11"/>
     <p:sldId id="266" r:id="rId12"/>
     <p:sldId id="267" r:id="rId13"/>
+    <p:sldId id="268" r:id="rId14"/>
   </p:sldIdLst>
   <p:sldSz cx="12192000" cy="6858000"/>
   <p:notesSz cx="6858000" cy="9144000"/>
@@ -1317,7 +1318,7 @@
           <a:p>
             <a:fld id="{FFCE6A37-3420-40C1-9DE2-D7E9118C4CF6}" type="datetimeFigureOut">
               <a:rPr lang="pt-BR" smtClean="0"/>
-              <a:t>03/06/2026</a:t>
+              <a:t>08/06/2026</a:t>
             </a:fld>
             <a:endParaRPr lang="pt-BR"/>
           </a:p>
@@ -1818,7 +1819,7 @@
           <a:p>
             <a:fld id="{7C8BC570-9881-4DD1-A666-BFFC3ABED690}" type="datetimeFigureOut">
               <a:rPr lang="pt-BR" smtClean="0"/>
-              <a:t>03/06/2026</a:t>
+              <a:t>08/06/2026</a:t>
             </a:fld>
             <a:endParaRPr lang="pt-BR"/>
           </a:p>
@@ -2018,7 +2019,7 @@
           <a:p>
             <a:fld id="{7C8BC570-9881-4DD1-A666-BFFC3ABED690}" type="datetimeFigureOut">
               <a:rPr lang="pt-BR" smtClean="0"/>
-              <a:t>03/06/2026</a:t>
+              <a:t>08/06/2026</a:t>
             </a:fld>
             <a:endParaRPr lang="pt-BR"/>
           </a:p>
@@ -2228,7 +2229,7 @@
           <a:p>
             <a:fld id="{7C8BC570-9881-4DD1-A666-BFFC3ABED690}" type="datetimeFigureOut">
               <a:rPr lang="pt-BR" smtClean="0"/>
-              <a:t>03/06/2026</a:t>
+              <a:t>08/06/2026</a:t>
             </a:fld>
             <a:endParaRPr lang="pt-BR"/>
           </a:p>
@@ -2428,7 +2429,7 @@
           <a:p>
             <a:fld id="{7C8BC570-9881-4DD1-A666-BFFC3ABED690}" type="datetimeFigureOut">
               <a:rPr lang="pt-BR" smtClean="0"/>
-              <a:t>03/06/2026</a:t>
+              <a:t>08/06/2026</a:t>
             </a:fld>
             <a:endParaRPr lang="pt-BR"/>
           </a:p>
@@ -2704,7 +2705,7 @@
           <a:p>
             <a:fld id="{7C8BC570-9881-4DD1-A666-BFFC3ABED690}" type="datetimeFigureOut">
               <a:rPr lang="pt-BR" smtClean="0"/>
-              <a:t>03/06/2026</a:t>
+              <a:t>08/06/2026</a:t>
             </a:fld>
             <a:endParaRPr lang="pt-BR"/>
           </a:p>
@@ -2972,7 +2973,7 @@
           <a:p>
             <a:fld id="{7C8BC570-9881-4DD1-A666-BFFC3ABED690}" type="datetimeFigureOut">
               <a:rPr lang="pt-BR" smtClean="0"/>
-              <a:t>03/06/2026</a:t>
+              <a:t>08/06/2026</a:t>
             </a:fld>
             <a:endParaRPr lang="pt-BR"/>
           </a:p>
@@ -3387,7 +3388,7 @@
           <a:p>
             <a:fld id="{7C8BC570-9881-4DD1-A666-BFFC3ABED690}" type="datetimeFigureOut">
               <a:rPr lang="pt-BR" smtClean="0"/>
-              <a:t>03/06/2026</a:t>
+              <a:t>08/06/2026</a:t>
             </a:fld>
             <a:endParaRPr lang="pt-BR"/>
           </a:p>
@@ -3529,7 +3530,7 @@
           <a:p>
             <a:fld id="{7C8BC570-9881-4DD1-A666-BFFC3ABED690}" type="datetimeFigureOut">
               <a:rPr lang="pt-BR" smtClean="0"/>
-              <a:t>03/06/2026</a:t>
+              <a:t>08/06/2026</a:t>
             </a:fld>
             <a:endParaRPr lang="pt-BR"/>
           </a:p>
@@ -3642,7 +3643,7 @@
           <a:p>
             <a:fld id="{7C8BC570-9881-4DD1-A666-BFFC3ABED690}" type="datetimeFigureOut">
               <a:rPr lang="pt-BR" smtClean="0"/>
-              <a:t>03/06/2026</a:t>
+              <a:t>08/06/2026</a:t>
             </a:fld>
             <a:endParaRPr lang="pt-BR"/>
           </a:p>
@@ -3955,7 +3956,7 @@
           <a:p>
             <a:fld id="{7C8BC570-9881-4DD1-A666-BFFC3ABED690}" type="datetimeFigureOut">
               <a:rPr lang="pt-BR" smtClean="0"/>
-              <a:t>03/06/2026</a:t>
+              <a:t>08/06/2026</a:t>
             </a:fld>
             <a:endParaRPr lang="pt-BR"/>
           </a:p>
@@ -4244,7 +4245,7 @@
           <a:p>
             <a:fld id="{7C8BC570-9881-4DD1-A666-BFFC3ABED690}" type="datetimeFigureOut">
               <a:rPr lang="pt-BR" smtClean="0"/>
-              <a:t>03/06/2026</a:t>
+              <a:t>08/06/2026</a:t>
             </a:fld>
             <a:endParaRPr lang="pt-BR"/>
           </a:p>
@@ -4487,7 +4488,7 @@
           <a:p>
             <a:fld id="{7C8BC570-9881-4DD1-A666-BFFC3ABED690}" type="datetimeFigureOut">
               <a:rPr lang="pt-BR" smtClean="0"/>
-              <a:t>03/06/2026</a:t>
+              <a:t>08/06/2026</a:t>
             </a:fld>
             <a:endParaRPr lang="pt-BR"/>
           </a:p>
@@ -13436,8 +13437,8 @@
             </a:p>
           </p:txBody>
         </p:sp>
-        <mc:AlternateContent xmlns:mc="http://schemas.openxmlformats.org/markup-compatibility/2006">
-          <mc:Choice xmlns:a14="http://schemas.microsoft.com/office/drawing/2010/main" Requires="a14">
+        <mc:AlternateContent xmlns:mc="http://schemas.openxmlformats.org/markup-compatibility/2006" xmlns:a14="http://schemas.microsoft.com/office/drawing/2010/main">
+          <mc:Choice Requires="a14">
             <p:sp>
               <p:nvSpPr>
                 <p:cNvPr id="21" name="TextBox 20">
@@ -13466,6 +13467,7 @@
                 </a:bodyPr>
                 <a:lstStyle/>
                 <a:p>
+                  <a:pPr/>
                   <a14:m>
                     <m:oMathPara xmlns:m="http://schemas.openxmlformats.org/officeDocument/2006/math">
                       <m:oMathParaPr>
@@ -13517,7 +13519,7 @@
               </p:txBody>
             </p:sp>
           </mc:Choice>
-          <mc:Fallback>
+          <mc:Fallback xmlns="">
             <p:sp>
               <p:nvSpPr>
                 <p:cNvPr id="21" name="TextBox 20">
@@ -13562,8 +13564,8 @@
             </p:sp>
           </mc:Fallback>
         </mc:AlternateContent>
-        <mc:AlternateContent xmlns:mc="http://schemas.openxmlformats.org/markup-compatibility/2006">
-          <mc:Choice xmlns:a14="http://schemas.microsoft.com/office/drawing/2010/main" Requires="a14">
+        <mc:AlternateContent xmlns:mc="http://schemas.openxmlformats.org/markup-compatibility/2006" xmlns:a14="http://schemas.microsoft.com/office/drawing/2010/main">
+          <mc:Choice Requires="a14">
             <p:sp>
               <p:nvSpPr>
                 <p:cNvPr id="23" name="TextBox 22">
@@ -13592,6 +13594,7 @@
                 </a:bodyPr>
                 <a:lstStyle/>
                 <a:p>
+                  <a:pPr/>
                   <a14:m>
                     <m:oMathPara xmlns:m="http://schemas.openxmlformats.org/officeDocument/2006/math">
                       <m:oMathParaPr>
@@ -13643,7 +13646,7 @@
               </p:txBody>
             </p:sp>
           </mc:Choice>
-          <mc:Fallback>
+          <mc:Fallback xmlns="">
             <p:sp>
               <p:nvSpPr>
                 <p:cNvPr id="23" name="TextBox 22">
@@ -14107,6 +14110,203 @@
     <p:extLst>
       <p:ext uri="{BB962C8B-B14F-4D97-AF65-F5344CB8AC3E}">
         <p14:creationId xmlns:p14="http://schemas.microsoft.com/office/powerpoint/2010/main" val="1044334470"/>
+      </p:ext>
+    </p:extLst>
+  </p:cSld>
+  <p:clrMapOvr>
+    <a:masterClrMapping/>
+  </p:clrMapOvr>
+</p:sld>
+</file>
+
+<file path=ppt/slides/slide13.xml><?xml version="1.0" encoding="utf-8"?>
+<p:sld xmlns:a="http://schemas.openxmlformats.org/drawingml/2006/main" xmlns:r="http://schemas.openxmlformats.org/officeDocument/2006/relationships" xmlns:p="http://schemas.openxmlformats.org/presentationml/2006/main">
+  <p:cSld>
+    <p:spTree>
+      <p:nvGrpSpPr>
+        <p:cNvPr id="1" name=""/>
+        <p:cNvGrpSpPr/>
+        <p:nvPr/>
+      </p:nvGrpSpPr>
+      <p:grpSpPr>
+        <a:xfrm>
+          <a:off x="0" y="0"/>
+          <a:ext cx="0" cy="0"/>
+          <a:chOff x="0" y="0"/>
+          <a:chExt cx="0" cy="0"/>
+        </a:xfrm>
+      </p:grpSpPr>
+      <p:grpSp>
+        <p:nvGrpSpPr>
+          <p:cNvPr id="12" name="Group 11">
+            <a:extLst>
+              <a:ext uri="{FF2B5EF4-FFF2-40B4-BE49-F238E27FC236}">
+                <a16:creationId xmlns:a16="http://schemas.microsoft.com/office/drawing/2014/main" id="{85203010-2883-0EA3-11F8-BF1A310C001F}"/>
+              </a:ext>
+            </a:extLst>
+          </p:cNvPr>
+          <p:cNvGrpSpPr/>
+          <p:nvPr/>
+        </p:nvGrpSpPr>
+        <p:grpSpPr>
+          <a:xfrm>
+            <a:off x="227781" y="446955"/>
+            <a:ext cx="11736438" cy="2486372"/>
+            <a:chOff x="227781" y="836344"/>
+            <a:chExt cx="11736438" cy="2486372"/>
+          </a:xfrm>
+        </p:grpSpPr>
+        <p:pic>
+          <p:nvPicPr>
+            <p:cNvPr id="8" name="Picture 7">
+              <a:extLst>
+                <a:ext uri="{FF2B5EF4-FFF2-40B4-BE49-F238E27FC236}">
+                  <a16:creationId xmlns:a16="http://schemas.microsoft.com/office/drawing/2014/main" id="{EFBE7FAC-610B-1530-2035-4D46E6943DF8}"/>
+                </a:ext>
+              </a:extLst>
+            </p:cNvPr>
+            <p:cNvPicPr>
+              <a:picLocks noChangeAspect="1"/>
+            </p:cNvPicPr>
+            <p:nvPr/>
+          </p:nvPicPr>
+          <p:blipFill>
+            <a:blip r:embed="rId2">
+              <a:extLst>
+                <a:ext uri="{28A0092B-C50C-407E-A947-70E740481C1C}">
+                  <a14:useLocalDpi xmlns:a14="http://schemas.microsoft.com/office/drawing/2010/main" val="0"/>
+                </a:ext>
+              </a:extLst>
+            </a:blip>
+            <a:srcRect/>
+            <a:stretch/>
+          </p:blipFill>
+          <p:spPr>
+            <a:xfrm>
+              <a:off x="227781" y="836344"/>
+              <a:ext cx="11736438" cy="2486372"/>
+            </a:xfrm>
+            <a:prstGeom prst="rect">
+              <a:avLst/>
+            </a:prstGeom>
+          </p:spPr>
+        </p:pic>
+        <p:pic>
+          <p:nvPicPr>
+            <p:cNvPr id="9" name="Picture 8">
+              <a:extLst>
+                <a:ext uri="{FF2B5EF4-FFF2-40B4-BE49-F238E27FC236}">
+                  <a16:creationId xmlns:a16="http://schemas.microsoft.com/office/drawing/2014/main" id="{8AA6569C-9CD9-988C-8062-8C4D6AB049BA}"/>
+                </a:ext>
+              </a:extLst>
+            </p:cNvPr>
+            <p:cNvPicPr>
+              <a:picLocks noChangeAspect="1"/>
+            </p:cNvPicPr>
+            <p:nvPr/>
+          </p:nvPicPr>
+          <p:blipFill>
+            <a:blip r:embed="rId3"/>
+            <a:stretch>
+              <a:fillRect/>
+            </a:stretch>
+          </p:blipFill>
+          <p:spPr>
+            <a:xfrm>
+              <a:off x="5803233" y="836344"/>
+              <a:ext cx="585531" cy="452810"/>
+            </a:xfrm>
+            <a:prstGeom prst="rect">
+              <a:avLst/>
+            </a:prstGeom>
+          </p:spPr>
+        </p:pic>
+      </p:grpSp>
+      <p:grpSp>
+        <p:nvGrpSpPr>
+          <p:cNvPr id="11" name="Group 10">
+            <a:extLst>
+              <a:ext uri="{FF2B5EF4-FFF2-40B4-BE49-F238E27FC236}">
+                <a16:creationId xmlns:a16="http://schemas.microsoft.com/office/drawing/2014/main" id="{D8F3B639-7391-F016-A4C3-A5944C193FEE}"/>
+              </a:ext>
+            </a:extLst>
+          </p:cNvPr>
+          <p:cNvGrpSpPr/>
+          <p:nvPr/>
+        </p:nvGrpSpPr>
+        <p:grpSpPr>
+          <a:xfrm>
+            <a:off x="227781" y="3924673"/>
+            <a:ext cx="11736438" cy="2486372"/>
+            <a:chOff x="227781" y="3984633"/>
+            <a:chExt cx="11736438" cy="2486372"/>
+          </a:xfrm>
+        </p:grpSpPr>
+        <p:pic>
+          <p:nvPicPr>
+            <p:cNvPr id="3" name="Picture 2">
+              <a:extLst>
+                <a:ext uri="{FF2B5EF4-FFF2-40B4-BE49-F238E27FC236}">
+                  <a16:creationId xmlns:a16="http://schemas.microsoft.com/office/drawing/2014/main" id="{E10360D1-C467-A84D-47D2-0D9D571A8309}"/>
+                </a:ext>
+              </a:extLst>
+            </p:cNvPr>
+            <p:cNvPicPr>
+              <a:picLocks noChangeAspect="1"/>
+            </p:cNvPicPr>
+            <p:nvPr/>
+          </p:nvPicPr>
+          <p:blipFill>
+            <a:blip r:embed="rId4"/>
+            <a:stretch>
+              <a:fillRect/>
+            </a:stretch>
+          </p:blipFill>
+          <p:spPr>
+            <a:xfrm>
+              <a:off x="227781" y="3984633"/>
+              <a:ext cx="11736438" cy="2486372"/>
+            </a:xfrm>
+            <a:prstGeom prst="rect">
+              <a:avLst/>
+            </a:prstGeom>
+          </p:spPr>
+        </p:pic>
+        <p:pic>
+          <p:nvPicPr>
+            <p:cNvPr id="10" name="Picture 9">
+              <a:extLst>
+                <a:ext uri="{FF2B5EF4-FFF2-40B4-BE49-F238E27FC236}">
+                  <a16:creationId xmlns:a16="http://schemas.microsoft.com/office/drawing/2014/main" id="{5FEA047C-452E-44BC-5272-4AFCD06558D4}"/>
+                </a:ext>
+              </a:extLst>
+            </p:cNvPr>
+            <p:cNvPicPr>
+              <a:picLocks noChangeAspect="1"/>
+            </p:cNvPicPr>
+            <p:nvPr/>
+          </p:nvPicPr>
+          <p:blipFill>
+            <a:blip r:embed="rId3"/>
+            <a:stretch>
+              <a:fillRect/>
+            </a:stretch>
+          </p:blipFill>
+          <p:spPr>
+            <a:xfrm>
+              <a:off x="5803233" y="3984633"/>
+              <a:ext cx="585531" cy="452810"/>
+            </a:xfrm>
+            <a:prstGeom prst="rect">
+              <a:avLst/>
+            </a:prstGeom>
+          </p:spPr>
+        </p:pic>
+      </p:grpSp>
+    </p:spTree>
+    <p:extLst>
+      <p:ext uri="{BB962C8B-B14F-4D97-AF65-F5344CB8AC3E}">
+        <p14:creationId xmlns:p14="http://schemas.microsoft.com/office/powerpoint/2010/main" val="3118575108"/>
       </p:ext>
     </p:extLst>
   </p:cSld>

--- a/DISSERTACAO/figuras/figures.pptx
+++ b/DISSERTACAO/figuras/figures.pptx
@@ -5,7 +5,7 @@
     <p:sldMasterId id="2147483648" r:id="rId1"/>
   </p:sldMasterIdLst>
   <p:notesMasterIdLst>
-    <p:notesMasterId r:id="rId15"/>
+    <p:notesMasterId r:id="rId16"/>
   </p:notesMasterIdLst>
   <p:sldIdLst>
     <p:sldId id="256" r:id="rId2"/>
@@ -21,6 +21,7 @@
     <p:sldId id="266" r:id="rId12"/>
     <p:sldId id="267" r:id="rId13"/>
     <p:sldId id="268" r:id="rId14"/>
+    <p:sldId id="269" r:id="rId15"/>
   </p:sldIdLst>
   <p:sldSz cx="12192000" cy="6858000"/>
   <p:notesSz cx="6858000" cy="9144000"/>
@@ -130,7 +131,7 @@
 <file path=ppt/revisionInfo.xml><?xml version="1.0" encoding="utf-8"?>
 <p1510:revInfo xmlns:a="http://schemas.openxmlformats.org/drawingml/2006/main" xmlns:r="http://schemas.openxmlformats.org/officeDocument/2006/relationships" xmlns:p1510="http://schemas.microsoft.com/office/powerpoint/2015/10/main">
   <p1510:revLst>
-    <p1510:client id="{93B72BAE-AB54-495B-86A9-4541991303FD}" v="77" dt="2026-06-03T20:47:40.220"/>
+    <p1510:client id="{93B72BAE-AB54-495B-86A9-4541991303FD}" v="2" dt="2026-06-08T17:21:25.893"/>
   </p1510:revLst>
 </p1510:revInfo>
 </file>
@@ -140,7 +141,7 @@
   <pc:docChgLst>
     <pc:chgData name="Murillo Álvaro Borges de Sousa" userId="02386067-c46f-46e6-bf61-8f6a774af0e5" providerId="ADAL" clId="{73C3FE35-BF7E-418C-A7F8-FA0AB4F63A6B}"/>
     <pc:docChg chg="undo custSel addSld modSld sldOrd">
-      <pc:chgData name="Murillo Álvaro Borges de Sousa" userId="02386067-c46f-46e6-bf61-8f6a774af0e5" providerId="ADAL" clId="{73C3FE35-BF7E-418C-A7F8-FA0AB4F63A6B}" dt="2026-06-03T20:47:40.220" v="624" actId="14100"/>
+      <pc:chgData name="Murillo Álvaro Borges de Sousa" userId="02386067-c46f-46e6-bf61-8f6a774af0e5" providerId="ADAL" clId="{73C3FE35-BF7E-418C-A7F8-FA0AB4F63A6B}" dt="2026-06-08T17:22:09.955" v="684" actId="1076"/>
       <pc:docMkLst>
         <pc:docMk/>
       </pc:docMkLst>
@@ -857,14 +858,6 @@
             <ac:spMk id="6" creationId="{968B5D67-F3CD-C562-F708-B396E50213D8}"/>
           </ac:spMkLst>
         </pc:spChg>
-        <pc:spChg chg="add del mod ord">
-          <ac:chgData name="Murillo Álvaro Borges de Sousa" userId="02386067-c46f-46e6-bf61-8f6a774af0e5" providerId="ADAL" clId="{73C3FE35-BF7E-418C-A7F8-FA0AB4F63A6B}" dt="2026-06-02T14:37:18.113" v="359" actId="478"/>
-          <ac:spMkLst>
-            <pc:docMk/>
-            <pc:sldMk cId="1522299716" sldId="264"/>
-            <ac:spMk id="8" creationId="{847CC85F-1B1D-54D3-04B1-F79DCF1CC49E}"/>
-          </ac:spMkLst>
-        </pc:spChg>
         <pc:spChg chg="add mod ord">
           <ac:chgData name="Murillo Álvaro Borges de Sousa" userId="02386067-c46f-46e6-bf61-8f6a774af0e5" providerId="ADAL" clId="{73C3FE35-BF7E-418C-A7F8-FA0AB4F63A6B}" dt="2026-06-02T17:04:50.653" v="374" actId="208"/>
           <ac:spMkLst>
@@ -904,14 +897,6 @@
           <pc:docMk/>
           <pc:sldMk cId="4196720484" sldId="265"/>
         </pc:sldMkLst>
-        <pc:spChg chg="add del mod">
-          <ac:chgData name="Murillo Álvaro Borges de Sousa" userId="02386067-c46f-46e6-bf61-8f6a774af0e5" providerId="ADAL" clId="{73C3FE35-BF7E-418C-A7F8-FA0AB4F63A6B}" dt="2026-06-02T18:11:23.386" v="379" actId="478"/>
-          <ac:spMkLst>
-            <pc:docMk/>
-            <pc:sldMk cId="4196720484" sldId="265"/>
-            <ac:spMk id="2" creationId="{DEC84091-BDE2-80FA-FCC9-86173490AD77}"/>
-          </ac:spMkLst>
-        </pc:spChg>
         <pc:spChg chg="add mod">
           <ac:chgData name="Murillo Álvaro Borges de Sousa" userId="02386067-c46f-46e6-bf61-8f6a774af0e5" providerId="ADAL" clId="{73C3FE35-BF7E-418C-A7F8-FA0AB4F63A6B}" dt="2026-06-02T18:19:05.993" v="441" actId="164"/>
           <ac:spMkLst>
@@ -1103,14 +1088,6 @@
             <ac:spMk id="21" creationId="{910EDAC2-AB1B-CC09-F543-DB67348C62EB}"/>
           </ac:spMkLst>
         </pc:spChg>
-        <pc:spChg chg="add del mod">
-          <ac:chgData name="Murillo Álvaro Borges de Sousa" userId="02386067-c46f-46e6-bf61-8f6a774af0e5" providerId="ADAL" clId="{73C3FE35-BF7E-418C-A7F8-FA0AB4F63A6B}" dt="2026-06-03T18:43:18.476" v="524" actId="478"/>
-          <ac:spMkLst>
-            <pc:docMk/>
-            <pc:sldMk cId="790095411" sldId="266"/>
-            <ac:spMk id="22" creationId="{8225757F-1773-332F-B024-CFABFDA8DD40}"/>
-          </ac:spMkLst>
-        </pc:spChg>
         <pc:spChg chg="add mod">
           <ac:chgData name="Murillo Álvaro Borges de Sousa" userId="02386067-c46f-46e6-bf61-8f6a774af0e5" providerId="ADAL" clId="{73C3FE35-BF7E-418C-A7F8-FA0AB4F63A6B}" dt="2026-06-03T18:46:53.962" v="557" actId="164"/>
           <ac:spMkLst>
@@ -1182,22 +1159,6 @@
             <ac:grpSpMk id="4" creationId="{9990C49C-874B-7A88-ED8B-1DDCA56DD1B3}"/>
           </ac:grpSpMkLst>
         </pc:grpChg>
-        <pc:picChg chg="add del mod">
-          <ac:chgData name="Murillo Álvaro Borges de Sousa" userId="02386067-c46f-46e6-bf61-8f6a774af0e5" providerId="ADAL" clId="{73C3FE35-BF7E-418C-A7F8-FA0AB4F63A6B}" dt="2026-06-03T20:45:49.498" v="592" actId="478"/>
-          <ac:picMkLst>
-            <pc:docMk/>
-            <pc:sldMk cId="1044334470" sldId="267"/>
-            <ac:picMk id="3" creationId="{6DB04F82-3D01-18EC-7053-E8D737AAB1C4}"/>
-          </ac:picMkLst>
-        </pc:picChg>
-        <pc:picChg chg="add del mod">
-          <ac:chgData name="Murillo Álvaro Borges de Sousa" userId="02386067-c46f-46e6-bf61-8f6a774af0e5" providerId="ADAL" clId="{73C3FE35-BF7E-418C-A7F8-FA0AB4F63A6B}" dt="2026-06-03T20:45:27.424" v="588" actId="478"/>
-          <ac:picMkLst>
-            <pc:docMk/>
-            <pc:sldMk cId="1044334470" sldId="267"/>
-            <ac:picMk id="1026" creationId="{DD102A72-AD13-B15B-1FF8-92A0E8CA47DE}"/>
-          </ac:picMkLst>
-        </pc:picChg>
         <pc:picChg chg="add mod">
           <ac:chgData name="Murillo Álvaro Borges de Sousa" userId="02386067-c46f-46e6-bf61-8f6a774af0e5" providerId="ADAL" clId="{73C3FE35-BF7E-418C-A7F8-FA0AB4F63A6B}" dt="2026-06-03T20:47:40.220" v="624" actId="14100"/>
           <ac:picMkLst>
@@ -1230,6 +1191,44 @@
             <ac:picMk id="1034" creationId="{BC5F9A05-7C65-2FAB-C9D0-B20E275568F2}"/>
           </ac:picMkLst>
         </pc:picChg>
+      </pc:sldChg>
+      <pc:sldChg chg="addSp modSp mod">
+        <pc:chgData name="Murillo Álvaro Borges de Sousa" userId="02386067-c46f-46e6-bf61-8f6a774af0e5" providerId="ADAL" clId="{73C3FE35-BF7E-418C-A7F8-FA0AB4F63A6B}" dt="2026-06-08T17:22:09.955" v="684" actId="1076"/>
+        <pc:sldMkLst>
+          <pc:docMk/>
+          <pc:sldMk cId="3118575108" sldId="268"/>
+        </pc:sldMkLst>
+        <pc:spChg chg="add mod">
+          <ac:chgData name="Murillo Álvaro Borges de Sousa" userId="02386067-c46f-46e6-bf61-8f6a774af0e5" providerId="ADAL" clId="{73C3FE35-BF7E-418C-A7F8-FA0AB4F63A6B}" dt="2026-06-08T17:22:09.955" v="684" actId="1076"/>
+          <ac:spMkLst>
+            <pc:docMk/>
+            <pc:sldMk cId="3118575108" sldId="268"/>
+            <ac:spMk id="2" creationId="{66DB9167-9389-860C-3053-C44E9CAEBB1A}"/>
+          </ac:spMkLst>
+        </pc:spChg>
+        <pc:spChg chg="add mod">
+          <ac:chgData name="Murillo Álvaro Borges de Sousa" userId="02386067-c46f-46e6-bf61-8f6a774af0e5" providerId="ADAL" clId="{73C3FE35-BF7E-418C-A7F8-FA0AB4F63A6B}" dt="2026-06-08T17:21:53.982" v="670" actId="1076"/>
+          <ac:spMkLst>
+            <pc:docMk/>
+            <pc:sldMk cId="3118575108" sldId="268"/>
+            <ac:spMk id="4" creationId="{FE379F07-E5FD-A65B-5C09-A440B15930B1}"/>
+          </ac:spMkLst>
+        </pc:spChg>
+        <pc:grpChg chg="mod">
+          <ac:chgData name="Murillo Álvaro Borges de Sousa" userId="02386067-c46f-46e6-bf61-8f6a774af0e5" providerId="ADAL" clId="{73C3FE35-BF7E-418C-A7F8-FA0AB4F63A6B}" dt="2026-06-08T17:20:48.627" v="626" actId="1076"/>
+          <ac:grpSpMkLst>
+            <pc:docMk/>
+            <pc:sldMk cId="3118575108" sldId="268"/>
+            <ac:grpSpMk id="12" creationId="{85203010-2883-0EA3-11F8-BF1A310C001F}"/>
+          </ac:grpSpMkLst>
+        </pc:grpChg>
+      </pc:sldChg>
+      <pc:sldChg chg="new">
+        <pc:chgData name="Murillo Álvaro Borges de Sousa" userId="02386067-c46f-46e6-bf61-8f6a774af0e5" providerId="ADAL" clId="{73C3FE35-BF7E-418C-A7F8-FA0AB4F63A6B}" dt="2026-06-08T17:16:51.694" v="625" actId="680"/>
+        <pc:sldMkLst>
+          <pc:docMk/>
+          <pc:sldMk cId="543279352" sldId="269"/>
+        </pc:sldMkLst>
       </pc:sldChg>
     </pc:docChg>
   </pc:docChgLst>
@@ -14150,7 +14149,7 @@
         </p:nvGrpSpPr>
         <p:grpSpPr>
           <a:xfrm>
-            <a:off x="227781" y="446955"/>
+            <a:off x="227779" y="647925"/>
             <a:ext cx="11736438" cy="2486372"/>
             <a:chOff x="227781" y="836344"/>
             <a:chExt cx="11736438" cy="2486372"/>
@@ -14303,10 +14302,110 @@
           </p:spPr>
         </p:pic>
       </p:grpSp>
+      <p:sp>
+        <p:nvSpPr>
+          <p:cNvPr id="2" name="TextBox 1">
+            <a:extLst>
+              <a:ext uri="{FF2B5EF4-FFF2-40B4-BE49-F238E27FC236}">
+                <a16:creationId xmlns:a16="http://schemas.microsoft.com/office/drawing/2014/main" id="{66DB9167-9389-860C-3053-C44E9CAEBB1A}"/>
+              </a:ext>
+            </a:extLst>
+          </p:cNvPr>
+          <p:cNvSpPr txBox="1"/>
+          <p:nvPr/>
+        </p:nvSpPr>
+        <p:spPr>
+          <a:xfrm>
+            <a:off x="4618090" y="278593"/>
+            <a:ext cx="2970237" cy="369332"/>
+          </a:xfrm>
+          <a:prstGeom prst="rect">
+            <a:avLst/>
+          </a:prstGeom>
+          <a:noFill/>
+        </p:spPr>
+        <p:txBody>
+          <a:bodyPr wrap="none" rtlCol="0">
+            <a:spAutoFit/>
+          </a:bodyPr>
+          <a:lstStyle/>
+          <a:p>
+            <a:r>
+              <a:rPr lang="pt-BR" dirty="0"/>
+              <a:t>Resultados sem Suavização</a:t>
+            </a:r>
+          </a:p>
+        </p:txBody>
+      </p:sp>
+      <p:sp>
+        <p:nvSpPr>
+          <p:cNvPr id="4" name="TextBox 3">
+            <a:extLst>
+              <a:ext uri="{FF2B5EF4-FFF2-40B4-BE49-F238E27FC236}">
+                <a16:creationId xmlns:a16="http://schemas.microsoft.com/office/drawing/2014/main" id="{FE379F07-E5FD-A65B-5C09-A440B15930B1}"/>
+              </a:ext>
+            </a:extLst>
+          </p:cNvPr>
+          <p:cNvSpPr txBox="1"/>
+          <p:nvPr/>
+        </p:nvSpPr>
+        <p:spPr>
+          <a:xfrm>
+            <a:off x="4603664" y="3492996"/>
+            <a:ext cx="2984663" cy="369332"/>
+          </a:xfrm>
+          <a:prstGeom prst="rect">
+            <a:avLst/>
+          </a:prstGeom>
+          <a:noFill/>
+        </p:spPr>
+        <p:txBody>
+          <a:bodyPr wrap="none" rtlCol="0">
+            <a:spAutoFit/>
+          </a:bodyPr>
+          <a:lstStyle/>
+          <a:p>
+            <a:r>
+              <a:rPr lang="pt-BR" dirty="0"/>
+              <a:t>Resultados com Suavização</a:t>
+            </a:r>
+          </a:p>
+        </p:txBody>
+      </p:sp>
     </p:spTree>
     <p:extLst>
       <p:ext uri="{BB962C8B-B14F-4D97-AF65-F5344CB8AC3E}">
         <p14:creationId xmlns:p14="http://schemas.microsoft.com/office/powerpoint/2010/main" val="3118575108"/>
+      </p:ext>
+    </p:extLst>
+  </p:cSld>
+  <p:clrMapOvr>
+    <a:masterClrMapping/>
+  </p:clrMapOvr>
+</p:sld>
+</file>
+
+<file path=ppt/slides/slide14.xml><?xml version="1.0" encoding="utf-8"?>
+<p:sld xmlns:a="http://schemas.openxmlformats.org/drawingml/2006/main" xmlns:r="http://schemas.openxmlformats.org/officeDocument/2006/relationships" xmlns:p="http://schemas.openxmlformats.org/presentationml/2006/main">
+  <p:cSld>
+    <p:spTree>
+      <p:nvGrpSpPr>
+        <p:cNvPr id="1" name=""/>
+        <p:cNvGrpSpPr/>
+        <p:nvPr/>
+      </p:nvGrpSpPr>
+      <p:grpSpPr>
+        <a:xfrm>
+          <a:off x="0" y="0"/>
+          <a:ext cx="0" cy="0"/>
+          <a:chOff x="0" y="0"/>
+          <a:chExt cx="0" cy="0"/>
+        </a:xfrm>
+      </p:grpSpPr>
+    </p:spTree>
+    <p:extLst>
+      <p:ext uri="{BB962C8B-B14F-4D97-AF65-F5344CB8AC3E}">
+        <p14:creationId xmlns:p14="http://schemas.microsoft.com/office/powerpoint/2010/main" val="543279352"/>
       </p:ext>
     </p:extLst>
   </p:cSld>

--- a/DISSERTACAO/figuras/figures.pptx
+++ b/DISSERTACAO/figuras/figures.pptx
@@ -1317,7 +1317,7 @@
           <a:p>
             <a:fld id="{FFCE6A37-3420-40C1-9DE2-D7E9118C4CF6}" type="datetimeFigureOut">
               <a:rPr lang="pt-BR" smtClean="0"/>
-              <a:t>08/06/2026</a:t>
+              <a:t>09/06/2026</a:t>
             </a:fld>
             <a:endParaRPr lang="pt-BR"/>
           </a:p>
@@ -1818,7 +1818,7 @@
           <a:p>
             <a:fld id="{7C8BC570-9881-4DD1-A666-BFFC3ABED690}" type="datetimeFigureOut">
               <a:rPr lang="pt-BR" smtClean="0"/>
-              <a:t>08/06/2026</a:t>
+              <a:t>09/06/2026</a:t>
             </a:fld>
             <a:endParaRPr lang="pt-BR"/>
           </a:p>
@@ -2018,7 +2018,7 @@
           <a:p>
             <a:fld id="{7C8BC570-9881-4DD1-A666-BFFC3ABED690}" type="datetimeFigureOut">
               <a:rPr lang="pt-BR" smtClean="0"/>
-              <a:t>08/06/2026</a:t>
+              <a:t>09/06/2026</a:t>
             </a:fld>
             <a:endParaRPr lang="pt-BR"/>
           </a:p>
@@ -2228,7 +2228,7 @@
           <a:p>
             <a:fld id="{7C8BC570-9881-4DD1-A666-BFFC3ABED690}" type="datetimeFigureOut">
               <a:rPr lang="pt-BR" smtClean="0"/>
-              <a:t>08/06/2026</a:t>
+              <a:t>09/06/2026</a:t>
             </a:fld>
             <a:endParaRPr lang="pt-BR"/>
           </a:p>
@@ -2428,7 +2428,7 @@
           <a:p>
             <a:fld id="{7C8BC570-9881-4DD1-A666-BFFC3ABED690}" type="datetimeFigureOut">
               <a:rPr lang="pt-BR" smtClean="0"/>
-              <a:t>08/06/2026</a:t>
+              <a:t>09/06/2026</a:t>
             </a:fld>
             <a:endParaRPr lang="pt-BR"/>
           </a:p>
@@ -2704,7 +2704,7 @@
           <a:p>
             <a:fld id="{7C8BC570-9881-4DD1-A666-BFFC3ABED690}" type="datetimeFigureOut">
               <a:rPr lang="pt-BR" smtClean="0"/>
-              <a:t>08/06/2026</a:t>
+              <a:t>09/06/2026</a:t>
             </a:fld>
             <a:endParaRPr lang="pt-BR"/>
           </a:p>
@@ -2972,7 +2972,7 @@
           <a:p>
             <a:fld id="{7C8BC570-9881-4DD1-A666-BFFC3ABED690}" type="datetimeFigureOut">
               <a:rPr lang="pt-BR" smtClean="0"/>
-              <a:t>08/06/2026</a:t>
+              <a:t>09/06/2026</a:t>
             </a:fld>
             <a:endParaRPr lang="pt-BR"/>
           </a:p>
@@ -3387,7 +3387,7 @@
           <a:p>
             <a:fld id="{7C8BC570-9881-4DD1-A666-BFFC3ABED690}" type="datetimeFigureOut">
               <a:rPr lang="pt-BR" smtClean="0"/>
-              <a:t>08/06/2026</a:t>
+              <a:t>09/06/2026</a:t>
             </a:fld>
             <a:endParaRPr lang="pt-BR"/>
           </a:p>
@@ -3529,7 +3529,7 @@
           <a:p>
             <a:fld id="{7C8BC570-9881-4DD1-A666-BFFC3ABED690}" type="datetimeFigureOut">
               <a:rPr lang="pt-BR" smtClean="0"/>
-              <a:t>08/06/2026</a:t>
+              <a:t>09/06/2026</a:t>
             </a:fld>
             <a:endParaRPr lang="pt-BR"/>
           </a:p>
@@ -3642,7 +3642,7 @@
           <a:p>
             <a:fld id="{7C8BC570-9881-4DD1-A666-BFFC3ABED690}" type="datetimeFigureOut">
               <a:rPr lang="pt-BR" smtClean="0"/>
-              <a:t>08/06/2026</a:t>
+              <a:t>09/06/2026</a:t>
             </a:fld>
             <a:endParaRPr lang="pt-BR"/>
           </a:p>
@@ -3955,7 +3955,7 @@
           <a:p>
             <a:fld id="{7C8BC570-9881-4DD1-A666-BFFC3ABED690}" type="datetimeFigureOut">
               <a:rPr lang="pt-BR" smtClean="0"/>
-              <a:t>08/06/2026</a:t>
+              <a:t>09/06/2026</a:t>
             </a:fld>
             <a:endParaRPr lang="pt-BR"/>
           </a:p>
@@ -4244,7 +4244,7 @@
           <a:p>
             <a:fld id="{7C8BC570-9881-4DD1-A666-BFFC3ABED690}" type="datetimeFigureOut">
               <a:rPr lang="pt-BR" smtClean="0"/>
-              <a:t>08/06/2026</a:t>
+              <a:t>09/06/2026</a:t>
             </a:fld>
             <a:endParaRPr lang="pt-BR"/>
           </a:p>
@@ -4487,7 +4487,7 @@
           <a:p>
             <a:fld id="{7C8BC570-9881-4DD1-A666-BFFC3ABED690}" type="datetimeFigureOut">
               <a:rPr lang="pt-BR" smtClean="0"/>
-              <a:t>08/06/2026</a:t>
+              <a:t>09/06/2026</a:t>
             </a:fld>
             <a:endParaRPr lang="pt-BR"/>
           </a:p>
@@ -14137,10 +14137,10 @@
       </p:grpSpPr>
       <p:grpSp>
         <p:nvGrpSpPr>
-          <p:cNvPr id="12" name="Group 11">
+          <p:cNvPr id="7" name="Group 6">
             <a:extLst>
               <a:ext uri="{FF2B5EF4-FFF2-40B4-BE49-F238E27FC236}">
-                <a16:creationId xmlns:a16="http://schemas.microsoft.com/office/drawing/2014/main" id="{85203010-2883-0EA3-11F8-BF1A310C001F}"/>
+                <a16:creationId xmlns:a16="http://schemas.microsoft.com/office/drawing/2014/main" id="{4C164737-1DF1-7A94-0820-4540B763E114}"/>
               </a:ext>
             </a:extLst>
           </p:cNvPr>
@@ -14149,18 +14149,18 @@
         </p:nvGrpSpPr>
         <p:grpSpPr>
           <a:xfrm>
-            <a:off x="227779" y="647925"/>
-            <a:ext cx="11736438" cy="2486372"/>
-            <a:chOff x="227781" y="836344"/>
-            <a:chExt cx="11736438" cy="2486372"/>
+            <a:off x="161798" y="3862328"/>
+            <a:ext cx="11809618" cy="2486372"/>
+            <a:chOff x="161798" y="3862328"/>
+            <a:chExt cx="11809618" cy="2486372"/>
           </a:xfrm>
         </p:grpSpPr>
         <p:pic>
           <p:nvPicPr>
-            <p:cNvPr id="8" name="Picture 7">
+            <p:cNvPr id="5" name="Picture 4">
               <a:extLst>
                 <a:ext uri="{FF2B5EF4-FFF2-40B4-BE49-F238E27FC236}">
-                  <a16:creationId xmlns:a16="http://schemas.microsoft.com/office/drawing/2014/main" id="{EFBE7FAC-610B-1530-2035-4D46E6943DF8}"/>
+                  <a16:creationId xmlns:a16="http://schemas.microsoft.com/office/drawing/2014/main" id="{41B43844-CC90-5180-75F0-4AA34409EBA4}"/>
                 </a:ext>
               </a:extLst>
             </p:cNvPr>
@@ -14177,70 +14177,19 @@
                 </a:ext>
               </a:extLst>
             </a:blip>
-            <a:srcRect/>
+            <a:srcRect t="643" b="643"/>
             <a:stretch/>
           </p:blipFill>
           <p:spPr>
             <a:xfrm>
-              <a:off x="227781" y="836344"/>
-              <a:ext cx="11736438" cy="2486372"/>
+              <a:off x="6103208" y="3862333"/>
+              <a:ext cx="5868208" cy="2486367"/>
             </a:xfrm>
             <a:prstGeom prst="rect">
               <a:avLst/>
             </a:prstGeom>
           </p:spPr>
         </p:pic>
-        <p:pic>
-          <p:nvPicPr>
-            <p:cNvPr id="9" name="Picture 8">
-              <a:extLst>
-                <a:ext uri="{FF2B5EF4-FFF2-40B4-BE49-F238E27FC236}">
-                  <a16:creationId xmlns:a16="http://schemas.microsoft.com/office/drawing/2014/main" id="{8AA6569C-9CD9-988C-8062-8C4D6AB049BA}"/>
-                </a:ext>
-              </a:extLst>
-            </p:cNvPr>
-            <p:cNvPicPr>
-              <a:picLocks noChangeAspect="1"/>
-            </p:cNvPicPr>
-            <p:nvPr/>
-          </p:nvPicPr>
-          <p:blipFill>
-            <a:blip r:embed="rId3"/>
-            <a:stretch>
-              <a:fillRect/>
-            </a:stretch>
-          </p:blipFill>
-          <p:spPr>
-            <a:xfrm>
-              <a:off x="5803233" y="836344"/>
-              <a:ext cx="585531" cy="452810"/>
-            </a:xfrm>
-            <a:prstGeom prst="rect">
-              <a:avLst/>
-            </a:prstGeom>
-          </p:spPr>
-        </p:pic>
-      </p:grpSp>
-      <p:grpSp>
-        <p:nvGrpSpPr>
-          <p:cNvPr id="11" name="Group 10">
-            <a:extLst>
-              <a:ext uri="{FF2B5EF4-FFF2-40B4-BE49-F238E27FC236}">
-                <a16:creationId xmlns:a16="http://schemas.microsoft.com/office/drawing/2014/main" id="{D8F3B639-7391-F016-A4C3-A5944C193FEE}"/>
-              </a:ext>
-            </a:extLst>
-          </p:cNvPr>
-          <p:cNvGrpSpPr/>
-          <p:nvPr/>
-        </p:nvGrpSpPr>
-        <p:grpSpPr>
-          <a:xfrm>
-            <a:off x="227781" y="3924673"/>
-            <a:ext cx="11736438" cy="2486372"/>
-            <a:chOff x="227781" y="3984633"/>
-            <a:chExt cx="11736438" cy="2486372"/>
-          </a:xfrm>
-        </p:grpSpPr>
         <p:pic>
           <p:nvPicPr>
             <p:cNvPr id="3" name="Picture 2">
@@ -14256,45 +14205,20 @@
             <p:nvPr/>
           </p:nvPicPr>
           <p:blipFill>
-            <a:blip r:embed="rId4"/>
-            <a:stretch>
-              <a:fillRect/>
-            </a:stretch>
+            <a:blip r:embed="rId3">
+              <a:extLst>
+                <a:ext uri="{28A0092B-C50C-407E-A947-70E740481C1C}">
+                  <a14:useLocalDpi xmlns:a14="http://schemas.microsoft.com/office/drawing/2010/main" val="0"/>
+                </a:ext>
+              </a:extLst>
+            </a:blip>
+            <a:srcRect l="830" r="830"/>
+            <a:stretch/>
           </p:blipFill>
           <p:spPr>
             <a:xfrm>
-              <a:off x="227781" y="3984633"/>
-              <a:ext cx="11736438" cy="2486372"/>
-            </a:xfrm>
-            <a:prstGeom prst="rect">
-              <a:avLst/>
-            </a:prstGeom>
-          </p:spPr>
-        </p:pic>
-        <p:pic>
-          <p:nvPicPr>
-            <p:cNvPr id="10" name="Picture 9">
-              <a:extLst>
-                <a:ext uri="{FF2B5EF4-FFF2-40B4-BE49-F238E27FC236}">
-                  <a16:creationId xmlns:a16="http://schemas.microsoft.com/office/drawing/2014/main" id="{5FEA047C-452E-44BC-5272-4AFCD06558D4}"/>
-                </a:ext>
-              </a:extLst>
-            </p:cNvPr>
-            <p:cNvPicPr>
-              <a:picLocks noChangeAspect="1"/>
-            </p:cNvPicPr>
-            <p:nvPr/>
-          </p:nvPicPr>
-          <p:blipFill>
-            <a:blip r:embed="rId3"/>
-            <a:stretch>
-              <a:fillRect/>
-            </a:stretch>
-          </p:blipFill>
-          <p:spPr>
-            <a:xfrm>
-              <a:off x="5803233" y="3984633"/>
-              <a:ext cx="585531" cy="452810"/>
+              <a:off x="161798" y="3862328"/>
+              <a:ext cx="5868219" cy="2486372"/>
             </a:xfrm>
             <a:prstGeom prst="rect">
               <a:avLst/>
@@ -14372,6 +14296,97 @@
           </a:p>
         </p:txBody>
       </p:sp>
+      <p:grpSp>
+        <p:nvGrpSpPr>
+          <p:cNvPr id="13" name="Group 12">
+            <a:extLst>
+              <a:ext uri="{FF2B5EF4-FFF2-40B4-BE49-F238E27FC236}">
+                <a16:creationId xmlns:a16="http://schemas.microsoft.com/office/drawing/2014/main" id="{35685DFB-180C-F4C8-81BC-2CF5A19D58AE}"/>
+              </a:ext>
+            </a:extLst>
+          </p:cNvPr>
+          <p:cNvGrpSpPr/>
+          <p:nvPr/>
+        </p:nvGrpSpPr>
+        <p:grpSpPr>
+          <a:xfrm>
+            <a:off x="125208" y="642606"/>
+            <a:ext cx="11809618" cy="2486372"/>
+            <a:chOff x="161798" y="3862328"/>
+            <a:chExt cx="11809618" cy="2486372"/>
+          </a:xfrm>
+        </p:grpSpPr>
+        <p:pic>
+          <p:nvPicPr>
+            <p:cNvPr id="14" name="Picture 13">
+              <a:extLst>
+                <a:ext uri="{FF2B5EF4-FFF2-40B4-BE49-F238E27FC236}">
+                  <a16:creationId xmlns:a16="http://schemas.microsoft.com/office/drawing/2014/main" id="{DC636D5A-6215-6615-0528-B2D56106ABE4}"/>
+                </a:ext>
+              </a:extLst>
+            </p:cNvPr>
+            <p:cNvPicPr>
+              <a:picLocks noChangeAspect="1"/>
+            </p:cNvPicPr>
+            <p:nvPr/>
+          </p:nvPicPr>
+          <p:blipFill>
+            <a:blip r:embed="rId4">
+              <a:extLst>
+                <a:ext uri="{28A0092B-C50C-407E-A947-70E740481C1C}">
+                  <a14:useLocalDpi xmlns:a14="http://schemas.microsoft.com/office/drawing/2010/main" val="0"/>
+                </a:ext>
+              </a:extLst>
+            </a:blip>
+            <a:srcRect l="1494" r="1494"/>
+            <a:stretch/>
+          </p:blipFill>
+          <p:spPr>
+            <a:xfrm>
+              <a:off x="6103208" y="3862333"/>
+              <a:ext cx="5868208" cy="2486367"/>
+            </a:xfrm>
+            <a:prstGeom prst="rect">
+              <a:avLst/>
+            </a:prstGeom>
+          </p:spPr>
+        </p:pic>
+        <p:pic>
+          <p:nvPicPr>
+            <p:cNvPr id="15" name="Picture 14">
+              <a:extLst>
+                <a:ext uri="{FF2B5EF4-FFF2-40B4-BE49-F238E27FC236}">
+                  <a16:creationId xmlns:a16="http://schemas.microsoft.com/office/drawing/2014/main" id="{412B12D2-0216-833A-DD38-396C88BDFA53}"/>
+                </a:ext>
+              </a:extLst>
+            </p:cNvPr>
+            <p:cNvPicPr>
+              <a:picLocks noChangeAspect="1"/>
+            </p:cNvPicPr>
+            <p:nvPr/>
+          </p:nvPicPr>
+          <p:blipFill>
+            <a:blip r:embed="rId5">
+              <a:extLst>
+                <a:ext uri="{28A0092B-C50C-407E-A947-70E740481C1C}">
+                  <a14:useLocalDpi xmlns:a14="http://schemas.microsoft.com/office/drawing/2010/main" val="0"/>
+                </a:ext>
+              </a:extLst>
+            </a:blip>
+            <a:srcRect l="1587" r="1587"/>
+            <a:stretch/>
+          </p:blipFill>
+          <p:spPr>
+            <a:xfrm>
+              <a:off x="161798" y="3862328"/>
+              <a:ext cx="5868219" cy="2486372"/>
+            </a:xfrm>
+            <a:prstGeom prst="rect">
+              <a:avLst/>
+            </a:prstGeom>
+          </p:spPr>
+        </p:pic>
+      </p:grpSp>
     </p:spTree>
     <p:extLst>
       <p:ext uri="{BB962C8B-B14F-4D97-AF65-F5344CB8AC3E}">

--- a/DISSERTACAO/figuras/figures.pptx
+++ b/DISSERTACAO/figuras/figures.pptx
@@ -5,7 +5,7 @@
     <p:sldMasterId id="2147483648" r:id="rId1"/>
   </p:sldMasterIdLst>
   <p:notesMasterIdLst>
-    <p:notesMasterId r:id="rId16"/>
+    <p:notesMasterId r:id="rId17"/>
   </p:notesMasterIdLst>
   <p:sldIdLst>
     <p:sldId id="256" r:id="rId2"/>
@@ -21,7 +21,8 @@
     <p:sldId id="266" r:id="rId12"/>
     <p:sldId id="267" r:id="rId13"/>
     <p:sldId id="268" r:id="rId14"/>
-    <p:sldId id="269" r:id="rId15"/>
+    <p:sldId id="270" r:id="rId15"/>
+    <p:sldId id="269" r:id="rId16"/>
   </p:sldIdLst>
   <p:sldSz cx="12192000" cy="6858000"/>
   <p:notesSz cx="6858000" cy="9144000"/>
@@ -1317,7 +1318,7 @@
           <a:p>
             <a:fld id="{FFCE6A37-3420-40C1-9DE2-D7E9118C4CF6}" type="datetimeFigureOut">
               <a:rPr lang="pt-BR" smtClean="0"/>
-              <a:t>09/06/2026</a:t>
+              <a:t>10/06/2026</a:t>
             </a:fld>
             <a:endParaRPr lang="pt-BR"/>
           </a:p>
@@ -1818,7 +1819,7 @@
           <a:p>
             <a:fld id="{7C8BC570-9881-4DD1-A666-BFFC3ABED690}" type="datetimeFigureOut">
               <a:rPr lang="pt-BR" smtClean="0"/>
-              <a:t>09/06/2026</a:t>
+              <a:t>10/06/2026</a:t>
             </a:fld>
             <a:endParaRPr lang="pt-BR"/>
           </a:p>
@@ -2018,7 +2019,7 @@
           <a:p>
             <a:fld id="{7C8BC570-9881-4DD1-A666-BFFC3ABED690}" type="datetimeFigureOut">
               <a:rPr lang="pt-BR" smtClean="0"/>
-              <a:t>09/06/2026</a:t>
+              <a:t>10/06/2026</a:t>
             </a:fld>
             <a:endParaRPr lang="pt-BR"/>
           </a:p>
@@ -2228,7 +2229,7 @@
           <a:p>
             <a:fld id="{7C8BC570-9881-4DD1-A666-BFFC3ABED690}" type="datetimeFigureOut">
               <a:rPr lang="pt-BR" smtClean="0"/>
-              <a:t>09/06/2026</a:t>
+              <a:t>10/06/2026</a:t>
             </a:fld>
             <a:endParaRPr lang="pt-BR"/>
           </a:p>
@@ -2428,7 +2429,7 @@
           <a:p>
             <a:fld id="{7C8BC570-9881-4DD1-A666-BFFC3ABED690}" type="datetimeFigureOut">
               <a:rPr lang="pt-BR" smtClean="0"/>
-              <a:t>09/06/2026</a:t>
+              <a:t>10/06/2026</a:t>
             </a:fld>
             <a:endParaRPr lang="pt-BR"/>
           </a:p>
@@ -2704,7 +2705,7 @@
           <a:p>
             <a:fld id="{7C8BC570-9881-4DD1-A666-BFFC3ABED690}" type="datetimeFigureOut">
               <a:rPr lang="pt-BR" smtClean="0"/>
-              <a:t>09/06/2026</a:t>
+              <a:t>10/06/2026</a:t>
             </a:fld>
             <a:endParaRPr lang="pt-BR"/>
           </a:p>
@@ -2972,7 +2973,7 @@
           <a:p>
             <a:fld id="{7C8BC570-9881-4DD1-A666-BFFC3ABED690}" type="datetimeFigureOut">
               <a:rPr lang="pt-BR" smtClean="0"/>
-              <a:t>09/06/2026</a:t>
+              <a:t>10/06/2026</a:t>
             </a:fld>
             <a:endParaRPr lang="pt-BR"/>
           </a:p>
@@ -3387,7 +3388,7 @@
           <a:p>
             <a:fld id="{7C8BC570-9881-4DD1-A666-BFFC3ABED690}" type="datetimeFigureOut">
               <a:rPr lang="pt-BR" smtClean="0"/>
-              <a:t>09/06/2026</a:t>
+              <a:t>10/06/2026</a:t>
             </a:fld>
             <a:endParaRPr lang="pt-BR"/>
           </a:p>
@@ -3529,7 +3530,7 @@
           <a:p>
             <a:fld id="{7C8BC570-9881-4DD1-A666-BFFC3ABED690}" type="datetimeFigureOut">
               <a:rPr lang="pt-BR" smtClean="0"/>
-              <a:t>09/06/2026</a:t>
+              <a:t>10/06/2026</a:t>
             </a:fld>
             <a:endParaRPr lang="pt-BR"/>
           </a:p>
@@ -3642,7 +3643,7 @@
           <a:p>
             <a:fld id="{7C8BC570-9881-4DD1-A666-BFFC3ABED690}" type="datetimeFigureOut">
               <a:rPr lang="pt-BR" smtClean="0"/>
-              <a:t>09/06/2026</a:t>
+              <a:t>10/06/2026</a:t>
             </a:fld>
             <a:endParaRPr lang="pt-BR"/>
           </a:p>
@@ -3955,7 +3956,7 @@
           <a:p>
             <a:fld id="{7C8BC570-9881-4DD1-A666-BFFC3ABED690}" type="datetimeFigureOut">
               <a:rPr lang="pt-BR" smtClean="0"/>
-              <a:t>09/06/2026</a:t>
+              <a:t>10/06/2026</a:t>
             </a:fld>
             <a:endParaRPr lang="pt-BR"/>
           </a:p>
@@ -4244,7 +4245,7 @@
           <a:p>
             <a:fld id="{7C8BC570-9881-4DD1-A666-BFFC3ABED690}" type="datetimeFigureOut">
               <a:rPr lang="pt-BR" smtClean="0"/>
-              <a:t>09/06/2026</a:t>
+              <a:t>10/06/2026</a:t>
             </a:fld>
             <a:endParaRPr lang="pt-BR"/>
           </a:p>
@@ -4487,7 +4488,7 @@
           <a:p>
             <a:fld id="{7C8BC570-9881-4DD1-A666-BFFC3ABED690}" type="datetimeFigureOut">
               <a:rPr lang="pt-BR" smtClean="0"/>
-              <a:t>09/06/2026</a:t>
+              <a:t>10/06/2026</a:t>
             </a:fld>
             <a:endParaRPr lang="pt-BR"/>
           </a:p>
@@ -14177,7 +14178,7 @@
                 </a:ext>
               </a:extLst>
             </a:blip>
-            <a:srcRect t="643" b="643"/>
+            <a:srcRect t="517" b="517"/>
             <a:stretch/>
           </p:blipFill>
           <p:spPr>
@@ -14212,7 +14213,7 @@
                 </a:ext>
               </a:extLst>
             </a:blip>
-            <a:srcRect l="830" r="830"/>
+            <a:srcRect t="441" b="441"/>
             <a:stretch/>
           </p:blipFill>
           <p:spPr>
@@ -14275,8 +14276,8 @@
         </p:nvSpPr>
         <p:spPr>
           <a:xfrm>
-            <a:off x="4603664" y="3492996"/>
-            <a:ext cx="2984663" cy="369332"/>
+            <a:off x="4392873" y="3492996"/>
+            <a:ext cx="3406253" cy="369332"/>
           </a:xfrm>
           <a:prstGeom prst="rect">
             <a:avLst/>
@@ -14291,7 +14292,7 @@
           <a:p>
             <a:r>
               <a:rPr lang="pt-BR" dirty="0"/>
-              <a:t>Resultados com Suavização</a:t>
+              <a:t>Resultados com Suavização 5E4</a:t>
             </a:r>
           </a:p>
         </p:txBody>
@@ -14401,6 +14402,168 @@
 </file>
 
 <file path=ppt/slides/slide14.xml><?xml version="1.0" encoding="utf-8"?>
+<p:sld xmlns:a="http://schemas.openxmlformats.org/drawingml/2006/main" xmlns:r="http://schemas.openxmlformats.org/officeDocument/2006/relationships" xmlns:p="http://schemas.openxmlformats.org/presentationml/2006/main">
+  <p:cSld>
+    <p:spTree>
+      <p:nvGrpSpPr>
+        <p:cNvPr id="1" name="">
+          <a:extLst>
+            <a:ext uri="{FF2B5EF4-FFF2-40B4-BE49-F238E27FC236}">
+              <a16:creationId xmlns:a16="http://schemas.microsoft.com/office/drawing/2014/main" id="{64638A23-64B5-644A-CECB-9DD853073F70}"/>
+            </a:ext>
+          </a:extLst>
+        </p:cNvPr>
+        <p:cNvGrpSpPr/>
+        <p:nvPr/>
+      </p:nvGrpSpPr>
+      <p:grpSpPr>
+        <a:xfrm>
+          <a:off x="0" y="0"/>
+          <a:ext cx="0" cy="0"/>
+          <a:chOff x="0" y="0"/>
+          <a:chExt cx="0" cy="0"/>
+        </a:xfrm>
+      </p:grpSpPr>
+      <p:grpSp>
+        <p:nvGrpSpPr>
+          <p:cNvPr id="7" name="Group 6">
+            <a:extLst>
+              <a:ext uri="{FF2B5EF4-FFF2-40B4-BE49-F238E27FC236}">
+                <a16:creationId xmlns:a16="http://schemas.microsoft.com/office/drawing/2014/main" id="{C7144D70-AF4A-FDF9-C7EC-1B1955D54437}"/>
+              </a:ext>
+            </a:extLst>
+          </p:cNvPr>
+          <p:cNvGrpSpPr/>
+          <p:nvPr/>
+        </p:nvGrpSpPr>
+        <p:grpSpPr>
+          <a:xfrm>
+            <a:off x="191191" y="549502"/>
+            <a:ext cx="11809618" cy="2486372"/>
+            <a:chOff x="161798" y="3862328"/>
+            <a:chExt cx="11809618" cy="2486372"/>
+          </a:xfrm>
+        </p:grpSpPr>
+        <p:pic>
+          <p:nvPicPr>
+            <p:cNvPr id="5" name="Picture 4">
+              <a:extLst>
+                <a:ext uri="{FF2B5EF4-FFF2-40B4-BE49-F238E27FC236}">
+                  <a16:creationId xmlns:a16="http://schemas.microsoft.com/office/drawing/2014/main" id="{D96923AF-8A1C-9068-0322-A398C0E16F16}"/>
+                </a:ext>
+              </a:extLst>
+            </p:cNvPr>
+            <p:cNvPicPr>
+              <a:picLocks noChangeAspect="1"/>
+            </p:cNvPicPr>
+            <p:nvPr/>
+          </p:nvPicPr>
+          <p:blipFill>
+            <a:blip r:embed="rId2">
+              <a:extLst>
+                <a:ext uri="{28A0092B-C50C-407E-A947-70E740481C1C}">
+                  <a14:useLocalDpi xmlns:a14="http://schemas.microsoft.com/office/drawing/2010/main" val="0"/>
+                </a:ext>
+              </a:extLst>
+            </a:blip>
+            <a:srcRect l="1012" r="1012"/>
+            <a:stretch/>
+          </p:blipFill>
+          <p:spPr>
+            <a:xfrm>
+              <a:off x="6103208" y="3862333"/>
+              <a:ext cx="5868208" cy="2486367"/>
+            </a:xfrm>
+            <a:prstGeom prst="rect">
+              <a:avLst/>
+            </a:prstGeom>
+          </p:spPr>
+        </p:pic>
+        <p:pic>
+          <p:nvPicPr>
+            <p:cNvPr id="3" name="Picture 2">
+              <a:extLst>
+                <a:ext uri="{FF2B5EF4-FFF2-40B4-BE49-F238E27FC236}">
+                  <a16:creationId xmlns:a16="http://schemas.microsoft.com/office/drawing/2014/main" id="{B6B33699-1D56-68AD-8392-B3BB87AC9F95}"/>
+                </a:ext>
+              </a:extLst>
+            </p:cNvPr>
+            <p:cNvPicPr>
+              <a:picLocks noChangeAspect="1"/>
+            </p:cNvPicPr>
+            <p:nvPr/>
+          </p:nvPicPr>
+          <p:blipFill>
+            <a:blip r:embed="rId3">
+              <a:extLst>
+                <a:ext uri="{28A0092B-C50C-407E-A947-70E740481C1C}">
+                  <a14:useLocalDpi xmlns:a14="http://schemas.microsoft.com/office/drawing/2010/main" val="0"/>
+                </a:ext>
+              </a:extLst>
+            </a:blip>
+            <a:srcRect l="46" r="46"/>
+            <a:stretch/>
+          </p:blipFill>
+          <p:spPr>
+            <a:xfrm>
+              <a:off x="161798" y="3862328"/>
+              <a:ext cx="5868219" cy="2486372"/>
+            </a:xfrm>
+            <a:prstGeom prst="rect">
+              <a:avLst/>
+            </a:prstGeom>
+          </p:spPr>
+        </p:pic>
+      </p:grpSp>
+      <p:sp>
+        <p:nvSpPr>
+          <p:cNvPr id="4" name="TextBox 3">
+            <a:extLst>
+              <a:ext uri="{FF2B5EF4-FFF2-40B4-BE49-F238E27FC236}">
+                <a16:creationId xmlns:a16="http://schemas.microsoft.com/office/drawing/2014/main" id="{C64F5E71-D058-336D-B7C5-67FBADEE2948}"/>
+              </a:ext>
+            </a:extLst>
+          </p:cNvPr>
+          <p:cNvSpPr txBox="1"/>
+          <p:nvPr/>
+        </p:nvSpPr>
+        <p:spPr>
+          <a:xfrm>
+            <a:off x="4429465" y="180170"/>
+            <a:ext cx="3406253" cy="369332"/>
+          </a:xfrm>
+          <a:prstGeom prst="rect">
+            <a:avLst/>
+          </a:prstGeom>
+          <a:noFill/>
+        </p:spPr>
+        <p:txBody>
+          <a:bodyPr wrap="none" rtlCol="0">
+            <a:spAutoFit/>
+          </a:bodyPr>
+          <a:lstStyle/>
+          <a:p>
+            <a:r>
+              <a:rPr lang="pt-BR" dirty="0"/>
+              <a:t>Resultados com Suavização 1E5</a:t>
+            </a:r>
+          </a:p>
+        </p:txBody>
+      </p:sp>
+    </p:spTree>
+    <p:extLst>
+      <p:ext uri="{BB962C8B-B14F-4D97-AF65-F5344CB8AC3E}">
+        <p14:creationId xmlns:p14="http://schemas.microsoft.com/office/powerpoint/2010/main" val="3376657017"/>
+      </p:ext>
+    </p:extLst>
+  </p:cSld>
+  <p:clrMapOvr>
+    <a:masterClrMapping/>
+  </p:clrMapOvr>
+</p:sld>
+</file>
+
+<file path=ppt/slides/slide15.xml><?xml version="1.0" encoding="utf-8"?>
 <p:sld xmlns:a="http://schemas.openxmlformats.org/drawingml/2006/main" xmlns:r="http://schemas.openxmlformats.org/officeDocument/2006/relationships" xmlns:p="http://schemas.openxmlformats.org/presentationml/2006/main">
   <p:cSld>
     <p:spTree>

--- a/DISSERTACAO/figuras/figures.pptx
+++ b/DISSERTACAO/figuras/figures.pptx
@@ -14550,6 +14550,132 @@
           </a:p>
         </p:txBody>
       </p:sp>
+      <p:grpSp>
+        <p:nvGrpSpPr>
+          <p:cNvPr id="6" name="Group 5">
+            <a:extLst>
+              <a:ext uri="{FF2B5EF4-FFF2-40B4-BE49-F238E27FC236}">
+                <a16:creationId xmlns:a16="http://schemas.microsoft.com/office/drawing/2014/main" id="{C466ADCD-E9DF-25E3-58B7-9D728374581B}"/>
+              </a:ext>
+            </a:extLst>
+          </p:cNvPr>
+          <p:cNvGrpSpPr/>
+          <p:nvPr/>
+        </p:nvGrpSpPr>
+        <p:grpSpPr>
+          <a:xfrm>
+            <a:off x="191191" y="3939778"/>
+            <a:ext cx="11809618" cy="2486372"/>
+            <a:chOff x="161798" y="3862328"/>
+            <a:chExt cx="11809618" cy="2486372"/>
+          </a:xfrm>
+        </p:grpSpPr>
+        <p:pic>
+          <p:nvPicPr>
+            <p:cNvPr id="8" name="Picture 7">
+              <a:extLst>
+                <a:ext uri="{FF2B5EF4-FFF2-40B4-BE49-F238E27FC236}">
+                  <a16:creationId xmlns:a16="http://schemas.microsoft.com/office/drawing/2014/main" id="{07527855-073A-6FE1-41FB-61C5B6045AA1}"/>
+                </a:ext>
+              </a:extLst>
+            </p:cNvPr>
+            <p:cNvPicPr>
+              <a:picLocks noChangeAspect="1"/>
+            </p:cNvPicPr>
+            <p:nvPr/>
+          </p:nvPicPr>
+          <p:blipFill>
+            <a:blip r:embed="rId4">
+              <a:extLst>
+                <a:ext uri="{28A0092B-C50C-407E-A947-70E740481C1C}">
+                  <a14:useLocalDpi xmlns:a14="http://schemas.microsoft.com/office/drawing/2010/main" val="0"/>
+                </a:ext>
+              </a:extLst>
+            </a:blip>
+            <a:srcRect t="227" b="227"/>
+            <a:stretch/>
+          </p:blipFill>
+          <p:spPr>
+            <a:xfrm>
+              <a:off x="6103208" y="3862333"/>
+              <a:ext cx="5868208" cy="2486367"/>
+            </a:xfrm>
+            <a:prstGeom prst="rect">
+              <a:avLst/>
+            </a:prstGeom>
+          </p:spPr>
+        </p:pic>
+        <p:pic>
+          <p:nvPicPr>
+            <p:cNvPr id="9" name="Picture 8">
+              <a:extLst>
+                <a:ext uri="{FF2B5EF4-FFF2-40B4-BE49-F238E27FC236}">
+                  <a16:creationId xmlns:a16="http://schemas.microsoft.com/office/drawing/2014/main" id="{6B83EF3A-2BD0-6A1F-7FFC-429399F0A620}"/>
+                </a:ext>
+              </a:extLst>
+            </p:cNvPr>
+            <p:cNvPicPr>
+              <a:picLocks noChangeAspect="1"/>
+            </p:cNvPicPr>
+            <p:nvPr/>
+          </p:nvPicPr>
+          <p:blipFill>
+            <a:blip r:embed="rId5">
+              <a:extLst>
+                <a:ext uri="{28A0092B-C50C-407E-A947-70E740481C1C}">
+                  <a14:useLocalDpi xmlns:a14="http://schemas.microsoft.com/office/drawing/2010/main" val="0"/>
+                </a:ext>
+              </a:extLst>
+            </a:blip>
+            <a:srcRect l="1559" r="1559"/>
+            <a:stretch/>
+          </p:blipFill>
+          <p:spPr>
+            <a:xfrm>
+              <a:off x="161798" y="3862328"/>
+              <a:ext cx="5868219" cy="2486372"/>
+            </a:xfrm>
+            <a:prstGeom prst="rect">
+              <a:avLst/>
+            </a:prstGeom>
+          </p:spPr>
+        </p:pic>
+      </p:grpSp>
+      <p:sp>
+        <p:nvSpPr>
+          <p:cNvPr id="10" name="TextBox 9">
+            <a:extLst>
+              <a:ext uri="{FF2B5EF4-FFF2-40B4-BE49-F238E27FC236}">
+                <a16:creationId xmlns:a16="http://schemas.microsoft.com/office/drawing/2014/main" id="{757C7332-32E6-1C8C-C7B4-288DD4A21447}"/>
+              </a:ext>
+            </a:extLst>
+          </p:cNvPr>
+          <p:cNvSpPr txBox="1"/>
+          <p:nvPr/>
+        </p:nvSpPr>
+        <p:spPr>
+          <a:xfrm>
+            <a:off x="4429465" y="3570446"/>
+            <a:ext cx="3406253" cy="369332"/>
+          </a:xfrm>
+          <a:prstGeom prst="rect">
+            <a:avLst/>
+          </a:prstGeom>
+          <a:noFill/>
+        </p:spPr>
+        <p:txBody>
+          <a:bodyPr wrap="none" rtlCol="0">
+            <a:spAutoFit/>
+          </a:bodyPr>
+          <a:lstStyle/>
+          <a:p>
+            <a:r>
+              <a:rPr lang="pt-BR" dirty="0"/>
+              <a:t>Resultados com Suavização 1E4</a:t>
+            </a:r>
+          </a:p>
+        </p:txBody>
+      </p:sp>
     </p:spTree>
     <p:extLst>
       <p:ext uri="{BB962C8B-B14F-4D97-AF65-F5344CB8AC3E}">

--- a/DISSERTACAO/figuras/figures.pptx
+++ b/DISSERTACAO/figuras/figures.pptx
@@ -14706,6 +14706,147 @@
           <a:chExt cx="0" cy="0"/>
         </a:xfrm>
       </p:grpSpPr>
+      <p:grpSp>
+        <p:nvGrpSpPr>
+          <p:cNvPr id="10" name="Group 9">
+            <a:extLst>
+              <a:ext uri="{FF2B5EF4-FFF2-40B4-BE49-F238E27FC236}">
+                <a16:creationId xmlns:a16="http://schemas.microsoft.com/office/drawing/2014/main" id="{5CF0CA41-3D76-A3AE-E365-80D7DA72A190}"/>
+              </a:ext>
+            </a:extLst>
+          </p:cNvPr>
+          <p:cNvGrpSpPr/>
+          <p:nvPr/>
+        </p:nvGrpSpPr>
+        <p:grpSpPr>
+          <a:xfrm>
+            <a:off x="1694048" y="235390"/>
+            <a:ext cx="8519037" cy="6438745"/>
+            <a:chOff x="1694048" y="235390"/>
+            <a:chExt cx="8519037" cy="6438745"/>
+          </a:xfrm>
+        </p:grpSpPr>
+        <p:pic>
+          <p:nvPicPr>
+            <p:cNvPr id="3" name="Picture 2">
+              <a:extLst>
+                <a:ext uri="{FF2B5EF4-FFF2-40B4-BE49-F238E27FC236}">
+                  <a16:creationId xmlns:a16="http://schemas.microsoft.com/office/drawing/2014/main" id="{F86C3281-A026-ECCC-5039-6F2A457E098B}"/>
+                </a:ext>
+              </a:extLst>
+            </p:cNvPr>
+            <p:cNvPicPr>
+              <a:picLocks noChangeAspect="1"/>
+            </p:cNvPicPr>
+            <p:nvPr/>
+          </p:nvPicPr>
+          <p:blipFill>
+            <a:blip r:embed="rId2"/>
+            <a:stretch>
+              <a:fillRect/>
+            </a:stretch>
+          </p:blipFill>
+          <p:spPr>
+            <a:xfrm>
+              <a:off x="1694048" y="235390"/>
+              <a:ext cx="4246893" cy="3193610"/>
+            </a:xfrm>
+            <a:prstGeom prst="rect">
+              <a:avLst/>
+            </a:prstGeom>
+          </p:spPr>
+        </p:pic>
+        <p:pic>
+          <p:nvPicPr>
+            <p:cNvPr id="5" name="Picture 4">
+              <a:extLst>
+                <a:ext uri="{FF2B5EF4-FFF2-40B4-BE49-F238E27FC236}">
+                  <a16:creationId xmlns:a16="http://schemas.microsoft.com/office/drawing/2014/main" id="{668178DF-D427-264B-CBA9-55CFD385F924}"/>
+                </a:ext>
+              </a:extLst>
+            </p:cNvPr>
+            <p:cNvPicPr>
+              <a:picLocks noChangeAspect="1"/>
+            </p:cNvPicPr>
+            <p:nvPr/>
+          </p:nvPicPr>
+          <p:blipFill>
+            <a:blip r:embed="rId3"/>
+            <a:stretch>
+              <a:fillRect/>
+            </a:stretch>
+          </p:blipFill>
+          <p:spPr>
+            <a:xfrm>
+              <a:off x="6089209" y="235390"/>
+              <a:ext cx="3950356" cy="3193610"/>
+            </a:xfrm>
+            <a:prstGeom prst="rect">
+              <a:avLst/>
+            </a:prstGeom>
+          </p:spPr>
+        </p:pic>
+        <p:pic>
+          <p:nvPicPr>
+            <p:cNvPr id="7" name="Picture 6">
+              <a:extLst>
+                <a:ext uri="{FF2B5EF4-FFF2-40B4-BE49-F238E27FC236}">
+                  <a16:creationId xmlns:a16="http://schemas.microsoft.com/office/drawing/2014/main" id="{6D20D759-DEC0-3752-F272-B62CAA9837FB}"/>
+                </a:ext>
+              </a:extLst>
+            </p:cNvPr>
+            <p:cNvPicPr>
+              <a:picLocks noChangeAspect="1"/>
+            </p:cNvPicPr>
+            <p:nvPr/>
+          </p:nvPicPr>
+          <p:blipFill>
+            <a:blip r:embed="rId4"/>
+            <a:stretch>
+              <a:fillRect/>
+            </a:stretch>
+          </p:blipFill>
+          <p:spPr>
+            <a:xfrm>
+              <a:off x="1719298" y="3429000"/>
+              <a:ext cx="4246894" cy="3245135"/>
+            </a:xfrm>
+            <a:prstGeom prst="rect">
+              <a:avLst/>
+            </a:prstGeom>
+          </p:spPr>
+        </p:pic>
+        <p:pic>
+          <p:nvPicPr>
+            <p:cNvPr id="9" name="Picture 8">
+              <a:extLst>
+                <a:ext uri="{FF2B5EF4-FFF2-40B4-BE49-F238E27FC236}">
+                  <a16:creationId xmlns:a16="http://schemas.microsoft.com/office/drawing/2014/main" id="{61B1F51B-E81A-16F7-C750-EEF748DD7D0C}"/>
+                </a:ext>
+              </a:extLst>
+            </p:cNvPr>
+            <p:cNvPicPr>
+              <a:picLocks noChangeAspect="1"/>
+            </p:cNvPicPr>
+            <p:nvPr/>
+          </p:nvPicPr>
+          <p:blipFill>
+            <a:blip r:embed="rId5"/>
+            <a:stretch>
+              <a:fillRect/>
+            </a:stretch>
+          </p:blipFill>
+          <p:spPr>
+            <a:xfrm>
+              <a:off x="5962314" y="3429000"/>
+              <a:ext cx="4250771" cy="3245135"/>
+            </a:xfrm>
+            <a:prstGeom prst="rect">
+              <a:avLst/>
+            </a:prstGeom>
+          </p:spPr>
+        </p:pic>
+      </p:grpSp>
     </p:spTree>
     <p:extLst>
       <p:ext uri="{BB962C8B-B14F-4D97-AF65-F5344CB8AC3E}">
